--- a/slidepoise/examples/consulting-ai-transformation/deliverables/presentation.pptx
+++ b/slidepoise/examples/consulting-ai-transformation/deliverables/presentation.pptx
@@ -120,7 +120,7 @@
     <c:plotArea>
       <c:layout/>
       <c:barChart>
-        <c:barDir val="bar"/>
+        <c:barDir val="col"/>
         <c:grouping val="clustered"/>
         <c:varyColors val="0"/>
         <c:ser>
@@ -280,11 +280,11 @@
           <c:orientation val="minMax"/>
         </c:scaling>
         <c:delete val="0"/>
-        <c:axPos val="l"/>
+        <c:axPos val="b"/>
         <c:numFmt formatCode="General" sourceLinked="1"/>
         <c:majorTickMark val="out"/>
         <c:minorTickMark val="none"/>
-        <c:tickLblPos val="nextTo"/>
+        <c:tickLblPos val="low"/>
         <c:spPr>
           <a:ln w="12700" cap="flat">
             <a:solidFill>
@@ -323,7 +323,7 @@
           <c:min val="0"/>
         </c:scaling>
         <c:delete val="0"/>
-        <c:axPos val="b"/>
+        <c:axPos val="l"/>
         <c:majorGridlines>
           <c:spPr>
             <a:ln w="12700" cap="flat">
@@ -338,7 +338,7 @@
         <c:numFmt formatCode="General" sourceLinked="0"/>
         <c:majorTickMark val="out"/>
         <c:minorTickMark val="none"/>
-        <c:tickLblPos val="low"/>
+        <c:tickLblPos val="nextTo"/>
         <c:spPr>
           <a:ln w="12700" cap="flat">
             <a:solidFill>
@@ -792,7 +792,7 @@
 The 95% gate applies to a sampled test set. Each client release separately requires expert verification and engagement-lead approval.
 At least 11 of 15 pilot users must be weekly active. One comparable research task is measured per pilot engagement.
 [SlidePoise sources]
-Generated target visual: /private/tmp/.slidepoise-rebuild-jkaybi9w/slides/s01-recommendation/work/accepted-slide.png
+Generated target visual: /private/tmp/.slidepoise-rebuild-h51errnw/slides/s01-recommendation/work/accepted-slide.png
 Canonical asset remix-focus-2-line: /Users/henry/Codes/AI_slide_drafting/examples/consulting-ai-transformation/run/work/icon-cache/focus-2/remix-focus-2-line.svg
 Canonical asset remix-team-line: /Users/henry/Codes/AI_slide_drafting/examples/consulting-ai-transformation/run/work/icon-cache/team/remix-team-line.svg
 Canonical asset remix-shield-check-line: /Users/henry/Codes/AI_slide_drafting/examples/consulting-ai-transformation/run/work/icon-cache/shield-check/remix-shield-check-line.svg</a:t>
@@ -886,7 +886,7 @@
               <a:t>This is an illustrative planning model for fictional Northstar Advisory. Annual capacity assumes 900 engagements. Research uses 900 x 12 baseline hours x 60% adoption x 30% time saved = 1,944 hours. The same formula produces 1,440 proposal hours and 1,080 retrieval hours from the displayed assumptions.
 The three workflow estimates may overlap and cannot be added without checking task boundaries. Capacity released is not a cash saving. Control readiness determines the proposed sequence, and expert review remains required before any client release.
 [SlidePoise sources]
-Generated target visual: /private/tmp/.slidepoise-rebuild-jkaybi9w/slides/s02-opportunities/work/accepted-slide.png
+Generated target visual: /private/tmp/.slidepoise-rebuild-h51errnw/slides/s02-opportunities/work/accepted-slide.png
 Canonical asset remix-file-search-line: /Users/henry/Codes/AI_slide_drafting/examples/consulting-ai-transformation/run/work/icon-cache/file-search/remix-file-search-line.svg
 Canonical asset remix-database-2-line: /Users/henry/Codes/AI_slide_drafting/examples/consulting-ai-transformation/run/work/icon-cache/database-2/remix-database-2-line.svg
 Canonical asset remix-user-star-line: /Users/henry/Codes/AI_slide_drafting/examples/consulting-ai-transformation/run/work/icon-cache/user-star/remix-user-star-line.svg</a:t>
@@ -980,7 +980,7 @@
               <a:t>This is an illustrative planning scenario. Twenty paired tasks represent one research task from each of twenty pilot engagements, with ten tasks at the week-eight interim review. The sampled 95% claim-verification gate measures pilot quality. Every client claim still requires expert sign-off and every client release requires engagement-lead approval.
 The two curved feedback paths are editable native freeforms. They preserve the observed direction and curve geometry, but moving the table or its columns in Office does not automatically reattach these paths.
 [SlidePoise sources]
-Generated target visual: /private/tmp/.slidepoise-rebuild-jkaybi9w/slides/s03-operating-model/work/accepted-slide.png
+Generated target visual: /private/tmp/.slidepoise-rebuild-h51errnw/slides/s03-operating-model/work/accepted-slide.png
 Canonical asset remix-file-search-line: /Users/henry/Codes/AI_slide_drafting/examples/consulting-ai-transformation/run/work/icon-cache/file-search/remix-file-search-line.svg
 Canonical asset remix-draft-line: /Users/henry/Codes/AI_slide_drafting/examples/consulting-ai-transformation/run/work/icon-cache/draft/remix-draft-line.svg
 Canonical asset remix-shield-check-line: /Users/henry/Codes/AI_slide_drafting/examples/consulting-ai-transformation/run/work/icon-cache/shield-check/remix-shield-check-line.svg
@@ -1075,7 +1075,7 @@
               <a:t>Each pilot engagement supplies one research task. Twenty paired tasks correspond to twenty engagements.
 The practice lead and CFO release scale funding only after the evidence gates are reviewed. Critical data exceptions stop expansion.
 [SlidePoise sources]
-Generated target visual: /private/tmp/.slidepoise-rebuild-jkaybi9w/slides/s04-delivery-roadmap/work/accepted-slide.png
+Generated target visual: /private/tmp/.slidepoise-rebuild-h51errnw/slides/s04-delivery-roadmap/work/accepted-slide.png
 Canonical asset remix-flag-line: /Users/henry/Codes/AI_slide_drafting/examples/consulting-ai-transformation/run/work/icon-cache/flag/remix-flag-line.svg</a:t>
             </a:r>
             <a:endParaRPr lang="en-US" dirty="0"/>
@@ -1165,7 +1165,7 @@
             <a:r>
               <a:rPr lang="en-US" dirty="0"/>
               <a:t>[SlidePoise sources]
-Generated target visual: /private/tmp/.slidepoise-rebuild-jkaybi9w/slides/s05-investment-decision/work/accepted-slide.png
+Generated target visual: /private/tmp/.slidepoise-rebuild-h51errnw/slides/s05-investment-decision/work/accepted-slide.png
 Canonical asset remix-play-circle-line: /Users/henry/Codes/AI_slide_drafting/examples/consulting-ai-transformation/run/work/icon-cache/play-circle/remix-play-circle-line.svg
 Canonical asset remix-pause-circle-line: /Users/henry/Codes/AI_slide_drafting/examples/consulting-ai-transformation/run/work/icon-cache/pause-circle/remix-pause-circle-line.svg
 Canonical asset remix-stop-circle-line: /Users/henry/Codes/AI_slide_drafting/examples/consulting-ai-transformation/run/work/icon-cache/stop-circle/remix-stop-circle-line.svg</a:t>
@@ -12655,8 +12655,8 @@
         </p:nvCxnSpPr>
         <p:spPr>
           <a:xfrm>
-            <a:off x="1739900" y="4800600"/>
-            <a:ext cx="1758950" cy="0"/>
+            <a:off x="1549400" y="4800600"/>
+            <a:ext cx="1663700" cy="0"/>
           </a:xfrm>
           <a:prstGeom prst="line">
             <a:avLst/>
@@ -12681,8 +12681,8 @@
         </p:nvCxnSpPr>
         <p:spPr>
           <a:xfrm>
-            <a:off x="3803650" y="4800600"/>
-            <a:ext cx="1758950" cy="0"/>
+            <a:off x="3517900" y="4800600"/>
+            <a:ext cx="1663700" cy="0"/>
           </a:xfrm>
           <a:prstGeom prst="line">
             <a:avLst/>
@@ -12707,8 +12707,8 @@
         </p:nvCxnSpPr>
         <p:spPr>
           <a:xfrm>
-            <a:off x="5867400" y="4800600"/>
-            <a:ext cx="1758950" cy="0"/>
+            <a:off x="5486400" y="4800600"/>
+            <a:ext cx="1663700" cy="0"/>
           </a:xfrm>
           <a:prstGeom prst="line">
             <a:avLst/>
@@ -12868,7 +12868,7 @@
         </p:nvSpPr>
         <p:spPr>
           <a:xfrm>
-            <a:off x="762000" y="5035550"/>
+            <a:off x="571500" y="5035550"/>
             <a:ext cx="1651000" cy="203200"/>
           </a:xfrm>
           <a:prstGeom prst="rect">
@@ -12913,7 +12913,7 @@
         </p:nvSpPr>
         <p:spPr>
           <a:xfrm>
-            <a:off x="635000" y="5251450"/>
+            <a:off x="444500" y="5251450"/>
             <a:ext cx="1905000" cy="222250"/>
           </a:xfrm>
           <a:prstGeom prst="rect">
@@ -12958,7 +12958,7 @@
         </p:nvSpPr>
         <p:spPr>
           <a:xfrm>
-            <a:off x="2825750" y="5035550"/>
+            <a:off x="2540000" y="5035550"/>
             <a:ext cx="1651000" cy="203200"/>
           </a:xfrm>
           <a:prstGeom prst="rect">
@@ -13003,7 +13003,7 @@
         </p:nvSpPr>
         <p:spPr>
           <a:xfrm>
-            <a:off x="2698750" y="5251450"/>
+            <a:off x="2413000" y="5251450"/>
             <a:ext cx="1905000" cy="222250"/>
           </a:xfrm>
           <a:prstGeom prst="rect">
@@ -13048,7 +13048,7 @@
         </p:nvSpPr>
         <p:spPr>
           <a:xfrm>
-            <a:off x="4889500" y="5035550"/>
+            <a:off x="4508500" y="5035550"/>
             <a:ext cx="1651000" cy="203200"/>
           </a:xfrm>
           <a:prstGeom prst="rect">
@@ -13093,7 +13093,7 @@
         </p:nvSpPr>
         <p:spPr>
           <a:xfrm>
-            <a:off x="4762500" y="5251450"/>
+            <a:off x="4381500" y="5251450"/>
             <a:ext cx="1905000" cy="222250"/>
           </a:xfrm>
           <a:prstGeom prst="rect">
@@ -13138,7 +13138,7 @@
         </p:nvSpPr>
         <p:spPr>
           <a:xfrm>
-            <a:off x="6953250" y="5035550"/>
+            <a:off x="6477000" y="5035550"/>
             <a:ext cx="1651000" cy="203200"/>
           </a:xfrm>
           <a:prstGeom prst="rect">
@@ -13183,7 +13183,7 @@
         </p:nvSpPr>
         <p:spPr>
           <a:xfrm>
-            <a:off x="6826250" y="5251450"/>
+            <a:off x="6350000" y="5251450"/>
             <a:ext cx="1905000" cy="222250"/>
           </a:xfrm>
           <a:prstGeom prst="rect">
@@ -13512,7 +13512,7 @@
         </p:blipFill>
         <p:spPr>
           <a:xfrm>
-            <a:off x="1447800" y="4660900"/>
+            <a:off x="1257300" y="4660900"/>
             <a:ext cx="279400" cy="279400"/>
           </a:xfrm>
           <a:prstGeom prst="rect">
@@ -13542,7 +13542,7 @@
         </p:blipFill>
         <p:spPr>
           <a:xfrm>
-            <a:off x="3511550" y="4660900"/>
+            <a:off x="3225800" y="4660900"/>
             <a:ext cx="279400" cy="279400"/>
           </a:xfrm>
           <a:prstGeom prst="rect">
@@ -13572,7 +13572,7 @@
         </p:blipFill>
         <p:spPr>
           <a:xfrm>
-            <a:off x="5575300" y="4660900"/>
+            <a:off x="5194300" y="4660900"/>
             <a:ext cx="279400" cy="279400"/>
           </a:xfrm>
           <a:prstGeom prst="rect">
@@ -13602,7 +13602,7 @@
         </p:blipFill>
         <p:spPr>
           <a:xfrm>
-            <a:off x="7639050" y="4660900"/>
+            <a:off x="7162800" y="4660900"/>
             <a:ext cx="279400" cy="279400"/>
           </a:xfrm>
           <a:prstGeom prst="rect">

--- a/slidepoise/examples/consulting-ai-transformation/deliverables/presentation.pptx
+++ b/slidepoise/examples/consulting-ai-transformation/deliverables/presentation.pptx
@@ -145,13 +145,88 @@
           </c:spPr>
           <c:invertIfNegative val="0"/>
           <c:dLbls>
+            <c:dLbl>
+              <c:idx val="0"/>
+              <c:numFmt formatCode="#,##0" sourceLinked="0"/>
+              <c:txPr>
+                <a:bodyPr wrap="none"/>
+                <a:lstStyle/>
+                <a:p>
+                  <a:pPr>
+                    <a:defRPr b="1" i="0" strike="noStrike" sz="1400" u="none">
+                      <a:solidFill>
+                        <a:srgbClr val="FD5108"/>
+                      </a:solidFill>
+                      <a:latin typeface="Arial"/>
+                    </a:defRPr>
+                  </a:pPr>
+                </a:p>
+              </c:txPr>
+              <c:dLblPos val="outEnd"/>
+              <c:showLegendKey val="0"/>
+              <c:showVal val="1"/>
+              <c:showCatName val="0"/>
+              <c:showSerName val="0"/>
+              <c:showPercent val="0"/>
+              <c:showBubbleSize val="0"/>
+            </c:dLbl>
+            <c:dLbl>
+              <c:idx val="1"/>
+              <c:numFmt formatCode="#,##0" sourceLinked="0"/>
+              <c:txPr>
+                <a:bodyPr wrap="none"/>
+                <a:lstStyle/>
+                <a:p>
+                  <a:pPr>
+                    <a:defRPr b="1" i="0" strike="noStrike" sz="1400" u="none">
+                      <a:solidFill>
+                        <a:srgbClr val="000000"/>
+                      </a:solidFill>
+                      <a:latin typeface="Arial"/>
+                    </a:defRPr>
+                  </a:pPr>
+                </a:p>
+              </c:txPr>
+              <c:dLblPos val="outEnd"/>
+              <c:showLegendKey val="0"/>
+              <c:showVal val="1"/>
+              <c:showCatName val="0"/>
+              <c:showSerName val="0"/>
+              <c:showPercent val="0"/>
+              <c:showBubbleSize val="0"/>
+            </c:dLbl>
+            <c:dLbl>
+              <c:idx val="2"/>
+              <c:numFmt formatCode="#,##0" sourceLinked="0"/>
+              <c:txPr>
+                <a:bodyPr wrap="none"/>
+                <a:lstStyle/>
+                <a:p>
+                  <a:pPr>
+                    <a:defRPr b="1" i="0" strike="noStrike" sz="1400" u="none">
+                      <a:solidFill>
+                        <a:srgbClr val="000000"/>
+                      </a:solidFill>
+                      <a:latin typeface="Arial"/>
+                    </a:defRPr>
+                  </a:pPr>
+                </a:p>
+              </c:txPr>
+              <c:dLblPos val="outEnd"/>
+              <c:showLegendKey val="0"/>
+              <c:showVal val="1"/>
+              <c:showCatName val="0"/>
+              <c:showSerName val="0"/>
+              <c:showPercent val="0"/>
+              <c:showBubbleSize val="0"/>
+            </c:dLbl>
             <c:numFmt formatCode="#,##0" sourceLinked="0"/>
             <c:txPr>
               <a:bodyPr wrap="none"/>
               <a:lstStyle/>
               <a:p>
                 <a:pPr>
-                  <a:defRPr b="0" i="0" strike="noStrike" sz="1200" u="none">
+                  <a:defRPr b="1" i="0" strike="noStrike" sz="1400" u="none">
                     <a:solidFill>
                       <a:srgbClr val="000000"/>
                     </a:solidFill>
@@ -244,13 +319,88 @@
           </c:val>
         </c:ser>
         <c:dLbls>
+          <c:dLbl>
+            <c:idx val="0"/>
+            <c:numFmt formatCode="#,##0" sourceLinked="0"/>
+            <c:txPr>
+              <a:bodyPr wrap="none"/>
+              <a:lstStyle/>
+              <a:p>
+                <a:pPr>
+                  <a:defRPr b="1" i="0" strike="noStrike" sz="1400" u="none">
+                    <a:solidFill>
+                      <a:srgbClr val="FD5108"/>
+                    </a:solidFill>
+                    <a:latin typeface="Arial"/>
+                  </a:defRPr>
+                </a:pPr>
+              </a:p>
+            </c:txPr>
+            <c:dLblPos val="outEnd"/>
+            <c:showLegendKey val="0"/>
+            <c:showVal val="1"/>
+            <c:showCatName val="0"/>
+            <c:showSerName val="0"/>
+            <c:showPercent val="0"/>
+            <c:showBubbleSize val="0"/>
+          </c:dLbl>
+          <c:dLbl>
+            <c:idx val="1"/>
+            <c:numFmt formatCode="#,##0" sourceLinked="0"/>
+            <c:txPr>
+              <a:bodyPr wrap="none"/>
+              <a:lstStyle/>
+              <a:p>
+                <a:pPr>
+                  <a:defRPr b="1" i="0" strike="noStrike" sz="1400" u="none">
+                    <a:solidFill>
+                      <a:srgbClr val="000000"/>
+                    </a:solidFill>
+                    <a:latin typeface="Arial"/>
+                  </a:defRPr>
+                </a:pPr>
+              </a:p>
+            </c:txPr>
+            <c:dLblPos val="outEnd"/>
+            <c:showLegendKey val="0"/>
+            <c:showVal val="1"/>
+            <c:showCatName val="0"/>
+            <c:showSerName val="0"/>
+            <c:showPercent val="0"/>
+            <c:showBubbleSize val="0"/>
+          </c:dLbl>
+          <c:dLbl>
+            <c:idx val="2"/>
+            <c:numFmt formatCode="#,##0" sourceLinked="0"/>
+            <c:txPr>
+              <a:bodyPr wrap="none"/>
+              <a:lstStyle/>
+              <a:p>
+                <a:pPr>
+                  <a:defRPr b="1" i="0" strike="noStrike" sz="1400" u="none">
+                    <a:solidFill>
+                      <a:srgbClr val="000000"/>
+                    </a:solidFill>
+                    <a:latin typeface="Arial"/>
+                  </a:defRPr>
+                </a:pPr>
+              </a:p>
+            </c:txPr>
+            <c:dLblPos val="outEnd"/>
+            <c:showLegendKey val="0"/>
+            <c:showVal val="1"/>
+            <c:showCatName val="0"/>
+            <c:showSerName val="0"/>
+            <c:showPercent val="0"/>
+            <c:showBubbleSize val="0"/>
+          </c:dLbl>
           <c:numFmt formatCode="#,##0" sourceLinked="0"/>
           <c:txPr>
             <a:bodyPr wrap="none"/>
             <a:lstStyle/>
             <a:p>
               <a:pPr>
-                <a:defRPr b="0" i="0" strike="noStrike" sz="1200" u="none">
+                <a:defRPr b="1" i="0" strike="noStrike" sz="1400" u="none">
                   <a:solidFill>
                     <a:srgbClr val="000000"/>
                   </a:solidFill>
@@ -335,7 +485,7 @@
             </a:ln>
           </c:spPr>
         </c:majorGridlines>
-        <c:numFmt formatCode="General" sourceLinked="0"/>
+        <c:numFmt formatCode="#,##0" sourceLinked="0"/>
         <c:majorTickMark val="out"/>
         <c:minorTickMark val="none"/>
         <c:tickLblPos val="nextTo"/>
@@ -792,7 +942,7 @@
 The 95% gate applies to a sampled test set. Each client release separately requires expert verification and engagement-lead approval.
 At least 11 of 15 pilot users must be weekly active. One comparable research task is measured per pilot engagement.
 [SlidePoise sources]
-Generated target visual: /private/tmp/.slidepoise-rebuild-h51errnw/slides/s01-recommendation/work/accepted-slide.png
+Generated target visual: /Users/henry/Codes/AI_slide_drafting/examples/consulting-ai-transformation/run/slides/s01-recommendation/work/accepted-slide.png
 Canonical asset remix-focus-2-line: /Users/henry/Codes/AI_slide_drafting/examples/consulting-ai-transformation/run/work/icon-cache/focus-2/remix-focus-2-line.svg
 Canonical asset remix-team-line: /Users/henry/Codes/AI_slide_drafting/examples/consulting-ai-transformation/run/work/icon-cache/team/remix-team-line.svg
 Canonical asset remix-shield-check-line: /Users/henry/Codes/AI_slide_drafting/examples/consulting-ai-transformation/run/work/icon-cache/shield-check/remix-shield-check-line.svg</a:t>
@@ -886,7 +1036,7 @@
               <a:t>This is an illustrative planning model for fictional Northstar Advisory. Annual capacity assumes 900 engagements. Research uses 900 x 12 baseline hours x 60% adoption x 30% time saved = 1,944 hours. The same formula produces 1,440 proposal hours and 1,080 retrieval hours from the displayed assumptions.
 The three workflow estimates may overlap and cannot be added without checking task boundaries. Capacity released is not a cash saving. Control readiness determines the proposed sequence, and expert review remains required before any client release.
 [SlidePoise sources]
-Generated target visual: /private/tmp/.slidepoise-rebuild-h51errnw/slides/s02-opportunities/work/accepted-slide.png
+Generated target visual: /Users/henry/Codes/AI_slide_drafting/examples/consulting-ai-transformation/run/slides/s02-opportunities/work/accepted-slide.png
 Canonical asset remix-file-search-line: /Users/henry/Codes/AI_slide_drafting/examples/consulting-ai-transformation/run/work/icon-cache/file-search/remix-file-search-line.svg
 Canonical asset remix-database-2-line: /Users/henry/Codes/AI_slide_drafting/examples/consulting-ai-transformation/run/work/icon-cache/database-2/remix-database-2-line.svg
 Canonical asset remix-user-star-line: /Users/henry/Codes/AI_slide_drafting/examples/consulting-ai-transformation/run/work/icon-cache/user-star/remix-user-star-line.svg</a:t>
@@ -978,9 +1128,9 @@
             <a:r>
               <a:rPr lang="en-US" dirty="0"/>
               <a:t>This is an illustrative planning scenario. Twenty paired tasks represent one research task from each of twenty pilot engagements, with ten tasks at the week-eight interim review. The sampled 95% claim-verification gate measures pilot quality. Every client claim still requires expert sign-off and every client release requires engagement-lead approval.
-The two curved feedback paths are editable native freeforms. They preserve the observed direction and curve geometry, but moving the table or its columns in Office does not automatically reattach these paths.
+Rejected drafts return to the drafting team. Source exceptions return to the source steward. The editable feedback paths are regenerated from their named owners when the deck is rebuilt. Moving objects manually in PowerPoint does not reattach the paths.
 [SlidePoise sources]
-Generated target visual: /private/tmp/.slidepoise-rebuild-h51errnw/slides/s03-operating-model/work/accepted-slide.png
+Generated target visual: /Users/henry/Codes/AI_slide_drafting/examples/consulting-ai-transformation/run/slides/s03-operating-model/work/accepted-slide.png
 Canonical asset remix-file-search-line: /Users/henry/Codes/AI_slide_drafting/examples/consulting-ai-transformation/run/work/icon-cache/file-search/remix-file-search-line.svg
 Canonical asset remix-draft-line: /Users/henry/Codes/AI_slide_drafting/examples/consulting-ai-transformation/run/work/icon-cache/draft/remix-draft-line.svg
 Canonical asset remix-shield-check-line: /Users/henry/Codes/AI_slide_drafting/examples/consulting-ai-transformation/run/work/icon-cache/shield-check/remix-shield-check-line.svg
@@ -1075,7 +1225,7 @@
               <a:t>Each pilot engagement supplies one research task. Twenty paired tasks correspond to twenty engagements.
 The practice lead and CFO release scale funding only after the evidence gates are reviewed. Critical data exceptions stop expansion.
 [SlidePoise sources]
-Generated target visual: /private/tmp/.slidepoise-rebuild-h51errnw/slides/s04-delivery-roadmap/work/accepted-slide.png
+Generated target visual: /Users/henry/Codes/AI_slide_drafting/examples/consulting-ai-transformation/run/slides/s04-delivery-roadmap/work/accepted-slide.png
 Canonical asset remix-flag-line: /Users/henry/Codes/AI_slide_drafting/examples/consulting-ai-transformation/run/work/icon-cache/flag/remix-flag-line.svg</a:t>
             </a:r>
             <a:endParaRPr lang="en-US" dirty="0"/>
@@ -1165,7 +1315,7 @@
             <a:r>
               <a:rPr lang="en-US" dirty="0"/>
               <a:t>[SlidePoise sources]
-Generated target visual: /private/tmp/.slidepoise-rebuild-h51errnw/slides/s05-investment-decision/work/accepted-slide.png
+Generated target visual: /Users/henry/Codes/AI_slide_drafting/examples/consulting-ai-transformation/run/slides/s05-investment-decision/work/accepted-slide.png
 Canonical asset remix-play-circle-line: /Users/henry/Codes/AI_slide_drafting/examples/consulting-ai-transformation/run/work/icon-cache/play-circle/remix-play-circle-line.svg
 Canonical asset remix-pause-circle-line: /Users/henry/Codes/AI_slide_drafting/examples/consulting-ai-transformation/run/work/icon-cache/pause-circle/remix-pause-circle-line.svg
 Canonical asset remix-stop-circle-line: /Users/henry/Codes/AI_slide_drafting/examples/consulting-ai-transformation/run/work/icon-cache/stop-circle/remix-stop-circle-line.svg</a:t>
@@ -1888,8 +2038,8 @@
         </p:nvSpPr>
         <p:spPr>
           <a:xfrm>
-            <a:off x="4108450" y="1524000"/>
-            <a:ext cx="6350" cy="876300"/>
+            <a:off x="4076700" y="1739900"/>
+            <a:ext cx="6350" cy="889000"/>
           </a:xfrm>
           <a:prstGeom prst="rect">
             <a:avLst/>
@@ -1915,8 +2065,8 @@
         </p:nvSpPr>
         <p:spPr>
           <a:xfrm>
-            <a:off x="8210550" y="1524000"/>
-            <a:ext cx="6350" cy="876300"/>
+            <a:off x="8337550" y="1739900"/>
+            <a:ext cx="6350" cy="889000"/>
           </a:xfrm>
           <a:prstGeom prst="rect">
             <a:avLst/>
@@ -2003,18 +2153,18 @@
           </p:nvPr>
         </p:nvGraphicFramePr>
         <p:xfrm>
-          <a:off x="6781800" y="2959100"/>
-          <a:ext cx="5080000" cy="2108200"/>
+          <a:off x="6731000" y="3251200"/>
+          <a:ext cx="5207000" cy="2120900"/>
         </p:xfrm>
         <a:graphic>
           <a:graphicData uri="http://schemas.openxmlformats.org/drawingml/2006/table">
             <a:tbl>
               <a:tblPr/>
               <a:tblGrid>
-                <a:gridCol w="2794000"/>
-                <a:gridCol w="2286000"/>
+                <a:gridCol w="2857500"/>
+                <a:gridCol w="2349500"/>
               </a:tblGrid>
-              <a:tr h="342900">
+              <a:tr h="381000">
                 <a:tc>
                   <a:txBody>
                     <a:bodyPr>
@@ -2026,7 +2176,7 @@
                         <a:buNone/>
                       </a:pPr>
                       <a:r>
-                        <a:rPr lang="en-US" sz="1100" b="1" dirty="0">
+                        <a:rPr lang="en-US" sz="1200" b="1" dirty="0">
                           <a:solidFill>
                             <a:srgbClr val="FFFFFF"/>
                           </a:solidFill>
@@ -2036,14 +2186,14 @@
                         </a:rPr>
                         <a:t>Measure</a:t>
                       </a:r>
-                      <a:endParaRPr lang="en-US" sz="1100" dirty="0">
+                      <a:endParaRPr lang="en-US" sz="1200" dirty="0">
                         <a:latin typeface="Arial" charset="0"/>
                         <a:ea typeface="Arial" charset="0"/>
                         <a:cs typeface="Arial" charset="0"/>
                       </a:endParaRPr>
                     </a:p>
                   </a:txBody>
-                  <a:tcPr marL="101600" marR="101600" marT="38100" marB="38100" anchor="ctr">
+                  <a:tcPr marL="76200" marR="76200" marT="31750" marB="31750" anchor="ctr">
                     <a:lnL w="6350" cap="flat" cmpd="sng" algn="ctr">
                       <a:solidFill>
                         <a:srgbClr val="C6C9CD"/>
@@ -2092,11 +2242,11 @@
                     </a:bodyPr>
                     <a:lstStyle/>
                     <a:p>
-                      <a:pPr algn="ctr" indent="0" marL="0">
+                      <a:pPr algn="l" indent="0" marL="0">
                         <a:buNone/>
                       </a:pPr>
                       <a:r>
-                        <a:rPr lang="en-US" sz="1100" b="1" dirty="0">
+                        <a:rPr lang="en-US" sz="1200" b="1" dirty="0">
                           <a:solidFill>
                             <a:srgbClr val="FFFFFF"/>
                           </a:solidFill>
@@ -2106,14 +2256,14 @@
                         </a:rPr>
                         <a:t>Minimum to scale</a:t>
                       </a:r>
-                      <a:endParaRPr lang="en-US" sz="1100" dirty="0">
+                      <a:endParaRPr lang="en-US" sz="1200" dirty="0">
                         <a:latin typeface="Arial" charset="0"/>
                         <a:ea typeface="Arial" charset="0"/>
                         <a:cs typeface="Arial" charset="0"/>
                       </a:endParaRPr>
                     </a:p>
                   </a:txBody>
-                  <a:tcPr marL="101600" marR="101600" marT="38100" marB="38100" anchor="ctr">
+                  <a:tcPr marL="76200" marR="76200" marT="31750" marB="31750" anchor="ctr">
                     <a:lnL w="6350" cap="flat" cmpd="sng" algn="ctr">
                       <a:solidFill>
                         <a:srgbClr val="C6C9CD"/>
@@ -2156,7 +2306,7 @@
                   </a:tcPr>
                 </a:tc>
               </a:tr>
-              <a:tr h="438150">
+              <a:tr h="431800">
                 <a:tc>
                   <a:txBody>
                     <a:bodyPr>
@@ -2168,7 +2318,7 @@
                         <a:buNone/>
                       </a:pPr>
                       <a:r>
-                        <a:rPr lang="en-US" sz="1100" b="1" dirty="0">
+                        <a:rPr lang="en-US" sz="1200" b="1" dirty="0">
                           <a:solidFill>
                             <a:srgbClr val="000000"/>
                           </a:solidFill>
@@ -2178,14 +2328,14 @@
                         </a:rPr>
                         <a:t>Cycle-time reduction</a:t>
                       </a:r>
-                      <a:endParaRPr lang="en-US" sz="1100" dirty="0">
+                      <a:endParaRPr lang="en-US" sz="1200" dirty="0">
                         <a:latin typeface="Arial" charset="0"/>
                         <a:ea typeface="Arial" charset="0"/>
                         <a:cs typeface="Arial" charset="0"/>
                       </a:endParaRPr>
                     </a:p>
                   </a:txBody>
-                  <a:tcPr marL="101600" marR="101600" marT="38100" marB="38100" anchor="ctr">
+                  <a:tcPr marL="76200" marR="76200" marT="31750" marB="31750" anchor="ctr">
                     <a:lnL w="6350" cap="flat" cmpd="sng" algn="ctr">
                       <a:solidFill>
                         <a:srgbClr val="C6C9CD"/>
@@ -2234,11 +2384,11 @@
                     </a:bodyPr>
                     <a:lstStyle/>
                     <a:p>
-                      <a:pPr algn="ctr" indent="0" marL="0">
+                      <a:pPr algn="l" indent="0" marL="0">
                         <a:buNone/>
                       </a:pPr>
                       <a:r>
-                        <a:rPr lang="en-US" sz="1100" dirty="0">
+                        <a:rPr lang="en-US" sz="1200" dirty="0">
                           <a:solidFill>
                             <a:srgbClr val="000000"/>
                           </a:solidFill>
@@ -2248,14 +2398,14 @@
                         </a:rPr>
                         <a:t>25%</a:t>
                       </a:r>
-                      <a:endParaRPr lang="en-US" sz="1100" dirty="0">
+                      <a:endParaRPr lang="en-US" sz="1200" dirty="0">
                         <a:latin typeface="Arial" charset="0"/>
                         <a:ea typeface="Arial" charset="0"/>
                         <a:cs typeface="Arial" charset="0"/>
                       </a:endParaRPr>
                     </a:p>
                   </a:txBody>
-                  <a:tcPr marL="101600" marR="101600" marT="38100" marB="38100" anchor="ctr">
+                  <a:tcPr marL="76200" marR="76200" marT="31750" marB="31750" anchor="ctr">
                     <a:lnL w="6350" cap="flat" cmpd="sng" algn="ctr">
                       <a:solidFill>
                         <a:srgbClr val="C6C9CD"/>
@@ -2298,7 +2448,7 @@
                   </a:tcPr>
                 </a:tc>
               </a:tr>
-              <a:tr h="438150">
+              <a:tr h="431800">
                 <a:tc>
                   <a:txBody>
                     <a:bodyPr>
@@ -2310,7 +2460,7 @@
                         <a:buNone/>
                       </a:pPr>
                       <a:r>
-                        <a:rPr lang="en-US" sz="1100" b="1" dirty="0">
+                        <a:rPr lang="en-US" sz="1200" b="1" dirty="0">
                           <a:solidFill>
                             <a:srgbClr val="000000"/>
                           </a:solidFill>
@@ -2320,14 +2470,14 @@
                         </a:rPr>
                         <a:t>Sampled cited claims verified</a:t>
                       </a:r>
-                      <a:endParaRPr lang="en-US" sz="1100" dirty="0">
+                      <a:endParaRPr lang="en-US" sz="1200" dirty="0">
                         <a:latin typeface="Arial" charset="0"/>
                         <a:ea typeface="Arial" charset="0"/>
                         <a:cs typeface="Arial" charset="0"/>
                       </a:endParaRPr>
                     </a:p>
                   </a:txBody>
-                  <a:tcPr marL="101600" marR="101600" marT="38100" marB="38100" anchor="ctr">
+                  <a:tcPr marL="76200" marR="76200" marT="31750" marB="31750" anchor="ctr">
                     <a:lnL w="6350" cap="flat" cmpd="sng" algn="ctr">
                       <a:solidFill>
                         <a:srgbClr val="C6C9CD"/>
@@ -2376,11 +2526,11 @@
                     </a:bodyPr>
                     <a:lstStyle/>
                     <a:p>
-                      <a:pPr algn="ctr" indent="0" marL="0">
+                      <a:pPr algn="l" indent="0" marL="0">
                         <a:buNone/>
                       </a:pPr>
                       <a:r>
-                        <a:rPr lang="en-US" sz="1100" dirty="0">
+                        <a:rPr lang="en-US" sz="1200" dirty="0">
                           <a:solidFill>
                             <a:srgbClr val="000000"/>
                           </a:solidFill>
@@ -2390,14 +2540,14 @@
                         </a:rPr>
                         <a:t>95%</a:t>
                       </a:r>
-                      <a:endParaRPr lang="en-US" sz="1100" dirty="0">
+                      <a:endParaRPr lang="en-US" sz="1200" dirty="0">
                         <a:latin typeface="Arial" charset="0"/>
                         <a:ea typeface="Arial" charset="0"/>
                         <a:cs typeface="Arial" charset="0"/>
                       </a:endParaRPr>
                     </a:p>
                   </a:txBody>
-                  <a:tcPr marL="101600" marR="101600" marT="38100" marB="38100" anchor="ctr">
+                  <a:tcPr marL="76200" marR="76200" marT="31750" marB="31750" anchor="ctr">
                     <a:lnL w="6350" cap="flat" cmpd="sng" algn="ctr">
                       <a:solidFill>
                         <a:srgbClr val="C6C9CD"/>
@@ -2440,7 +2590,7 @@
                   </a:tcPr>
                 </a:tc>
               </a:tr>
-              <a:tr h="438150">
+              <a:tr h="431800">
                 <a:tc>
                   <a:txBody>
                     <a:bodyPr>
@@ -2452,7 +2602,7 @@
                         <a:buNone/>
                       </a:pPr>
                       <a:r>
-                        <a:rPr lang="en-US" sz="1100" b="1" dirty="0">
+                        <a:rPr lang="en-US" sz="1200" b="1" dirty="0">
                           <a:solidFill>
                             <a:srgbClr val="000000"/>
                           </a:solidFill>
@@ -2462,14 +2612,14 @@
                         </a:rPr>
                         <a:t>Critical data exceptions</a:t>
                       </a:r>
-                      <a:endParaRPr lang="en-US" sz="1100" dirty="0">
+                      <a:endParaRPr lang="en-US" sz="1200" dirty="0">
                         <a:latin typeface="Arial" charset="0"/>
                         <a:ea typeface="Arial" charset="0"/>
                         <a:cs typeface="Arial" charset="0"/>
                       </a:endParaRPr>
                     </a:p>
                   </a:txBody>
-                  <a:tcPr marL="101600" marR="101600" marT="38100" marB="38100" anchor="ctr">
+                  <a:tcPr marL="76200" marR="76200" marT="31750" marB="31750" anchor="ctr">
                     <a:lnL w="6350" cap="flat" cmpd="sng" algn="ctr">
                       <a:solidFill>
                         <a:srgbClr val="C6C9CD"/>
@@ -2518,11 +2668,11 @@
                     </a:bodyPr>
                     <a:lstStyle/>
                     <a:p>
-                      <a:pPr algn="ctr" indent="0" marL="0">
+                      <a:pPr algn="l" indent="0" marL="0">
                         <a:buNone/>
                       </a:pPr>
                       <a:r>
-                        <a:rPr lang="en-US" sz="1100" dirty="0">
+                        <a:rPr lang="en-US" sz="1200" dirty="0">
                           <a:solidFill>
                             <a:srgbClr val="000000"/>
                           </a:solidFill>
@@ -2532,14 +2682,14 @@
                         </a:rPr>
                         <a:t>0</a:t>
                       </a:r>
-                      <a:endParaRPr lang="en-US" sz="1100" dirty="0">
+                      <a:endParaRPr lang="en-US" sz="1200" dirty="0">
                         <a:latin typeface="Arial" charset="0"/>
                         <a:ea typeface="Arial" charset="0"/>
                         <a:cs typeface="Arial" charset="0"/>
                       </a:endParaRPr>
                     </a:p>
                   </a:txBody>
-                  <a:tcPr marL="101600" marR="101600" marT="38100" marB="38100" anchor="ctr">
+                  <a:tcPr marL="76200" marR="76200" marT="31750" marB="31750" anchor="ctr">
                     <a:lnL w="6350" cap="flat" cmpd="sng" algn="ctr">
                       <a:solidFill>
                         <a:srgbClr val="C6C9CD"/>
@@ -2582,7 +2732,7 @@
                   </a:tcPr>
                 </a:tc>
               </a:tr>
-              <a:tr h="450850">
+              <a:tr h="444500">
                 <a:tc>
                   <a:txBody>
                     <a:bodyPr>
@@ -2594,7 +2744,7 @@
                         <a:buNone/>
                       </a:pPr>
                       <a:r>
-                        <a:rPr lang="en-US" sz="1100" b="1" dirty="0">
+                        <a:rPr lang="en-US" sz="1200" b="1" dirty="0">
                           <a:solidFill>
                             <a:srgbClr val="000000"/>
                           </a:solidFill>
@@ -2604,14 +2754,14 @@
                         </a:rPr>
                         <a:t>Weekly-active pilot users</a:t>
                       </a:r>
-                      <a:endParaRPr lang="en-US" sz="1100" dirty="0">
+                      <a:endParaRPr lang="en-US" sz="1200" dirty="0">
                         <a:latin typeface="Arial" charset="0"/>
                         <a:ea typeface="Arial" charset="0"/>
                         <a:cs typeface="Arial" charset="0"/>
                       </a:endParaRPr>
                     </a:p>
                   </a:txBody>
-                  <a:tcPr marL="101600" marR="101600" marT="38100" marB="38100" anchor="ctr">
+                  <a:tcPr marL="76200" marR="76200" marT="31750" marB="31750" anchor="ctr">
                     <a:lnL w="6350" cap="flat" cmpd="sng" algn="ctr">
                       <a:solidFill>
                         <a:srgbClr val="C6C9CD"/>
@@ -2660,11 +2810,11 @@
                     </a:bodyPr>
                     <a:lstStyle/>
                     <a:p>
-                      <a:pPr algn="ctr" indent="0" marL="0">
+                      <a:pPr algn="l" indent="0" marL="0">
                         <a:buNone/>
                       </a:pPr>
                       <a:r>
-                        <a:rPr lang="en-US" sz="1100" dirty="0">
+                        <a:rPr lang="en-US" sz="1200" dirty="0">
                           <a:solidFill>
                             <a:srgbClr val="000000"/>
                           </a:solidFill>
@@ -2674,14 +2824,14 @@
                         </a:rPr>
                         <a:t>70% · at least 11 of 15</a:t>
                       </a:r>
-                      <a:endParaRPr lang="en-US" sz="1100" dirty="0">
+                      <a:endParaRPr lang="en-US" sz="1200" dirty="0">
                         <a:latin typeface="Arial" charset="0"/>
                         <a:ea typeface="Arial" charset="0"/>
                         <a:cs typeface="Arial" charset="0"/>
                       </a:endParaRPr>
                     </a:p>
                   </a:txBody>
-                  <a:tcPr marL="101600" marR="101600" marT="38100" marB="38100" anchor="ctr">
+                  <a:tcPr marL="76200" marR="76200" marT="31750" marB="31750" anchor="ctr">
                     <a:lnL w="6350" cap="flat" cmpd="sng" algn="ctr">
                       <a:solidFill>
                         <a:srgbClr val="C6C9CD"/>
@@ -2826,8 +2976,8 @@
         </p:nvSpPr>
         <p:spPr>
           <a:xfrm>
-            <a:off x="298450" y="1524000"/>
-            <a:ext cx="3175000" cy="444500"/>
+            <a:off x="298450" y="1619250"/>
+            <a:ext cx="3175000" cy="596900"/>
           </a:xfrm>
           <a:prstGeom prst="rect">
             <a:avLst/>
@@ -2849,7 +2999,7 @@
               <a:defRPr spc="0"/>
             </a:pPr>
             <a:r>
-              <a:rPr lang="en-US" sz="2900" b="1" dirty="0" spc="0">
+              <a:rPr lang="en-US" sz="4000" b="1" dirty="0" spc="0">
                 <a:solidFill>
                   <a:srgbClr val="FD5108"/>
                 </a:solidFill>
@@ -2859,7 +3009,7 @@
               </a:rPr>
               <a:t>10,800 h</a:t>
             </a:r>
-            <a:endParaRPr lang="en-US" sz="2900" dirty="0" spc="0"/>
+            <a:endParaRPr lang="en-US" sz="4000" dirty="0" spc="0"/>
           </a:p>
         </p:txBody>
       </p:sp>
@@ -2871,8 +3021,8 @@
         </p:nvSpPr>
         <p:spPr>
           <a:xfrm>
-            <a:off x="298450" y="1981200"/>
-            <a:ext cx="3302000" cy="203200"/>
+            <a:off x="298450" y="2197100"/>
+            <a:ext cx="3175000" cy="241300"/>
           </a:xfrm>
           <a:prstGeom prst="rect">
             <a:avLst/>
@@ -2894,7 +3044,7 @@
               <a:defRPr spc="0"/>
             </a:pPr>
             <a:r>
-              <a:rPr lang="en-US" sz="1250" b="1" dirty="0" spc="0">
+              <a:rPr lang="en-US" sz="1400" b="1" dirty="0" spc="0">
                 <a:solidFill>
                   <a:srgbClr val="000000"/>
                 </a:solidFill>
@@ -2904,7 +3054,7 @@
               </a:rPr>
               <a:t>Annual research baseline</a:t>
             </a:r>
-            <a:endParaRPr lang="en-US" sz="1250" dirty="0" spc="0"/>
+            <a:endParaRPr lang="en-US" sz="1400" dirty="0" spc="0"/>
           </a:p>
         </p:txBody>
       </p:sp>
@@ -2916,8 +3066,8 @@
         </p:nvSpPr>
         <p:spPr>
           <a:xfrm>
-            <a:off x="298450" y="2197100"/>
-            <a:ext cx="3302000" cy="203200"/>
+            <a:off x="298450" y="2476500"/>
+            <a:ext cx="3175000" cy="266700"/>
           </a:xfrm>
           <a:prstGeom prst="rect">
             <a:avLst/>
@@ -2939,7 +3089,7 @@
               <a:defRPr spc="0"/>
             </a:pPr>
             <a:r>
-              <a:rPr lang="en-US" sz="1150" dirty="0" spc="0">
+              <a:rPr lang="en-US" sz="1300" dirty="0" spc="0">
                 <a:solidFill>
                   <a:srgbClr val="000000"/>
                 </a:solidFill>
@@ -2949,7 +3099,7 @@
               </a:rPr>
               <a:t>900 engagements × 12 h</a:t>
             </a:r>
-            <a:endParaRPr lang="en-US" sz="1150" dirty="0" spc="0"/>
+            <a:endParaRPr lang="en-US" sz="1300" dirty="0" spc="0"/>
           </a:p>
         </p:txBody>
       </p:sp>
@@ -2961,8 +3111,8 @@
         </p:nvSpPr>
         <p:spPr>
           <a:xfrm>
-            <a:off x="4406900" y="1524000"/>
-            <a:ext cx="3175000" cy="444500"/>
+            <a:off x="4584700" y="1619250"/>
+            <a:ext cx="3175000" cy="596900"/>
           </a:xfrm>
           <a:prstGeom prst="rect">
             <a:avLst/>
@@ -2984,7 +3134,7 @@
               <a:defRPr spc="0"/>
             </a:pPr>
             <a:r>
-              <a:rPr lang="en-US" sz="2900" b="1" dirty="0" spc="0">
+              <a:rPr lang="en-US" sz="4000" b="1" dirty="0" spc="0">
                 <a:solidFill>
                   <a:srgbClr val="FD5108"/>
                 </a:solidFill>
@@ -2994,7 +3144,7 @@
               </a:rPr>
               <a:t>1,944 h</a:t>
             </a:r>
-            <a:endParaRPr lang="en-US" sz="2900" dirty="0" spc="0"/>
+            <a:endParaRPr lang="en-US" sz="4000" dirty="0" spc="0"/>
           </a:p>
         </p:txBody>
       </p:sp>
@@ -3006,8 +3156,8 @@
         </p:nvSpPr>
         <p:spPr>
           <a:xfrm>
-            <a:off x="4406900" y="1981200"/>
-            <a:ext cx="3302000" cy="203200"/>
+            <a:off x="4584700" y="2197100"/>
+            <a:ext cx="3175000" cy="241300"/>
           </a:xfrm>
           <a:prstGeom prst="rect">
             <a:avLst/>
@@ -3029,7 +3179,7 @@
               <a:defRPr spc="0"/>
             </a:pPr>
             <a:r>
-              <a:rPr lang="en-US" sz="1250" b="1" dirty="0" spc="0">
+              <a:rPr lang="en-US" sz="1400" b="1" dirty="0" spc="0">
                 <a:solidFill>
                   <a:srgbClr val="000000"/>
                 </a:solidFill>
@@ -3039,7 +3189,7 @@
               </a:rPr>
               <a:t>Potential annual capacity</a:t>
             </a:r>
-            <a:endParaRPr lang="en-US" sz="1250" dirty="0" spc="0"/>
+            <a:endParaRPr lang="en-US" sz="1400" dirty="0" spc="0"/>
           </a:p>
         </p:txBody>
       </p:sp>
@@ -3051,8 +3201,8 @@
         </p:nvSpPr>
         <p:spPr>
           <a:xfrm>
-            <a:off x="4406900" y="2197100"/>
-            <a:ext cx="3302000" cy="203200"/>
+            <a:off x="4584700" y="2476500"/>
+            <a:ext cx="3175000" cy="266700"/>
           </a:xfrm>
           <a:prstGeom prst="rect">
             <a:avLst/>
@@ -3074,7 +3224,7 @@
               <a:defRPr spc="0"/>
             </a:pPr>
             <a:r>
-              <a:rPr lang="en-US" sz="1150" dirty="0" spc="0">
+              <a:rPr lang="en-US" sz="1300" dirty="0" spc="0">
                 <a:solidFill>
                   <a:srgbClr val="000000"/>
                 </a:solidFill>
@@ -3084,7 +3234,7 @@
               </a:rPr>
               <a:t>60% adoption × 30% time reduction</a:t>
             </a:r>
-            <a:endParaRPr lang="en-US" sz="1150" dirty="0" spc="0"/>
+            <a:endParaRPr lang="en-US" sz="1300" dirty="0" spc="0"/>
           </a:p>
         </p:txBody>
       </p:sp>
@@ -3096,8 +3246,8 @@
         </p:nvSpPr>
         <p:spPr>
           <a:xfrm>
-            <a:off x="8509000" y="1524000"/>
-            <a:ext cx="3175000" cy="444500"/>
+            <a:off x="8940800" y="1619250"/>
+            <a:ext cx="3175000" cy="596900"/>
           </a:xfrm>
           <a:prstGeom prst="rect">
             <a:avLst/>
@@ -3119,7 +3269,7 @@
               <a:defRPr spc="0"/>
             </a:pPr>
             <a:r>
-              <a:rPr lang="en-US" sz="2900" b="1" dirty="0" spc="0">
+              <a:rPr lang="en-US" sz="4000" b="1" dirty="0" spc="0">
                 <a:solidFill>
                   <a:srgbClr val="FD5108"/>
                 </a:solidFill>
@@ -3129,7 +3279,7 @@
               </a:rPr>
               <a:t>$243k</a:t>
             </a:r>
-            <a:endParaRPr lang="en-US" sz="2900" dirty="0" spc="0"/>
+            <a:endParaRPr lang="en-US" sz="4000" dirty="0" spc="0"/>
           </a:p>
         </p:txBody>
       </p:sp>
@@ -3141,8 +3291,8 @@
         </p:nvSpPr>
         <p:spPr>
           <a:xfrm>
-            <a:off x="8509000" y="1981200"/>
-            <a:ext cx="3302000" cy="203200"/>
+            <a:off x="8940800" y="2197100"/>
+            <a:ext cx="3175000" cy="241300"/>
           </a:xfrm>
           <a:prstGeom prst="rect">
             <a:avLst/>
@@ -3164,7 +3314,7 @@
               <a:defRPr spc="0"/>
             </a:pPr>
             <a:r>
-              <a:rPr lang="en-US" sz="1250" b="1" dirty="0" spc="0">
+              <a:rPr lang="en-US" sz="1400" b="1" dirty="0" spc="0">
                 <a:solidFill>
                   <a:srgbClr val="000000"/>
                 </a:solidFill>
@@ -3174,7 +3324,7 @@
               </a:rPr>
               <a:t>Annual capacity equivalent</a:t>
             </a:r>
-            <a:endParaRPr lang="en-US" sz="1250" dirty="0" spc="0"/>
+            <a:endParaRPr lang="en-US" sz="1400" dirty="0" spc="0"/>
           </a:p>
         </p:txBody>
       </p:sp>
@@ -3186,8 +3336,8 @@
         </p:nvSpPr>
         <p:spPr>
           <a:xfrm>
-            <a:off x="8509000" y="2197100"/>
-            <a:ext cx="3302000" cy="203200"/>
+            <a:off x="8940800" y="2476500"/>
+            <a:ext cx="3175000" cy="266700"/>
           </a:xfrm>
           <a:prstGeom prst="rect">
             <a:avLst/>
@@ -3209,7 +3359,7 @@
               <a:defRPr spc="0"/>
             </a:pPr>
             <a:r>
-              <a:rPr lang="en-US" sz="1150" dirty="0" spc="0">
+              <a:rPr lang="en-US" sz="1300" dirty="0" spc="0">
                 <a:solidFill>
                   <a:srgbClr val="000000"/>
                 </a:solidFill>
@@ -3219,7 +3369,7 @@
               </a:rPr>
               <a:t>1,944 h × $125 per hour</a:t>
             </a:r>
-            <a:endParaRPr lang="en-US" sz="1150" dirty="0" spc="0"/>
+            <a:endParaRPr lang="en-US" sz="1300" dirty="0" spc="0"/>
           </a:p>
         </p:txBody>
       </p:sp>
@@ -3231,8 +3381,8 @@
         </p:nvSpPr>
         <p:spPr>
           <a:xfrm>
-            <a:off x="298450" y="2667000"/>
-            <a:ext cx="5397500" cy="266700"/>
+            <a:off x="298450" y="2927350"/>
+            <a:ext cx="5778500" cy="266700"/>
           </a:xfrm>
           <a:prstGeom prst="rect">
             <a:avLst/>
@@ -3254,7 +3404,7 @@
               <a:defRPr spc="0"/>
             </a:pPr>
             <a:r>
-              <a:rPr lang="en-US" sz="1350" b="1" dirty="0" spc="0">
+              <a:rPr lang="en-US" sz="1400" b="1" dirty="0" spc="0">
                 <a:solidFill>
                   <a:srgbClr val="000000"/>
                 </a:solidFill>
@@ -3264,7 +3414,7 @@
               </a:rPr>
               <a:t>WHY THIS PILOT FIRST</a:t>
             </a:r>
-            <a:endParaRPr lang="en-US" sz="1350" dirty="0" spc="0"/>
+            <a:endParaRPr lang="en-US" sz="1400" dirty="0" spc="0"/>
           </a:p>
         </p:txBody>
       </p:sp>
@@ -3276,8 +3426,8 @@
         </p:nvSpPr>
         <p:spPr>
           <a:xfrm>
-            <a:off x="1047750" y="3092450"/>
-            <a:ext cx="393700" cy="279400"/>
+            <a:off x="1358900" y="3302000"/>
+            <a:ext cx="412750" cy="254000"/>
           </a:xfrm>
           <a:prstGeom prst="rect">
             <a:avLst/>
@@ -3299,7 +3449,7 @@
               <a:defRPr spc="0"/>
             </a:pPr>
             <a:r>
-              <a:rPr lang="en-US" sz="1250" b="1" dirty="0" spc="0">
+              <a:rPr lang="en-US" sz="1500" b="1" dirty="0" spc="0">
                 <a:solidFill>
                   <a:srgbClr val="000000"/>
                 </a:solidFill>
@@ -3309,7 +3459,7 @@
               </a:rPr>
               <a:t>01</a:t>
             </a:r>
-            <a:endParaRPr lang="en-US" sz="1250" dirty="0" spc="0"/>
+            <a:endParaRPr lang="en-US" sz="1500" dirty="0" spc="0"/>
           </a:p>
         </p:txBody>
       </p:sp>
@@ -3321,8 +3471,8 @@
         </p:nvSpPr>
         <p:spPr>
           <a:xfrm>
-            <a:off x="1619250" y="3073400"/>
-            <a:ext cx="3429000" cy="222250"/>
+            <a:off x="1936750" y="3314700"/>
+            <a:ext cx="4445000" cy="241300"/>
           </a:xfrm>
           <a:prstGeom prst="rect">
             <a:avLst/>
@@ -3344,7 +3494,7 @@
               <a:defRPr spc="0"/>
             </a:pPr>
             <a:r>
-              <a:rPr lang="en-US" sz="1250" b="1" dirty="0" spc="0">
+              <a:rPr lang="en-US" sz="1400" b="1" dirty="0" spc="0">
                 <a:solidFill>
                   <a:srgbClr val="000000"/>
                 </a:solidFill>
@@ -3354,7 +3504,7 @@
               </a:rPr>
               <a:t>Focus a repeatable task</a:t>
             </a:r>
-            <a:endParaRPr lang="en-US" sz="1250" dirty="0" spc="0"/>
+            <a:endParaRPr lang="en-US" sz="1400" dirty="0" spc="0"/>
           </a:p>
         </p:txBody>
       </p:sp>
@@ -3366,8 +3516,8 @@
         </p:nvSpPr>
         <p:spPr>
           <a:xfrm>
-            <a:off x="1619250" y="3314700"/>
-            <a:ext cx="4445000" cy="254000"/>
+            <a:off x="1936750" y="3581400"/>
+            <a:ext cx="4635500" cy="412750"/>
           </a:xfrm>
           <a:prstGeom prst="rect">
             <a:avLst/>
@@ -3389,7 +3539,7 @@
               <a:defRPr spc="0"/>
             </a:pPr>
             <a:r>
-              <a:rPr lang="en-US" sz="1050" dirty="0" spc="0">
+              <a:rPr lang="en-US" sz="1300" dirty="0" spc="0">
                 <a:solidFill>
                   <a:srgbClr val="000000"/>
                 </a:solidFill>
@@ -3399,7 +3549,7 @@
               </a:rPr>
               <a:t>Approved sources, frequent use and comparable inputs.</a:t>
             </a:r>
-            <a:endParaRPr lang="en-US" sz="1050" dirty="0" spc="0"/>
+            <a:endParaRPr lang="en-US" sz="1300" dirty="0" spc="0"/>
           </a:p>
         </p:txBody>
       </p:sp>
@@ -3411,8 +3561,8 @@
         </p:nvSpPr>
         <p:spPr>
           <a:xfrm>
-            <a:off x="1047750" y="3771900"/>
-            <a:ext cx="393700" cy="279400"/>
+            <a:off x="1358900" y="4089400"/>
+            <a:ext cx="412750" cy="254000"/>
           </a:xfrm>
           <a:prstGeom prst="rect">
             <a:avLst/>
@@ -3434,7 +3584,7 @@
               <a:defRPr spc="0"/>
             </a:pPr>
             <a:r>
-              <a:rPr lang="en-US" sz="1250" b="1" dirty="0" spc="0">
+              <a:rPr lang="en-US" sz="1500" b="1" dirty="0" spc="0">
                 <a:solidFill>
                   <a:srgbClr val="000000"/>
                 </a:solidFill>
@@ -3444,7 +3594,7 @@
               </a:rPr>
               <a:t>02</a:t>
             </a:r>
-            <a:endParaRPr lang="en-US" sz="1250" dirty="0" spc="0"/>
+            <a:endParaRPr lang="en-US" sz="1500" dirty="0" spc="0"/>
           </a:p>
         </p:txBody>
       </p:sp>
@@ -3456,8 +3606,8 @@
         </p:nvSpPr>
         <p:spPr>
           <a:xfrm>
-            <a:off x="1619250" y="3752850"/>
-            <a:ext cx="3429000" cy="222250"/>
+            <a:off x="1936750" y="4102100"/>
+            <a:ext cx="4445000" cy="241300"/>
           </a:xfrm>
           <a:prstGeom prst="rect">
             <a:avLst/>
@@ -3479,7 +3629,7 @@
               <a:defRPr spc="0"/>
             </a:pPr>
             <a:r>
-              <a:rPr lang="en-US" sz="1250" b="1" dirty="0" spc="0">
+              <a:rPr lang="en-US" sz="1400" b="1" dirty="0" spc="0">
                 <a:solidFill>
                   <a:srgbClr val="000000"/>
                 </a:solidFill>
@@ -3489,7 +3639,7 @@
               </a:rPr>
               <a:t>Preserve expert review</a:t>
             </a:r>
-            <a:endParaRPr lang="en-US" sz="1250" dirty="0" spc="0"/>
+            <a:endParaRPr lang="en-US" sz="1400" dirty="0" spc="0"/>
           </a:p>
         </p:txBody>
       </p:sp>
@@ -3501,8 +3651,8 @@
         </p:nvSpPr>
         <p:spPr>
           <a:xfrm>
-            <a:off x="1619250" y="3994150"/>
-            <a:ext cx="4445000" cy="254000"/>
+            <a:off x="1936750" y="4368800"/>
+            <a:ext cx="4635500" cy="412750"/>
           </a:xfrm>
           <a:prstGeom prst="rect">
             <a:avLst/>
@@ -3524,7 +3674,7 @@
               <a:defRPr spc="0"/>
             </a:pPr>
             <a:r>
-              <a:rPr lang="en-US" sz="1050" dirty="0" spc="0">
+              <a:rPr lang="en-US" sz="1300" dirty="0" spc="0">
                 <a:solidFill>
                   <a:srgbClr val="000000"/>
                 </a:solidFill>
@@ -3534,7 +3684,7 @@
               </a:rPr>
               <a:t>Verify every client claim before release.</a:t>
             </a:r>
-            <a:endParaRPr lang="en-US" sz="1050" dirty="0" spc="0"/>
+            <a:endParaRPr lang="en-US" sz="1300" dirty="0" spc="0"/>
           </a:p>
         </p:txBody>
       </p:sp>
@@ -3546,8 +3696,8 @@
         </p:nvSpPr>
         <p:spPr>
           <a:xfrm>
-            <a:off x="1047750" y="4451350"/>
-            <a:ext cx="393700" cy="279400"/>
+            <a:off x="1358900" y="4851400"/>
+            <a:ext cx="412750" cy="254000"/>
           </a:xfrm>
           <a:prstGeom prst="rect">
             <a:avLst/>
@@ -3569,7 +3719,7 @@
               <a:defRPr spc="0"/>
             </a:pPr>
             <a:r>
-              <a:rPr lang="en-US" sz="1250" b="1" dirty="0" spc="0">
+              <a:rPr lang="en-US" sz="1500" b="1" dirty="0" spc="0">
                 <a:solidFill>
                   <a:srgbClr val="000000"/>
                 </a:solidFill>
@@ -3579,7 +3729,7 @@
               </a:rPr>
               <a:t>03</a:t>
             </a:r>
-            <a:endParaRPr lang="en-US" sz="1250" dirty="0" spc="0"/>
+            <a:endParaRPr lang="en-US" sz="1500" dirty="0" spc="0"/>
           </a:p>
         </p:txBody>
       </p:sp>
@@ -3591,8 +3741,8 @@
         </p:nvSpPr>
         <p:spPr>
           <a:xfrm>
-            <a:off x="1619250" y="4432300"/>
-            <a:ext cx="3429000" cy="222250"/>
+            <a:off x="1936750" y="4864100"/>
+            <a:ext cx="4445000" cy="241300"/>
           </a:xfrm>
           <a:prstGeom prst="rect">
             <a:avLst/>
@@ -3614,7 +3764,7 @@
               <a:defRPr spc="0"/>
             </a:pPr>
             <a:r>
-              <a:rPr lang="en-US" sz="1250" b="1" dirty="0" spc="0">
+              <a:rPr lang="en-US" sz="1400" b="1" dirty="0" spc="0">
                 <a:solidFill>
                   <a:srgbClr val="000000"/>
                 </a:solidFill>
@@ -3624,7 +3774,7 @@
               </a:rPr>
               <a:t>Fund against evidence</a:t>
             </a:r>
-            <a:endParaRPr lang="en-US" sz="1250" dirty="0" spc="0"/>
+            <a:endParaRPr lang="en-US" sz="1400" dirty="0" spc="0"/>
           </a:p>
         </p:txBody>
       </p:sp>
@@ -3636,8 +3786,8 @@
         </p:nvSpPr>
         <p:spPr>
           <a:xfrm>
-            <a:off x="1619250" y="4673600"/>
-            <a:ext cx="4445000" cy="254000"/>
+            <a:off x="1936750" y="5130800"/>
+            <a:ext cx="4635500" cy="412750"/>
           </a:xfrm>
           <a:prstGeom prst="rect">
             <a:avLst/>
@@ -3659,7 +3809,7 @@
               <a:defRPr spc="0"/>
             </a:pPr>
             <a:r>
-              <a:rPr lang="en-US" sz="1050" dirty="0" spc="0">
+              <a:rPr lang="en-US" sz="1300" dirty="0" spc="0">
                 <a:solidFill>
                   <a:srgbClr val="000000"/>
                 </a:solidFill>
@@ -3667,9 +3817,30 @@
                 <a:ea typeface="Arial" pitchFamily="34" charset="-122"/>
                 <a:cs typeface="Arial" pitchFamily="34" charset="-120"/>
               </a:rPr>
-              <a:t>Practice lead and CFO release $60k only after the week-12 gate.</a:t>
+              <a:t>Practice lead and CFO release $60k</a:t>
             </a:r>
-            <a:endParaRPr lang="en-US" sz="1050" dirty="0" spc="0"/>
+            <a:endParaRPr lang="en-US" sz="1300" dirty="0" spc="0"/>
+          </a:p>
+          <a:p>
+            <a:pPr algn="l" indent="0" marL="0">
+              <a:lnSpc>
+                <a:spcPct val="100000"/>
+              </a:lnSpc>
+              <a:buNone/>
+              <a:defRPr spc="0"/>
+            </a:pPr>
+            <a:r>
+              <a:rPr lang="en-US" sz="1300" dirty="0" spc="0">
+                <a:solidFill>
+                  <a:srgbClr val="000000"/>
+                </a:solidFill>
+                <a:latin typeface="Arial" pitchFamily="34" charset="0"/>
+                <a:ea typeface="Arial" pitchFamily="34" charset="-122"/>
+                <a:cs typeface="Arial" pitchFamily="34" charset="-120"/>
+              </a:rPr>
+              <a:t>only after the week-12 gate.</a:t>
+            </a:r>
+            <a:endParaRPr lang="en-US" sz="1300" dirty="0" spc="0"/>
           </a:p>
         </p:txBody>
       </p:sp>
@@ -3681,8 +3852,8 @@
         </p:nvSpPr>
         <p:spPr>
           <a:xfrm>
-            <a:off x="6781800" y="2667000"/>
-            <a:ext cx="5080000" cy="266700"/>
+            <a:off x="6731000" y="2927350"/>
+            <a:ext cx="5207000" cy="266700"/>
           </a:xfrm>
           <a:prstGeom prst="rect">
             <a:avLst/>
@@ -3704,7 +3875,7 @@
               <a:defRPr spc="0"/>
             </a:pPr>
             <a:r>
-              <a:rPr lang="en-US" sz="1350" b="1" dirty="0" spc="0">
+              <a:rPr lang="en-US" sz="1400" b="1" dirty="0" spc="0">
                 <a:solidFill>
                   <a:srgbClr val="000000"/>
                 </a:solidFill>
@@ -3714,7 +3885,7 @@
               </a:rPr>
               <a:t>WEEK-12 SCALE GATE</a:t>
             </a:r>
-            <a:endParaRPr lang="en-US" sz="1350" dirty="0" spc="0"/>
+            <a:endParaRPr lang="en-US" sz="1400" dirty="0" spc="0"/>
           </a:p>
         </p:txBody>
       </p:sp>
@@ -3830,8 +4001,8 @@
         </p:blipFill>
         <p:spPr>
           <a:xfrm>
-            <a:off x="495300" y="3086100"/>
-            <a:ext cx="317500" cy="317500"/>
+            <a:off x="495300" y="3282950"/>
+            <a:ext cx="546100" cy="546100"/>
           </a:xfrm>
           <a:prstGeom prst="rect">
             <a:avLst/>
@@ -3860,8 +4031,8 @@
         </p:blipFill>
         <p:spPr>
           <a:xfrm>
-            <a:off x="495300" y="3765550"/>
-            <a:ext cx="317500" cy="317500"/>
+            <a:off x="495300" y="4070350"/>
+            <a:ext cx="546100" cy="546100"/>
           </a:xfrm>
           <a:prstGeom prst="rect">
             <a:avLst/>
@@ -3890,8 +4061,8 @@
         </p:blipFill>
         <p:spPr>
           <a:xfrm>
-            <a:off x="495300" y="4445000"/>
-            <a:ext cx="317500" cy="317500"/>
+            <a:off x="495300" y="4832350"/>
+            <a:ext cx="546100" cy="546100"/>
           </a:xfrm>
           <a:prstGeom prst="rect">
             <a:avLst/>
@@ -4068,8 +4239,8 @@
           <p:nvPr/>
         </p:nvGraphicFramePr>
         <p:xfrm>
-          <a:off x="254000" y="1835150"/>
-          <a:ext cx="4191000" cy="1841500"/>
+          <a:off x="234950" y="1860550"/>
+          <a:ext cx="4254500" cy="2044700"/>
         </p:xfrm>
         <a:graphic xmlns:a="http://schemas.openxmlformats.org/drawingml/2006/main">
           <a:graphicData uri="http://schemas.openxmlformats.org/drawingml/2006/chart">
@@ -4117,7 +4288,7 @@
                         <a:buNone/>
                       </a:pPr>
                       <a:r>
-                        <a:rPr lang="en-US" sz="1100" b="1" dirty="0">
+                        <a:rPr lang="en-US" sz="1200" b="1" dirty="0">
                           <a:solidFill>
                             <a:srgbClr val="FFFFFF"/>
                           </a:solidFill>
@@ -4127,14 +4298,14 @@
                         </a:rPr>
                         <a:t>Workflow</a:t>
                       </a:r>
-                      <a:endParaRPr lang="en-US" sz="1100" dirty="0">
+                      <a:endParaRPr lang="en-US" sz="1200" dirty="0">
                         <a:latin typeface="Arial" charset="0"/>
                         <a:ea typeface="Arial" charset="0"/>
                         <a:cs typeface="Arial" charset="0"/>
                       </a:endParaRPr>
                     </a:p>
                   </a:txBody>
-                  <a:tcPr marL="101600" marR="101600" marT="38100" marB="38100" anchor="ctr">
+                  <a:tcPr marL="76200" marR="76200" marT="31750" marB="31750" anchor="ctr">
                     <a:lnL w="6350" cap="flat" cmpd="sng" algn="ctr">
                       <a:solidFill>
                         <a:srgbClr val="C6C9CD"/>
@@ -4187,7 +4358,7 @@
                         <a:buNone/>
                       </a:pPr>
                       <a:r>
-                        <a:rPr lang="en-US" sz="1100" b="1" dirty="0">
+                        <a:rPr lang="en-US" sz="1200" b="1" dirty="0">
                           <a:solidFill>
                             <a:srgbClr val="FFFFFF"/>
                           </a:solidFill>
@@ -4197,14 +4368,14 @@
                         </a:rPr>
                         <a:t>Baseline h</a:t>
                       </a:r>
-                      <a:endParaRPr lang="en-US" sz="1100" dirty="0">
+                      <a:endParaRPr lang="en-US" sz="1200" dirty="0">
                         <a:latin typeface="Arial" charset="0"/>
                         <a:ea typeface="Arial" charset="0"/>
                         <a:cs typeface="Arial" charset="0"/>
                       </a:endParaRPr>
                     </a:p>
                   </a:txBody>
-                  <a:tcPr marL="101600" marR="101600" marT="38100" marB="38100" anchor="ctr">
+                  <a:tcPr marL="76200" marR="76200" marT="31750" marB="31750" anchor="ctr">
                     <a:lnL w="6350" cap="flat" cmpd="sng" algn="ctr">
                       <a:solidFill>
                         <a:srgbClr val="C6C9CD"/>
@@ -4257,7 +4428,7 @@
                         <a:buNone/>
                       </a:pPr>
                       <a:r>
-                        <a:rPr lang="en-US" sz="1100" b="1" dirty="0">
+                        <a:rPr lang="en-US" sz="1200" b="1" dirty="0">
                           <a:solidFill>
                             <a:srgbClr val="FFFFFF"/>
                           </a:solidFill>
@@ -4267,14 +4438,14 @@
                         </a:rPr>
                         <a:t>Adoption</a:t>
                       </a:r>
-                      <a:endParaRPr lang="en-US" sz="1100" dirty="0">
+                      <a:endParaRPr lang="en-US" sz="1200" dirty="0">
                         <a:latin typeface="Arial" charset="0"/>
                         <a:ea typeface="Arial" charset="0"/>
                         <a:cs typeface="Arial" charset="0"/>
                       </a:endParaRPr>
                     </a:p>
                   </a:txBody>
-                  <a:tcPr marL="101600" marR="101600" marT="38100" marB="38100" anchor="ctr">
+                  <a:tcPr marL="76200" marR="76200" marT="31750" marB="31750" anchor="ctr">
                     <a:lnL w="6350" cap="flat" cmpd="sng" algn="ctr">
                       <a:solidFill>
                         <a:srgbClr val="C6C9CD"/>
@@ -4327,7 +4498,7 @@
                         <a:buNone/>
                       </a:pPr>
                       <a:r>
-                        <a:rPr lang="en-US" sz="1100" b="1" dirty="0">
+                        <a:rPr lang="en-US" sz="1200" b="1" dirty="0">
                           <a:solidFill>
                             <a:srgbClr val="FFFFFF"/>
                           </a:solidFill>
@@ -4337,14 +4508,14 @@
                         </a:rPr>
                         <a:t>Time saved</a:t>
                       </a:r>
-                      <a:endParaRPr lang="en-US" sz="1100" dirty="0">
+                      <a:endParaRPr lang="en-US" sz="1200" dirty="0">
                         <a:latin typeface="Arial" charset="0"/>
                         <a:ea typeface="Arial" charset="0"/>
                         <a:cs typeface="Arial" charset="0"/>
                       </a:endParaRPr>
                     </a:p>
                   </a:txBody>
-                  <a:tcPr marL="101600" marR="101600" marT="38100" marB="38100" anchor="ctr">
+                  <a:tcPr marL="76200" marR="76200" marT="31750" marB="31750" anchor="ctr">
                     <a:lnL w="6350" cap="flat" cmpd="sng" algn="ctr">
                       <a:solidFill>
                         <a:srgbClr val="C6C9CD"/>
@@ -4399,7 +4570,7 @@
                         <a:buNone/>
                       </a:pPr>
                       <a:r>
-                        <a:rPr lang="en-US" sz="1100" b="1" dirty="0">
+                        <a:rPr lang="en-US" sz="1200" b="1" dirty="0">
                           <a:solidFill>
                             <a:srgbClr val="000000"/>
                           </a:solidFill>
@@ -4409,14 +4580,14 @@
                         </a:rPr>
                         <a:t>Research</a:t>
                       </a:r>
-                      <a:endParaRPr lang="en-US" sz="1100" dirty="0">
+                      <a:endParaRPr lang="en-US" sz="1200" dirty="0">
                         <a:latin typeface="Arial" charset="0"/>
                         <a:ea typeface="Arial" charset="0"/>
                         <a:cs typeface="Arial" charset="0"/>
                       </a:endParaRPr>
                     </a:p>
                   </a:txBody>
-                  <a:tcPr marL="101600" marR="101600" marT="38100" marB="38100" anchor="ctr">
+                  <a:tcPr marL="76200" marR="76200" marT="31750" marB="31750" anchor="ctr">
                     <a:lnL w="6350" cap="flat" cmpd="sng" algn="ctr">
                       <a:solidFill>
                         <a:srgbClr val="C6C9CD"/>
@@ -4469,7 +4640,7 @@
                         <a:buNone/>
                       </a:pPr>
                       <a:r>
-                        <a:rPr lang="en-US" sz="1100" dirty="0">
+                        <a:rPr lang="en-US" sz="1200" dirty="0">
                           <a:solidFill>
                             <a:srgbClr val="000000"/>
                           </a:solidFill>
@@ -4479,14 +4650,14 @@
                         </a:rPr>
                         <a:t>12</a:t>
                       </a:r>
-                      <a:endParaRPr lang="en-US" sz="1100" dirty="0">
+                      <a:endParaRPr lang="en-US" sz="1200" dirty="0">
                         <a:latin typeface="Arial" charset="0"/>
                         <a:ea typeface="Arial" charset="0"/>
                         <a:cs typeface="Arial" charset="0"/>
                       </a:endParaRPr>
                     </a:p>
                   </a:txBody>
-                  <a:tcPr marL="101600" marR="101600" marT="38100" marB="38100" anchor="ctr">
+                  <a:tcPr marL="76200" marR="76200" marT="31750" marB="31750" anchor="ctr">
                     <a:lnL w="6350" cap="flat" cmpd="sng" algn="ctr">
                       <a:solidFill>
                         <a:srgbClr val="C6C9CD"/>
@@ -4539,7 +4710,7 @@
                         <a:buNone/>
                       </a:pPr>
                       <a:r>
-                        <a:rPr lang="en-US" sz="1100" dirty="0">
+                        <a:rPr lang="en-US" sz="1200" dirty="0">
                           <a:solidFill>
                             <a:srgbClr val="000000"/>
                           </a:solidFill>
@@ -4549,14 +4720,14 @@
                         </a:rPr>
                         <a:t>60%</a:t>
                       </a:r>
-                      <a:endParaRPr lang="en-US" sz="1100" dirty="0">
+                      <a:endParaRPr lang="en-US" sz="1200" dirty="0">
                         <a:latin typeface="Arial" charset="0"/>
                         <a:ea typeface="Arial" charset="0"/>
                         <a:cs typeface="Arial" charset="0"/>
                       </a:endParaRPr>
                     </a:p>
                   </a:txBody>
-                  <a:tcPr marL="101600" marR="101600" marT="38100" marB="38100" anchor="ctr">
+                  <a:tcPr marL="76200" marR="76200" marT="31750" marB="31750" anchor="ctr">
                     <a:lnL w="6350" cap="flat" cmpd="sng" algn="ctr">
                       <a:solidFill>
                         <a:srgbClr val="C6C9CD"/>
@@ -4609,7 +4780,7 @@
                         <a:buNone/>
                       </a:pPr>
                       <a:r>
-                        <a:rPr lang="en-US" sz="1100" dirty="0">
+                        <a:rPr lang="en-US" sz="1200" dirty="0">
                           <a:solidFill>
                             <a:srgbClr val="000000"/>
                           </a:solidFill>
@@ -4619,14 +4790,14 @@
                         </a:rPr>
                         <a:t>30%</a:t>
                       </a:r>
-                      <a:endParaRPr lang="en-US" sz="1100" dirty="0">
+                      <a:endParaRPr lang="en-US" sz="1200" dirty="0">
                         <a:latin typeface="Arial" charset="0"/>
                         <a:ea typeface="Arial" charset="0"/>
                         <a:cs typeface="Arial" charset="0"/>
                       </a:endParaRPr>
                     </a:p>
                   </a:txBody>
-                  <a:tcPr marL="101600" marR="101600" marT="38100" marB="38100" anchor="ctr">
+                  <a:tcPr marL="76200" marR="76200" marT="31750" marB="31750" anchor="ctr">
                     <a:lnL w="6350" cap="flat" cmpd="sng" algn="ctr">
                       <a:solidFill>
                         <a:srgbClr val="C6C9CD"/>
@@ -4681,7 +4852,7 @@
                         <a:buNone/>
                       </a:pPr>
                       <a:r>
-                        <a:rPr lang="en-US" sz="1100" b="1" dirty="0">
+                        <a:rPr lang="en-US" sz="1200" b="1" dirty="0">
                           <a:solidFill>
                             <a:srgbClr val="000000"/>
                           </a:solidFill>
@@ -4691,14 +4862,14 @@
                         </a:rPr>
                         <a:t>Proposal</a:t>
                       </a:r>
-                      <a:endParaRPr lang="en-US" sz="1100" dirty="0">
+                      <a:endParaRPr lang="en-US" sz="1200" dirty="0">
                         <a:latin typeface="Arial" charset="0"/>
                         <a:ea typeface="Arial" charset="0"/>
                         <a:cs typeface="Arial" charset="0"/>
                       </a:endParaRPr>
                     </a:p>
                   </a:txBody>
-                  <a:tcPr marL="101600" marR="101600" marT="38100" marB="38100" anchor="ctr">
+                  <a:tcPr marL="76200" marR="76200" marT="31750" marB="31750" anchor="ctr">
                     <a:lnL w="6350" cap="flat" cmpd="sng" algn="ctr">
                       <a:solidFill>
                         <a:srgbClr val="C6C9CD"/>
@@ -4751,7 +4922,7 @@
                         <a:buNone/>
                       </a:pPr>
                       <a:r>
-                        <a:rPr lang="en-US" sz="1100" dirty="0">
+                        <a:rPr lang="en-US" sz="1200" dirty="0">
                           <a:solidFill>
                             <a:srgbClr val="000000"/>
                           </a:solidFill>
@@ -4761,14 +4932,14 @@
                         </a:rPr>
                         <a:t>8</a:t>
                       </a:r>
-                      <a:endParaRPr lang="en-US" sz="1100" dirty="0">
+                      <a:endParaRPr lang="en-US" sz="1200" dirty="0">
                         <a:latin typeface="Arial" charset="0"/>
                         <a:ea typeface="Arial" charset="0"/>
                         <a:cs typeface="Arial" charset="0"/>
                       </a:endParaRPr>
                     </a:p>
                   </a:txBody>
-                  <a:tcPr marL="101600" marR="101600" marT="38100" marB="38100" anchor="ctr">
+                  <a:tcPr marL="76200" marR="76200" marT="31750" marB="31750" anchor="ctr">
                     <a:lnL w="6350" cap="flat" cmpd="sng" algn="ctr">
                       <a:solidFill>
                         <a:srgbClr val="C6C9CD"/>
@@ -4821,7 +4992,7 @@
                         <a:buNone/>
                       </a:pPr>
                       <a:r>
-                        <a:rPr lang="en-US" sz="1100" dirty="0">
+                        <a:rPr lang="en-US" sz="1200" dirty="0">
                           <a:solidFill>
                             <a:srgbClr val="000000"/>
                           </a:solidFill>
@@ -4831,14 +5002,14 @@
                         </a:rPr>
                         <a:t>50%</a:t>
                       </a:r>
-                      <a:endParaRPr lang="en-US" sz="1100" dirty="0">
+                      <a:endParaRPr lang="en-US" sz="1200" dirty="0">
                         <a:latin typeface="Arial" charset="0"/>
                         <a:ea typeface="Arial" charset="0"/>
                         <a:cs typeface="Arial" charset="0"/>
                       </a:endParaRPr>
                     </a:p>
                   </a:txBody>
-                  <a:tcPr marL="101600" marR="101600" marT="38100" marB="38100" anchor="ctr">
+                  <a:tcPr marL="76200" marR="76200" marT="31750" marB="31750" anchor="ctr">
                     <a:lnL w="6350" cap="flat" cmpd="sng" algn="ctr">
                       <a:solidFill>
                         <a:srgbClr val="C6C9CD"/>
@@ -4891,7 +5062,7 @@
                         <a:buNone/>
                       </a:pPr>
                       <a:r>
-                        <a:rPr lang="en-US" sz="1100" dirty="0">
+                        <a:rPr lang="en-US" sz="1200" dirty="0">
                           <a:solidFill>
                             <a:srgbClr val="000000"/>
                           </a:solidFill>
@@ -4901,14 +5072,14 @@
                         </a:rPr>
                         <a:t>40%</a:t>
                       </a:r>
-                      <a:endParaRPr lang="en-US" sz="1100" dirty="0">
+                      <a:endParaRPr lang="en-US" sz="1200" dirty="0">
                         <a:latin typeface="Arial" charset="0"/>
                         <a:ea typeface="Arial" charset="0"/>
                         <a:cs typeface="Arial" charset="0"/>
                       </a:endParaRPr>
                     </a:p>
                   </a:txBody>
-                  <a:tcPr marL="101600" marR="101600" marT="38100" marB="38100" anchor="ctr">
+                  <a:tcPr marL="76200" marR="76200" marT="31750" marB="31750" anchor="ctr">
                     <a:lnL w="6350" cap="flat" cmpd="sng" algn="ctr">
                       <a:solidFill>
                         <a:srgbClr val="C6C9CD"/>
@@ -4963,7 +5134,7 @@
                         <a:buNone/>
                       </a:pPr>
                       <a:r>
-                        <a:rPr lang="en-US" sz="1100" b="1" dirty="0">
+                        <a:rPr lang="en-US" sz="1200" b="1" dirty="0">
                           <a:solidFill>
                             <a:srgbClr val="000000"/>
                           </a:solidFill>
@@ -4973,14 +5144,14 @@
                         </a:rPr>
                         <a:t>Retrieval</a:t>
                       </a:r>
-                      <a:endParaRPr lang="en-US" sz="1100" dirty="0">
+                      <a:endParaRPr lang="en-US" sz="1200" dirty="0">
                         <a:latin typeface="Arial" charset="0"/>
                         <a:ea typeface="Arial" charset="0"/>
                         <a:cs typeface="Arial" charset="0"/>
                       </a:endParaRPr>
                     </a:p>
                   </a:txBody>
-                  <a:tcPr marL="101600" marR="101600" marT="38100" marB="38100" anchor="ctr">
+                  <a:tcPr marL="76200" marR="76200" marT="31750" marB="31750" anchor="ctr">
                     <a:lnL w="6350" cap="flat" cmpd="sng" algn="ctr">
                       <a:solidFill>
                         <a:srgbClr val="C6C9CD"/>
@@ -5033,7 +5204,7 @@
                         <a:buNone/>
                       </a:pPr>
                       <a:r>
-                        <a:rPr lang="en-US" sz="1100" dirty="0">
+                        <a:rPr lang="en-US" sz="1200" dirty="0">
                           <a:solidFill>
                             <a:srgbClr val="000000"/>
                           </a:solidFill>
@@ -5043,14 +5214,14 @@
                         </a:rPr>
                         <a:t>5</a:t>
                       </a:r>
-                      <a:endParaRPr lang="en-US" sz="1100" dirty="0">
+                      <a:endParaRPr lang="en-US" sz="1200" dirty="0">
                         <a:latin typeface="Arial" charset="0"/>
                         <a:ea typeface="Arial" charset="0"/>
                         <a:cs typeface="Arial" charset="0"/>
                       </a:endParaRPr>
                     </a:p>
                   </a:txBody>
-                  <a:tcPr marL="101600" marR="101600" marT="38100" marB="38100" anchor="ctr">
+                  <a:tcPr marL="76200" marR="76200" marT="31750" marB="31750" anchor="ctr">
                     <a:lnL w="6350" cap="flat" cmpd="sng" algn="ctr">
                       <a:solidFill>
                         <a:srgbClr val="C6C9CD"/>
@@ -5103,7 +5274,7 @@
                         <a:buNone/>
                       </a:pPr>
                       <a:r>
-                        <a:rPr lang="en-US" sz="1100" dirty="0">
+                        <a:rPr lang="en-US" sz="1200" dirty="0">
                           <a:solidFill>
                             <a:srgbClr val="000000"/>
                           </a:solidFill>
@@ -5113,14 +5284,14 @@
                         </a:rPr>
                         <a:t>60%</a:t>
                       </a:r>
-                      <a:endParaRPr lang="en-US" sz="1100" dirty="0">
+                      <a:endParaRPr lang="en-US" sz="1200" dirty="0">
                         <a:latin typeface="Arial" charset="0"/>
                         <a:ea typeface="Arial" charset="0"/>
                         <a:cs typeface="Arial" charset="0"/>
                       </a:endParaRPr>
                     </a:p>
                   </a:txBody>
-                  <a:tcPr marL="101600" marR="101600" marT="38100" marB="38100" anchor="ctr">
+                  <a:tcPr marL="76200" marR="76200" marT="31750" marB="31750" anchor="ctr">
                     <a:lnL w="6350" cap="flat" cmpd="sng" algn="ctr">
                       <a:solidFill>
                         <a:srgbClr val="C6C9CD"/>
@@ -5173,7 +5344,7 @@
                         <a:buNone/>
                       </a:pPr>
                       <a:r>
-                        <a:rPr lang="en-US" sz="1100" dirty="0">
+                        <a:rPr lang="en-US" sz="1200" dirty="0">
                           <a:solidFill>
                             <a:srgbClr val="000000"/>
                           </a:solidFill>
@@ -5183,14 +5354,14 @@
                         </a:rPr>
                         <a:t>40%</a:t>
                       </a:r>
-                      <a:endParaRPr lang="en-US" sz="1100" dirty="0">
+                      <a:endParaRPr lang="en-US" sz="1200" dirty="0">
                         <a:latin typeface="Arial" charset="0"/>
                         <a:ea typeface="Arial" charset="0"/>
                         <a:cs typeface="Arial" charset="0"/>
                       </a:endParaRPr>
                     </a:p>
                   </a:txBody>
-                  <a:tcPr marL="101600" marR="101600" marT="38100" marB="38100" anchor="ctr">
+                  <a:tcPr marL="76200" marR="76200" marT="31750" marB="31750" anchor="ctr">
                     <a:lnL w="6350" cap="flat" cmpd="sng" algn="ctr">
                       <a:solidFill>
                         <a:srgbClr val="C6C9CD"/>
@@ -5252,8 +5423,8 @@
           </p:nvPr>
         </p:nvGraphicFramePr>
         <p:xfrm>
-          <a:off x="4826000" y="3987800"/>
-          <a:ext cx="7048500" cy="1524000"/>
+          <a:off x="4826000" y="3835400"/>
+          <a:ext cx="7048500" cy="1612900"/>
         </p:xfrm>
         <a:graphic>
           <a:graphicData uri="http://schemas.openxmlformats.org/drawingml/2006/table">
@@ -5277,7 +5448,7 @@
                         <a:buNone/>
                       </a:pPr>
                       <a:r>
-                        <a:rPr lang="en-US" sz="1000" b="1" dirty="0">
+                        <a:rPr lang="en-US" sz="1200" b="1" dirty="0">
                           <a:solidFill>
                             <a:srgbClr val="FFFFFF"/>
                           </a:solidFill>
@@ -5287,14 +5458,154 @@
                         </a:rPr>
                         <a:t>Workflow</a:t>
                       </a:r>
-                      <a:endParaRPr lang="en-US" sz="1000" dirty="0">
+                      <a:endParaRPr lang="en-US" sz="1200" dirty="0">
                         <a:latin typeface="Arial" charset="0"/>
                         <a:ea typeface="Arial" charset="0"/>
                         <a:cs typeface="Arial" charset="0"/>
                       </a:endParaRPr>
                     </a:p>
                   </a:txBody>
-                  <a:tcPr marL="101600" marR="101600" marT="38100" marB="38100" anchor="ctr">
+                  <a:tcPr marL="76200" marR="76200" marT="31750" marB="31750" anchor="ctr">
+                    <a:lnL w="6350" cap="flat" cmpd="sng" algn="ctr">
+                      <a:solidFill>
+                        <a:srgbClr val="C6C9CD"/>
+                      </a:solidFill>
+                      <a:prstDash val="solid"/>
+                      <a:round/>
+                      <a:headEnd type="none" w="med" len="med"/>
+                      <a:tailEnd type="none" w="med" len="med"/>
+                    </a:lnL>
+                    <a:lnR w="6350" cap="flat" cmpd="sng" algn="ctr">
+                      <a:solidFill>
+                        <a:srgbClr val="C6C9CD"/>
+                      </a:solidFill>
+                      <a:prstDash val="solid"/>
+                      <a:round/>
+                      <a:headEnd type="none" w="med" len="med"/>
+                      <a:tailEnd type="none" w="med" len="med"/>
+                    </a:lnR>
+                    <a:lnT w="6350" cap="flat" cmpd="sng" algn="ctr">
+                      <a:solidFill>
+                        <a:srgbClr val="C6C9CD"/>
+                      </a:solidFill>
+                      <a:prstDash val="solid"/>
+                      <a:round/>
+                      <a:headEnd type="none" w="med" len="med"/>
+                      <a:tailEnd type="none" w="med" len="med"/>
+                    </a:lnT>
+                    <a:lnB w="6350" cap="flat" cmpd="sng" algn="ctr">
+                      <a:solidFill>
+                        <a:srgbClr val="C6C9CD"/>
+                      </a:solidFill>
+                      <a:prstDash val="solid"/>
+                      <a:round/>
+                      <a:headEnd type="none" w="med" len="med"/>
+                      <a:tailEnd type="none" w="med" len="med"/>
+                    </a:lnB>
+                    <a:solidFill>
+                      <a:srgbClr val="000000"/>
+                    </a:solidFill>
+                  </a:tcPr>
+                </a:tc>
+                <a:tc>
+                  <a:txBody>
+                    <a:bodyPr>
+                      <a:noAutofit/>
+                    </a:bodyPr>
+                    <a:lstStyle/>
+                    <a:p>
+                      <a:pPr algn="l" indent="0" marL="0">
+                        <a:buNone/>
+                      </a:pPr>
+                      <a:r>
+                        <a:rPr lang="en-US" sz="1200" b="1" dirty="0">
+                          <a:solidFill>
+                            <a:srgbClr val="FFFFFF"/>
+                          </a:solidFill>
+                          <a:latin typeface="Arial" pitchFamily="34" charset="0"/>
+                          <a:ea typeface="Arial" pitchFamily="34" charset="-122"/>
+                          <a:cs typeface="Arial" pitchFamily="34" charset="-120"/>
+                        </a:rPr>
+                        <a:t>Control readiness</a:t>
+                      </a:r>
+                      <a:endParaRPr lang="en-US" sz="1200" dirty="0">
+                        <a:latin typeface="Arial" charset="0"/>
+                        <a:ea typeface="Arial" charset="0"/>
+                        <a:cs typeface="Arial" charset="0"/>
+                      </a:endParaRPr>
+                    </a:p>
+                  </a:txBody>
+                  <a:tcPr marL="76200" marR="76200" marT="31750" marB="31750" anchor="ctr">
+                    <a:lnL w="6350" cap="flat" cmpd="sng" algn="ctr">
+                      <a:solidFill>
+                        <a:srgbClr val="C6C9CD"/>
+                      </a:solidFill>
+                      <a:prstDash val="solid"/>
+                      <a:round/>
+                      <a:headEnd type="none" w="med" len="med"/>
+                      <a:tailEnd type="none" w="med" len="med"/>
+                    </a:lnL>
+                    <a:lnR w="6350" cap="flat" cmpd="sng" algn="ctr">
+                      <a:solidFill>
+                        <a:srgbClr val="C6C9CD"/>
+                      </a:solidFill>
+                      <a:prstDash val="solid"/>
+                      <a:round/>
+                      <a:headEnd type="none" w="med" len="med"/>
+                      <a:tailEnd type="none" w="med" len="med"/>
+                    </a:lnR>
+                    <a:lnT w="6350" cap="flat" cmpd="sng" algn="ctr">
+                      <a:solidFill>
+                        <a:srgbClr val="C6C9CD"/>
+                      </a:solidFill>
+                      <a:prstDash val="solid"/>
+                      <a:round/>
+                      <a:headEnd type="none" w="med" len="med"/>
+                      <a:tailEnd type="none" w="med" len="med"/>
+                    </a:lnT>
+                    <a:lnB w="6350" cap="flat" cmpd="sng" algn="ctr">
+                      <a:solidFill>
+                        <a:srgbClr val="C6C9CD"/>
+                      </a:solidFill>
+                      <a:prstDash val="solid"/>
+                      <a:round/>
+                      <a:headEnd type="none" w="med" len="med"/>
+                      <a:tailEnd type="none" w="med" len="med"/>
+                    </a:lnB>
+                    <a:solidFill>
+                      <a:srgbClr val="000000"/>
+                    </a:solidFill>
+                  </a:tcPr>
+                </a:tc>
+                <a:tc>
+                  <a:txBody>
+                    <a:bodyPr>
+                      <a:noAutofit/>
+                    </a:bodyPr>
+                    <a:lstStyle/>
+                    <a:p>
+                      <a:pPr algn="l" indent="0" marL="0">
+                        <a:buNone/>
+                      </a:pPr>
+                      <a:r>
+                        <a:rPr lang="en-US" sz="1200" b="1" dirty="0">
+                          <a:solidFill>
+                            <a:srgbClr val="FFFFFF"/>
+                          </a:solidFill>
+                          <a:latin typeface="Arial" pitchFamily="34" charset="0"/>
+                          <a:ea typeface="Arial" pitchFamily="34" charset="-122"/>
+                          <a:cs typeface="Arial" pitchFamily="34" charset="-120"/>
+                        </a:rPr>
+                        <a:t>Owner</a:t>
+                      </a:r>
+                      <a:endParaRPr lang="en-US" sz="1200" dirty="0">
+                        <a:latin typeface="Arial" charset="0"/>
+                        <a:ea typeface="Arial" charset="0"/>
+                        <a:cs typeface="Arial" charset="0"/>
+                      </a:endParaRPr>
+                    </a:p>
+                  </a:txBody>
+                  <a:tcPr marL="76200" marR="76200" marT="31750" marB="31750" anchor="ctr">
                     <a:lnL w="6350" cap="flat" cmpd="sng" algn="ctr">
                       <a:solidFill>
                         <a:srgbClr val="C6C9CD"/>
@@ -5347,7 +5658,7 @@
                         <a:buNone/>
                       </a:pPr>
                       <a:r>
-                        <a:rPr lang="en-US" sz="1000" b="1" dirty="0">
+                        <a:rPr lang="en-US" sz="1200" b="1" dirty="0">
                           <a:solidFill>
                             <a:srgbClr val="FFFFFF"/>
                           </a:solidFill>
@@ -5355,16 +5666,16 @@
                           <a:ea typeface="Arial" pitchFamily="34" charset="-122"/>
                           <a:cs typeface="Arial" pitchFamily="34" charset="-120"/>
                         </a:rPr>
-                        <a:t>Control readiness</a:t>
+                        <a:t>Sequence</a:t>
                       </a:r>
-                      <a:endParaRPr lang="en-US" sz="1000" dirty="0">
+                      <a:endParaRPr lang="en-US" sz="1200" dirty="0">
                         <a:latin typeface="Arial" charset="0"/>
                         <a:ea typeface="Arial" charset="0"/>
                         <a:cs typeface="Arial" charset="0"/>
                       </a:endParaRPr>
                     </a:p>
                   </a:txBody>
-                  <a:tcPr marL="101600" marR="101600" marT="38100" marB="38100" anchor="ctr">
+                  <a:tcPr marL="76200" marR="76200" marT="31750" marB="31750" anchor="ctr">
                     <a:lnL w="6350" cap="flat" cmpd="sng" algn="ctr">
                       <a:solidFill>
                         <a:srgbClr val="C6C9CD"/>
@@ -5403,6 +5714,239 @@
                     </a:lnB>
                     <a:solidFill>
                       <a:srgbClr val="000000"/>
+                    </a:solidFill>
+                  </a:tcPr>
+                </a:tc>
+              </a:tr>
+              <a:tr h="431800">
+                <a:tc>
+                  <a:txBody>
+                    <a:bodyPr>
+                      <a:noAutofit/>
+                    </a:bodyPr>
+                    <a:lstStyle/>
+                    <a:p>
+                      <a:pPr algn="l" indent="0" marL="0">
+                        <a:buNone/>
+                      </a:pPr>
+                      <a:r>
+                        <a:rPr lang="en-US" sz="1200" b="1" dirty="0">
+                          <a:solidFill>
+                            <a:srgbClr val="000000"/>
+                          </a:solidFill>
+                          <a:latin typeface="Arial" pitchFamily="34" charset="0"/>
+                          <a:ea typeface="Arial" pitchFamily="34" charset="-122"/>
+                          <a:cs typeface="Arial" pitchFamily="34" charset="-120"/>
+                        </a:rPr>
+                        <a:t>Research synthesis</a:t>
+                      </a:r>
+                      <a:endParaRPr lang="en-US" sz="1200" dirty="0">
+                        <a:latin typeface="Arial" charset="0"/>
+                        <a:ea typeface="Arial" charset="0"/>
+                        <a:cs typeface="Arial" charset="0"/>
+                      </a:endParaRPr>
+                    </a:p>
+                  </a:txBody>
+                  <a:tcPr marL="76200" marR="76200" marT="31750" marB="31750" anchor="ctr">
+                    <a:lnL w="6350" cap="flat" cmpd="sng" algn="ctr">
+                      <a:solidFill>
+                        <a:srgbClr val="C6C9CD"/>
+                      </a:solidFill>
+                      <a:prstDash val="solid"/>
+                      <a:round/>
+                      <a:headEnd type="none" w="med" len="med"/>
+                      <a:tailEnd type="none" w="med" len="med"/>
+                    </a:lnL>
+                    <a:lnR w="6350" cap="flat" cmpd="sng" algn="ctr">
+                      <a:solidFill>
+                        <a:srgbClr val="C6C9CD"/>
+                      </a:solidFill>
+                      <a:prstDash val="solid"/>
+                      <a:round/>
+                      <a:headEnd type="none" w="med" len="med"/>
+                      <a:tailEnd type="none" w="med" len="med"/>
+                    </a:lnR>
+                    <a:lnT w="6350" cap="flat" cmpd="sng" algn="ctr">
+                      <a:solidFill>
+                        <a:srgbClr val="C6C9CD"/>
+                      </a:solidFill>
+                      <a:prstDash val="solid"/>
+                      <a:round/>
+                      <a:headEnd type="none" w="med" len="med"/>
+                      <a:tailEnd type="none" w="med" len="med"/>
+                    </a:lnT>
+                    <a:lnB w="6350" cap="flat" cmpd="sng" algn="ctr">
+                      <a:solidFill>
+                        <a:srgbClr val="C6C9CD"/>
+                      </a:solidFill>
+                      <a:prstDash val="solid"/>
+                      <a:round/>
+                      <a:headEnd type="none" w="med" len="med"/>
+                      <a:tailEnd type="none" w="med" len="med"/>
+                    </a:lnB>
+                    <a:solidFill>
+                      <a:srgbClr val="FFF5ED"/>
+                    </a:solidFill>
+                  </a:tcPr>
+                </a:tc>
+                <a:tc>
+                  <a:txBody>
+                    <a:bodyPr>
+                      <a:noAutofit/>
+                    </a:bodyPr>
+                    <a:lstStyle/>
+                    <a:p>
+                      <a:pPr algn="l" indent="0" marL="0">
+                        <a:buNone/>
+                      </a:pPr>
+                      <a:r>
+                        <a:rPr lang="en-US" sz="1200" dirty="0">
+                          <a:solidFill>
+                            <a:srgbClr val="000000"/>
+                          </a:solidFill>
+                          <a:latin typeface="Arial" pitchFamily="34" charset="0"/>
+                          <a:ea typeface="Arial" pitchFamily="34" charset="-122"/>
+                          <a:cs typeface="Arial" pitchFamily="34" charset="-120"/>
+                        </a:rPr>
+                        <a:t>Approved corpus</a:t>
+                      </a:r>
+                      <a:endParaRPr lang="en-US" sz="1200" dirty="0">
+                        <a:latin typeface="Arial" charset="0"/>
+                        <a:ea typeface="Arial" charset="0"/>
+                        <a:cs typeface="Arial" charset="0"/>
+                      </a:endParaRPr>
+                    </a:p>
+                    <a:p>
+                      <a:pPr algn="l" indent="0" marL="0">
+                        <a:buNone/>
+                      </a:pPr>
+                      <a:r>
+                        <a:rPr lang="en-US" sz="1200" dirty="0">
+                          <a:solidFill>
+                            <a:srgbClr val="000000"/>
+                          </a:solidFill>
+                          <a:latin typeface="Arial" pitchFamily="34" charset="0"/>
+                          <a:ea typeface="Arial" pitchFamily="34" charset="-122"/>
+                          <a:cs typeface="Arial" pitchFamily="34" charset="-120"/>
+                        </a:rPr>
+                        <a:t>Explicit review</a:t>
+                      </a:r>
+                      <a:endParaRPr lang="en-US" sz="1200" dirty="0">
+                        <a:latin typeface="Arial" charset="0"/>
+                        <a:ea typeface="Arial" charset="0"/>
+                        <a:cs typeface="Arial" charset="0"/>
+                      </a:endParaRPr>
+                    </a:p>
+                  </a:txBody>
+                  <a:tcPr marL="76200" marR="76200" marT="31750" marB="31750" anchor="ctr">
+                    <a:lnL w="6350" cap="flat" cmpd="sng" algn="ctr">
+                      <a:solidFill>
+                        <a:srgbClr val="C6C9CD"/>
+                      </a:solidFill>
+                      <a:prstDash val="solid"/>
+                      <a:round/>
+                      <a:headEnd type="none" w="med" len="med"/>
+                      <a:tailEnd type="none" w="med" len="med"/>
+                    </a:lnL>
+                    <a:lnR w="6350" cap="flat" cmpd="sng" algn="ctr">
+                      <a:solidFill>
+                        <a:srgbClr val="C6C9CD"/>
+                      </a:solidFill>
+                      <a:prstDash val="solid"/>
+                      <a:round/>
+                      <a:headEnd type="none" w="med" len="med"/>
+                      <a:tailEnd type="none" w="med" len="med"/>
+                    </a:lnR>
+                    <a:lnT w="6350" cap="flat" cmpd="sng" algn="ctr">
+                      <a:solidFill>
+                        <a:srgbClr val="C6C9CD"/>
+                      </a:solidFill>
+                      <a:prstDash val="solid"/>
+                      <a:round/>
+                      <a:headEnd type="none" w="med" len="med"/>
+                      <a:tailEnd type="none" w="med" len="med"/>
+                    </a:lnT>
+                    <a:lnB w="6350" cap="flat" cmpd="sng" algn="ctr">
+                      <a:solidFill>
+                        <a:srgbClr val="C6C9CD"/>
+                      </a:solidFill>
+                      <a:prstDash val="solid"/>
+                      <a:round/>
+                      <a:headEnd type="none" w="med" len="med"/>
+                      <a:tailEnd type="none" w="med" len="med"/>
+                    </a:lnB>
+                    <a:solidFill>
+                      <a:srgbClr val="FFF5ED"/>
+                    </a:solidFill>
+                  </a:tcPr>
+                </a:tc>
+                <a:tc>
+                  <a:txBody>
+                    <a:bodyPr>
+                      <a:noAutofit/>
+                    </a:bodyPr>
+                    <a:lstStyle/>
+                    <a:p>
+                      <a:pPr algn="l" indent="0" marL="0">
+                        <a:buNone/>
+                      </a:pPr>
+                      <a:r>
+                        <a:rPr lang="en-US" sz="1200" dirty="0">
+                          <a:solidFill>
+                            <a:srgbClr val="000000"/>
+                          </a:solidFill>
+                          <a:latin typeface="Arial" pitchFamily="34" charset="0"/>
+                          <a:ea typeface="Arial" pitchFamily="34" charset="-122"/>
+                          <a:cs typeface="Arial" pitchFamily="34" charset="-120"/>
+                        </a:rPr>
+                        <a:t>Practice lead</a:t>
+                      </a:r>
+                      <a:endParaRPr lang="en-US" sz="1200" dirty="0">
+                        <a:latin typeface="Arial" charset="0"/>
+                        <a:ea typeface="Arial" charset="0"/>
+                        <a:cs typeface="Arial" charset="0"/>
+                      </a:endParaRPr>
+                    </a:p>
+                  </a:txBody>
+                  <a:tcPr marL="76200" marR="76200" marT="31750" marB="31750" anchor="ctr">
+                    <a:lnL w="6350" cap="flat" cmpd="sng" algn="ctr">
+                      <a:solidFill>
+                        <a:srgbClr val="C6C9CD"/>
+                      </a:solidFill>
+                      <a:prstDash val="solid"/>
+                      <a:round/>
+                      <a:headEnd type="none" w="med" len="med"/>
+                      <a:tailEnd type="none" w="med" len="med"/>
+                    </a:lnL>
+                    <a:lnR w="6350" cap="flat" cmpd="sng" algn="ctr">
+                      <a:solidFill>
+                        <a:srgbClr val="C6C9CD"/>
+                      </a:solidFill>
+                      <a:prstDash val="solid"/>
+                      <a:round/>
+                      <a:headEnd type="none" w="med" len="med"/>
+                      <a:tailEnd type="none" w="med" len="med"/>
+                    </a:lnR>
+                    <a:lnT w="6350" cap="flat" cmpd="sng" algn="ctr">
+                      <a:solidFill>
+                        <a:srgbClr val="C6C9CD"/>
+                      </a:solidFill>
+                      <a:prstDash val="solid"/>
+                      <a:round/>
+                      <a:headEnd type="none" w="med" len="med"/>
+                      <a:tailEnd type="none" w="med" len="med"/>
+                    </a:lnT>
+                    <a:lnB w="6350" cap="flat" cmpd="sng" algn="ctr">
+                      <a:solidFill>
+                        <a:srgbClr val="C6C9CD"/>
+                      </a:solidFill>
+                      <a:prstDash val="solid"/>
+                      <a:round/>
+                      <a:headEnd type="none" w="med" len="med"/>
+                      <a:tailEnd type="none" w="med" len="med"/>
+                    </a:lnB>
+                    <a:solidFill>
+                      <a:srgbClr val="FFF5ED"/>
                     </a:solidFill>
                   </a:tcPr>
                 </a:tc>
@@ -5417,24 +5961,24 @@
                         <a:buNone/>
                       </a:pPr>
                       <a:r>
-                        <a:rPr lang="en-US" sz="1000" b="1" dirty="0">
+                        <a:rPr lang="en-US" sz="1200" b="1" dirty="0">
                           <a:solidFill>
-                            <a:srgbClr val="FFFFFF"/>
+                            <a:srgbClr val="FD5108"/>
                           </a:solidFill>
                           <a:latin typeface="Arial" pitchFamily="34" charset="0"/>
                           <a:ea typeface="Arial" pitchFamily="34" charset="-122"/>
                           <a:cs typeface="Arial" pitchFamily="34" charset="-120"/>
                         </a:rPr>
-                        <a:t>Owner</a:t>
+                        <a:t>START</a:t>
                       </a:r>
-                      <a:endParaRPr lang="en-US" sz="1000" dirty="0">
+                      <a:endParaRPr lang="en-US" sz="1200" dirty="0">
                         <a:latin typeface="Arial" charset="0"/>
                         <a:ea typeface="Arial" charset="0"/>
                         <a:cs typeface="Arial" charset="0"/>
                       </a:endParaRPr>
                     </a:p>
                   </a:txBody>
-                  <a:tcPr marL="101600" marR="101600" marT="38100" marB="38100" anchor="ctr">
+                  <a:tcPr marL="76200" marR="76200" marT="31750" marB="31750" anchor="ctr">
                     <a:lnL w="6350" cap="flat" cmpd="sng" algn="ctr">
                       <a:solidFill>
                         <a:srgbClr val="C6C9CD"/>
@@ -5472,7 +6016,240 @@
                       <a:tailEnd type="none" w="med" len="med"/>
                     </a:lnB>
                     <a:solidFill>
-                      <a:srgbClr val="000000"/>
+                      <a:srgbClr val="FFF5ED"/>
+                    </a:solidFill>
+                  </a:tcPr>
+                </a:tc>
+              </a:tr>
+              <a:tr h="431800">
+                <a:tc>
+                  <a:txBody>
+                    <a:bodyPr>
+                      <a:noAutofit/>
+                    </a:bodyPr>
+                    <a:lstStyle/>
+                    <a:p>
+                      <a:pPr algn="l" indent="0" marL="0">
+                        <a:buNone/>
+                      </a:pPr>
+                      <a:r>
+                        <a:rPr lang="en-US" sz="1200" b="1" dirty="0">
+                          <a:solidFill>
+                            <a:srgbClr val="000000"/>
+                          </a:solidFill>
+                          <a:latin typeface="Arial" pitchFamily="34" charset="0"/>
+                          <a:ea typeface="Arial" pitchFamily="34" charset="-122"/>
+                          <a:cs typeface="Arial" pitchFamily="34" charset="-120"/>
+                        </a:rPr>
+                        <a:t>Proposal drafting</a:t>
+                      </a:r>
+                      <a:endParaRPr lang="en-US" sz="1200" dirty="0">
+                        <a:latin typeface="Arial" charset="0"/>
+                        <a:ea typeface="Arial" charset="0"/>
+                        <a:cs typeface="Arial" charset="0"/>
+                      </a:endParaRPr>
+                    </a:p>
+                  </a:txBody>
+                  <a:tcPr marL="76200" marR="76200" marT="31750" marB="31750" anchor="ctr">
+                    <a:lnL w="6350" cap="flat" cmpd="sng" algn="ctr">
+                      <a:solidFill>
+                        <a:srgbClr val="C6C9CD"/>
+                      </a:solidFill>
+                      <a:prstDash val="solid"/>
+                      <a:round/>
+                      <a:headEnd type="none" w="med" len="med"/>
+                      <a:tailEnd type="none" w="med" len="med"/>
+                    </a:lnL>
+                    <a:lnR w="6350" cap="flat" cmpd="sng" algn="ctr">
+                      <a:solidFill>
+                        <a:srgbClr val="C6C9CD"/>
+                      </a:solidFill>
+                      <a:prstDash val="solid"/>
+                      <a:round/>
+                      <a:headEnd type="none" w="med" len="med"/>
+                      <a:tailEnd type="none" w="med" len="med"/>
+                    </a:lnR>
+                    <a:lnT w="6350" cap="flat" cmpd="sng" algn="ctr">
+                      <a:solidFill>
+                        <a:srgbClr val="C6C9CD"/>
+                      </a:solidFill>
+                      <a:prstDash val="solid"/>
+                      <a:round/>
+                      <a:headEnd type="none" w="med" len="med"/>
+                      <a:tailEnd type="none" w="med" len="med"/>
+                    </a:lnT>
+                    <a:lnB w="6350" cap="flat" cmpd="sng" algn="ctr">
+                      <a:solidFill>
+                        <a:srgbClr val="C6C9CD"/>
+                      </a:solidFill>
+                      <a:prstDash val="solid"/>
+                      <a:round/>
+                      <a:headEnd type="none" w="med" len="med"/>
+                      <a:tailEnd type="none" w="med" len="med"/>
+                    </a:lnB>
+                    <a:solidFill>
+                      <a:srgbClr val="F5F7F8"/>
+                    </a:solidFill>
+                  </a:tcPr>
+                </a:tc>
+                <a:tc>
+                  <a:txBody>
+                    <a:bodyPr>
+                      <a:noAutofit/>
+                    </a:bodyPr>
+                    <a:lstStyle/>
+                    <a:p>
+                      <a:pPr algn="l" indent="0" marL="0">
+                        <a:buNone/>
+                      </a:pPr>
+                      <a:r>
+                        <a:rPr lang="en-US" sz="1200" dirty="0">
+                          <a:solidFill>
+                            <a:srgbClr val="000000"/>
+                          </a:solidFill>
+                          <a:latin typeface="Arial" pitchFamily="34" charset="0"/>
+                          <a:ea typeface="Arial" pitchFamily="34" charset="-122"/>
+                          <a:cs typeface="Arial" pitchFamily="34" charset="-120"/>
+                        </a:rPr>
+                        <a:t>Claims and commitments</a:t>
+                      </a:r>
+                      <a:endParaRPr lang="en-US" sz="1200" dirty="0">
+                        <a:latin typeface="Arial" charset="0"/>
+                        <a:ea typeface="Arial" charset="0"/>
+                        <a:cs typeface="Arial" charset="0"/>
+                      </a:endParaRPr>
+                    </a:p>
+                    <a:p>
+                      <a:pPr algn="l" indent="0" marL="0">
+                        <a:buNone/>
+                      </a:pPr>
+                      <a:r>
+                        <a:rPr lang="en-US" sz="1200" dirty="0">
+                          <a:solidFill>
+                            <a:srgbClr val="000000"/>
+                          </a:solidFill>
+                          <a:latin typeface="Arial" pitchFamily="34" charset="0"/>
+                          <a:ea typeface="Arial" pitchFamily="34" charset="-122"/>
+                          <a:cs typeface="Arial" pitchFamily="34" charset="-120"/>
+                        </a:rPr>
+                        <a:t>need controls</a:t>
+                      </a:r>
+                      <a:endParaRPr lang="en-US" sz="1200" dirty="0">
+                        <a:latin typeface="Arial" charset="0"/>
+                        <a:ea typeface="Arial" charset="0"/>
+                        <a:cs typeface="Arial" charset="0"/>
+                      </a:endParaRPr>
+                    </a:p>
+                  </a:txBody>
+                  <a:tcPr marL="76200" marR="76200" marT="31750" marB="31750" anchor="ctr">
+                    <a:lnL w="6350" cap="flat" cmpd="sng" algn="ctr">
+                      <a:solidFill>
+                        <a:srgbClr val="C6C9CD"/>
+                      </a:solidFill>
+                      <a:prstDash val="solid"/>
+                      <a:round/>
+                      <a:headEnd type="none" w="med" len="med"/>
+                      <a:tailEnd type="none" w="med" len="med"/>
+                    </a:lnL>
+                    <a:lnR w="6350" cap="flat" cmpd="sng" algn="ctr">
+                      <a:solidFill>
+                        <a:srgbClr val="C6C9CD"/>
+                      </a:solidFill>
+                      <a:prstDash val="solid"/>
+                      <a:round/>
+                      <a:headEnd type="none" w="med" len="med"/>
+                      <a:tailEnd type="none" w="med" len="med"/>
+                    </a:lnR>
+                    <a:lnT w="6350" cap="flat" cmpd="sng" algn="ctr">
+                      <a:solidFill>
+                        <a:srgbClr val="C6C9CD"/>
+                      </a:solidFill>
+                      <a:prstDash val="solid"/>
+                      <a:round/>
+                      <a:headEnd type="none" w="med" len="med"/>
+                      <a:tailEnd type="none" w="med" len="med"/>
+                    </a:lnT>
+                    <a:lnB w="6350" cap="flat" cmpd="sng" algn="ctr">
+                      <a:solidFill>
+                        <a:srgbClr val="C6C9CD"/>
+                      </a:solidFill>
+                      <a:prstDash val="solid"/>
+                      <a:round/>
+                      <a:headEnd type="none" w="med" len="med"/>
+                      <a:tailEnd type="none" w="med" len="med"/>
+                    </a:lnB>
+                    <a:solidFill>
+                      <a:srgbClr val="F5F7F8"/>
+                    </a:solidFill>
+                  </a:tcPr>
+                </a:tc>
+                <a:tc>
+                  <a:txBody>
+                    <a:bodyPr>
+                      <a:noAutofit/>
+                    </a:bodyPr>
+                    <a:lstStyle/>
+                    <a:p>
+                      <a:pPr algn="l" indent="0" marL="0">
+                        <a:buNone/>
+                      </a:pPr>
+                      <a:r>
+                        <a:rPr lang="en-US" sz="1200" dirty="0">
+                          <a:solidFill>
+                            <a:srgbClr val="000000"/>
+                          </a:solidFill>
+                          <a:latin typeface="Arial" pitchFamily="34" charset="0"/>
+                          <a:ea typeface="Arial" pitchFamily="34" charset="-122"/>
+                          <a:cs typeface="Arial" pitchFamily="34" charset="-120"/>
+                        </a:rPr>
+                        <a:t>BD lead</a:t>
+                      </a:r>
+                      <a:endParaRPr lang="en-US" sz="1200" dirty="0">
+                        <a:latin typeface="Arial" charset="0"/>
+                        <a:ea typeface="Arial" charset="0"/>
+                        <a:cs typeface="Arial" charset="0"/>
+                      </a:endParaRPr>
+                    </a:p>
+                  </a:txBody>
+                  <a:tcPr marL="76200" marR="76200" marT="31750" marB="31750" anchor="ctr">
+                    <a:lnL w="6350" cap="flat" cmpd="sng" algn="ctr">
+                      <a:solidFill>
+                        <a:srgbClr val="C6C9CD"/>
+                      </a:solidFill>
+                      <a:prstDash val="solid"/>
+                      <a:round/>
+                      <a:headEnd type="none" w="med" len="med"/>
+                      <a:tailEnd type="none" w="med" len="med"/>
+                    </a:lnL>
+                    <a:lnR w="6350" cap="flat" cmpd="sng" algn="ctr">
+                      <a:solidFill>
+                        <a:srgbClr val="C6C9CD"/>
+                      </a:solidFill>
+                      <a:prstDash val="solid"/>
+                      <a:round/>
+                      <a:headEnd type="none" w="med" len="med"/>
+                      <a:tailEnd type="none" w="med" len="med"/>
+                    </a:lnR>
+                    <a:lnT w="6350" cap="flat" cmpd="sng" algn="ctr">
+                      <a:solidFill>
+                        <a:srgbClr val="C6C9CD"/>
+                      </a:solidFill>
+                      <a:prstDash val="solid"/>
+                      <a:round/>
+                      <a:headEnd type="none" w="med" len="med"/>
+                      <a:tailEnd type="none" w="med" len="med"/>
+                    </a:lnT>
+                    <a:lnB w="6350" cap="flat" cmpd="sng" algn="ctr">
+                      <a:solidFill>
+                        <a:srgbClr val="C6C9CD"/>
+                      </a:solidFill>
+                      <a:prstDash val="solid"/>
+                      <a:round/>
+                      <a:headEnd type="none" w="med" len="med"/>
+                      <a:tailEnd type="none" w="med" len="med"/>
+                    </a:lnB>
+                    <a:solidFill>
+                      <a:srgbClr val="F5F7F8"/>
                     </a:solidFill>
                   </a:tcPr>
                 </a:tc>
@@ -5487,24 +6264,24 @@
                         <a:buNone/>
                       </a:pPr>
                       <a:r>
-                        <a:rPr lang="en-US" sz="1000" b="1" dirty="0">
+                        <a:rPr lang="en-US" sz="1200" b="1" dirty="0">
                           <a:solidFill>
-                            <a:srgbClr val="FFFFFF"/>
+                            <a:srgbClr val="FD5108"/>
                           </a:solidFill>
                           <a:latin typeface="Arial" pitchFamily="34" charset="0"/>
                           <a:ea typeface="Arial" pitchFamily="34" charset="-122"/>
                           <a:cs typeface="Arial" pitchFamily="34" charset="-120"/>
                         </a:rPr>
-                        <a:t>Sequence</a:t>
+                        <a:t>NEXT</a:t>
                       </a:r>
-                      <a:endParaRPr lang="en-US" sz="1000" dirty="0">
+                      <a:endParaRPr lang="en-US" sz="1200" dirty="0">
                         <a:latin typeface="Arial" charset="0"/>
                         <a:ea typeface="Arial" charset="0"/>
                         <a:cs typeface="Arial" charset="0"/>
                       </a:endParaRPr>
                     </a:p>
                   </a:txBody>
-                  <a:tcPr marL="101600" marR="101600" marT="38100" marB="38100" anchor="ctr">
+                  <a:tcPr marL="76200" marR="76200" marT="31750" marB="31750" anchor="ctr">
                     <a:lnL w="6350" cap="flat" cmpd="sng" algn="ctr">
                       <a:solidFill>
                         <a:srgbClr val="C6C9CD"/>
@@ -5542,12 +6319,12 @@
                       <a:tailEnd type="none" w="med" len="med"/>
                     </a:lnB>
                     <a:solidFill>
-                      <a:srgbClr val="000000"/>
+                      <a:srgbClr val="F5F7F8"/>
                     </a:solidFill>
                   </a:tcPr>
                 </a:tc>
               </a:tr>
-              <a:tr h="400050">
+              <a:tr h="431800">
                 <a:tc>
                   <a:txBody>
                     <a:bodyPr>
@@ -5559,7 +6336,7 @@
                         <a:buNone/>
                       </a:pPr>
                       <a:r>
-                        <a:rPr lang="en-US" sz="1000" b="1" dirty="0">
+                        <a:rPr lang="en-US" sz="1200" b="1" dirty="0">
                           <a:solidFill>
                             <a:srgbClr val="000000"/>
                           </a:solidFill>
@@ -5567,16 +6344,177 @@
                           <a:ea typeface="Arial" pitchFamily="34" charset="-122"/>
                           <a:cs typeface="Arial" pitchFamily="34" charset="-120"/>
                         </a:rPr>
-                        <a:t>Research synthesis</a:t>
+                        <a:t>Knowledge retrieval</a:t>
                       </a:r>
-                      <a:endParaRPr lang="en-US" sz="1000" dirty="0">
+                      <a:endParaRPr lang="en-US" sz="1200" dirty="0">
                         <a:latin typeface="Arial" charset="0"/>
                         <a:ea typeface="Arial" charset="0"/>
                         <a:cs typeface="Arial" charset="0"/>
                       </a:endParaRPr>
                     </a:p>
                   </a:txBody>
-                  <a:tcPr marL="101600" marR="101600" marT="38100" marB="38100" anchor="ctr">
+                  <a:tcPr marL="76200" marR="76200" marT="31750" marB="31750" anchor="ctr">
+                    <a:lnL w="6350" cap="flat" cmpd="sng" algn="ctr">
+                      <a:solidFill>
+                        <a:srgbClr val="C6C9CD"/>
+                      </a:solidFill>
+                      <a:prstDash val="solid"/>
+                      <a:round/>
+                      <a:headEnd type="none" w="med" len="med"/>
+                      <a:tailEnd type="none" w="med" len="med"/>
+                    </a:lnL>
+                    <a:lnR w="6350" cap="flat" cmpd="sng" algn="ctr">
+                      <a:solidFill>
+                        <a:srgbClr val="C6C9CD"/>
+                      </a:solidFill>
+                      <a:prstDash val="solid"/>
+                      <a:round/>
+                      <a:headEnd type="none" w="med" len="med"/>
+                      <a:tailEnd type="none" w="med" len="med"/>
+                    </a:lnR>
+                    <a:lnT w="6350" cap="flat" cmpd="sng" algn="ctr">
+                      <a:solidFill>
+                        <a:srgbClr val="C6C9CD"/>
+                      </a:solidFill>
+                      <a:prstDash val="solid"/>
+                      <a:round/>
+                      <a:headEnd type="none" w="med" len="med"/>
+                      <a:tailEnd type="none" w="med" len="med"/>
+                    </a:lnT>
+                    <a:lnB w="6350" cap="flat" cmpd="sng" algn="ctr">
+                      <a:solidFill>
+                        <a:srgbClr val="C6C9CD"/>
+                      </a:solidFill>
+                      <a:prstDash val="solid"/>
+                      <a:round/>
+                      <a:headEnd type="none" w="med" len="med"/>
+                      <a:tailEnd type="none" w="med" len="med"/>
+                    </a:lnB>
+                    <a:solidFill>
+                      <a:srgbClr val="FFFFFF"/>
+                    </a:solidFill>
+                  </a:tcPr>
+                </a:tc>
+                <a:tc>
+                  <a:txBody>
+                    <a:bodyPr>
+                      <a:noAutofit/>
+                    </a:bodyPr>
+                    <a:lstStyle/>
+                    <a:p>
+                      <a:pPr algn="l" indent="0" marL="0">
+                        <a:buNone/>
+                      </a:pPr>
+                      <a:r>
+                        <a:rPr lang="en-US" sz="1200" dirty="0">
+                          <a:solidFill>
+                            <a:srgbClr val="000000"/>
+                          </a:solidFill>
+                          <a:latin typeface="Arial" pitchFamily="34" charset="0"/>
+                          <a:ea typeface="Arial" pitchFamily="34" charset="-122"/>
+                          <a:cs typeface="Arial" pitchFamily="34" charset="-120"/>
+                        </a:rPr>
+                        <a:t>Permissions need</a:t>
+                      </a:r>
+                      <a:endParaRPr lang="en-US" sz="1200" dirty="0">
+                        <a:latin typeface="Arial" charset="0"/>
+                        <a:ea typeface="Arial" charset="0"/>
+                        <a:cs typeface="Arial" charset="0"/>
+                      </a:endParaRPr>
+                    </a:p>
+                    <a:p>
+                      <a:pPr algn="l" indent="0" marL="0">
+                        <a:buNone/>
+                      </a:pPr>
+                      <a:r>
+                        <a:rPr lang="en-US" sz="1200" dirty="0">
+                          <a:solidFill>
+                            <a:srgbClr val="000000"/>
+                          </a:solidFill>
+                          <a:latin typeface="Arial" pitchFamily="34" charset="0"/>
+                          <a:ea typeface="Arial" pitchFamily="34" charset="-122"/>
+                          <a:cs typeface="Arial" pitchFamily="34" charset="-120"/>
+                        </a:rPr>
+                        <a:t>cleanup</a:t>
+                      </a:r>
+                      <a:endParaRPr lang="en-US" sz="1200" dirty="0">
+                        <a:latin typeface="Arial" charset="0"/>
+                        <a:ea typeface="Arial" charset="0"/>
+                        <a:cs typeface="Arial" charset="0"/>
+                      </a:endParaRPr>
+                    </a:p>
+                  </a:txBody>
+                  <a:tcPr marL="76200" marR="76200" marT="31750" marB="31750" anchor="ctr">
+                    <a:lnL w="6350" cap="flat" cmpd="sng" algn="ctr">
+                      <a:solidFill>
+                        <a:srgbClr val="C6C9CD"/>
+                      </a:solidFill>
+                      <a:prstDash val="solid"/>
+                      <a:round/>
+                      <a:headEnd type="none" w="med" len="med"/>
+                      <a:tailEnd type="none" w="med" len="med"/>
+                    </a:lnL>
+                    <a:lnR w="6350" cap="flat" cmpd="sng" algn="ctr">
+                      <a:solidFill>
+                        <a:srgbClr val="C6C9CD"/>
+                      </a:solidFill>
+                      <a:prstDash val="solid"/>
+                      <a:round/>
+                      <a:headEnd type="none" w="med" len="med"/>
+                      <a:tailEnd type="none" w="med" len="med"/>
+                    </a:lnR>
+                    <a:lnT w="6350" cap="flat" cmpd="sng" algn="ctr">
+                      <a:solidFill>
+                        <a:srgbClr val="C6C9CD"/>
+                      </a:solidFill>
+                      <a:prstDash val="solid"/>
+                      <a:round/>
+                      <a:headEnd type="none" w="med" len="med"/>
+                      <a:tailEnd type="none" w="med" len="med"/>
+                    </a:lnT>
+                    <a:lnB w="6350" cap="flat" cmpd="sng" algn="ctr">
+                      <a:solidFill>
+                        <a:srgbClr val="C6C9CD"/>
+                      </a:solidFill>
+                      <a:prstDash val="solid"/>
+                      <a:round/>
+                      <a:headEnd type="none" w="med" len="med"/>
+                      <a:tailEnd type="none" w="med" len="med"/>
+                    </a:lnB>
+                    <a:solidFill>
+                      <a:srgbClr val="FFFFFF"/>
+                    </a:solidFill>
+                  </a:tcPr>
+                </a:tc>
+                <a:tc>
+                  <a:txBody>
+                    <a:bodyPr>
+                      <a:noAutofit/>
+                    </a:bodyPr>
+                    <a:lstStyle/>
+                    <a:p>
+                      <a:pPr algn="l" indent="0" marL="0">
+                        <a:buNone/>
+                      </a:pPr>
+                      <a:r>
+                        <a:rPr lang="en-US" sz="1200" dirty="0">
+                          <a:solidFill>
+                            <a:srgbClr val="000000"/>
+                          </a:solidFill>
+                          <a:latin typeface="Arial" pitchFamily="34" charset="0"/>
+                          <a:ea typeface="Arial" pitchFamily="34" charset="-122"/>
+                          <a:cs typeface="Arial" pitchFamily="34" charset="-120"/>
+                        </a:rPr>
+                        <a:t>Knowledge lead</a:t>
+                      </a:r>
+                      <a:endParaRPr lang="en-US" sz="1200" dirty="0">
+                        <a:latin typeface="Arial" charset="0"/>
+                        <a:ea typeface="Arial" charset="0"/>
+                        <a:cs typeface="Arial" charset="0"/>
+                      </a:endParaRPr>
+                    </a:p>
+                  </a:txBody>
+                  <a:tcPr marL="76200" marR="76200" marT="31750" marB="31750" anchor="ctr">
                     <a:lnL w="6350" cap="flat" cmpd="sng" algn="ctr">
                       <a:solidFill>
                         <a:srgbClr val="C6C9CD"/>
@@ -5629,774 +6567,7 @@
                         <a:buNone/>
                       </a:pPr>
                       <a:r>
-                        <a:rPr lang="en-US" sz="1000" dirty="0">
-                          <a:solidFill>
-                            <a:srgbClr val="000000"/>
-                          </a:solidFill>
-                          <a:latin typeface="Arial" pitchFamily="34" charset="0"/>
-                          <a:ea typeface="Arial" pitchFamily="34" charset="-122"/>
-                          <a:cs typeface="Arial" pitchFamily="34" charset="-120"/>
-                        </a:rPr>
-                        <a:t>Approved corpus</a:t>
-                      </a:r>
-                      <a:endParaRPr lang="en-US" sz="1000" dirty="0">
-                        <a:latin typeface="Arial" charset="0"/>
-                        <a:ea typeface="Arial" charset="0"/>
-                        <a:cs typeface="Arial" charset="0"/>
-                      </a:endParaRPr>
-                    </a:p>
-                    <a:p>
-                      <a:pPr algn="ctr" indent="0" marL="0">
-                        <a:buNone/>
-                      </a:pPr>
-                      <a:r>
-                        <a:rPr lang="en-US" sz="1000" dirty="0">
-                          <a:solidFill>
-                            <a:srgbClr val="000000"/>
-                          </a:solidFill>
-                          <a:latin typeface="Arial" pitchFamily="34" charset="0"/>
-                          <a:ea typeface="Arial" pitchFamily="34" charset="-122"/>
-                          <a:cs typeface="Arial" pitchFamily="34" charset="-120"/>
-                        </a:rPr>
-                        <a:t>Explicit review</a:t>
-                      </a:r>
-                      <a:endParaRPr lang="en-US" sz="1000" dirty="0">
-                        <a:latin typeface="Arial" charset="0"/>
-                        <a:ea typeface="Arial" charset="0"/>
-                        <a:cs typeface="Arial" charset="0"/>
-                      </a:endParaRPr>
-                    </a:p>
-                  </a:txBody>
-                  <a:tcPr marL="101600" marR="101600" marT="38100" marB="38100" anchor="ctr">
-                    <a:lnL w="6350" cap="flat" cmpd="sng" algn="ctr">
-                      <a:solidFill>
-                        <a:srgbClr val="C6C9CD"/>
-                      </a:solidFill>
-                      <a:prstDash val="solid"/>
-                      <a:round/>
-                      <a:headEnd type="none" w="med" len="med"/>
-                      <a:tailEnd type="none" w="med" len="med"/>
-                    </a:lnL>
-                    <a:lnR w="6350" cap="flat" cmpd="sng" algn="ctr">
-                      <a:solidFill>
-                        <a:srgbClr val="C6C9CD"/>
-                      </a:solidFill>
-                      <a:prstDash val="solid"/>
-                      <a:round/>
-                      <a:headEnd type="none" w="med" len="med"/>
-                      <a:tailEnd type="none" w="med" len="med"/>
-                    </a:lnR>
-                    <a:lnT w="6350" cap="flat" cmpd="sng" algn="ctr">
-                      <a:solidFill>
-                        <a:srgbClr val="C6C9CD"/>
-                      </a:solidFill>
-                      <a:prstDash val="solid"/>
-                      <a:round/>
-                      <a:headEnd type="none" w="med" len="med"/>
-                      <a:tailEnd type="none" w="med" len="med"/>
-                    </a:lnT>
-                    <a:lnB w="6350" cap="flat" cmpd="sng" algn="ctr">
-                      <a:solidFill>
-                        <a:srgbClr val="C6C9CD"/>
-                      </a:solidFill>
-                      <a:prstDash val="solid"/>
-                      <a:round/>
-                      <a:headEnd type="none" w="med" len="med"/>
-                      <a:tailEnd type="none" w="med" len="med"/>
-                    </a:lnB>
-                    <a:solidFill>
-                      <a:srgbClr val="FFFFFF"/>
-                    </a:solidFill>
-                  </a:tcPr>
-                </a:tc>
-                <a:tc>
-                  <a:txBody>
-                    <a:bodyPr>
-                      <a:noAutofit/>
-                    </a:bodyPr>
-                    <a:lstStyle/>
-                    <a:p>
-                      <a:pPr algn="ctr" indent="0" marL="0">
-                        <a:buNone/>
-                      </a:pPr>
-                      <a:r>
-                        <a:rPr lang="en-US" sz="1000" dirty="0">
-                          <a:solidFill>
-                            <a:srgbClr val="000000"/>
-                          </a:solidFill>
-                          <a:latin typeface="Arial" pitchFamily="34" charset="0"/>
-                          <a:ea typeface="Arial" pitchFamily="34" charset="-122"/>
-                          <a:cs typeface="Arial" pitchFamily="34" charset="-120"/>
-                        </a:rPr>
-                        <a:t>Practice lead</a:t>
-                      </a:r>
-                      <a:endParaRPr lang="en-US" sz="1000" dirty="0">
-                        <a:latin typeface="Arial" charset="0"/>
-                        <a:ea typeface="Arial" charset="0"/>
-                        <a:cs typeface="Arial" charset="0"/>
-                      </a:endParaRPr>
-                    </a:p>
-                  </a:txBody>
-                  <a:tcPr marL="101600" marR="101600" marT="38100" marB="38100" anchor="ctr">
-                    <a:lnL w="6350" cap="flat" cmpd="sng" algn="ctr">
-                      <a:solidFill>
-                        <a:srgbClr val="C6C9CD"/>
-                      </a:solidFill>
-                      <a:prstDash val="solid"/>
-                      <a:round/>
-                      <a:headEnd type="none" w="med" len="med"/>
-                      <a:tailEnd type="none" w="med" len="med"/>
-                    </a:lnL>
-                    <a:lnR w="6350" cap="flat" cmpd="sng" algn="ctr">
-                      <a:solidFill>
-                        <a:srgbClr val="C6C9CD"/>
-                      </a:solidFill>
-                      <a:prstDash val="solid"/>
-                      <a:round/>
-                      <a:headEnd type="none" w="med" len="med"/>
-                      <a:tailEnd type="none" w="med" len="med"/>
-                    </a:lnR>
-                    <a:lnT w="6350" cap="flat" cmpd="sng" algn="ctr">
-                      <a:solidFill>
-                        <a:srgbClr val="C6C9CD"/>
-                      </a:solidFill>
-                      <a:prstDash val="solid"/>
-                      <a:round/>
-                      <a:headEnd type="none" w="med" len="med"/>
-                      <a:tailEnd type="none" w="med" len="med"/>
-                    </a:lnT>
-                    <a:lnB w="6350" cap="flat" cmpd="sng" algn="ctr">
-                      <a:solidFill>
-                        <a:srgbClr val="C6C9CD"/>
-                      </a:solidFill>
-                      <a:prstDash val="solid"/>
-                      <a:round/>
-                      <a:headEnd type="none" w="med" len="med"/>
-                      <a:tailEnd type="none" w="med" len="med"/>
-                    </a:lnB>
-                    <a:solidFill>
-                      <a:srgbClr val="FFFFFF"/>
-                    </a:solidFill>
-                  </a:tcPr>
-                </a:tc>
-                <a:tc>
-                  <a:txBody>
-                    <a:bodyPr>
-                      <a:noAutofit/>
-                    </a:bodyPr>
-                    <a:lstStyle/>
-                    <a:p>
-                      <a:pPr algn="ctr" indent="0" marL="0">
-                        <a:buNone/>
-                      </a:pPr>
-                      <a:r>
-                        <a:rPr lang="en-US" sz="1000" b="1" dirty="0">
-                          <a:solidFill>
-                            <a:srgbClr val="FD5108"/>
-                          </a:solidFill>
-                          <a:latin typeface="Arial" pitchFamily="34" charset="0"/>
-                          <a:ea typeface="Arial" pitchFamily="34" charset="-122"/>
-                          <a:cs typeface="Arial" pitchFamily="34" charset="-120"/>
-                        </a:rPr>
-                        <a:t>START</a:t>
-                      </a:r>
-                      <a:endParaRPr lang="en-US" sz="1000" dirty="0">
-                        <a:latin typeface="Arial" charset="0"/>
-                        <a:ea typeface="Arial" charset="0"/>
-                        <a:cs typeface="Arial" charset="0"/>
-                      </a:endParaRPr>
-                    </a:p>
-                  </a:txBody>
-                  <a:tcPr marL="101600" marR="101600" marT="38100" marB="38100" anchor="ctr">
-                    <a:lnL w="6350" cap="flat" cmpd="sng" algn="ctr">
-                      <a:solidFill>
-                        <a:srgbClr val="C6C9CD"/>
-                      </a:solidFill>
-                      <a:prstDash val="solid"/>
-                      <a:round/>
-                      <a:headEnd type="none" w="med" len="med"/>
-                      <a:tailEnd type="none" w="med" len="med"/>
-                    </a:lnL>
-                    <a:lnR w="6350" cap="flat" cmpd="sng" algn="ctr">
-                      <a:solidFill>
-                        <a:srgbClr val="C6C9CD"/>
-                      </a:solidFill>
-                      <a:prstDash val="solid"/>
-                      <a:round/>
-                      <a:headEnd type="none" w="med" len="med"/>
-                      <a:tailEnd type="none" w="med" len="med"/>
-                    </a:lnR>
-                    <a:lnT w="6350" cap="flat" cmpd="sng" algn="ctr">
-                      <a:solidFill>
-                        <a:srgbClr val="C6C9CD"/>
-                      </a:solidFill>
-                      <a:prstDash val="solid"/>
-                      <a:round/>
-                      <a:headEnd type="none" w="med" len="med"/>
-                      <a:tailEnd type="none" w="med" len="med"/>
-                    </a:lnT>
-                    <a:lnB w="6350" cap="flat" cmpd="sng" algn="ctr">
-                      <a:solidFill>
-                        <a:srgbClr val="C6C9CD"/>
-                      </a:solidFill>
-                      <a:prstDash val="solid"/>
-                      <a:round/>
-                      <a:headEnd type="none" w="med" len="med"/>
-                      <a:tailEnd type="none" w="med" len="med"/>
-                    </a:lnB>
-                    <a:solidFill>
-                      <a:srgbClr val="FFFFFF"/>
-                    </a:solidFill>
-                  </a:tcPr>
-                </a:tc>
-              </a:tr>
-              <a:tr h="400050">
-                <a:tc>
-                  <a:txBody>
-                    <a:bodyPr>
-                      <a:noAutofit/>
-                    </a:bodyPr>
-                    <a:lstStyle/>
-                    <a:p>
-                      <a:pPr algn="l" indent="0" marL="0">
-                        <a:buNone/>
-                      </a:pPr>
-                      <a:r>
-                        <a:rPr lang="en-US" sz="1000" b="1" dirty="0">
-                          <a:solidFill>
-                            <a:srgbClr val="000000"/>
-                          </a:solidFill>
-                          <a:latin typeface="Arial" pitchFamily="34" charset="0"/>
-                          <a:ea typeface="Arial" pitchFamily="34" charset="-122"/>
-                          <a:cs typeface="Arial" pitchFamily="34" charset="-120"/>
-                        </a:rPr>
-                        <a:t>Proposal drafting</a:t>
-                      </a:r>
-                      <a:endParaRPr lang="en-US" sz="1000" dirty="0">
-                        <a:latin typeface="Arial" charset="0"/>
-                        <a:ea typeface="Arial" charset="0"/>
-                        <a:cs typeface="Arial" charset="0"/>
-                      </a:endParaRPr>
-                    </a:p>
-                  </a:txBody>
-                  <a:tcPr marL="101600" marR="101600" marT="38100" marB="38100" anchor="ctr">
-                    <a:lnL w="6350" cap="flat" cmpd="sng" algn="ctr">
-                      <a:solidFill>
-                        <a:srgbClr val="C6C9CD"/>
-                      </a:solidFill>
-                      <a:prstDash val="solid"/>
-                      <a:round/>
-                      <a:headEnd type="none" w="med" len="med"/>
-                      <a:tailEnd type="none" w="med" len="med"/>
-                    </a:lnL>
-                    <a:lnR w="6350" cap="flat" cmpd="sng" algn="ctr">
-                      <a:solidFill>
-                        <a:srgbClr val="C6C9CD"/>
-                      </a:solidFill>
-                      <a:prstDash val="solid"/>
-                      <a:round/>
-                      <a:headEnd type="none" w="med" len="med"/>
-                      <a:tailEnd type="none" w="med" len="med"/>
-                    </a:lnR>
-                    <a:lnT w="6350" cap="flat" cmpd="sng" algn="ctr">
-                      <a:solidFill>
-                        <a:srgbClr val="C6C9CD"/>
-                      </a:solidFill>
-                      <a:prstDash val="solid"/>
-                      <a:round/>
-                      <a:headEnd type="none" w="med" len="med"/>
-                      <a:tailEnd type="none" w="med" len="med"/>
-                    </a:lnT>
-                    <a:lnB w="6350" cap="flat" cmpd="sng" algn="ctr">
-                      <a:solidFill>
-                        <a:srgbClr val="C6C9CD"/>
-                      </a:solidFill>
-                      <a:prstDash val="solid"/>
-                      <a:round/>
-                      <a:headEnd type="none" w="med" len="med"/>
-                      <a:tailEnd type="none" w="med" len="med"/>
-                    </a:lnB>
-                    <a:solidFill>
-                      <a:srgbClr val="F5F7F8"/>
-                    </a:solidFill>
-                  </a:tcPr>
-                </a:tc>
-                <a:tc>
-                  <a:txBody>
-                    <a:bodyPr>
-                      <a:noAutofit/>
-                    </a:bodyPr>
-                    <a:lstStyle/>
-                    <a:p>
-                      <a:pPr algn="ctr" indent="0" marL="0">
-                        <a:buNone/>
-                      </a:pPr>
-                      <a:r>
-                        <a:rPr lang="en-US" sz="1000" dirty="0">
-                          <a:solidFill>
-                            <a:srgbClr val="000000"/>
-                          </a:solidFill>
-                          <a:latin typeface="Arial" pitchFamily="34" charset="0"/>
-                          <a:ea typeface="Arial" pitchFamily="34" charset="-122"/>
-                          <a:cs typeface="Arial" pitchFamily="34" charset="-120"/>
-                        </a:rPr>
-                        <a:t>Claims and commitments</a:t>
-                      </a:r>
-                      <a:endParaRPr lang="en-US" sz="1000" dirty="0">
-                        <a:latin typeface="Arial" charset="0"/>
-                        <a:ea typeface="Arial" charset="0"/>
-                        <a:cs typeface="Arial" charset="0"/>
-                      </a:endParaRPr>
-                    </a:p>
-                    <a:p>
-                      <a:pPr algn="ctr" indent="0" marL="0">
-                        <a:buNone/>
-                      </a:pPr>
-                      <a:r>
-                        <a:rPr lang="en-US" sz="1000" dirty="0">
-                          <a:solidFill>
-                            <a:srgbClr val="000000"/>
-                          </a:solidFill>
-                          <a:latin typeface="Arial" pitchFamily="34" charset="0"/>
-                          <a:ea typeface="Arial" pitchFamily="34" charset="-122"/>
-                          <a:cs typeface="Arial" pitchFamily="34" charset="-120"/>
-                        </a:rPr>
-                        <a:t>need controls</a:t>
-                      </a:r>
-                      <a:endParaRPr lang="en-US" sz="1000" dirty="0">
-                        <a:latin typeface="Arial" charset="0"/>
-                        <a:ea typeface="Arial" charset="0"/>
-                        <a:cs typeface="Arial" charset="0"/>
-                      </a:endParaRPr>
-                    </a:p>
-                  </a:txBody>
-                  <a:tcPr marL="101600" marR="101600" marT="38100" marB="38100" anchor="ctr">
-                    <a:lnL w="6350" cap="flat" cmpd="sng" algn="ctr">
-                      <a:solidFill>
-                        <a:srgbClr val="C6C9CD"/>
-                      </a:solidFill>
-                      <a:prstDash val="solid"/>
-                      <a:round/>
-                      <a:headEnd type="none" w="med" len="med"/>
-                      <a:tailEnd type="none" w="med" len="med"/>
-                    </a:lnL>
-                    <a:lnR w="6350" cap="flat" cmpd="sng" algn="ctr">
-                      <a:solidFill>
-                        <a:srgbClr val="C6C9CD"/>
-                      </a:solidFill>
-                      <a:prstDash val="solid"/>
-                      <a:round/>
-                      <a:headEnd type="none" w="med" len="med"/>
-                      <a:tailEnd type="none" w="med" len="med"/>
-                    </a:lnR>
-                    <a:lnT w="6350" cap="flat" cmpd="sng" algn="ctr">
-                      <a:solidFill>
-                        <a:srgbClr val="C6C9CD"/>
-                      </a:solidFill>
-                      <a:prstDash val="solid"/>
-                      <a:round/>
-                      <a:headEnd type="none" w="med" len="med"/>
-                      <a:tailEnd type="none" w="med" len="med"/>
-                    </a:lnT>
-                    <a:lnB w="6350" cap="flat" cmpd="sng" algn="ctr">
-                      <a:solidFill>
-                        <a:srgbClr val="C6C9CD"/>
-                      </a:solidFill>
-                      <a:prstDash val="solid"/>
-                      <a:round/>
-                      <a:headEnd type="none" w="med" len="med"/>
-                      <a:tailEnd type="none" w="med" len="med"/>
-                    </a:lnB>
-                    <a:solidFill>
-                      <a:srgbClr val="F5F7F8"/>
-                    </a:solidFill>
-                  </a:tcPr>
-                </a:tc>
-                <a:tc>
-                  <a:txBody>
-                    <a:bodyPr>
-                      <a:noAutofit/>
-                    </a:bodyPr>
-                    <a:lstStyle/>
-                    <a:p>
-                      <a:pPr algn="ctr" indent="0" marL="0">
-                        <a:buNone/>
-                      </a:pPr>
-                      <a:r>
-                        <a:rPr lang="en-US" sz="1000" dirty="0">
-                          <a:solidFill>
-                            <a:srgbClr val="000000"/>
-                          </a:solidFill>
-                          <a:latin typeface="Arial" pitchFamily="34" charset="0"/>
-                          <a:ea typeface="Arial" pitchFamily="34" charset="-122"/>
-                          <a:cs typeface="Arial" pitchFamily="34" charset="-120"/>
-                        </a:rPr>
-                        <a:t>BD lead</a:t>
-                      </a:r>
-                      <a:endParaRPr lang="en-US" sz="1000" dirty="0">
-                        <a:latin typeface="Arial" charset="0"/>
-                        <a:ea typeface="Arial" charset="0"/>
-                        <a:cs typeface="Arial" charset="0"/>
-                      </a:endParaRPr>
-                    </a:p>
-                  </a:txBody>
-                  <a:tcPr marL="101600" marR="101600" marT="38100" marB="38100" anchor="ctr">
-                    <a:lnL w="6350" cap="flat" cmpd="sng" algn="ctr">
-                      <a:solidFill>
-                        <a:srgbClr val="C6C9CD"/>
-                      </a:solidFill>
-                      <a:prstDash val="solid"/>
-                      <a:round/>
-                      <a:headEnd type="none" w="med" len="med"/>
-                      <a:tailEnd type="none" w="med" len="med"/>
-                    </a:lnL>
-                    <a:lnR w="6350" cap="flat" cmpd="sng" algn="ctr">
-                      <a:solidFill>
-                        <a:srgbClr val="C6C9CD"/>
-                      </a:solidFill>
-                      <a:prstDash val="solid"/>
-                      <a:round/>
-                      <a:headEnd type="none" w="med" len="med"/>
-                      <a:tailEnd type="none" w="med" len="med"/>
-                    </a:lnR>
-                    <a:lnT w="6350" cap="flat" cmpd="sng" algn="ctr">
-                      <a:solidFill>
-                        <a:srgbClr val="C6C9CD"/>
-                      </a:solidFill>
-                      <a:prstDash val="solid"/>
-                      <a:round/>
-                      <a:headEnd type="none" w="med" len="med"/>
-                      <a:tailEnd type="none" w="med" len="med"/>
-                    </a:lnT>
-                    <a:lnB w="6350" cap="flat" cmpd="sng" algn="ctr">
-                      <a:solidFill>
-                        <a:srgbClr val="C6C9CD"/>
-                      </a:solidFill>
-                      <a:prstDash val="solid"/>
-                      <a:round/>
-                      <a:headEnd type="none" w="med" len="med"/>
-                      <a:tailEnd type="none" w="med" len="med"/>
-                    </a:lnB>
-                    <a:solidFill>
-                      <a:srgbClr val="F5F7F8"/>
-                    </a:solidFill>
-                  </a:tcPr>
-                </a:tc>
-                <a:tc>
-                  <a:txBody>
-                    <a:bodyPr>
-                      <a:noAutofit/>
-                    </a:bodyPr>
-                    <a:lstStyle/>
-                    <a:p>
-                      <a:pPr algn="ctr" indent="0" marL="0">
-                        <a:buNone/>
-                      </a:pPr>
-                      <a:r>
-                        <a:rPr lang="en-US" sz="1000" b="1" dirty="0">
-                          <a:solidFill>
-                            <a:srgbClr val="FD5108"/>
-                          </a:solidFill>
-                          <a:latin typeface="Arial" pitchFamily="34" charset="0"/>
-                          <a:ea typeface="Arial" pitchFamily="34" charset="-122"/>
-                          <a:cs typeface="Arial" pitchFamily="34" charset="-120"/>
-                        </a:rPr>
-                        <a:t>NEXT</a:t>
-                      </a:r>
-                      <a:endParaRPr lang="en-US" sz="1000" dirty="0">
-                        <a:latin typeface="Arial" charset="0"/>
-                        <a:ea typeface="Arial" charset="0"/>
-                        <a:cs typeface="Arial" charset="0"/>
-                      </a:endParaRPr>
-                    </a:p>
-                  </a:txBody>
-                  <a:tcPr marL="101600" marR="101600" marT="38100" marB="38100" anchor="ctr">
-                    <a:lnL w="6350" cap="flat" cmpd="sng" algn="ctr">
-                      <a:solidFill>
-                        <a:srgbClr val="C6C9CD"/>
-                      </a:solidFill>
-                      <a:prstDash val="solid"/>
-                      <a:round/>
-                      <a:headEnd type="none" w="med" len="med"/>
-                      <a:tailEnd type="none" w="med" len="med"/>
-                    </a:lnL>
-                    <a:lnR w="6350" cap="flat" cmpd="sng" algn="ctr">
-                      <a:solidFill>
-                        <a:srgbClr val="C6C9CD"/>
-                      </a:solidFill>
-                      <a:prstDash val="solid"/>
-                      <a:round/>
-                      <a:headEnd type="none" w="med" len="med"/>
-                      <a:tailEnd type="none" w="med" len="med"/>
-                    </a:lnR>
-                    <a:lnT w="6350" cap="flat" cmpd="sng" algn="ctr">
-                      <a:solidFill>
-                        <a:srgbClr val="C6C9CD"/>
-                      </a:solidFill>
-                      <a:prstDash val="solid"/>
-                      <a:round/>
-                      <a:headEnd type="none" w="med" len="med"/>
-                      <a:tailEnd type="none" w="med" len="med"/>
-                    </a:lnT>
-                    <a:lnB w="6350" cap="flat" cmpd="sng" algn="ctr">
-                      <a:solidFill>
-                        <a:srgbClr val="C6C9CD"/>
-                      </a:solidFill>
-                      <a:prstDash val="solid"/>
-                      <a:round/>
-                      <a:headEnd type="none" w="med" len="med"/>
-                      <a:tailEnd type="none" w="med" len="med"/>
-                    </a:lnB>
-                    <a:solidFill>
-                      <a:srgbClr val="F5F7F8"/>
-                    </a:solidFill>
-                  </a:tcPr>
-                </a:tc>
-              </a:tr>
-              <a:tr h="406400">
-                <a:tc>
-                  <a:txBody>
-                    <a:bodyPr>
-                      <a:noAutofit/>
-                    </a:bodyPr>
-                    <a:lstStyle/>
-                    <a:p>
-                      <a:pPr algn="l" indent="0" marL="0">
-                        <a:buNone/>
-                      </a:pPr>
-                      <a:r>
-                        <a:rPr lang="en-US" sz="1000" b="1" dirty="0">
-                          <a:solidFill>
-                            <a:srgbClr val="000000"/>
-                          </a:solidFill>
-                          <a:latin typeface="Arial" pitchFamily="34" charset="0"/>
-                          <a:ea typeface="Arial" pitchFamily="34" charset="-122"/>
-                          <a:cs typeface="Arial" pitchFamily="34" charset="-120"/>
-                        </a:rPr>
-                        <a:t>Knowledge retrieval</a:t>
-                      </a:r>
-                      <a:endParaRPr lang="en-US" sz="1000" dirty="0">
-                        <a:latin typeface="Arial" charset="0"/>
-                        <a:ea typeface="Arial" charset="0"/>
-                        <a:cs typeface="Arial" charset="0"/>
-                      </a:endParaRPr>
-                    </a:p>
-                  </a:txBody>
-                  <a:tcPr marL="101600" marR="101600" marT="38100" marB="38100" anchor="ctr">
-                    <a:lnL w="6350" cap="flat" cmpd="sng" algn="ctr">
-                      <a:solidFill>
-                        <a:srgbClr val="C6C9CD"/>
-                      </a:solidFill>
-                      <a:prstDash val="solid"/>
-                      <a:round/>
-                      <a:headEnd type="none" w="med" len="med"/>
-                      <a:tailEnd type="none" w="med" len="med"/>
-                    </a:lnL>
-                    <a:lnR w="6350" cap="flat" cmpd="sng" algn="ctr">
-                      <a:solidFill>
-                        <a:srgbClr val="C6C9CD"/>
-                      </a:solidFill>
-                      <a:prstDash val="solid"/>
-                      <a:round/>
-                      <a:headEnd type="none" w="med" len="med"/>
-                      <a:tailEnd type="none" w="med" len="med"/>
-                    </a:lnR>
-                    <a:lnT w="6350" cap="flat" cmpd="sng" algn="ctr">
-                      <a:solidFill>
-                        <a:srgbClr val="C6C9CD"/>
-                      </a:solidFill>
-                      <a:prstDash val="solid"/>
-                      <a:round/>
-                      <a:headEnd type="none" w="med" len="med"/>
-                      <a:tailEnd type="none" w="med" len="med"/>
-                    </a:lnT>
-                    <a:lnB w="6350" cap="flat" cmpd="sng" algn="ctr">
-                      <a:solidFill>
-                        <a:srgbClr val="C6C9CD"/>
-                      </a:solidFill>
-                      <a:prstDash val="solid"/>
-                      <a:round/>
-                      <a:headEnd type="none" w="med" len="med"/>
-                      <a:tailEnd type="none" w="med" len="med"/>
-                    </a:lnB>
-                    <a:solidFill>
-                      <a:srgbClr val="FFFFFF"/>
-                    </a:solidFill>
-                  </a:tcPr>
-                </a:tc>
-                <a:tc>
-                  <a:txBody>
-                    <a:bodyPr>
-                      <a:noAutofit/>
-                    </a:bodyPr>
-                    <a:lstStyle/>
-                    <a:p>
-                      <a:pPr algn="ctr" indent="0" marL="0">
-                        <a:buNone/>
-                      </a:pPr>
-                      <a:r>
-                        <a:rPr lang="en-US" sz="1000" dirty="0">
-                          <a:solidFill>
-                            <a:srgbClr val="000000"/>
-                          </a:solidFill>
-                          <a:latin typeface="Arial" pitchFamily="34" charset="0"/>
-                          <a:ea typeface="Arial" pitchFamily="34" charset="-122"/>
-                          <a:cs typeface="Arial" pitchFamily="34" charset="-120"/>
-                        </a:rPr>
-                        <a:t>Permissions need</a:t>
-                      </a:r>
-                      <a:endParaRPr lang="en-US" sz="1000" dirty="0">
-                        <a:latin typeface="Arial" charset="0"/>
-                        <a:ea typeface="Arial" charset="0"/>
-                        <a:cs typeface="Arial" charset="0"/>
-                      </a:endParaRPr>
-                    </a:p>
-                    <a:p>
-                      <a:pPr algn="ctr" indent="0" marL="0">
-                        <a:buNone/>
-                      </a:pPr>
-                      <a:r>
-                        <a:rPr lang="en-US" sz="1000" dirty="0">
-                          <a:solidFill>
-                            <a:srgbClr val="000000"/>
-                          </a:solidFill>
-                          <a:latin typeface="Arial" pitchFamily="34" charset="0"/>
-                          <a:ea typeface="Arial" pitchFamily="34" charset="-122"/>
-                          <a:cs typeface="Arial" pitchFamily="34" charset="-120"/>
-                        </a:rPr>
-                        <a:t>cleanup</a:t>
-                      </a:r>
-                      <a:endParaRPr lang="en-US" sz="1000" dirty="0">
-                        <a:latin typeface="Arial" charset="0"/>
-                        <a:ea typeface="Arial" charset="0"/>
-                        <a:cs typeface="Arial" charset="0"/>
-                      </a:endParaRPr>
-                    </a:p>
-                  </a:txBody>
-                  <a:tcPr marL="101600" marR="101600" marT="38100" marB="38100" anchor="ctr">
-                    <a:lnL w="6350" cap="flat" cmpd="sng" algn="ctr">
-                      <a:solidFill>
-                        <a:srgbClr val="C6C9CD"/>
-                      </a:solidFill>
-                      <a:prstDash val="solid"/>
-                      <a:round/>
-                      <a:headEnd type="none" w="med" len="med"/>
-                      <a:tailEnd type="none" w="med" len="med"/>
-                    </a:lnL>
-                    <a:lnR w="6350" cap="flat" cmpd="sng" algn="ctr">
-                      <a:solidFill>
-                        <a:srgbClr val="C6C9CD"/>
-                      </a:solidFill>
-                      <a:prstDash val="solid"/>
-                      <a:round/>
-                      <a:headEnd type="none" w="med" len="med"/>
-                      <a:tailEnd type="none" w="med" len="med"/>
-                    </a:lnR>
-                    <a:lnT w="6350" cap="flat" cmpd="sng" algn="ctr">
-                      <a:solidFill>
-                        <a:srgbClr val="C6C9CD"/>
-                      </a:solidFill>
-                      <a:prstDash val="solid"/>
-                      <a:round/>
-                      <a:headEnd type="none" w="med" len="med"/>
-                      <a:tailEnd type="none" w="med" len="med"/>
-                    </a:lnT>
-                    <a:lnB w="6350" cap="flat" cmpd="sng" algn="ctr">
-                      <a:solidFill>
-                        <a:srgbClr val="C6C9CD"/>
-                      </a:solidFill>
-                      <a:prstDash val="solid"/>
-                      <a:round/>
-                      <a:headEnd type="none" w="med" len="med"/>
-                      <a:tailEnd type="none" w="med" len="med"/>
-                    </a:lnB>
-                    <a:solidFill>
-                      <a:srgbClr val="FFFFFF"/>
-                    </a:solidFill>
-                  </a:tcPr>
-                </a:tc>
-                <a:tc>
-                  <a:txBody>
-                    <a:bodyPr>
-                      <a:noAutofit/>
-                    </a:bodyPr>
-                    <a:lstStyle/>
-                    <a:p>
-                      <a:pPr algn="ctr" indent="0" marL="0">
-                        <a:buNone/>
-                      </a:pPr>
-                      <a:r>
-                        <a:rPr lang="en-US" sz="1000" dirty="0">
-                          <a:solidFill>
-                            <a:srgbClr val="000000"/>
-                          </a:solidFill>
-                          <a:latin typeface="Arial" pitchFamily="34" charset="0"/>
-                          <a:ea typeface="Arial" pitchFamily="34" charset="-122"/>
-                          <a:cs typeface="Arial" pitchFamily="34" charset="-120"/>
-                        </a:rPr>
-                        <a:t>Knowledge lead</a:t>
-                      </a:r>
-                      <a:endParaRPr lang="en-US" sz="1000" dirty="0">
-                        <a:latin typeface="Arial" charset="0"/>
-                        <a:ea typeface="Arial" charset="0"/>
-                        <a:cs typeface="Arial" charset="0"/>
-                      </a:endParaRPr>
-                    </a:p>
-                  </a:txBody>
-                  <a:tcPr marL="101600" marR="101600" marT="38100" marB="38100" anchor="ctr">
-                    <a:lnL w="6350" cap="flat" cmpd="sng" algn="ctr">
-                      <a:solidFill>
-                        <a:srgbClr val="C6C9CD"/>
-                      </a:solidFill>
-                      <a:prstDash val="solid"/>
-                      <a:round/>
-                      <a:headEnd type="none" w="med" len="med"/>
-                      <a:tailEnd type="none" w="med" len="med"/>
-                    </a:lnL>
-                    <a:lnR w="6350" cap="flat" cmpd="sng" algn="ctr">
-                      <a:solidFill>
-                        <a:srgbClr val="C6C9CD"/>
-                      </a:solidFill>
-                      <a:prstDash val="solid"/>
-                      <a:round/>
-                      <a:headEnd type="none" w="med" len="med"/>
-                      <a:tailEnd type="none" w="med" len="med"/>
-                    </a:lnR>
-                    <a:lnT w="6350" cap="flat" cmpd="sng" algn="ctr">
-                      <a:solidFill>
-                        <a:srgbClr val="C6C9CD"/>
-                      </a:solidFill>
-                      <a:prstDash val="solid"/>
-                      <a:round/>
-                      <a:headEnd type="none" w="med" len="med"/>
-                      <a:tailEnd type="none" w="med" len="med"/>
-                    </a:lnT>
-                    <a:lnB w="6350" cap="flat" cmpd="sng" algn="ctr">
-                      <a:solidFill>
-                        <a:srgbClr val="C6C9CD"/>
-                      </a:solidFill>
-                      <a:prstDash val="solid"/>
-                      <a:round/>
-                      <a:headEnd type="none" w="med" len="med"/>
-                      <a:tailEnd type="none" w="med" len="med"/>
-                    </a:lnB>
-                    <a:solidFill>
-                      <a:srgbClr val="FFFFFF"/>
-                    </a:solidFill>
-                  </a:tcPr>
-                </a:tc>
-                <a:tc>
-                  <a:txBody>
-                    <a:bodyPr>
-                      <a:noAutofit/>
-                    </a:bodyPr>
-                    <a:lstStyle/>
-                    <a:p>
-                      <a:pPr algn="ctr" indent="0" marL="0">
-                        <a:buNone/>
-                      </a:pPr>
-                      <a:r>
-                        <a:rPr lang="en-US" sz="1000" b="1" dirty="0">
+                        <a:rPr lang="en-US" sz="1200" b="1" dirty="0">
                           <a:solidFill>
                             <a:srgbClr val="FD5108"/>
                           </a:solidFill>
@@ -6406,14 +6577,14 @@
                         </a:rPr>
                         <a:t>LATER</a:t>
                       </a:r>
-                      <a:endParaRPr lang="en-US" sz="1000" dirty="0">
+                      <a:endParaRPr lang="en-US" sz="1200" dirty="0">
                         <a:latin typeface="Arial" charset="0"/>
                         <a:ea typeface="Arial" charset="0"/>
                         <a:cs typeface="Arial" charset="0"/>
                       </a:endParaRPr>
                     </a:p>
                   </a:txBody>
-                  <a:tcPr marL="101600" marR="101600" marT="38100" marB="38100" anchor="ctr">
+                  <a:tcPr marL="76200" marR="76200" marT="31750" marB="31750" anchor="ctr">
                     <a:lnL w="6350" cap="flat" cmpd="sng" algn="ctr">
                       <a:solidFill>
                         <a:srgbClr val="C6C9CD"/>
@@ -6581,7 +6752,7 @@
               <a:defRPr spc="0"/>
             </a:pPr>
             <a:r>
-              <a:rPr lang="en-US" sz="1350" b="1" dirty="0" spc="0">
+              <a:rPr lang="en-US" sz="1400" b="1" dirty="0" spc="0">
                 <a:solidFill>
                   <a:srgbClr val="000000"/>
                 </a:solidFill>
@@ -6591,7 +6762,7 @@
               </a:rPr>
               <a:t>ANNUAL CAPACITY POTENTIAL</a:t>
             </a:r>
-            <a:endParaRPr lang="en-US" sz="1350" dirty="0" spc="0"/>
+            <a:endParaRPr lang="en-US" sz="1400" dirty="0" spc="0"/>
           </a:p>
         </p:txBody>
       </p:sp>
@@ -6671,7 +6842,7 @@
               <a:defRPr spc="0"/>
             </a:pPr>
             <a:r>
-              <a:rPr lang="en-US" sz="1350" b="1" dirty="0" spc="0">
+              <a:rPr lang="en-US" sz="1400" b="1" dirty="0" spc="0">
                 <a:solidFill>
                   <a:srgbClr val="000000"/>
                 </a:solidFill>
@@ -6681,7 +6852,7 @@
               </a:rPr>
               <a:t>WORKFLOW VALUE MODEL</a:t>
             </a:r>
-            <a:endParaRPr lang="en-US" sz="1350" dirty="0" spc="0"/>
+            <a:endParaRPr lang="en-US" sz="1400" dirty="0" spc="0"/>
           </a:p>
         </p:txBody>
       </p:sp>
@@ -6738,8 +6909,8 @@
         </p:nvSpPr>
         <p:spPr>
           <a:xfrm>
-            <a:off x="234950" y="3784600"/>
-            <a:ext cx="4318000" cy="241300"/>
+            <a:off x="234950" y="4064000"/>
+            <a:ext cx="4445000" cy="241300"/>
           </a:xfrm>
           <a:prstGeom prst="rect">
             <a:avLst/>
@@ -6761,7 +6932,7 @@
               <a:defRPr spc="0"/>
             </a:pPr>
             <a:r>
-              <a:rPr lang="en-US" sz="1350" b="1" dirty="0" spc="0">
+              <a:rPr lang="en-US" sz="1400" b="1" dirty="0" spc="0">
                 <a:solidFill>
                   <a:srgbClr val="000000"/>
                 </a:solidFill>
@@ -6771,7 +6942,7 @@
               </a:rPr>
               <a:t>WHY RESEARCH WINS FIRST</a:t>
             </a:r>
-            <a:endParaRPr lang="en-US" sz="1350" dirty="0" spc="0"/>
+            <a:endParaRPr lang="en-US" sz="1400" dirty="0" spc="0"/>
           </a:p>
         </p:txBody>
       </p:sp>
@@ -6783,8 +6954,8 @@
         </p:nvSpPr>
         <p:spPr>
           <a:xfrm>
-            <a:off x="901700" y="4108450"/>
-            <a:ext cx="3429000" cy="254000"/>
+            <a:off x="1016000" y="4311650"/>
+            <a:ext cx="3505200" cy="266700"/>
           </a:xfrm>
           <a:prstGeom prst="rect">
             <a:avLst/>
@@ -6806,7 +6977,7 @@
               <a:defRPr spc="0"/>
             </a:pPr>
             <a:r>
-              <a:rPr lang="en-US" sz="1200" dirty="0" spc="0">
+              <a:rPr lang="en-US" sz="1400" dirty="0" spc="0">
                 <a:solidFill>
                   <a:srgbClr val="000000"/>
                 </a:solidFill>
@@ -6816,7 +6987,7 @@
               </a:rPr>
               <a:t>Frequent, comparable tasks</a:t>
             </a:r>
-            <a:endParaRPr lang="en-US" sz="1200" dirty="0" spc="0"/>
+            <a:endParaRPr lang="en-US" sz="1400" dirty="0" spc="0"/>
           </a:p>
         </p:txBody>
       </p:sp>
@@ -6828,8 +6999,8 @@
         </p:nvSpPr>
         <p:spPr>
           <a:xfrm>
-            <a:off x="901700" y="4552950"/>
-            <a:ext cx="3429000" cy="254000"/>
+            <a:off x="1016000" y="4806950"/>
+            <a:ext cx="3505200" cy="266700"/>
           </a:xfrm>
           <a:prstGeom prst="rect">
             <a:avLst/>
@@ -6851,7 +7022,7 @@
               <a:defRPr spc="0"/>
             </a:pPr>
             <a:r>
-              <a:rPr lang="en-US" sz="1200" dirty="0" spc="0">
+              <a:rPr lang="en-US" sz="1400" dirty="0" spc="0">
                 <a:solidFill>
                   <a:srgbClr val="000000"/>
                 </a:solidFill>
@@ -6861,7 +7032,7 @@
               </a:rPr>
               <a:t>A bounded source corpus</a:t>
             </a:r>
-            <a:endParaRPr lang="en-US" sz="1200" dirty="0" spc="0"/>
+            <a:endParaRPr lang="en-US" sz="1400" dirty="0" spc="0"/>
           </a:p>
         </p:txBody>
       </p:sp>
@@ -6873,8 +7044,8 @@
         </p:nvSpPr>
         <p:spPr>
           <a:xfrm>
-            <a:off x="901700" y="4997450"/>
-            <a:ext cx="3429000" cy="254000"/>
+            <a:off x="1016000" y="5302250"/>
+            <a:ext cx="3505200" cy="266700"/>
           </a:xfrm>
           <a:prstGeom prst="rect">
             <a:avLst/>
@@ -6896,7 +7067,7 @@
               <a:defRPr spc="0"/>
             </a:pPr>
             <a:r>
-              <a:rPr lang="en-US" sz="1200" dirty="0" spc="0">
+              <a:rPr lang="en-US" sz="1400" dirty="0" spc="0">
                 <a:solidFill>
                   <a:srgbClr val="000000"/>
                 </a:solidFill>
@@ -6906,7 +7077,7 @@
               </a:rPr>
               <a:t>A named expert reviewer</a:t>
             </a:r>
-            <a:endParaRPr lang="en-US" sz="1200" dirty="0" spc="0"/>
+            <a:endParaRPr lang="en-US" sz="1400" dirty="0" spc="0"/>
           </a:p>
         </p:txBody>
       </p:sp>
@@ -6918,7 +7089,7 @@
         </p:nvSpPr>
         <p:spPr>
           <a:xfrm>
-            <a:off x="4826000" y="3708400"/>
+            <a:off x="4826000" y="3556000"/>
             <a:ext cx="7048500" cy="241300"/>
           </a:xfrm>
           <a:prstGeom prst="rect">
@@ -6941,7 +7112,7 @@
               <a:defRPr spc="0"/>
             </a:pPr>
             <a:r>
-              <a:rPr lang="en-US" sz="1350" b="1" dirty="0" spc="0">
+              <a:rPr lang="en-US" sz="1400" b="1" dirty="0" spc="0">
                 <a:solidFill>
                   <a:srgbClr val="000000"/>
                 </a:solidFill>
@@ -6951,7 +7122,7 @@
               </a:rPr>
               <a:t>PILOT SEQUENCING TEST</a:t>
             </a:r>
-            <a:endParaRPr lang="en-US" sz="1350" dirty="0" spc="0"/>
+            <a:endParaRPr lang="en-US" sz="1400" dirty="0" spc="0"/>
           </a:p>
         </p:txBody>
       </p:sp>
@@ -6963,8 +7134,8 @@
         </p:nvSpPr>
         <p:spPr>
           <a:xfrm>
-            <a:off x="4826000" y="5530850"/>
-            <a:ext cx="5397500" cy="190500"/>
+            <a:off x="4826000" y="5486400"/>
+            <a:ext cx="6985000" cy="177800"/>
           </a:xfrm>
           <a:prstGeom prst="rect">
             <a:avLst/>
@@ -6986,7 +7157,7 @@
               <a:defRPr spc="0"/>
             </a:pPr>
             <a:r>
-              <a:rPr lang="en-US" sz="1000" dirty="0" spc="0">
+              <a:rPr lang="en-US" sz="1100" dirty="0" spc="0">
                 <a:solidFill>
                   <a:srgbClr val="000000"/>
                 </a:solidFill>
@@ -6996,7 +7167,7 @@
               </a:rPr>
               <a:t>Check task overlap before adding workflow benefits.</a:t>
             </a:r>
-            <a:endParaRPr lang="en-US" sz="1000" dirty="0" spc="0"/>
+            <a:endParaRPr lang="en-US" sz="1100" dirty="0" spc="0"/>
           </a:p>
         </p:txBody>
       </p:sp>
@@ -7112,8 +7283,8 @@
         </p:blipFill>
         <p:spPr>
           <a:xfrm>
-            <a:off x="381000" y="4108450"/>
-            <a:ext cx="260350" cy="260350"/>
+            <a:off x="355600" y="4273550"/>
+            <a:ext cx="361950" cy="361950"/>
           </a:xfrm>
           <a:prstGeom prst="rect">
             <a:avLst/>
@@ -7142,8 +7313,8 @@
         </p:blipFill>
         <p:spPr>
           <a:xfrm>
-            <a:off x="381000" y="4552950"/>
-            <a:ext cx="260350" cy="260350"/>
+            <a:off x="355600" y="4768850"/>
+            <a:ext cx="361950" cy="361950"/>
           </a:xfrm>
           <a:prstGeom prst="rect">
             <a:avLst/>
@@ -7172,8 +7343,8 @@
         </p:blipFill>
         <p:spPr>
           <a:xfrm>
-            <a:off x="381000" y="4997450"/>
-            <a:ext cx="260350" cy="260350"/>
+            <a:off x="355600" y="5264150"/>
+            <a:ext cx="361950" cy="361950"/>
           </a:xfrm>
           <a:prstGeom prst="rect">
             <a:avLst/>
@@ -7270,8 +7441,8 @@
         </p:nvSpPr>
         <p:spPr>
           <a:xfrm>
-            <a:off x="5715000" y="4851400"/>
-            <a:ext cx="6350" cy="685800"/>
+            <a:off x="6083300" y="5054600"/>
+            <a:ext cx="6350" cy="615950"/>
           </a:xfrm>
           <a:prstGeom prst="rect">
             <a:avLst/>
@@ -7343,9 +7514,117 @@
           </a:ln>
         </p:spPr>
       </p:sp>
+      <p:sp>
+        <p:nvSpPr>
+          <p:cNvPr id="5" name="shared-controls-1-bullet"/>
+          <p:cNvSpPr/>
+          <p:nvPr/>
+        </p:nvSpPr>
+        <p:spPr>
+          <a:xfrm>
+            <a:off x="330200" y="5289550"/>
+            <a:ext cx="63500" cy="63500"/>
+          </a:xfrm>
+          <a:prstGeom prst="ellipse">
+            <a:avLst/>
+          </a:prstGeom>
+          <a:solidFill>
+            <a:srgbClr val="FD5108"/>
+          </a:solidFill>
+          <a:ln w="12700">
+            <a:solidFill>
+              <a:srgbClr val="FFFFFF">
+                <a:alpha val="0"/>
+              </a:srgbClr>
+            </a:solidFill>
+            <a:prstDash val="solid"/>
+          </a:ln>
+        </p:spPr>
+      </p:sp>
+      <p:sp>
+        <p:nvSpPr>
+          <p:cNvPr id="6" name="shared-controls-2-bullet"/>
+          <p:cNvSpPr/>
+          <p:nvPr/>
+        </p:nvSpPr>
+        <p:spPr>
+          <a:xfrm>
+            <a:off x="330200" y="5505450"/>
+            <a:ext cx="63500" cy="63500"/>
+          </a:xfrm>
+          <a:prstGeom prst="ellipse">
+            <a:avLst/>
+          </a:prstGeom>
+          <a:solidFill>
+            <a:srgbClr val="FD5108"/>
+          </a:solidFill>
+          <a:ln w="12700">
+            <a:solidFill>
+              <a:srgbClr val="FFFFFF">
+                <a:alpha val="0"/>
+              </a:srgbClr>
+            </a:solidFill>
+            <a:prstDash val="solid"/>
+          </a:ln>
+        </p:spPr>
+      </p:sp>
+      <p:sp>
+        <p:nvSpPr>
+          <p:cNvPr id="7" name="measurement-1-bullet"/>
+          <p:cNvSpPr/>
+          <p:nvPr/>
+        </p:nvSpPr>
+        <p:spPr>
+          <a:xfrm>
+            <a:off x="6369050" y="5289550"/>
+            <a:ext cx="63500" cy="63500"/>
+          </a:xfrm>
+          <a:prstGeom prst="ellipse">
+            <a:avLst/>
+          </a:prstGeom>
+          <a:solidFill>
+            <a:srgbClr val="FD5108"/>
+          </a:solidFill>
+          <a:ln w="12700">
+            <a:solidFill>
+              <a:srgbClr val="FFFFFF">
+                <a:alpha val="0"/>
+              </a:srgbClr>
+            </a:solidFill>
+            <a:prstDash val="solid"/>
+          </a:ln>
+        </p:spPr>
+      </p:sp>
+      <p:sp>
+        <p:nvSpPr>
+          <p:cNvPr id="8" name="measurement-2-bullet"/>
+          <p:cNvSpPr/>
+          <p:nvPr/>
+        </p:nvSpPr>
+        <p:spPr>
+          <a:xfrm>
+            <a:off x="6369050" y="5505450"/>
+            <a:ext cx="63500" cy="63500"/>
+          </a:xfrm>
+          <a:prstGeom prst="ellipse">
+            <a:avLst/>
+          </a:prstGeom>
+          <a:solidFill>
+            <a:srgbClr val="FD5108"/>
+          </a:solidFill>
+          <a:ln w="12700">
+            <a:solidFill>
+              <a:srgbClr val="FFFFFF">
+                <a:alpha val="0"/>
+              </a:srgbClr>
+            </a:solidFill>
+            <a:prstDash val="solid"/>
+          </a:ln>
+        </p:spPr>
+      </p:sp>
       <p:graphicFrame>
         <p:nvGraphicFramePr>
-          <p:cNvPr id="5" name="responsibility-matrix"/>
+          <p:cNvPr id="9" name="responsibility-matrix"/>
           <p:cNvGraphicFramePr>
             <a:graphicFrameLocks noGrp="1"/>
           </p:cNvGraphicFramePr>
@@ -7358,21 +7637,21 @@
           </p:nvPr>
         </p:nvGraphicFramePr>
         <p:xfrm>
-          <a:off x="215900" y="2832100"/>
-          <a:ext cx="11658600" cy="1905000"/>
+          <a:off x="215900" y="3035300"/>
+          <a:ext cx="11760200" cy="1892300"/>
         </p:xfrm>
         <a:graphic>
           <a:graphicData uri="http://schemas.openxmlformats.org/drawingml/2006/table">
             <a:tbl>
               <a:tblPr/>
               <a:tblGrid>
-                <a:gridCol w="1841500"/>
-                <a:gridCol w="2444750"/>
-                <a:gridCol w="2476500"/>
-                <a:gridCol w="2444750"/>
-                <a:gridCol w="2451100"/>
+                <a:gridCol w="1866900"/>
+                <a:gridCol w="2317750"/>
+                <a:gridCol w="2520950"/>
+                <a:gridCol w="2514600"/>
+                <a:gridCol w="2540000"/>
               </a:tblGrid>
-              <a:tr h="317500">
+              <a:tr h="330200">
                 <a:tc>
                   <a:txBody>
                     <a:bodyPr>
@@ -7383,14 +7662,14 @@
                       <a:pPr algn="l" indent="0" marL="0">
                         <a:buNone/>
                       </a:pPr>
-                      <a:endParaRPr lang="en-US" sz="950" dirty="0">
+                      <a:endParaRPr lang="en-US" sz="1200" dirty="0">
                         <a:latin typeface="Arial" charset="0"/>
                         <a:ea typeface="Arial" charset="0"/>
                         <a:cs typeface="Arial" charset="0"/>
                       </a:endParaRPr>
                     </a:p>
                   </a:txBody>
-                  <a:tcPr marL="101600" marR="101600" marT="38100" marB="38100" anchor="ctr">
+                  <a:tcPr marL="76200" marR="76200" marT="31750" marB="31750" anchor="ctr">
                     <a:lnL w="6350" cap="flat" cmpd="sng" algn="ctr">
                       <a:solidFill>
                         <a:srgbClr val="C6C9CD"/>
@@ -7439,11 +7718,11 @@
                     </a:bodyPr>
                     <a:lstStyle/>
                     <a:p>
-                      <a:pPr algn="ctr" indent="0" marL="0">
+                      <a:pPr algn="l" indent="0" marL="0">
                         <a:buNone/>
                       </a:pPr>
                       <a:r>
-                        <a:rPr lang="en-US" sz="950" b="1" dirty="0">
+                        <a:rPr lang="en-US" sz="1200" b="1" dirty="0">
                           <a:solidFill>
                             <a:srgbClr val="FFFFFF"/>
                           </a:solidFill>
@@ -7453,14 +7732,14 @@
                         </a:rPr>
                         <a:t>Approved sources</a:t>
                       </a:r>
-                      <a:endParaRPr lang="en-US" sz="950" dirty="0">
+                      <a:endParaRPr lang="en-US" sz="1200" dirty="0">
                         <a:latin typeface="Arial" charset="0"/>
                         <a:ea typeface="Arial" charset="0"/>
                         <a:cs typeface="Arial" charset="0"/>
                       </a:endParaRPr>
                     </a:p>
                   </a:txBody>
-                  <a:tcPr marL="101600" marR="101600" marT="38100" marB="38100" anchor="ctr">
+                  <a:tcPr marL="76200" marR="76200" marT="31750" marB="31750" anchor="ctr">
                     <a:lnL w="6350" cap="flat" cmpd="sng" algn="ctr">
                       <a:solidFill>
                         <a:srgbClr val="C6C9CD"/>
@@ -7509,11 +7788,11 @@
                     </a:bodyPr>
                     <a:lstStyle/>
                     <a:p>
-                      <a:pPr algn="ctr" indent="0" marL="0">
+                      <a:pPr algn="l" indent="0" marL="0">
                         <a:buNone/>
                       </a:pPr>
                       <a:r>
-                        <a:rPr lang="en-US" sz="950" b="1" dirty="0">
+                        <a:rPr lang="en-US" sz="1200" b="1" dirty="0">
                           <a:solidFill>
                             <a:srgbClr val="FFFFFF"/>
                           </a:solidFill>
@@ -7523,14 +7802,14 @@
                         </a:rPr>
                         <a:t>Grounded draft</a:t>
                       </a:r>
-                      <a:endParaRPr lang="en-US" sz="950" dirty="0">
+                      <a:endParaRPr lang="en-US" sz="1200" dirty="0">
                         <a:latin typeface="Arial" charset="0"/>
                         <a:ea typeface="Arial" charset="0"/>
                         <a:cs typeface="Arial" charset="0"/>
                       </a:endParaRPr>
                     </a:p>
                   </a:txBody>
-                  <a:tcPr marL="101600" marR="101600" marT="38100" marB="38100" anchor="ctr">
+                  <a:tcPr marL="76200" marR="76200" marT="31750" marB="31750" anchor="ctr">
                     <a:lnL w="6350" cap="flat" cmpd="sng" algn="ctr">
                       <a:solidFill>
                         <a:srgbClr val="C6C9CD"/>
@@ -7579,11 +7858,11 @@
                     </a:bodyPr>
                     <a:lstStyle/>
                     <a:p>
-                      <a:pPr algn="ctr" indent="0" marL="0">
+                      <a:pPr algn="l" indent="0" marL="0">
                         <a:buNone/>
                       </a:pPr>
                       <a:r>
-                        <a:rPr lang="en-US" sz="950" b="1" dirty="0">
+                        <a:rPr lang="en-US" sz="1200" b="1" dirty="0">
                           <a:solidFill>
                             <a:srgbClr val="FFFFFF"/>
                           </a:solidFill>
@@ -7593,14 +7872,14 @@
                         </a:rPr>
                         <a:t>Expert review</a:t>
                       </a:r>
-                      <a:endParaRPr lang="en-US" sz="950" dirty="0">
+                      <a:endParaRPr lang="en-US" sz="1200" dirty="0">
                         <a:latin typeface="Arial" charset="0"/>
                         <a:ea typeface="Arial" charset="0"/>
                         <a:cs typeface="Arial" charset="0"/>
                       </a:endParaRPr>
                     </a:p>
                   </a:txBody>
-                  <a:tcPr marL="101600" marR="101600" marT="38100" marB="38100" anchor="ctr">
+                  <a:tcPr marL="76200" marR="76200" marT="31750" marB="31750" anchor="ctr">
                     <a:lnL w="6350" cap="flat" cmpd="sng" algn="ctr">
                       <a:solidFill>
                         <a:srgbClr val="C6C9CD"/>
@@ -7649,11 +7928,11 @@
                     </a:bodyPr>
                     <a:lstStyle/>
                     <a:p>
-                      <a:pPr algn="ctr" indent="0" marL="0">
+                      <a:pPr algn="l" indent="0" marL="0">
                         <a:buNone/>
                       </a:pPr>
                       <a:r>
-                        <a:rPr lang="en-US" sz="950" b="1" dirty="0">
+                        <a:rPr lang="en-US" sz="1200" b="1" dirty="0">
                           <a:solidFill>
                             <a:srgbClr val="FFFFFF"/>
                           </a:solidFill>
@@ -7663,14 +7942,14 @@
                         </a:rPr>
                         <a:t>Client-ready output</a:t>
                       </a:r>
-                      <a:endParaRPr lang="en-US" sz="950" dirty="0">
+                      <a:endParaRPr lang="en-US" sz="1200" dirty="0">
                         <a:latin typeface="Arial" charset="0"/>
                         <a:ea typeface="Arial" charset="0"/>
                         <a:cs typeface="Arial" charset="0"/>
                       </a:endParaRPr>
                     </a:p>
                   </a:txBody>
-                  <a:tcPr marL="101600" marR="101600" marT="38100" marB="38100" anchor="ctr">
+                  <a:tcPr marL="76200" marR="76200" marT="31750" marB="31750" anchor="ctr">
                     <a:lnL w="6350" cap="flat" cmpd="sng" algn="ctr">
                       <a:solidFill>
                         <a:srgbClr val="C6C9CD"/>
@@ -7713,7 +7992,7 @@
                   </a:tcPr>
                 </a:tc>
               </a:tr>
-              <a:tr h="368300">
+              <a:tr h="330200">
                 <a:tc>
                   <a:txBody>
                     <a:bodyPr>
@@ -7725,7 +8004,7 @@
                         <a:buNone/>
                       </a:pPr>
                       <a:r>
-                        <a:rPr lang="en-US" sz="950" b="1" dirty="0">
+                        <a:rPr lang="en-US" sz="1200" b="1" dirty="0">
                           <a:solidFill>
                             <a:srgbClr val="000000"/>
                           </a:solidFill>
@@ -7735,14 +8014,14 @@
                         </a:rPr>
                         <a:t>INPUT</a:t>
                       </a:r>
-                      <a:endParaRPr lang="en-US" sz="950" dirty="0">
+                      <a:endParaRPr lang="en-US" sz="1200" dirty="0">
                         <a:latin typeface="Arial" charset="0"/>
                         <a:ea typeface="Arial" charset="0"/>
                         <a:cs typeface="Arial" charset="0"/>
                       </a:endParaRPr>
                     </a:p>
                   </a:txBody>
-                  <a:tcPr marL="101600" marR="101600" marT="38100" marB="38100" anchor="ctr">
+                  <a:tcPr marL="76200" marR="76200" marT="31750" marB="31750" anchor="ctr">
                     <a:lnL w="6350" cap="flat" cmpd="sng" algn="ctr">
                       <a:solidFill>
                         <a:srgbClr val="C6C9CD"/>
@@ -7791,11 +8070,11 @@
                     </a:bodyPr>
                     <a:lstStyle/>
                     <a:p>
-                      <a:pPr algn="ctr" indent="0" marL="0">
+                      <a:pPr algn="l" indent="0" marL="0">
                         <a:buNone/>
                       </a:pPr>
                       <a:r>
-                        <a:rPr lang="en-US" sz="950" dirty="0">
+                        <a:rPr lang="en-US" sz="1200" dirty="0">
                           <a:solidFill>
                             <a:srgbClr val="000000"/>
                           </a:solidFill>
@@ -7805,14 +8084,14 @@
                         </a:rPr>
                         <a:t>Corpus request</a:t>
                       </a:r>
-                      <a:endParaRPr lang="en-US" sz="950" dirty="0">
+                      <a:endParaRPr lang="en-US" sz="1200" dirty="0">
                         <a:latin typeface="Arial" charset="0"/>
                         <a:ea typeface="Arial" charset="0"/>
                         <a:cs typeface="Arial" charset="0"/>
                       </a:endParaRPr>
                     </a:p>
                   </a:txBody>
-                  <a:tcPr marL="101600" marR="101600" marT="38100" marB="38100" anchor="ctr">
+                  <a:tcPr marL="76200" marR="76200" marT="31750" marB="31750" anchor="ctr">
                     <a:lnL w="6350" cap="flat" cmpd="sng" algn="ctr">
                       <a:solidFill>
                         <a:srgbClr val="C6C9CD"/>
@@ -7861,11 +8140,11 @@
                     </a:bodyPr>
                     <a:lstStyle/>
                     <a:p>
-                      <a:pPr algn="ctr" indent="0" marL="0">
+                      <a:pPr algn="l" indent="0" marL="0">
                         <a:buNone/>
                       </a:pPr>
                       <a:r>
-                        <a:rPr lang="en-US" sz="950" dirty="0">
+                        <a:rPr lang="en-US" sz="1200" dirty="0">
                           <a:solidFill>
                             <a:srgbClr val="000000"/>
                           </a:solidFill>
@@ -7875,14 +8154,14 @@
                         </a:rPr>
                         <a:t>Source pack + task brief</a:t>
                       </a:r>
-                      <a:endParaRPr lang="en-US" sz="950" dirty="0">
+                      <a:endParaRPr lang="en-US" sz="1200" dirty="0">
                         <a:latin typeface="Arial" charset="0"/>
                         <a:ea typeface="Arial" charset="0"/>
                         <a:cs typeface="Arial" charset="0"/>
                       </a:endParaRPr>
                     </a:p>
                   </a:txBody>
-                  <a:tcPr marL="101600" marR="101600" marT="38100" marB="38100" anchor="ctr">
+                  <a:tcPr marL="76200" marR="76200" marT="31750" marB="31750" anchor="ctr">
                     <a:lnL w="6350" cap="flat" cmpd="sng" algn="ctr">
                       <a:solidFill>
                         <a:srgbClr val="C6C9CD"/>
@@ -7931,11 +8210,11 @@
                     </a:bodyPr>
                     <a:lstStyle/>
                     <a:p>
-                      <a:pPr algn="ctr" indent="0" marL="0">
+                      <a:pPr algn="l" indent="0" marL="0">
                         <a:buNone/>
                       </a:pPr>
                       <a:r>
-                        <a:rPr lang="en-US" sz="950" dirty="0">
+                        <a:rPr lang="en-US" sz="1200" dirty="0">
                           <a:solidFill>
                             <a:srgbClr val="000000"/>
                           </a:solidFill>
@@ -7945,14 +8224,14 @@
                         </a:rPr>
                         <a:t>Draft + evidence trail</a:t>
                       </a:r>
-                      <a:endParaRPr lang="en-US" sz="950" dirty="0">
+                      <a:endParaRPr lang="en-US" sz="1200" dirty="0">
                         <a:latin typeface="Arial" charset="0"/>
                         <a:ea typeface="Arial" charset="0"/>
                         <a:cs typeface="Arial" charset="0"/>
                       </a:endParaRPr>
                     </a:p>
                   </a:txBody>
-                  <a:tcPr marL="101600" marR="101600" marT="38100" marB="38100" anchor="ctr">
+                  <a:tcPr marL="76200" marR="76200" marT="31750" marB="31750" anchor="ctr">
                     <a:lnL w="6350" cap="flat" cmpd="sng" algn="ctr">
                       <a:solidFill>
                         <a:srgbClr val="C6C9CD"/>
@@ -8001,11 +8280,11 @@
                     </a:bodyPr>
                     <a:lstStyle/>
                     <a:p>
-                      <a:pPr algn="ctr" indent="0" marL="0">
+                      <a:pPr algn="l" indent="0" marL="0">
                         <a:buNone/>
                       </a:pPr>
                       <a:r>
-                        <a:rPr lang="en-US" sz="950" dirty="0">
+                        <a:rPr lang="en-US" sz="1200" dirty="0">
                           <a:solidFill>
                             <a:srgbClr val="000000"/>
                           </a:solidFill>
@@ -8015,14 +8294,14 @@
                         </a:rPr>
                         <a:t>Signed draft + resolved defects</a:t>
                       </a:r>
-                      <a:endParaRPr lang="en-US" sz="950" dirty="0">
+                      <a:endParaRPr lang="en-US" sz="1200" dirty="0">
                         <a:latin typeface="Arial" charset="0"/>
                         <a:ea typeface="Arial" charset="0"/>
                         <a:cs typeface="Arial" charset="0"/>
                       </a:endParaRPr>
                     </a:p>
                   </a:txBody>
-                  <a:tcPr marL="101600" marR="101600" marT="38100" marB="38100" anchor="ctr">
+                  <a:tcPr marL="76200" marR="76200" marT="31750" marB="31750" anchor="ctr">
                     <a:lnL w="6350" cap="flat" cmpd="sng" algn="ctr">
                       <a:solidFill>
                         <a:srgbClr val="C6C9CD"/>
@@ -8065,7 +8344,7 @@
                   </a:tcPr>
                 </a:tc>
               </a:tr>
-              <a:tr h="368300">
+              <a:tr h="355600">
                 <a:tc>
                   <a:txBody>
                     <a:bodyPr>
@@ -8077,7 +8356,7 @@
                         <a:buNone/>
                       </a:pPr>
                       <a:r>
-                        <a:rPr lang="en-US" sz="950" b="1" dirty="0">
+                        <a:rPr lang="en-US" sz="1200" b="1" dirty="0">
                           <a:solidFill>
                             <a:srgbClr val="000000"/>
                           </a:solidFill>
@@ -8087,14 +8366,14 @@
                         </a:rPr>
                         <a:t>OUTPUT</a:t>
                       </a:r>
-                      <a:endParaRPr lang="en-US" sz="950" dirty="0">
+                      <a:endParaRPr lang="en-US" sz="1200" dirty="0">
                         <a:latin typeface="Arial" charset="0"/>
                         <a:ea typeface="Arial" charset="0"/>
                         <a:cs typeface="Arial" charset="0"/>
                       </a:endParaRPr>
                     </a:p>
                   </a:txBody>
-                  <a:tcPr marL="101600" marR="101600" marT="38100" marB="38100" anchor="ctr">
+                  <a:tcPr marL="76200" marR="76200" marT="31750" marB="31750" anchor="ctr">
                     <a:lnL w="6350" cap="flat" cmpd="sng" algn="ctr">
                       <a:solidFill>
                         <a:srgbClr val="C6C9CD"/>
@@ -8143,11 +8422,11 @@
                     </a:bodyPr>
                     <a:lstStyle/>
                     <a:p>
-                      <a:pPr algn="ctr" indent="0" marL="0">
+                      <a:pPr algn="l" indent="0" marL="0">
                         <a:buNone/>
                       </a:pPr>
                       <a:r>
-                        <a:rPr lang="en-US" sz="950" dirty="0">
+                        <a:rPr lang="en-US" sz="1200" dirty="0">
                           <a:solidFill>
                             <a:srgbClr val="000000"/>
                           </a:solidFill>
@@ -8157,14 +8436,14 @@
                         </a:rPr>
                         <a:t>Versioned source pack</a:t>
                       </a:r>
-                      <a:endParaRPr lang="en-US" sz="950" dirty="0">
+                      <a:endParaRPr lang="en-US" sz="1200" dirty="0">
                         <a:latin typeface="Arial" charset="0"/>
                         <a:ea typeface="Arial" charset="0"/>
                         <a:cs typeface="Arial" charset="0"/>
                       </a:endParaRPr>
                     </a:p>
                   </a:txBody>
-                  <a:tcPr marL="101600" marR="101600" marT="38100" marB="38100" anchor="ctr">
+                  <a:tcPr marL="76200" marR="76200" marT="31750" marB="31750" anchor="ctr">
                     <a:lnL w="6350" cap="flat" cmpd="sng" algn="ctr">
                       <a:solidFill>
                         <a:srgbClr val="C6C9CD"/>
@@ -8213,11 +8492,11 @@
                     </a:bodyPr>
                     <a:lstStyle/>
                     <a:p>
-                      <a:pPr algn="ctr" indent="0" marL="0">
+                      <a:pPr algn="l" indent="0" marL="0">
                         <a:buNone/>
                       </a:pPr>
                       <a:r>
-                        <a:rPr lang="en-US" sz="950" dirty="0">
+                        <a:rPr lang="en-US" sz="1200" dirty="0">
                           <a:solidFill>
                             <a:srgbClr val="000000"/>
                           </a:solidFill>
@@ -8227,14 +8506,14 @@
                         </a:rPr>
                         <a:t>Cited draft + uncertainty flags</a:t>
                       </a:r>
-                      <a:endParaRPr lang="en-US" sz="950" dirty="0">
+                      <a:endParaRPr lang="en-US" sz="1200" dirty="0">
                         <a:latin typeface="Arial" charset="0"/>
                         <a:ea typeface="Arial" charset="0"/>
                         <a:cs typeface="Arial" charset="0"/>
                       </a:endParaRPr>
                     </a:p>
                   </a:txBody>
-                  <a:tcPr marL="101600" marR="101600" marT="38100" marB="38100" anchor="ctr">
+                  <a:tcPr marL="76200" marR="76200" marT="31750" marB="31750" anchor="ctr">
                     <a:lnL w="6350" cap="flat" cmpd="sng" algn="ctr">
                       <a:solidFill>
                         <a:srgbClr val="C6C9CD"/>
@@ -8283,11 +8562,11 @@
                     </a:bodyPr>
                     <a:lstStyle/>
                     <a:p>
-                      <a:pPr algn="ctr" indent="0" marL="0">
+                      <a:pPr algn="l" indent="0" marL="0">
                         <a:buNone/>
                       </a:pPr>
                       <a:r>
-                        <a:rPr lang="en-US" sz="950" dirty="0">
+                        <a:rPr lang="en-US" sz="1200" dirty="0">
                           <a:solidFill>
                             <a:srgbClr val="000000"/>
                           </a:solidFill>
@@ -8297,14 +8576,14 @@
                         </a:rPr>
                         <a:t>Signed review or defect log</a:t>
                       </a:r>
-                      <a:endParaRPr lang="en-US" sz="950" dirty="0">
+                      <a:endParaRPr lang="en-US" sz="1200" dirty="0">
                         <a:latin typeface="Arial" charset="0"/>
                         <a:ea typeface="Arial" charset="0"/>
                         <a:cs typeface="Arial" charset="0"/>
                       </a:endParaRPr>
                     </a:p>
                   </a:txBody>
-                  <a:tcPr marL="101600" marR="101600" marT="38100" marB="38100" anchor="ctr">
+                  <a:tcPr marL="76200" marR="76200" marT="31750" marB="31750" anchor="ctr">
                     <a:lnL w="6350" cap="flat" cmpd="sng" algn="ctr">
                       <a:solidFill>
                         <a:srgbClr val="C6C9CD"/>
@@ -8353,11 +8632,11 @@
                     </a:bodyPr>
                     <a:lstStyle/>
                     <a:p>
-                      <a:pPr algn="ctr" indent="0" marL="0">
+                      <a:pPr algn="l" indent="0" marL="0">
                         <a:buNone/>
                       </a:pPr>
                       <a:r>
-                        <a:rPr lang="en-US" sz="950" dirty="0">
+                        <a:rPr lang="en-US" sz="1200" dirty="0">
                           <a:solidFill>
                             <a:srgbClr val="000000"/>
                           </a:solidFill>
@@ -8367,14 +8646,14 @@
                         </a:rPr>
                         <a:t>Authorized client deliverable</a:t>
                       </a:r>
-                      <a:endParaRPr lang="en-US" sz="950" dirty="0">
+                      <a:endParaRPr lang="en-US" sz="1200" dirty="0">
                         <a:latin typeface="Arial" charset="0"/>
                         <a:ea typeface="Arial" charset="0"/>
                         <a:cs typeface="Arial" charset="0"/>
                       </a:endParaRPr>
                     </a:p>
                   </a:txBody>
-                  <a:tcPr marL="101600" marR="101600" marT="38100" marB="38100" anchor="ctr">
+                  <a:tcPr marL="76200" marR="76200" marT="31750" marB="31750" anchor="ctr">
                     <a:lnL w="6350" cap="flat" cmpd="sng" algn="ctr">
                       <a:solidFill>
                         <a:srgbClr val="C6C9CD"/>
@@ -8417,7 +8696,7 @@
                   </a:tcPr>
                 </a:tc>
               </a:tr>
-              <a:tr h="368300">
+              <a:tr h="336550">
                 <a:tc>
                   <a:txBody>
                     <a:bodyPr>
@@ -8429,7 +8708,7 @@
                         <a:buNone/>
                       </a:pPr>
                       <a:r>
-                        <a:rPr lang="en-US" sz="950" b="1" dirty="0">
+                        <a:rPr lang="en-US" sz="1200" b="1" dirty="0">
                           <a:solidFill>
                             <a:srgbClr val="000000"/>
                           </a:solidFill>
@@ -8439,14 +8718,14 @@
                         </a:rPr>
                         <a:t>OWNER</a:t>
                       </a:r>
-                      <a:endParaRPr lang="en-US" sz="950" dirty="0">
+                      <a:endParaRPr lang="en-US" sz="1200" dirty="0">
                         <a:latin typeface="Arial" charset="0"/>
                         <a:ea typeface="Arial" charset="0"/>
                         <a:cs typeface="Arial" charset="0"/>
                       </a:endParaRPr>
                     </a:p>
                   </a:txBody>
-                  <a:tcPr marL="101600" marR="101600" marT="38100" marB="38100" anchor="ctr">
+                  <a:tcPr marL="76200" marR="76200" marT="31750" marB="31750" anchor="ctr">
                     <a:lnL w="6350" cap="flat" cmpd="sng" algn="ctr">
                       <a:solidFill>
                         <a:srgbClr val="C6C9CD"/>
@@ -8495,11 +8774,11 @@
                     </a:bodyPr>
                     <a:lstStyle/>
                     <a:p>
-                      <a:pPr algn="ctr" indent="0" marL="0">
+                      <a:pPr algn="l" indent="0" marL="0">
                         <a:buNone/>
                       </a:pPr>
                       <a:r>
-                        <a:rPr lang="en-US" sz="950" dirty="0">
+                        <a:rPr lang="en-US" sz="1200" dirty="0">
                           <a:solidFill>
                             <a:srgbClr val="000000"/>
                           </a:solidFill>
@@ -8509,14 +8788,14 @@
                         </a:rPr>
                         <a:t>Source steward</a:t>
                       </a:r>
-                      <a:endParaRPr lang="en-US" sz="950" dirty="0">
+                      <a:endParaRPr lang="en-US" sz="1200" dirty="0">
                         <a:latin typeface="Arial" charset="0"/>
                         <a:ea typeface="Arial" charset="0"/>
                         <a:cs typeface="Arial" charset="0"/>
                       </a:endParaRPr>
                     </a:p>
                   </a:txBody>
-                  <a:tcPr marL="101600" marR="101600" marT="38100" marB="38100" anchor="ctr">
+                  <a:tcPr marL="76200" marR="76200" marT="31750" marB="31750" anchor="ctr">
                     <a:lnL w="6350" cap="flat" cmpd="sng" algn="ctr">
                       <a:solidFill>
                         <a:srgbClr val="C6C9CD"/>
@@ -8565,11 +8844,11 @@
                     </a:bodyPr>
                     <a:lstStyle/>
                     <a:p>
-                      <a:pPr algn="ctr" indent="0" marL="0">
+                      <a:pPr algn="l" indent="0" marL="0">
                         <a:buNone/>
                       </a:pPr>
                       <a:r>
-                        <a:rPr lang="en-US" sz="950" dirty="0">
+                        <a:rPr lang="en-US" sz="1200" dirty="0">
                           <a:solidFill>
                             <a:srgbClr val="000000"/>
                           </a:solidFill>
@@ -8579,14 +8858,14 @@
                         </a:rPr>
                         <a:t>Engagement team</a:t>
                       </a:r>
-                      <a:endParaRPr lang="en-US" sz="950" dirty="0">
+                      <a:endParaRPr lang="en-US" sz="1200" dirty="0">
                         <a:latin typeface="Arial" charset="0"/>
                         <a:ea typeface="Arial" charset="0"/>
                         <a:cs typeface="Arial" charset="0"/>
                       </a:endParaRPr>
                     </a:p>
                   </a:txBody>
-                  <a:tcPr marL="101600" marR="101600" marT="38100" marB="38100" anchor="ctr">
+                  <a:tcPr marL="76200" marR="76200" marT="31750" marB="31750" anchor="ctr">
                     <a:lnL w="6350" cap="flat" cmpd="sng" algn="ctr">
                       <a:solidFill>
                         <a:srgbClr val="C6C9CD"/>
@@ -8635,11 +8914,11 @@
                     </a:bodyPr>
                     <a:lstStyle/>
                     <a:p>
-                      <a:pPr algn="ctr" indent="0" marL="0">
+                      <a:pPr algn="l" indent="0" marL="0">
                         <a:buNone/>
                       </a:pPr>
                       <a:r>
-                        <a:rPr lang="en-US" sz="950" dirty="0">
+                        <a:rPr lang="en-US" sz="1200" dirty="0">
                           <a:solidFill>
                             <a:srgbClr val="000000"/>
                           </a:solidFill>
@@ -8649,14 +8928,14 @@
                         </a:rPr>
                         <a:t>Expert reviewer</a:t>
                       </a:r>
-                      <a:endParaRPr lang="en-US" sz="950" dirty="0">
+                      <a:endParaRPr lang="en-US" sz="1200" dirty="0">
                         <a:latin typeface="Arial" charset="0"/>
                         <a:ea typeface="Arial" charset="0"/>
                         <a:cs typeface="Arial" charset="0"/>
                       </a:endParaRPr>
                     </a:p>
                   </a:txBody>
-                  <a:tcPr marL="101600" marR="101600" marT="38100" marB="38100" anchor="ctr">
+                  <a:tcPr marL="76200" marR="76200" marT="31750" marB="31750" anchor="ctr">
                     <a:lnL w="6350" cap="flat" cmpd="sng" algn="ctr">
                       <a:solidFill>
                         <a:srgbClr val="C6C9CD"/>
@@ -8705,11 +8984,11 @@
                     </a:bodyPr>
                     <a:lstStyle/>
                     <a:p>
-                      <a:pPr algn="ctr" indent="0" marL="0">
+                      <a:pPr algn="l" indent="0" marL="0">
                         <a:buNone/>
                       </a:pPr>
                       <a:r>
-                        <a:rPr lang="en-US" sz="950" dirty="0">
+                        <a:rPr lang="en-US" sz="1200" dirty="0">
                           <a:solidFill>
                             <a:srgbClr val="000000"/>
                           </a:solidFill>
@@ -8719,14 +8998,14 @@
                         </a:rPr>
                         <a:t>Engagement lead</a:t>
                       </a:r>
-                      <a:endParaRPr lang="en-US" sz="950" dirty="0">
+                      <a:endParaRPr lang="en-US" sz="1200" dirty="0">
                         <a:latin typeface="Arial" charset="0"/>
                         <a:ea typeface="Arial" charset="0"/>
                         <a:cs typeface="Arial" charset="0"/>
                       </a:endParaRPr>
                     </a:p>
                   </a:txBody>
-                  <a:tcPr marL="101600" marR="101600" marT="38100" marB="38100" anchor="ctr">
+                  <a:tcPr marL="76200" marR="76200" marT="31750" marB="31750" anchor="ctr">
                     <a:lnL w="6350" cap="flat" cmpd="sng" algn="ctr">
                       <a:solidFill>
                         <a:srgbClr val="C6C9CD"/>
@@ -8769,7 +9048,7 @@
                   </a:tcPr>
                 </a:tc>
               </a:tr>
-              <a:tr h="482600">
+              <a:tr h="539750">
                 <a:tc>
                   <a:txBody>
                     <a:bodyPr>
@@ -8781,7 +9060,7 @@
                         <a:buNone/>
                       </a:pPr>
                       <a:r>
-                        <a:rPr lang="en-US" sz="950" b="1" dirty="0">
+                        <a:rPr lang="en-US" sz="1200" b="1" dirty="0">
                           <a:solidFill>
                             <a:srgbClr val="000000"/>
                           </a:solidFill>
@@ -8791,14 +9070,14 @@
                         </a:rPr>
                         <a:t>RELEASE CONTROL</a:t>
                       </a:r>
-                      <a:endParaRPr lang="en-US" sz="950" dirty="0">
+                      <a:endParaRPr lang="en-US" sz="1200" dirty="0">
                         <a:latin typeface="Arial" charset="0"/>
                         <a:ea typeface="Arial" charset="0"/>
                         <a:cs typeface="Arial" charset="0"/>
                       </a:endParaRPr>
                     </a:p>
                   </a:txBody>
-                  <a:tcPr marL="101600" marR="101600" marT="38100" marB="38100" anchor="ctr">
+                  <a:tcPr marL="76200" marR="76200" marT="31750" marB="31750" anchor="ctr">
                     <a:lnL w="6350" cap="flat" cmpd="sng" algn="ctr">
                       <a:solidFill>
                         <a:srgbClr val="C6C9CD"/>
@@ -8847,11 +9126,11 @@
                     </a:bodyPr>
                     <a:lstStyle/>
                     <a:p>
-                      <a:pPr algn="ctr" indent="0" marL="0">
+                      <a:pPr algn="l" indent="0" marL="0">
                         <a:buNone/>
                       </a:pPr>
                       <a:r>
-                        <a:rPr lang="en-US" sz="950" dirty="0">
+                        <a:rPr lang="en-US" sz="1200" dirty="0">
                           <a:solidFill>
                             <a:srgbClr val="000000"/>
                           </a:solidFill>
@@ -8861,18 +9140,18 @@
                         </a:rPr>
                         <a:t>Verify permissions</a:t>
                       </a:r>
-                      <a:endParaRPr lang="en-US" sz="950" dirty="0">
+                      <a:endParaRPr lang="en-US" sz="1200" dirty="0">
                         <a:latin typeface="Arial" charset="0"/>
                         <a:ea typeface="Arial" charset="0"/>
                         <a:cs typeface="Arial" charset="0"/>
                       </a:endParaRPr>
                     </a:p>
                     <a:p>
-                      <a:pPr algn="ctr" indent="0" marL="0">
+                      <a:pPr algn="l" indent="0" marL="0">
                         <a:buNone/>
                       </a:pPr>
                       <a:r>
-                        <a:rPr lang="en-US" sz="950" dirty="0">
+                        <a:rPr lang="en-US" sz="1200" dirty="0">
                           <a:solidFill>
                             <a:srgbClr val="000000"/>
                           </a:solidFill>
@@ -8882,14 +9161,14 @@
                         </a:rPr>
                         <a:t>and dates</a:t>
                       </a:r>
-                      <a:endParaRPr lang="en-US" sz="950" dirty="0">
+                      <a:endParaRPr lang="en-US" sz="1200" dirty="0">
                         <a:latin typeface="Arial" charset="0"/>
                         <a:ea typeface="Arial" charset="0"/>
                         <a:cs typeface="Arial" charset="0"/>
                       </a:endParaRPr>
                     </a:p>
                   </a:txBody>
-                  <a:tcPr marL="101600" marR="101600" marT="38100" marB="38100" anchor="ctr">
+                  <a:tcPr marL="76200" marR="76200" marT="31750" marB="31750" anchor="ctr">
                     <a:lnL w="6350" cap="flat" cmpd="sng" algn="ctr">
                       <a:solidFill>
                         <a:srgbClr val="C6C9CD"/>
@@ -8938,11 +9217,11 @@
                     </a:bodyPr>
                     <a:lstStyle/>
                     <a:p>
-                      <a:pPr algn="ctr" indent="0" marL="0">
+                      <a:pPr algn="l" indent="0" marL="0">
                         <a:buNone/>
                       </a:pPr>
                       <a:r>
-                        <a:rPr lang="en-US" sz="950" dirty="0">
+                        <a:rPr lang="en-US" sz="1200" dirty="0">
                           <a:solidFill>
                             <a:srgbClr val="000000"/>
                           </a:solidFill>
@@ -8952,18 +9231,18 @@
                         </a:rPr>
                         <a:t>Check citations</a:t>
                       </a:r>
-                      <a:endParaRPr lang="en-US" sz="950" dirty="0">
+                      <a:endParaRPr lang="en-US" sz="1200" dirty="0">
                         <a:latin typeface="Arial" charset="0"/>
                         <a:ea typeface="Arial" charset="0"/>
                         <a:cs typeface="Arial" charset="0"/>
                       </a:endParaRPr>
                     </a:p>
                     <a:p>
-                      <a:pPr algn="ctr" indent="0" marL="0">
+                      <a:pPr algn="l" indent="0" marL="0">
                         <a:buNone/>
                       </a:pPr>
                       <a:r>
-                        <a:rPr lang="en-US" sz="950" dirty="0">
+                        <a:rPr lang="en-US" sz="1200" dirty="0">
                           <a:solidFill>
                             <a:srgbClr val="000000"/>
                           </a:solidFill>
@@ -8973,14 +9252,14 @@
                         </a:rPr>
                         <a:t>and evidence gaps</a:t>
                       </a:r>
-                      <a:endParaRPr lang="en-US" sz="950" dirty="0">
+                      <a:endParaRPr lang="en-US" sz="1200" dirty="0">
                         <a:latin typeface="Arial" charset="0"/>
                         <a:ea typeface="Arial" charset="0"/>
                         <a:cs typeface="Arial" charset="0"/>
                       </a:endParaRPr>
                     </a:p>
                   </a:txBody>
-                  <a:tcPr marL="101600" marR="101600" marT="38100" marB="38100" anchor="ctr">
+                  <a:tcPr marL="76200" marR="76200" marT="31750" marB="31750" anchor="ctr">
                     <a:lnL w="6350" cap="flat" cmpd="sng" algn="ctr">
                       <a:solidFill>
                         <a:srgbClr val="C6C9CD"/>
@@ -9029,11 +9308,11 @@
                     </a:bodyPr>
                     <a:lstStyle/>
                     <a:p>
-                      <a:pPr algn="ctr" indent="0" marL="0">
+                      <a:pPr algn="l" indent="0" marL="0">
                         <a:buNone/>
                       </a:pPr>
                       <a:r>
-                        <a:rPr lang="en-US" sz="950" dirty="0">
+                        <a:rPr lang="en-US" sz="1200" dirty="0">
                           <a:solidFill>
                             <a:srgbClr val="000000"/>
                           </a:solidFill>
@@ -9043,18 +9322,18 @@
                         </a:rPr>
                         <a:t>Validate claims</a:t>
                       </a:r>
-                      <a:endParaRPr lang="en-US" sz="950" dirty="0">
+                      <a:endParaRPr lang="en-US" sz="1200" dirty="0">
                         <a:latin typeface="Arial" charset="0"/>
                         <a:ea typeface="Arial" charset="0"/>
                         <a:cs typeface="Arial" charset="0"/>
                       </a:endParaRPr>
                     </a:p>
                     <a:p>
-                      <a:pPr algn="ctr" indent="0" marL="0">
+                      <a:pPr algn="l" indent="0" marL="0">
                         <a:buNone/>
                       </a:pPr>
                       <a:r>
-                        <a:rPr lang="en-US" sz="950" dirty="0">
+                        <a:rPr lang="en-US" sz="1200" dirty="0">
                           <a:solidFill>
                             <a:srgbClr val="000000"/>
                           </a:solidFill>
@@ -9064,14 +9343,14 @@
                         </a:rPr>
                         <a:t>and quality</a:t>
                       </a:r>
-                      <a:endParaRPr lang="en-US" sz="950" dirty="0">
+                      <a:endParaRPr lang="en-US" sz="1200" dirty="0">
                         <a:latin typeface="Arial" charset="0"/>
                         <a:ea typeface="Arial" charset="0"/>
                         <a:cs typeface="Arial" charset="0"/>
                       </a:endParaRPr>
                     </a:p>
                   </a:txBody>
-                  <a:tcPr marL="101600" marR="101600" marT="38100" marB="38100" anchor="ctr">
+                  <a:tcPr marL="76200" marR="76200" marT="31750" marB="31750" anchor="ctr">
                     <a:lnL w="6350" cap="flat" cmpd="sng" algn="ctr">
                       <a:solidFill>
                         <a:srgbClr val="C6C9CD"/>
@@ -9120,11 +9399,11 @@
                     </a:bodyPr>
                     <a:lstStyle/>
                     <a:p>
-                      <a:pPr algn="ctr" indent="0" marL="0">
+                      <a:pPr algn="l" indent="0" marL="0">
                         <a:buNone/>
                       </a:pPr>
                       <a:r>
-                        <a:rPr lang="en-US" sz="950" dirty="0">
+                        <a:rPr lang="en-US" sz="1200" dirty="0">
                           <a:solidFill>
                             <a:srgbClr val="000000"/>
                           </a:solidFill>
@@ -9134,18 +9413,18 @@
                         </a:rPr>
                         <a:t>Confirm release</a:t>
                       </a:r>
-                      <a:endParaRPr lang="en-US" sz="950" dirty="0">
+                      <a:endParaRPr lang="en-US" sz="1200" dirty="0">
                         <a:latin typeface="Arial" charset="0"/>
                         <a:ea typeface="Arial" charset="0"/>
                         <a:cs typeface="Arial" charset="0"/>
                       </a:endParaRPr>
                     </a:p>
                     <a:p>
-                      <a:pPr algn="ctr" indent="0" marL="0">
+                      <a:pPr algn="l" indent="0" marL="0">
                         <a:buNone/>
                       </a:pPr>
                       <a:r>
-                        <a:rPr lang="en-US" sz="950" dirty="0">
+                        <a:rPr lang="en-US" sz="1200" dirty="0">
                           <a:solidFill>
                             <a:srgbClr val="000000"/>
                           </a:solidFill>
@@ -9155,14 +9434,14 @@
                         </a:rPr>
                         <a:t>approval</a:t>
                       </a:r>
-                      <a:endParaRPr lang="en-US" sz="950" dirty="0">
+                      <a:endParaRPr lang="en-US" sz="1200" dirty="0">
                         <a:latin typeface="Arial" charset="0"/>
                         <a:ea typeface="Arial" charset="0"/>
                         <a:cs typeface="Arial" charset="0"/>
                       </a:endParaRPr>
                     </a:p>
                   </a:txBody>
-                  <a:tcPr marL="101600" marR="101600" marT="38100" marB="38100" anchor="ctr">
+                  <a:tcPr marL="76200" marR="76200" marT="31750" marB="31750" anchor="ctr">
                     <a:lnL w="6350" cap="flat" cmpd="sng" algn="ctr">
                       <a:solidFill>
                         <a:srgbClr val="C6C9CD"/>
@@ -9211,14 +9490,14 @@
       </p:graphicFrame>
       <p:cxnSp>
         <p:nvCxnSpPr>
-          <p:cNvPr id="6" name="SC_CONNECTOR__forward-1__0"/>
+          <p:cNvPr id="10" name="SC_CONNECTOR__forward-1__0"/>
           <p:cNvCxnSpPr/>
           <p:nvPr/>
         </p:nvCxnSpPr>
         <p:spPr>
           <a:xfrm>
-            <a:off x="1892300" y="1949450"/>
-            <a:ext cx="2247900" cy="0"/>
+            <a:off x="2139950" y="2159000"/>
+            <a:ext cx="2197100" cy="0"/>
           </a:xfrm>
           <a:prstGeom prst="line">
             <a:avLst/>
@@ -9237,14 +9516,14 @@
       </p:cxnSp>
       <p:cxnSp>
         <p:nvCxnSpPr>
-          <p:cNvPr id="7" name="SC_CONNECTOR__forward-2__0"/>
+          <p:cNvPr id="11" name="SC_CONNECTOR__forward-2__0"/>
           <p:cNvCxnSpPr/>
           <p:nvPr/>
         </p:nvCxnSpPr>
         <p:spPr>
           <a:xfrm>
-            <a:off x="4622800" y="1949450"/>
-            <a:ext cx="2660650" cy="0"/>
+            <a:off x="4997450" y="2159000"/>
+            <a:ext cx="2292350" cy="0"/>
           </a:xfrm>
           <a:prstGeom prst="line">
             <a:avLst/>
@@ -9263,14 +9542,14 @@
       </p:cxnSp>
       <p:cxnSp>
         <p:nvCxnSpPr>
-          <p:cNvPr id="8" name="SC_CONNECTOR__forward-3__0"/>
+          <p:cNvPr id="12" name="SC_CONNECTOR__forward-3__0"/>
           <p:cNvCxnSpPr/>
           <p:nvPr/>
         </p:nvCxnSpPr>
         <p:spPr>
           <a:xfrm>
-            <a:off x="7766050" y="1949450"/>
-            <a:ext cx="2216150" cy="0"/>
+            <a:off x="7950200" y="2159000"/>
+            <a:ext cx="2101850" cy="0"/>
           </a:xfrm>
           <a:prstGeom prst="line">
             <a:avLst/>
@@ -9289,7 +9568,107 @@
       </p:cxnSp>
       <p:sp>
         <p:nvSpPr>
-          <p:cNvPr id="9" name="headline"/>
+          <p:cNvPr id="13" name="SC_FREEFORM_ROUTE__source-return__0"/>
+          <p:cNvSpPr/>
+          <p:nvPr/>
+        </p:nvSpPr>
+        <p:spPr>
+          <a:xfrm>
+            <a:off x="1809750" y="1612900"/>
+            <a:ext cx="2758440" cy="215900"/>
+          </a:xfrm>
+          <a:custGeom>
+            <a:avLst/>
+            <a:gdLst/>
+            <a:ahLst/>
+            <a:cxnLst/>
+            <a:rect l="l" t="t" r="r" b="b"/>
+            <a:pathLst>
+              <a:path w="2758440" h="215900">
+                <a:moveTo>
+                  <a:pt x="2758440" y="215900"/>
+                </a:moveTo>
+                <a:lnTo>
+                  <a:pt x="2758440" y="0"/>
+                </a:lnTo>
+                <a:lnTo>
+                  <a:pt x="0" y="0"/>
+                </a:lnTo>
+                <a:lnTo>
+                  <a:pt x="0" y="215900"/>
+                </a:lnTo>
+              </a:path>
+            </a:pathLst>
+          </a:custGeom>
+          <a:solidFill>
+            <a:srgbClr val="FFFFFF">
+              <a:alpha val="0"/>
+            </a:srgbClr>
+          </a:solidFill>
+          <a:ln w="19050">
+            <a:solidFill>
+              <a:srgbClr val="FD5108"/>
+            </a:solidFill>
+            <a:prstDash val="solid"/>
+            <a:round/>
+            <a:headEnd type="none"/>
+            <a:tailEnd type="triangle" w="lg" len="lg"/>
+          </a:ln>
+        </p:spPr>
+      </p:sp>
+      <p:sp>
+        <p:nvSpPr>
+          <p:cNvPr id="14" name="SC_FREEFORM_ROUTE__review-return__0"/>
+          <p:cNvSpPr/>
+          <p:nvPr/>
+        </p:nvSpPr>
+        <p:spPr>
+          <a:xfrm>
+            <a:off x="4832350" y="1612900"/>
+            <a:ext cx="2787650" cy="215900"/>
+          </a:xfrm>
+          <a:custGeom>
+            <a:avLst/>
+            <a:gdLst/>
+            <a:ahLst/>
+            <a:cxnLst/>
+            <a:rect l="l" t="t" r="r" b="b"/>
+            <a:pathLst>
+              <a:path w="2787650" h="215900">
+                <a:moveTo>
+                  <a:pt x="2787650" y="215900"/>
+                </a:moveTo>
+                <a:lnTo>
+                  <a:pt x="2787650" y="0"/>
+                </a:lnTo>
+                <a:lnTo>
+                  <a:pt x="0" y="0"/>
+                </a:lnTo>
+                <a:lnTo>
+                  <a:pt x="0" y="215900"/>
+                </a:lnTo>
+              </a:path>
+            </a:pathLst>
+          </a:custGeom>
+          <a:solidFill>
+            <a:srgbClr val="FFFFFF">
+              <a:alpha val="0"/>
+            </a:srgbClr>
+          </a:solidFill>
+          <a:ln w="19050">
+            <a:solidFill>
+              <a:srgbClr val="FD5108"/>
+            </a:solidFill>
+            <a:prstDash val="solid"/>
+            <a:round/>
+            <a:headEnd type="none"/>
+            <a:tailEnd type="triangle" w="lg" len="lg"/>
+          </a:ln>
+        </p:spPr>
+      </p:sp>
+      <p:sp>
+        <p:nvSpPr>
+          <p:cNvPr id="15" name="headline"/>
           <p:cNvSpPr txBox="1"/>
           <p:nvPr/>
         </p:nvSpPr>
@@ -9334,7 +9713,7 @@
       </p:sp>
       <p:sp>
         <p:nvSpPr>
-          <p:cNvPr id="10" name="subtitle"/>
+          <p:cNvPr id="16" name="subtitle"/>
           <p:cNvSpPr txBox="1"/>
           <p:nvPr/>
         </p:nvSpPr>
@@ -9379,14 +9758,14 @@
       </p:sp>
       <p:sp>
         <p:nvSpPr>
-          <p:cNvPr id="11" name="stage-label-sources"/>
+          <p:cNvPr id="17" name="stage-label-sources"/>
           <p:cNvSpPr txBox="1"/>
           <p:nvPr/>
         </p:nvSpPr>
         <p:spPr>
           <a:xfrm>
-            <a:off x="635000" y="2387600"/>
-            <a:ext cx="2032000" cy="266700"/>
+            <a:off x="603250" y="2635250"/>
+            <a:ext cx="2413000" cy="273050"/>
           </a:xfrm>
           <a:prstGeom prst="rect">
             <a:avLst/>
@@ -9408,7 +9787,7 @@
               <a:defRPr spc="0"/>
             </a:pPr>
             <a:r>
-              <a:rPr lang="en-US" sz="1250" b="1" dirty="0" spc="0">
+              <a:rPr lang="en-US" sz="1400" b="1" dirty="0" spc="0">
                 <a:solidFill>
                   <a:srgbClr val="000000"/>
                 </a:solidFill>
@@ -9418,20 +9797,20 @@
               </a:rPr>
               <a:t>Approved sources</a:t>
             </a:r>
-            <a:endParaRPr lang="en-US" sz="1250" dirty="0" spc="0"/>
+            <a:endParaRPr lang="en-US" sz="1400" dirty="0" spc="0"/>
           </a:p>
         </p:txBody>
       </p:sp>
       <p:sp>
         <p:nvSpPr>
-          <p:cNvPr id="12" name="stage-label-draft"/>
+          <p:cNvPr id="18" name="stage-label-draft"/>
           <p:cNvSpPr txBox="1"/>
           <p:nvPr/>
         </p:nvSpPr>
         <p:spPr>
           <a:xfrm>
-            <a:off x="3365500" y="2387600"/>
-            <a:ext cx="2032000" cy="266700"/>
+            <a:off x="3460750" y="2635250"/>
+            <a:ext cx="2413000" cy="273050"/>
           </a:xfrm>
           <a:prstGeom prst="rect">
             <a:avLst/>
@@ -9453,7 +9832,7 @@
               <a:defRPr spc="0"/>
             </a:pPr>
             <a:r>
-              <a:rPr lang="en-US" sz="1250" b="1" dirty="0" spc="0">
+              <a:rPr lang="en-US" sz="1400" b="1" dirty="0" spc="0">
                 <a:solidFill>
                   <a:srgbClr val="000000"/>
                 </a:solidFill>
@@ -9463,20 +9842,20 @@
               </a:rPr>
               <a:t>Grounded draft</a:t>
             </a:r>
-            <a:endParaRPr lang="en-US" sz="1250" dirty="0" spc="0"/>
+            <a:endParaRPr lang="en-US" sz="1400" dirty="0" spc="0"/>
           </a:p>
         </p:txBody>
       </p:sp>
       <p:sp>
         <p:nvSpPr>
-          <p:cNvPr id="13" name="stage-label-review"/>
+          <p:cNvPr id="19" name="stage-label-review"/>
           <p:cNvSpPr txBox="1"/>
           <p:nvPr/>
         </p:nvSpPr>
         <p:spPr>
           <a:xfrm>
-            <a:off x="6508750" y="2387600"/>
-            <a:ext cx="2032000" cy="266700"/>
+            <a:off x="6413500" y="2635250"/>
+            <a:ext cx="2413000" cy="273050"/>
           </a:xfrm>
           <a:prstGeom prst="rect">
             <a:avLst/>
@@ -9498,7 +9877,7 @@
               <a:defRPr spc="0"/>
             </a:pPr>
             <a:r>
-              <a:rPr lang="en-US" sz="1250" b="1" dirty="0" spc="0">
+              <a:rPr lang="en-US" sz="1400" b="1" dirty="0" spc="0">
                 <a:solidFill>
                   <a:srgbClr val="000000"/>
                 </a:solidFill>
@@ -9508,20 +9887,20 @@
               </a:rPr>
               <a:t>Expert review</a:t>
             </a:r>
-            <a:endParaRPr lang="en-US" sz="1250" dirty="0" spc="0"/>
+            <a:endParaRPr lang="en-US" sz="1400" dirty="0" spc="0"/>
           </a:p>
         </p:txBody>
       </p:sp>
       <p:sp>
         <p:nvSpPr>
-          <p:cNvPr id="14" name="stage-label-output"/>
+          <p:cNvPr id="20" name="stage-label-output"/>
           <p:cNvSpPr txBox="1"/>
           <p:nvPr/>
         </p:nvSpPr>
         <p:spPr>
           <a:xfrm>
-            <a:off x="9207500" y="2387600"/>
-            <a:ext cx="2032000" cy="266700"/>
+            <a:off x="9175750" y="2635250"/>
+            <a:ext cx="2413000" cy="273050"/>
           </a:xfrm>
           <a:prstGeom prst="rect">
             <a:avLst/>
@@ -9543,7 +9922,7 @@
               <a:defRPr spc="0"/>
             </a:pPr>
             <a:r>
-              <a:rPr lang="en-US" sz="1250" b="1" dirty="0" spc="0">
+              <a:rPr lang="en-US" sz="1400" b="1" dirty="0" spc="0">
                 <a:solidFill>
                   <a:srgbClr val="000000"/>
                 </a:solidFill>
@@ -9553,20 +9932,20 @@
               </a:rPr>
               <a:t>Client-ready output</a:t>
             </a:r>
-            <a:endParaRPr lang="en-US" sz="1250" dirty="0" spc="0"/>
+            <a:endParaRPr lang="en-US" sz="1400" dirty="0" spc="0"/>
           </a:p>
         </p:txBody>
       </p:sp>
       <p:sp>
         <p:nvSpPr>
-          <p:cNvPr id="15" name="source-return-label"/>
+          <p:cNvPr id="21" name="source-return-label"/>
           <p:cNvSpPr txBox="1"/>
           <p:nvPr/>
         </p:nvSpPr>
         <p:spPr>
           <a:xfrm>
-            <a:off x="1905000" y="1365250"/>
-            <a:ext cx="2730500" cy="203200"/>
+            <a:off x="2019300" y="1365250"/>
+            <a:ext cx="2527300" cy="209550"/>
           </a:xfrm>
           <a:prstGeom prst="rect">
             <a:avLst/>
@@ -9588,7 +9967,7 @@
               <a:defRPr spc="0"/>
             </a:pPr>
             <a:r>
-              <a:rPr lang="en-US" sz="1050" b="1" dirty="0" spc="0">
+              <a:rPr lang="en-US" sz="1000" b="1" dirty="0" spc="0">
                 <a:solidFill>
                   <a:srgbClr val="000000"/>
                 </a:solidFill>
@@ -9598,20 +9977,20 @@
               </a:rPr>
               <a:t>Correct sources via exception register</a:t>
             </a:r>
-            <a:endParaRPr lang="en-US" sz="1050" dirty="0" spc="0"/>
+            <a:endParaRPr lang="en-US" sz="1000" dirty="0" spc="0"/>
           </a:p>
         </p:txBody>
       </p:sp>
       <p:sp>
         <p:nvSpPr>
-          <p:cNvPr id="16" name="review-return-label"/>
+          <p:cNvPr id="22" name="review-return-label"/>
           <p:cNvSpPr txBox="1"/>
           <p:nvPr/>
         </p:nvSpPr>
         <p:spPr>
           <a:xfrm>
-            <a:off x="5016500" y="1365250"/>
-            <a:ext cx="2730500" cy="203200"/>
+            <a:off x="5060950" y="1365250"/>
+            <a:ext cx="2571750" cy="209550"/>
           </a:xfrm>
           <a:prstGeom prst="rect">
             <a:avLst/>
@@ -9633,7 +10012,7 @@
               <a:defRPr spc="0"/>
             </a:pPr>
             <a:r>
-              <a:rPr lang="en-US" sz="1050" b="1" dirty="0" spc="0">
+              <a:rPr lang="en-US" sz="1000" b="1" dirty="0" spc="0">
                 <a:solidFill>
                   <a:srgbClr val="000000"/>
                 </a:solidFill>
@@ -9643,20 +10022,20 @@
               </a:rPr>
               <a:t>Reject with defect reasons</a:t>
             </a:r>
-            <a:endParaRPr lang="en-US" sz="1050" dirty="0" spc="0"/>
+            <a:endParaRPr lang="en-US" sz="1000" dirty="0" spc="0"/>
           </a:p>
         </p:txBody>
       </p:sp>
       <p:sp>
         <p:nvSpPr>
-          <p:cNvPr id="17" name="shared-controls-heading"/>
+          <p:cNvPr id="23" name="shared-controls-heading"/>
           <p:cNvSpPr txBox="1"/>
           <p:nvPr/>
         </p:nvSpPr>
         <p:spPr>
           <a:xfrm>
-            <a:off x="292100" y="4851400"/>
-            <a:ext cx="5016500" cy="222250"/>
+            <a:off x="292100" y="4978400"/>
+            <a:ext cx="5016500" cy="228600"/>
           </a:xfrm>
           <a:prstGeom prst="rect">
             <a:avLst/>
@@ -9678,7 +10057,7 @@
               <a:defRPr spc="0"/>
             </a:pPr>
             <a:r>
-              <a:rPr lang="en-US" sz="1250" b="1" dirty="0" spc="0">
+              <a:rPr lang="en-US" sz="1400" b="1" dirty="0" spc="0">
                 <a:solidFill>
                   <a:srgbClr val="000000"/>
                 </a:solidFill>
@@ -9688,86 +10067,20 @@
               </a:rPr>
               <a:t>SHARED CONTROLS</a:t>
             </a:r>
-            <a:endParaRPr lang="en-US" sz="1250" dirty="0" spc="0"/>
+            <a:endParaRPr lang="en-US" sz="1400" dirty="0" spc="0"/>
           </a:p>
         </p:txBody>
       </p:sp>
       <p:sp>
         <p:nvSpPr>
-          <p:cNvPr id="18" name="shared-controls"/>
+          <p:cNvPr id="24" name="measurement-heading"/>
           <p:cNvSpPr txBox="1"/>
           <p:nvPr/>
         </p:nvSpPr>
         <p:spPr>
           <a:xfrm>
-            <a:off x="292100" y="5092700"/>
-            <a:ext cx="5080000" cy="444500"/>
-          </a:xfrm>
-          <a:prstGeom prst="rect">
-            <a:avLst/>
-          </a:prstGeom>
-          <a:noFill/>
-          <a:ln/>
-        </p:spPr>
-        <p:txBody>
-          <a:bodyPr wrap="square" lIns="12700" tIns="12700" rIns="12700" bIns="12700" rtlCol="0" anchor="t">
-            <a:noAutofit/>
-          </a:bodyPr>
-          <a:lstStyle/>
-          <a:p>
-            <a:pPr algn="l" indent="0" marL="0">
-              <a:lnSpc>
-                <a:spcPct val="115000"/>
-              </a:lnSpc>
-              <a:buNone/>
-              <a:defRPr spc="0"/>
-            </a:pPr>
-            <a:r>
-              <a:rPr lang="en-US" sz="1050" dirty="0" spc="0">
-                <a:solidFill>
-                  <a:srgbClr val="000000"/>
-                </a:solidFill>
-                <a:latin typeface="Arial" pitchFamily="34" charset="0"/>
-                <a:ea typeface="Arial" pitchFamily="34" charset="-122"/>
-                <a:cs typeface="Arial" pitchFamily="34" charset="-120"/>
-              </a:rPr>
-              <a:t>• One register records defects, owners and disposition.</a:t>
-            </a:r>
-            <a:endParaRPr lang="en-US" sz="1050" dirty="0" spc="0"/>
-          </a:p>
-          <a:p>
-            <a:pPr algn="l" indent="0" marL="0">
-              <a:lnSpc>
-                <a:spcPct val="115000"/>
-              </a:lnSpc>
-              <a:buNone/>
-              <a:defRPr spc="0"/>
-            </a:pPr>
-            <a:r>
-              <a:rPr lang="en-US" sz="1050" dirty="0" spc="0">
-                <a:solidFill>
-                  <a:srgbClr val="000000"/>
-                </a:solidFill>
-                <a:latin typeface="Arial" pitchFamily="34" charset="0"/>
-                <a:ea typeface="Arial" pitchFamily="34" charset="-122"/>
-                <a:cs typeface="Arial" pitchFamily="34" charset="-120"/>
-              </a:rPr>
-              <a:t>• Platform team maintains access controls and audit logs.</a:t>
-            </a:r>
-            <a:endParaRPr lang="en-US" sz="1050" dirty="0" spc="0"/>
-          </a:p>
-        </p:txBody>
-      </p:sp>
-      <p:sp>
-        <p:nvSpPr>
-          <p:cNvPr id="19" name="measurement-heading"/>
-          <p:cNvSpPr txBox="1"/>
-          <p:nvPr/>
-        </p:nvSpPr>
-        <p:spPr>
-          <a:xfrm>
-            <a:off x="6000750" y="4851400"/>
-            <a:ext cx="5397500" cy="222250"/>
+            <a:off x="6350000" y="4978400"/>
+            <a:ext cx="5524500" cy="228600"/>
           </a:xfrm>
           <a:prstGeom prst="rect">
             <a:avLst/>
@@ -9789,7 +10102,7 @@
               <a:defRPr spc="0"/>
             </a:pPr>
             <a:r>
-              <a:rPr lang="en-US" sz="1250" b="1" dirty="0" spc="0">
+              <a:rPr lang="en-US" sz="1400" b="1" dirty="0" spc="0">
                 <a:solidFill>
                   <a:srgbClr val="000000"/>
                 </a:solidFill>
@@ -9799,79 +10112,13 @@
               </a:rPr>
               <a:t>PILOT MEASUREMENT</a:t>
             </a:r>
-            <a:endParaRPr lang="en-US" sz="1250" dirty="0" spc="0"/>
+            <a:endParaRPr lang="en-US" sz="1400" dirty="0" spc="0"/>
           </a:p>
         </p:txBody>
       </p:sp>
       <p:sp>
         <p:nvSpPr>
-          <p:cNvPr id="20" name="measurement"/>
-          <p:cNvSpPr txBox="1"/>
-          <p:nvPr/>
-        </p:nvSpPr>
-        <p:spPr>
-          <a:xfrm>
-            <a:off x="6000750" y="5092700"/>
-            <a:ext cx="5397500" cy="444500"/>
-          </a:xfrm>
-          <a:prstGeom prst="rect">
-            <a:avLst/>
-          </a:prstGeom>
-          <a:noFill/>
-          <a:ln/>
-        </p:spPr>
-        <p:txBody>
-          <a:bodyPr wrap="square" lIns="12700" tIns="12700" rIns="12700" bIns="12700" rtlCol="0" anchor="t">
-            <a:noAutofit/>
-          </a:bodyPr>
-          <a:lstStyle/>
-          <a:p>
-            <a:pPr algn="l" indent="0" marL="0">
-              <a:lnSpc>
-                <a:spcPct val="115000"/>
-              </a:lnSpc>
-              <a:buNone/>
-              <a:defRPr spc="0"/>
-            </a:pPr>
-            <a:r>
-              <a:rPr lang="en-US" sz="1050" dirty="0" spc="0">
-                <a:solidFill>
-                  <a:srgbClr val="000000"/>
-                </a:solidFill>
-                <a:latin typeface="Arial" pitchFamily="34" charset="0"/>
-                <a:ea typeface="Arial" pitchFamily="34" charset="-122"/>
-                <a:cs typeface="Arial" pitchFamily="34" charset="-120"/>
-              </a:rPr>
-              <a:t>• Compare 20 paired tasks with baseline time logs.</a:t>
-            </a:r>
-            <a:endParaRPr lang="en-US" sz="1050" dirty="0" spc="0"/>
-          </a:p>
-          <a:p>
-            <a:pPr algn="l" indent="0" marL="0">
-              <a:lnSpc>
-                <a:spcPct val="115000"/>
-              </a:lnSpc>
-              <a:buNone/>
-              <a:defRPr spc="0"/>
-            </a:pPr>
-            <a:r>
-              <a:rPr lang="en-US" sz="1050" dirty="0" spc="0">
-                <a:solidFill>
-                  <a:srgbClr val="000000"/>
-                </a:solidFill>
-                <a:latin typeface="Arial" pitchFamily="34" charset="0"/>
-                <a:ea typeface="Arial" pitchFamily="34" charset="-122"/>
-                <a:cs typeface="Arial" pitchFamily="34" charset="-120"/>
-              </a:rPr>
-              <a:t>• Verify claim samples and record expert review effort.</a:t>
-            </a:r>
-            <a:endParaRPr lang="en-US" sz="1050" dirty="0" spc="0"/>
-          </a:p>
-        </p:txBody>
-      </p:sp>
-      <p:sp>
-        <p:nvSpPr>
-          <p:cNvPr id="21" name="decision-label"/>
+          <p:cNvPr id="25" name="decision-label"/>
           <p:cNvSpPr txBox="1"/>
           <p:nvPr/>
         </p:nvSpPr>
@@ -9916,7 +10163,7 @@
       </p:sp>
       <p:sp>
         <p:nvSpPr>
-          <p:cNvPr id="22" name="decision-message"/>
+          <p:cNvPr id="26" name="decision-message"/>
           <p:cNvSpPr txBox="1"/>
           <p:nvPr/>
         </p:nvSpPr>
@@ -9959,9 +10206,189 @@
           </a:p>
         </p:txBody>
       </p:sp>
+      <p:sp>
+        <p:nvSpPr>
+          <p:cNvPr id="27" name="shared-controls-1"/>
+          <p:cNvSpPr txBox="1"/>
+          <p:nvPr/>
+        </p:nvSpPr>
+        <p:spPr>
+          <a:xfrm>
+            <a:off x="552450" y="5226050"/>
+            <a:ext cx="5372100" cy="215900"/>
+          </a:xfrm>
+          <a:prstGeom prst="rect">
+            <a:avLst/>
+          </a:prstGeom>
+          <a:noFill/>
+          <a:ln/>
+        </p:spPr>
+        <p:txBody>
+          <a:bodyPr wrap="square" lIns="12700" tIns="12700" rIns="12700" bIns="12700" rtlCol="0" anchor="t">
+            <a:noAutofit/>
+          </a:bodyPr>
+          <a:lstStyle/>
+          <a:p>
+            <a:pPr algn="l" indent="0" marL="0">
+              <a:lnSpc>
+                <a:spcPct val="115000"/>
+              </a:lnSpc>
+              <a:buNone/>
+              <a:defRPr spc="0"/>
+            </a:pPr>
+            <a:r>
+              <a:rPr lang="en-US" sz="1200" dirty="0" spc="0">
+                <a:solidFill>
+                  <a:srgbClr val="000000"/>
+                </a:solidFill>
+                <a:latin typeface="Arial" pitchFamily="34" charset="0"/>
+                <a:ea typeface="Arial" pitchFamily="34" charset="-122"/>
+                <a:cs typeface="Arial" pitchFamily="34" charset="-120"/>
+              </a:rPr>
+              <a:t>One register records defects, owners and disposition.</a:t>
+            </a:r>
+            <a:endParaRPr lang="en-US" sz="1200" dirty="0" spc="0"/>
+          </a:p>
+        </p:txBody>
+      </p:sp>
+      <p:sp>
+        <p:nvSpPr>
+          <p:cNvPr id="28" name="shared-controls-2"/>
+          <p:cNvSpPr txBox="1"/>
+          <p:nvPr/>
+        </p:nvSpPr>
+        <p:spPr>
+          <a:xfrm>
+            <a:off x="552450" y="5441950"/>
+            <a:ext cx="5372100" cy="215900"/>
+          </a:xfrm>
+          <a:prstGeom prst="rect">
+            <a:avLst/>
+          </a:prstGeom>
+          <a:noFill/>
+          <a:ln/>
+        </p:spPr>
+        <p:txBody>
+          <a:bodyPr wrap="square" lIns="12700" tIns="12700" rIns="12700" bIns="12700" rtlCol="0" anchor="t">
+            <a:noAutofit/>
+          </a:bodyPr>
+          <a:lstStyle/>
+          <a:p>
+            <a:pPr algn="l" indent="0" marL="0">
+              <a:lnSpc>
+                <a:spcPct val="115000"/>
+              </a:lnSpc>
+              <a:buNone/>
+              <a:defRPr spc="0"/>
+            </a:pPr>
+            <a:r>
+              <a:rPr lang="en-US" sz="1200" dirty="0" spc="0">
+                <a:solidFill>
+                  <a:srgbClr val="000000"/>
+                </a:solidFill>
+                <a:latin typeface="Arial" pitchFamily="34" charset="0"/>
+                <a:ea typeface="Arial" pitchFamily="34" charset="-122"/>
+                <a:cs typeface="Arial" pitchFamily="34" charset="-120"/>
+              </a:rPr>
+              <a:t>Platform team maintains access controls and audit logs.</a:t>
+            </a:r>
+            <a:endParaRPr lang="en-US" sz="1200" dirty="0" spc="0"/>
+          </a:p>
+        </p:txBody>
+      </p:sp>
+      <p:sp>
+        <p:nvSpPr>
+          <p:cNvPr id="29" name="measurement-1"/>
+          <p:cNvSpPr txBox="1"/>
+          <p:nvPr/>
+        </p:nvSpPr>
+        <p:spPr>
+          <a:xfrm>
+            <a:off x="6591300" y="5226050"/>
+            <a:ext cx="5302250" cy="215900"/>
+          </a:xfrm>
+          <a:prstGeom prst="rect">
+            <a:avLst/>
+          </a:prstGeom>
+          <a:noFill/>
+          <a:ln/>
+        </p:spPr>
+        <p:txBody>
+          <a:bodyPr wrap="square" lIns="12700" tIns="12700" rIns="12700" bIns="12700" rtlCol="0" anchor="t">
+            <a:noAutofit/>
+          </a:bodyPr>
+          <a:lstStyle/>
+          <a:p>
+            <a:pPr algn="l" indent="0" marL="0">
+              <a:lnSpc>
+                <a:spcPct val="115000"/>
+              </a:lnSpc>
+              <a:buNone/>
+              <a:defRPr spc="0"/>
+            </a:pPr>
+            <a:r>
+              <a:rPr lang="en-US" sz="1200" dirty="0" spc="0">
+                <a:solidFill>
+                  <a:srgbClr val="000000"/>
+                </a:solidFill>
+                <a:latin typeface="Arial" pitchFamily="34" charset="0"/>
+                <a:ea typeface="Arial" pitchFamily="34" charset="-122"/>
+                <a:cs typeface="Arial" pitchFamily="34" charset="-120"/>
+              </a:rPr>
+              <a:t>Compare 20 paired tasks with baseline time logs.</a:t>
+            </a:r>
+            <a:endParaRPr lang="en-US" sz="1200" dirty="0" spc="0"/>
+          </a:p>
+        </p:txBody>
+      </p:sp>
+      <p:sp>
+        <p:nvSpPr>
+          <p:cNvPr id="30" name="measurement-2"/>
+          <p:cNvSpPr txBox="1"/>
+          <p:nvPr/>
+        </p:nvSpPr>
+        <p:spPr>
+          <a:xfrm>
+            <a:off x="6591300" y="5441950"/>
+            <a:ext cx="5302250" cy="215900"/>
+          </a:xfrm>
+          <a:prstGeom prst="rect">
+            <a:avLst/>
+          </a:prstGeom>
+          <a:noFill/>
+          <a:ln/>
+        </p:spPr>
+        <p:txBody>
+          <a:bodyPr wrap="square" lIns="12700" tIns="12700" rIns="12700" bIns="12700" rtlCol="0" anchor="t">
+            <a:noAutofit/>
+          </a:bodyPr>
+          <a:lstStyle/>
+          <a:p>
+            <a:pPr algn="l" indent="0" marL="0">
+              <a:lnSpc>
+                <a:spcPct val="115000"/>
+              </a:lnSpc>
+              <a:buNone/>
+              <a:defRPr spc="0"/>
+            </a:pPr>
+            <a:r>
+              <a:rPr lang="en-US" sz="1200" dirty="0" spc="0">
+                <a:solidFill>
+                  <a:srgbClr val="000000"/>
+                </a:solidFill>
+                <a:latin typeface="Arial" pitchFamily="34" charset="0"/>
+                <a:ea typeface="Arial" pitchFamily="34" charset="-122"/>
+                <a:cs typeface="Arial" pitchFamily="34" charset="-120"/>
+              </a:rPr>
+              <a:t>Verify claim samples and record expert review effort.</a:t>
+            </a:r>
+            <a:endParaRPr lang="en-US" sz="1200" dirty="0" spc="0"/>
+          </a:p>
+        </p:txBody>
+      </p:sp>
       <p:pic>
         <p:nvPicPr>
-          <p:cNvPr id="23" name="stage-icon-sources" descr="remix-file-search-line">    </p:cNvPr>
+          <p:cNvPr id="31" name="stage-icon-sources" descr="remix-file-search-line">    </p:cNvPr>
           <p:cNvPicPr>
             <a:picLocks noChangeAspect="1"/>
           </p:cNvPicPr>
@@ -9981,8 +10408,8 @@
         </p:blipFill>
         <p:spPr>
           <a:xfrm>
-            <a:off x="1428750" y="1727200"/>
-            <a:ext cx="444500" cy="444500"/>
+            <a:off x="1504950" y="1854200"/>
+            <a:ext cx="609600" cy="609600"/>
           </a:xfrm>
           <a:prstGeom prst="rect">
             <a:avLst/>
@@ -9991,7 +10418,7 @@
       </p:pic>
       <p:pic>
         <p:nvPicPr>
-          <p:cNvPr id="24" name="stage-icon-draft" descr="remix-draft-line">    </p:cNvPr>
+          <p:cNvPr id="32" name="stage-icon-draft" descr="remix-draft-line">    </p:cNvPr>
           <p:cNvPicPr>
             <a:picLocks noChangeAspect="1"/>
           </p:cNvPicPr>
@@ -10011,8 +10438,8 @@
         </p:blipFill>
         <p:spPr>
           <a:xfrm>
-            <a:off x="4159250" y="1727200"/>
-            <a:ext cx="444500" cy="444500"/>
+            <a:off x="4362450" y="1854200"/>
+            <a:ext cx="609600" cy="609600"/>
           </a:xfrm>
           <a:prstGeom prst="rect">
             <a:avLst/>
@@ -10021,7 +10448,7 @@
       </p:pic>
       <p:pic>
         <p:nvPicPr>
-          <p:cNvPr id="25" name="stage-icon-review" descr="remix-shield-check-line">    </p:cNvPr>
+          <p:cNvPr id="33" name="stage-icon-review" descr="remix-shield-check-line">    </p:cNvPr>
           <p:cNvPicPr>
             <a:picLocks noChangeAspect="1"/>
           </p:cNvPicPr>
@@ -10041,8 +10468,8 @@
         </p:blipFill>
         <p:spPr>
           <a:xfrm>
-            <a:off x="7302500" y="1727200"/>
-            <a:ext cx="444500" cy="444500"/>
+            <a:off x="7315200" y="1854200"/>
+            <a:ext cx="609600" cy="609600"/>
           </a:xfrm>
           <a:prstGeom prst="rect">
             <a:avLst/>
@@ -10051,7 +10478,7 @@
       </p:pic>
       <p:pic>
         <p:nvPicPr>
-          <p:cNvPr id="26" name="stage-icon-output" descr="remix-send-plane-2-line">    </p:cNvPr>
+          <p:cNvPr id="34" name="stage-icon-output" descr="remix-send-plane-2-line">    </p:cNvPr>
           <p:cNvPicPr>
             <a:picLocks noChangeAspect="1"/>
           </p:cNvPicPr>
@@ -10071,8 +10498,8 @@
         </p:blipFill>
         <p:spPr>
           <a:xfrm>
-            <a:off x="10001250" y="1727200"/>
-            <a:ext cx="444500" cy="444500"/>
+            <a:off x="10077450" y="1854200"/>
+            <a:ext cx="609600" cy="609600"/>
           </a:xfrm>
           <a:prstGeom prst="rect">
             <a:avLst/>
@@ -10081,7 +10508,7 @@
       </p:pic>
       <p:sp>
         <p:nvSpPr>
-          <p:cNvPr id="27" name="Slide Number Placeholder 0"/>
+          <p:cNvPr id="35" name="Slide Number Placeholder 0"/>
           <p:cNvSpPr>
             <a:spLocks noGrp="1"/>
           </p:cNvSpPr>
@@ -10391,7 +10818,7 @@
                         <a:buNone/>
                       </a:pPr>
                       <a:r>
-                        <a:rPr lang="en-US" sz="1000" b="1" dirty="0">
+                        <a:rPr lang="en-US" sz="1200" b="1" dirty="0">
                           <a:solidFill>
                             <a:srgbClr val="FFFFFF"/>
                           </a:solidFill>
@@ -10401,14 +10828,14 @@
                         </a:rPr>
                         <a:t>WORKSTREAM / OWNER</a:t>
                       </a:r>
-                      <a:endParaRPr lang="en-US" sz="1000" dirty="0">
+                      <a:endParaRPr lang="en-US" sz="1200" dirty="0">
                         <a:latin typeface="Arial" charset="0"/>
                         <a:ea typeface="Arial" charset="0"/>
                         <a:cs typeface="Arial" charset="0"/>
                       </a:endParaRPr>
                     </a:p>
                   </a:txBody>
-                  <a:tcPr marL="101600" marR="101600" marT="38100" marB="38100" anchor="ctr">
+                  <a:tcPr marL="76200" marR="76200" marT="31750" marB="31750" anchor="ctr">
                     <a:lnL w="6350" cap="flat" cmpd="sng" algn="ctr">
                       <a:solidFill>
                         <a:srgbClr val="C6C9CD"/>
@@ -10457,11 +10884,11 @@
                     </a:bodyPr>
                     <a:lstStyle/>
                     <a:p>
-                      <a:pPr algn="ctr" indent="0" marL="0">
+                      <a:pPr algn="l" indent="0" marL="0">
                         <a:buNone/>
                       </a:pPr>
                       <a:r>
-                        <a:rPr lang="en-US" sz="1000" b="1" dirty="0">
+                        <a:rPr lang="en-US" sz="1200" b="1" dirty="0">
                           <a:solidFill>
                             <a:srgbClr val="FFFFFF"/>
                           </a:solidFill>
@@ -10471,18 +10898,18 @@
                         </a:rPr>
                         <a:t>WEEKS 1–2</a:t>
                       </a:r>
-                      <a:endParaRPr lang="en-US" sz="1000" dirty="0">
+                      <a:endParaRPr lang="en-US" sz="1200" dirty="0">
                         <a:latin typeface="Arial" charset="0"/>
                         <a:ea typeface="Arial" charset="0"/>
                         <a:cs typeface="Arial" charset="0"/>
                       </a:endParaRPr>
                     </a:p>
                     <a:p>
-                      <a:pPr algn="ctr" indent="0" marL="0">
+                      <a:pPr algn="l" indent="0" marL="0">
                         <a:buNone/>
                       </a:pPr>
                       <a:r>
-                        <a:rPr lang="en-US" sz="1000" b="1" dirty="0">
+                        <a:rPr lang="en-US" sz="1200" b="1" dirty="0">
                           <a:solidFill>
                             <a:srgbClr val="FFFFFF"/>
                           </a:solidFill>
@@ -10492,14 +10919,14 @@
                         </a:rPr>
                         <a:t>Approve &amp; baseline</a:t>
                       </a:r>
-                      <a:endParaRPr lang="en-US" sz="1000" dirty="0">
+                      <a:endParaRPr lang="en-US" sz="1200" dirty="0">
                         <a:latin typeface="Arial" charset="0"/>
                         <a:ea typeface="Arial" charset="0"/>
                         <a:cs typeface="Arial" charset="0"/>
                       </a:endParaRPr>
                     </a:p>
                   </a:txBody>
-                  <a:tcPr marL="101600" marR="101600" marT="38100" marB="38100" anchor="ctr">
+                  <a:tcPr marL="76200" marR="76200" marT="31750" marB="31750" anchor="ctr">
                     <a:lnL w="6350" cap="flat" cmpd="sng" algn="ctr">
                       <a:solidFill>
                         <a:srgbClr val="C6C9CD"/>
@@ -10548,11 +10975,11 @@
                     </a:bodyPr>
                     <a:lstStyle/>
                     <a:p>
-                      <a:pPr algn="ctr" indent="0" marL="0">
+                      <a:pPr algn="l" indent="0" marL="0">
                         <a:buNone/>
                       </a:pPr>
                       <a:r>
-                        <a:rPr lang="en-US" sz="1000" b="1" dirty="0">
+                        <a:rPr lang="en-US" sz="1200" b="1" dirty="0">
                           <a:solidFill>
                             <a:srgbClr val="FFFFFF"/>
                           </a:solidFill>
@@ -10562,18 +10989,18 @@
                         </a:rPr>
                         <a:t>WEEKS 3–4</a:t>
                       </a:r>
-                      <a:endParaRPr lang="en-US" sz="1000" dirty="0">
+                      <a:endParaRPr lang="en-US" sz="1200" dirty="0">
                         <a:latin typeface="Arial" charset="0"/>
                         <a:ea typeface="Arial" charset="0"/>
                         <a:cs typeface="Arial" charset="0"/>
                       </a:endParaRPr>
                     </a:p>
                     <a:p>
-                      <a:pPr algn="ctr" indent="0" marL="0">
+                      <a:pPr algn="l" indent="0" marL="0">
                         <a:buNone/>
                       </a:pPr>
                       <a:r>
-                        <a:rPr lang="en-US" sz="1000" b="1" dirty="0">
+                        <a:rPr lang="en-US" sz="1200" b="1" dirty="0">
                           <a:solidFill>
                             <a:srgbClr val="FFFFFF"/>
                           </a:solidFill>
@@ -10583,14 +11010,14 @@
                         </a:rPr>
                         <a:t>Build &amp; test</a:t>
                       </a:r>
-                      <a:endParaRPr lang="en-US" sz="1000" dirty="0">
+                      <a:endParaRPr lang="en-US" sz="1200" dirty="0">
                         <a:latin typeface="Arial" charset="0"/>
                         <a:ea typeface="Arial" charset="0"/>
                         <a:cs typeface="Arial" charset="0"/>
                       </a:endParaRPr>
                     </a:p>
                   </a:txBody>
-                  <a:tcPr marL="101600" marR="101600" marT="38100" marB="38100" anchor="ctr">
+                  <a:tcPr marL="76200" marR="76200" marT="31750" marB="31750" anchor="ctr">
                     <a:lnL w="6350" cap="flat" cmpd="sng" algn="ctr">
                       <a:solidFill>
                         <a:srgbClr val="C6C9CD"/>
@@ -10639,11 +11066,11 @@
                     </a:bodyPr>
                     <a:lstStyle/>
                     <a:p>
-                      <a:pPr algn="ctr" indent="0" marL="0">
+                      <a:pPr algn="l" indent="0" marL="0">
                         <a:buNone/>
                       </a:pPr>
                       <a:r>
-                        <a:rPr lang="en-US" sz="1000" b="1" dirty="0">
+                        <a:rPr lang="en-US" sz="1200" b="1" dirty="0">
                           <a:solidFill>
                             <a:srgbClr val="FFFFFF"/>
                           </a:solidFill>
@@ -10653,18 +11080,18 @@
                         </a:rPr>
                         <a:t>WEEKS 5–8</a:t>
                       </a:r>
-                      <a:endParaRPr lang="en-US" sz="1000" dirty="0">
+                      <a:endParaRPr lang="en-US" sz="1200" dirty="0">
                         <a:latin typeface="Arial" charset="0"/>
                         <a:ea typeface="Arial" charset="0"/>
                         <a:cs typeface="Arial" charset="0"/>
                       </a:endParaRPr>
                     </a:p>
                     <a:p>
-                      <a:pPr algn="ctr" indent="0" marL="0">
+                      <a:pPr algn="l" indent="0" marL="0">
                         <a:buNone/>
                       </a:pPr>
                       <a:r>
-                        <a:rPr lang="en-US" sz="1000" b="1" dirty="0">
+                        <a:rPr lang="en-US" sz="1200" b="1" dirty="0">
                           <a:solidFill>
                             <a:srgbClr val="FFFFFF"/>
                           </a:solidFill>
@@ -10674,14 +11101,14 @@
                         </a:rPr>
                         <a:t>Pilot &amp; learn</a:t>
                       </a:r>
-                      <a:endParaRPr lang="en-US" sz="1000" dirty="0">
+                      <a:endParaRPr lang="en-US" sz="1200" dirty="0">
                         <a:latin typeface="Arial" charset="0"/>
                         <a:ea typeface="Arial" charset="0"/>
                         <a:cs typeface="Arial" charset="0"/>
                       </a:endParaRPr>
                     </a:p>
                   </a:txBody>
-                  <a:tcPr marL="101600" marR="101600" marT="38100" marB="38100" anchor="ctr">
+                  <a:tcPr marL="76200" marR="76200" marT="31750" marB="31750" anchor="ctr">
                     <a:lnL w="6350" cap="flat" cmpd="sng" algn="ctr">
                       <a:solidFill>
                         <a:srgbClr val="C6C9CD"/>
@@ -10730,11 +11157,11 @@
                     </a:bodyPr>
                     <a:lstStyle/>
                     <a:p>
-                      <a:pPr algn="ctr" indent="0" marL="0">
+                      <a:pPr algn="l" indent="0" marL="0">
                         <a:buNone/>
                       </a:pPr>
                       <a:r>
-                        <a:rPr lang="en-US" sz="1000" b="1" dirty="0">
+                        <a:rPr lang="en-US" sz="1200" b="1" dirty="0">
                           <a:solidFill>
                             <a:srgbClr val="FFFFFF"/>
                           </a:solidFill>
@@ -10744,18 +11171,18 @@
                         </a:rPr>
                         <a:t>WEEKS 9–12</a:t>
                       </a:r>
-                      <a:endParaRPr lang="en-US" sz="1000" dirty="0">
+                      <a:endParaRPr lang="en-US" sz="1200" dirty="0">
                         <a:latin typeface="Arial" charset="0"/>
                         <a:ea typeface="Arial" charset="0"/>
                         <a:cs typeface="Arial" charset="0"/>
                       </a:endParaRPr>
                     </a:p>
                     <a:p>
-                      <a:pPr algn="ctr" indent="0" marL="0">
+                      <a:pPr algn="l" indent="0" marL="0">
                         <a:buNone/>
                       </a:pPr>
                       <a:r>
-                        <a:rPr lang="en-US" sz="1000" b="1" dirty="0">
+                        <a:rPr lang="en-US" sz="1200" b="1" dirty="0">
                           <a:solidFill>
                             <a:srgbClr val="FFFFFF"/>
                           </a:solidFill>
@@ -10765,14 +11192,14 @@
                         </a:rPr>
                         <a:t>Prove &amp; decide</a:t>
                       </a:r>
-                      <a:endParaRPr lang="en-US" sz="1000" dirty="0">
+                      <a:endParaRPr lang="en-US" sz="1200" dirty="0">
                         <a:latin typeface="Arial" charset="0"/>
                         <a:ea typeface="Arial" charset="0"/>
                         <a:cs typeface="Arial" charset="0"/>
                       </a:endParaRPr>
                     </a:p>
                   </a:txBody>
-                  <a:tcPr marL="101600" marR="101600" marT="38100" marB="38100" anchor="ctr">
+                  <a:tcPr marL="76200" marR="76200" marT="31750" marB="31750" anchor="ctr">
                     <a:lnL w="6350" cap="flat" cmpd="sng" algn="ctr">
                       <a:solidFill>
                         <a:srgbClr val="C6C9CD"/>
@@ -10827,7 +11254,7 @@
                         <a:buNone/>
                       </a:pPr>
                       <a:r>
-                        <a:rPr lang="en-US" sz="1000" b="1" dirty="0">
+                        <a:rPr lang="en-US" sz="1200" b="1" dirty="0">
                           <a:solidFill>
                             <a:srgbClr val="000000"/>
                           </a:solidFill>
@@ -10835,20 +11262,14 @@
                           <a:ea typeface="Arial" pitchFamily="34" charset="-122"/>
                           <a:cs typeface="Arial" pitchFamily="34" charset="-120"/>
                         </a:rPr>
-                        <a:t>Data &amp; access</a:t>
+                        <a:t>Data &amp; access
+</a:t>
                       </a:r>
-                      <a:endParaRPr lang="en-US" sz="1000" dirty="0">
-                        <a:latin typeface="Arial" charset="0"/>
-                        <a:ea typeface="Arial" charset="0"/>
-                        <a:cs typeface="Arial" charset="0"/>
-                      </a:endParaRPr>
-                    </a:p>
-                    <a:p>
                       <a:pPr algn="l" indent="0" marL="0">
                         <a:buNone/>
                       </a:pPr>
                       <a:r>
-                        <a:rPr lang="en-US" sz="1000" b="1" dirty="0">
+                        <a:rPr lang="en-US" sz="1200" dirty="0">
                           <a:solidFill>
                             <a:srgbClr val="000000"/>
                           </a:solidFill>
@@ -10858,14 +11279,14 @@
                         </a:rPr>
                         <a:t>Source steward</a:t>
                       </a:r>
-                      <a:endParaRPr lang="en-US" sz="1000" dirty="0">
+                      <a:endParaRPr lang="en-US" sz="1200" dirty="0">
                         <a:latin typeface="Arial" charset="0"/>
                         <a:ea typeface="Arial" charset="0"/>
                         <a:cs typeface="Arial" charset="0"/>
                       </a:endParaRPr>
                     </a:p>
                   </a:txBody>
-                  <a:tcPr marL="101600" marR="101600" marT="38100" marB="38100" anchor="ctr">
+                  <a:tcPr marL="76200" marR="76200" marT="31750" marB="31750" anchor="ctr">
                     <a:lnL w="6350" cap="flat" cmpd="sng" algn="ctr">
                       <a:solidFill>
                         <a:srgbClr val="C6C9CD"/>
@@ -10914,11 +11335,11 @@
                     </a:bodyPr>
                     <a:lstStyle/>
                     <a:p>
-                      <a:pPr algn="ctr" indent="0" marL="0">
+                      <a:pPr algn="l" indent="0" marL="0">
                         <a:buNone/>
                       </a:pPr>
                       <a:r>
-                        <a:rPr lang="en-US" sz="1000" dirty="0">
+                        <a:rPr lang="en-US" sz="1200" dirty="0">
                           <a:solidFill>
                             <a:srgbClr val="000000"/>
                           </a:solidFill>
@@ -10928,18 +11349,18 @@
                         </a:rPr>
                         <a:t>Approved corpus</a:t>
                       </a:r>
-                      <a:endParaRPr lang="en-US" sz="1000" dirty="0">
+                      <a:endParaRPr lang="en-US" sz="1200" dirty="0">
                         <a:latin typeface="Arial" charset="0"/>
                         <a:ea typeface="Arial" charset="0"/>
                         <a:cs typeface="Arial" charset="0"/>
                       </a:endParaRPr>
                     </a:p>
                     <a:p>
-                      <a:pPr algn="ctr" indent="0" marL="0">
+                      <a:pPr algn="l" indent="0" marL="0">
                         <a:buNone/>
                       </a:pPr>
                       <a:r>
-                        <a:rPr lang="en-US" sz="1000" dirty="0">
+                        <a:rPr lang="en-US" sz="1200" dirty="0">
                           <a:solidFill>
                             <a:srgbClr val="000000"/>
                           </a:solidFill>
@@ -10949,14 +11370,14 @@
                         </a:rPr>
                         <a:t>Access register</a:t>
                       </a:r>
-                      <a:endParaRPr lang="en-US" sz="1000" dirty="0">
+                      <a:endParaRPr lang="en-US" sz="1200" dirty="0">
                         <a:latin typeface="Arial" charset="0"/>
                         <a:ea typeface="Arial" charset="0"/>
                         <a:cs typeface="Arial" charset="0"/>
                       </a:endParaRPr>
                     </a:p>
                   </a:txBody>
-                  <a:tcPr marL="101600" marR="101600" marT="38100" marB="38100" anchor="ctr">
+                  <a:tcPr marL="76200" marR="76200" marT="31750" marB="31750" anchor="ctr">
                     <a:lnL w="6350" cap="flat" cmpd="sng" algn="ctr">
                       <a:solidFill>
                         <a:srgbClr val="C6C9CD"/>
@@ -11005,11 +11426,11 @@
                     </a:bodyPr>
                     <a:lstStyle/>
                     <a:p>
-                      <a:pPr algn="ctr" indent="0" marL="0">
+                      <a:pPr algn="l" indent="0" marL="0">
                         <a:buNone/>
                       </a:pPr>
                       <a:r>
-                        <a:rPr lang="en-US" sz="1000" dirty="0">
+                        <a:rPr lang="en-US" sz="1200" dirty="0">
                           <a:solidFill>
                             <a:srgbClr val="000000"/>
                           </a:solidFill>
@@ -11019,18 +11440,18 @@
                         </a:rPr>
                         <a:t>Source refresh</a:t>
                       </a:r>
-                      <a:endParaRPr lang="en-US" sz="1000" dirty="0">
+                      <a:endParaRPr lang="en-US" sz="1200" dirty="0">
                         <a:latin typeface="Arial" charset="0"/>
                         <a:ea typeface="Arial" charset="0"/>
                         <a:cs typeface="Arial" charset="0"/>
                       </a:endParaRPr>
                     </a:p>
                     <a:p>
-                      <a:pPr algn="ctr" indent="0" marL="0">
+                      <a:pPr algn="l" indent="0" marL="0">
                         <a:buNone/>
                       </a:pPr>
                       <a:r>
-                        <a:rPr lang="en-US" sz="1000" dirty="0">
+                        <a:rPr lang="en-US" sz="1200" dirty="0">
                           <a:solidFill>
                             <a:srgbClr val="000000"/>
                           </a:solidFill>
@@ -11040,14 +11461,14 @@
                         </a:rPr>
                         <a:t>Named stewards</a:t>
                       </a:r>
-                      <a:endParaRPr lang="en-US" sz="1000" dirty="0">
+                      <a:endParaRPr lang="en-US" sz="1200" dirty="0">
                         <a:latin typeface="Arial" charset="0"/>
                         <a:ea typeface="Arial" charset="0"/>
                         <a:cs typeface="Arial" charset="0"/>
                       </a:endParaRPr>
                     </a:p>
                   </a:txBody>
-                  <a:tcPr marL="101600" marR="101600" marT="38100" marB="38100" anchor="ctr">
+                  <a:tcPr marL="76200" marR="76200" marT="31750" marB="31750" anchor="ctr">
                     <a:lnL w="6350" cap="flat" cmpd="sng" algn="ctr">
                       <a:solidFill>
                         <a:srgbClr val="C6C9CD"/>
@@ -11096,11 +11517,11 @@
                     </a:bodyPr>
                     <a:lstStyle/>
                     <a:p>
-                      <a:pPr algn="ctr" indent="0" marL="0">
+                      <a:pPr algn="l" indent="0" marL="0">
                         <a:buNone/>
                       </a:pPr>
                       <a:r>
-                        <a:rPr lang="en-US" sz="1000" dirty="0">
+                        <a:rPr lang="en-US" sz="1200" dirty="0">
                           <a:solidFill>
                             <a:srgbClr val="000000"/>
                           </a:solidFill>
@@ -11110,18 +11531,18 @@
                         </a:rPr>
                         <a:t>Weekly access and</a:t>
                       </a:r>
-                      <a:endParaRPr lang="en-US" sz="1000" dirty="0">
+                      <a:endParaRPr lang="en-US" sz="1200" dirty="0">
                         <a:latin typeface="Arial" charset="0"/>
                         <a:ea typeface="Arial" charset="0"/>
                         <a:cs typeface="Arial" charset="0"/>
                       </a:endParaRPr>
                     </a:p>
                     <a:p>
-                      <a:pPr algn="ctr" indent="0" marL="0">
+                      <a:pPr algn="l" indent="0" marL="0">
                         <a:buNone/>
                       </a:pPr>
                       <a:r>
-                        <a:rPr lang="en-US" sz="1000" dirty="0">
+                        <a:rPr lang="en-US" sz="1200" dirty="0">
                           <a:solidFill>
                             <a:srgbClr val="000000"/>
                           </a:solidFill>
@@ -11131,14 +11552,14 @@
                         </a:rPr>
                         <a:t>freshness checks</a:t>
                       </a:r>
-                      <a:endParaRPr lang="en-US" sz="1000" dirty="0">
+                      <a:endParaRPr lang="en-US" sz="1200" dirty="0">
                         <a:latin typeface="Arial" charset="0"/>
                         <a:ea typeface="Arial" charset="0"/>
                         <a:cs typeface="Arial" charset="0"/>
                       </a:endParaRPr>
                     </a:p>
                   </a:txBody>
-                  <a:tcPr marL="101600" marR="101600" marT="38100" marB="38100" anchor="ctr">
+                  <a:tcPr marL="76200" marR="76200" marT="31750" marB="31750" anchor="ctr">
                     <a:lnL w="6350" cap="flat" cmpd="sng" algn="ctr">
                       <a:solidFill>
                         <a:srgbClr val="C6C9CD"/>
@@ -11187,11 +11608,11 @@
                     </a:bodyPr>
                     <a:lstStyle/>
                     <a:p>
-                      <a:pPr algn="ctr" indent="0" marL="0">
+                      <a:pPr algn="l" indent="0" marL="0">
                         <a:buNone/>
                       </a:pPr>
                       <a:r>
-                        <a:rPr lang="en-US" sz="1000" dirty="0">
+                        <a:rPr lang="en-US" sz="1200" dirty="0">
                           <a:solidFill>
                             <a:srgbClr val="000000"/>
                           </a:solidFill>
@@ -11201,18 +11622,18 @@
                         </a:rPr>
                         <a:t>Audit closeout</a:t>
                       </a:r>
-                      <a:endParaRPr lang="en-US" sz="1000" dirty="0">
+                      <a:endParaRPr lang="en-US" sz="1200" dirty="0">
                         <a:latin typeface="Arial" charset="0"/>
                         <a:ea typeface="Arial" charset="0"/>
                         <a:cs typeface="Arial" charset="0"/>
                       </a:endParaRPr>
                     </a:p>
                     <a:p>
-                      <a:pPr algn="ctr" indent="0" marL="0">
+                      <a:pPr algn="l" indent="0" marL="0">
                         <a:buNone/>
                       </a:pPr>
                       <a:r>
-                        <a:rPr lang="en-US" sz="1000" dirty="0">
+                        <a:rPr lang="en-US" sz="1200" dirty="0">
                           <a:solidFill>
                             <a:srgbClr val="000000"/>
                           </a:solidFill>
@@ -11222,14 +11643,14 @@
                         </a:rPr>
                         <a:t>Release inventory</a:t>
                       </a:r>
-                      <a:endParaRPr lang="en-US" sz="1000" dirty="0">
+                      <a:endParaRPr lang="en-US" sz="1200" dirty="0">
                         <a:latin typeface="Arial" charset="0"/>
                         <a:ea typeface="Arial" charset="0"/>
                         <a:cs typeface="Arial" charset="0"/>
                       </a:endParaRPr>
                     </a:p>
                   </a:txBody>
-                  <a:tcPr marL="101600" marR="101600" marT="38100" marB="38100" anchor="ctr">
+                  <a:tcPr marL="76200" marR="76200" marT="31750" marB="31750" anchor="ctr">
                     <a:lnL w="6350" cap="flat" cmpd="sng" algn="ctr">
                       <a:solidFill>
                         <a:srgbClr val="C6C9CD"/>
@@ -11284,7 +11705,7 @@
                         <a:buNone/>
                       </a:pPr>
                       <a:r>
-                        <a:rPr lang="en-US" sz="1000" b="1" dirty="0">
+                        <a:rPr lang="en-US" sz="1200" b="1" dirty="0">
                           <a:solidFill>
                             <a:srgbClr val="000000"/>
                           </a:solidFill>
@@ -11292,20 +11713,14 @@
                           <a:ea typeface="Arial" pitchFamily="34" charset="-122"/>
                           <a:cs typeface="Arial" pitchFamily="34" charset="-120"/>
                         </a:rPr>
-                        <a:t>Workflow &amp; product</a:t>
+                        <a:t>Workflow &amp; product
+</a:t>
                       </a:r>
-                      <a:endParaRPr lang="en-US" sz="1000" dirty="0">
-                        <a:latin typeface="Arial" charset="0"/>
-                        <a:ea typeface="Arial" charset="0"/>
-                        <a:cs typeface="Arial" charset="0"/>
-                      </a:endParaRPr>
-                    </a:p>
-                    <a:p>
                       <a:pPr algn="l" indent="0" marL="0">
                         <a:buNone/>
                       </a:pPr>
                       <a:r>
-                        <a:rPr lang="en-US" sz="1000" b="1" dirty="0">
+                        <a:rPr lang="en-US" sz="1200" dirty="0">
                           <a:solidFill>
                             <a:srgbClr val="000000"/>
                           </a:solidFill>
@@ -11315,14 +11730,14 @@
                         </a:rPr>
                         <a:t>Product lead</a:t>
                       </a:r>
-                      <a:endParaRPr lang="en-US" sz="1000" dirty="0">
+                      <a:endParaRPr lang="en-US" sz="1200" dirty="0">
                         <a:latin typeface="Arial" charset="0"/>
                         <a:ea typeface="Arial" charset="0"/>
                         <a:cs typeface="Arial" charset="0"/>
                       </a:endParaRPr>
                     </a:p>
                   </a:txBody>
-                  <a:tcPr marL="101600" marR="101600" marT="38100" marB="38100" anchor="ctr">
+                  <a:tcPr marL="76200" marR="76200" marT="31750" marB="31750" anchor="ctr">
                     <a:lnL w="6350" cap="flat" cmpd="sng" algn="ctr">
                       <a:solidFill>
                         <a:srgbClr val="C6C9CD"/>
@@ -11371,11 +11786,11 @@
                     </a:bodyPr>
                     <a:lstStyle/>
                     <a:p>
-                      <a:pPr algn="ctr" indent="0" marL="0">
+                      <a:pPr algn="l" indent="0" marL="0">
                         <a:buNone/>
                       </a:pPr>
                       <a:r>
-                        <a:rPr lang="en-US" sz="1000" dirty="0">
+                        <a:rPr lang="en-US" sz="1200" dirty="0">
                           <a:solidFill>
                             <a:srgbClr val="000000"/>
                           </a:solidFill>
@@ -11385,18 +11800,18 @@
                         </a:rPr>
                         <a:t>Task mapping</a:t>
                       </a:r>
-                      <a:endParaRPr lang="en-US" sz="1000" dirty="0">
+                      <a:endParaRPr lang="en-US" sz="1200" dirty="0">
                         <a:latin typeface="Arial" charset="0"/>
                         <a:ea typeface="Arial" charset="0"/>
                         <a:cs typeface="Arial" charset="0"/>
                       </a:endParaRPr>
                     </a:p>
                     <a:p>
-                      <a:pPr algn="ctr" indent="0" marL="0">
+                      <a:pPr algn="l" indent="0" marL="0">
                         <a:buNone/>
                       </a:pPr>
                       <a:r>
-                        <a:rPr lang="en-US" sz="1000" dirty="0">
+                        <a:rPr lang="en-US" sz="1200" dirty="0">
                           <a:solidFill>
                             <a:srgbClr val="000000"/>
                           </a:solidFill>
@@ -11406,14 +11821,14 @@
                         </a:rPr>
                         <a:t>Baseline time logs</a:t>
                       </a:r>
-                      <a:endParaRPr lang="en-US" sz="1000" dirty="0">
+                      <a:endParaRPr lang="en-US" sz="1200" dirty="0">
                         <a:latin typeface="Arial" charset="0"/>
                         <a:ea typeface="Arial" charset="0"/>
                         <a:cs typeface="Arial" charset="0"/>
                       </a:endParaRPr>
                     </a:p>
                   </a:txBody>
-                  <a:tcPr marL="101600" marR="101600" marT="38100" marB="38100" anchor="ctr">
+                  <a:tcPr marL="76200" marR="76200" marT="31750" marB="31750" anchor="ctr">
                     <a:lnL w="6350" cap="flat" cmpd="sng" algn="ctr">
                       <a:solidFill>
                         <a:srgbClr val="C6C9CD"/>
@@ -11462,11 +11877,11 @@
                     </a:bodyPr>
                     <a:lstStyle/>
                     <a:p>
-                      <a:pPr algn="ctr" indent="0" marL="0">
+                      <a:pPr algn="l" indent="0" marL="0">
                         <a:buNone/>
                       </a:pPr>
                       <a:r>
-                        <a:rPr lang="en-US" sz="1000" dirty="0">
+                        <a:rPr lang="en-US" sz="1200" dirty="0">
                           <a:solidFill>
                             <a:srgbClr val="000000"/>
                           </a:solidFill>
@@ -11476,18 +11891,18 @@
                         </a:rPr>
                         <a:t>Grounded draft</a:t>
                       </a:r>
-                      <a:endParaRPr lang="en-US" sz="1000" dirty="0">
+                      <a:endParaRPr lang="en-US" sz="1200" dirty="0">
                         <a:latin typeface="Arial" charset="0"/>
                         <a:ea typeface="Arial" charset="0"/>
                         <a:cs typeface="Arial" charset="0"/>
                       </a:endParaRPr>
                     </a:p>
                     <a:p>
-                      <a:pPr algn="ctr" indent="0" marL="0">
+                      <a:pPr algn="l" indent="0" marL="0">
                         <a:buNone/>
                       </a:pPr>
                       <a:r>
-                        <a:rPr lang="en-US" sz="1000" dirty="0">
+                        <a:rPr lang="en-US" sz="1200" dirty="0">
                           <a:solidFill>
                             <a:srgbClr val="000000"/>
                           </a:solidFill>
@@ -11497,14 +11912,14 @@
                         </a:rPr>
                         <a:t>Visible citations</a:t>
                       </a:r>
-                      <a:endParaRPr lang="en-US" sz="1000" dirty="0">
+                      <a:endParaRPr lang="en-US" sz="1200" dirty="0">
                         <a:latin typeface="Arial" charset="0"/>
                         <a:ea typeface="Arial" charset="0"/>
                         <a:cs typeface="Arial" charset="0"/>
                       </a:endParaRPr>
                     </a:p>
                   </a:txBody>
-                  <a:tcPr marL="101600" marR="101600" marT="38100" marB="38100" anchor="ctr">
+                  <a:tcPr marL="76200" marR="76200" marT="31750" marB="31750" anchor="ctr">
                     <a:lnL w="6350" cap="flat" cmpd="sng" algn="ctr">
                       <a:solidFill>
                         <a:srgbClr val="C6C9CD"/>
@@ -11553,11 +11968,11 @@
                     </a:bodyPr>
                     <a:lstStyle/>
                     <a:p>
-                      <a:pPr algn="ctr" indent="0" marL="0">
+                      <a:pPr algn="l" indent="0" marL="0">
                         <a:buNone/>
                       </a:pPr>
                       <a:r>
-                        <a:rPr lang="en-US" sz="1000" dirty="0">
+                        <a:rPr lang="en-US" sz="1200" dirty="0">
                           <a:solidFill>
                             <a:srgbClr val="000000"/>
                           </a:solidFill>
@@ -11567,18 +11982,18 @@
                         </a:rPr>
                         <a:t>15-user pilot</a:t>
                       </a:r>
-                      <a:endParaRPr lang="en-US" sz="1000" dirty="0">
+                      <a:endParaRPr lang="en-US" sz="1200" dirty="0">
                         <a:latin typeface="Arial" charset="0"/>
                         <a:ea typeface="Arial" charset="0"/>
                         <a:cs typeface="Arial" charset="0"/>
                       </a:endParaRPr>
                     </a:p>
                     <a:p>
-                      <a:pPr algn="ctr" indent="0" marL="0">
+                      <a:pPr algn="l" indent="0" marL="0">
                         <a:buNone/>
                       </a:pPr>
                       <a:r>
-                        <a:rPr lang="en-US" sz="1000" dirty="0">
+                        <a:rPr lang="en-US" sz="1200" dirty="0">
                           <a:solidFill>
                             <a:srgbClr val="000000"/>
                           </a:solidFill>
@@ -11588,14 +12003,14 @@
                         </a:rPr>
                         <a:t>Defect fixes</a:t>
                       </a:r>
-                      <a:endParaRPr lang="en-US" sz="1000" dirty="0">
+                      <a:endParaRPr lang="en-US" sz="1200" dirty="0">
                         <a:latin typeface="Arial" charset="0"/>
                         <a:ea typeface="Arial" charset="0"/>
                         <a:cs typeface="Arial" charset="0"/>
                       </a:endParaRPr>
                     </a:p>
                   </a:txBody>
-                  <a:tcPr marL="101600" marR="101600" marT="38100" marB="38100" anchor="ctr">
+                  <a:tcPr marL="76200" marR="76200" marT="31750" marB="31750" anchor="ctr">
                     <a:lnL w="6350" cap="flat" cmpd="sng" algn="ctr">
                       <a:solidFill>
                         <a:srgbClr val="C6C9CD"/>
@@ -11644,11 +12059,11 @@
                     </a:bodyPr>
                     <a:lstStyle/>
                     <a:p>
-                      <a:pPr algn="ctr" indent="0" marL="0">
+                      <a:pPr algn="l" indent="0" marL="0">
                         <a:buNone/>
                       </a:pPr>
                       <a:r>
-                        <a:rPr lang="en-US" sz="1000" dirty="0">
+                        <a:rPr lang="en-US" sz="1200" dirty="0">
                           <a:solidFill>
                             <a:srgbClr val="000000"/>
                           </a:solidFill>
@@ -11658,18 +12073,18 @@
                         </a:rPr>
                         <a:t>Release candidate</a:t>
                       </a:r>
-                      <a:endParaRPr lang="en-US" sz="1000" dirty="0">
+                      <a:endParaRPr lang="en-US" sz="1200" dirty="0">
                         <a:latin typeface="Arial" charset="0"/>
                         <a:ea typeface="Arial" charset="0"/>
                         <a:cs typeface="Arial" charset="0"/>
                       </a:endParaRPr>
                     </a:p>
                     <a:p>
-                      <a:pPr algn="ctr" indent="0" marL="0">
+                      <a:pPr algn="l" indent="0" marL="0">
                         <a:buNone/>
                       </a:pPr>
                       <a:r>
-                        <a:rPr lang="en-US" sz="1000" dirty="0">
+                        <a:rPr lang="en-US" sz="1200" dirty="0">
                           <a:solidFill>
                             <a:srgbClr val="000000"/>
                           </a:solidFill>
@@ -11679,14 +12094,14 @@
                         </a:rPr>
                         <a:t>Runbook</a:t>
                       </a:r>
-                      <a:endParaRPr lang="en-US" sz="1000" dirty="0">
+                      <a:endParaRPr lang="en-US" sz="1200" dirty="0">
                         <a:latin typeface="Arial" charset="0"/>
                         <a:ea typeface="Arial" charset="0"/>
                         <a:cs typeface="Arial" charset="0"/>
                       </a:endParaRPr>
                     </a:p>
                   </a:txBody>
-                  <a:tcPr marL="101600" marR="101600" marT="38100" marB="38100" anchor="ctr">
+                  <a:tcPr marL="76200" marR="76200" marT="31750" marB="31750" anchor="ctr">
                     <a:lnL w="6350" cap="flat" cmpd="sng" algn="ctr">
                       <a:solidFill>
                         <a:srgbClr val="C6C9CD"/>
@@ -11741,7 +12156,7 @@
                         <a:buNone/>
                       </a:pPr>
                       <a:r>
-                        <a:rPr lang="en-US" sz="1000" b="1" dirty="0">
+                        <a:rPr lang="en-US" sz="1200" b="1" dirty="0">
                           <a:solidFill>
                             <a:srgbClr val="000000"/>
                           </a:solidFill>
@@ -11749,20 +12164,14 @@
                           <a:ea typeface="Arial" pitchFamily="34" charset="-122"/>
                           <a:cs typeface="Arial" pitchFamily="34" charset="-120"/>
                         </a:rPr>
-                        <a:t>Quality &amp; controls</a:t>
+                        <a:t>Quality &amp; controls
+</a:t>
                       </a:r>
-                      <a:endParaRPr lang="en-US" sz="1000" dirty="0">
-                        <a:latin typeface="Arial" charset="0"/>
-                        <a:ea typeface="Arial" charset="0"/>
-                        <a:cs typeface="Arial" charset="0"/>
-                      </a:endParaRPr>
-                    </a:p>
-                    <a:p>
                       <a:pPr algn="l" indent="0" marL="0">
                         <a:buNone/>
                       </a:pPr>
                       <a:r>
-                        <a:rPr lang="en-US" sz="1000" b="1" dirty="0">
+                        <a:rPr lang="en-US" sz="1200" dirty="0">
                           <a:solidFill>
                             <a:srgbClr val="000000"/>
                           </a:solidFill>
@@ -11772,14 +12181,14 @@
                         </a:rPr>
                         <a:t>Expert reviewer</a:t>
                       </a:r>
-                      <a:endParaRPr lang="en-US" sz="1000" dirty="0">
+                      <a:endParaRPr lang="en-US" sz="1200" dirty="0">
                         <a:latin typeface="Arial" charset="0"/>
                         <a:ea typeface="Arial" charset="0"/>
                         <a:cs typeface="Arial" charset="0"/>
                       </a:endParaRPr>
                     </a:p>
                   </a:txBody>
-                  <a:tcPr marL="101600" marR="101600" marT="38100" marB="38100" anchor="ctr">
+                  <a:tcPr marL="76200" marR="76200" marT="31750" marB="31750" anchor="ctr">
                     <a:lnL w="6350" cap="flat" cmpd="sng" algn="ctr">
                       <a:solidFill>
                         <a:srgbClr val="C6C9CD"/>
@@ -11828,11 +12237,11 @@
                     </a:bodyPr>
                     <a:lstStyle/>
                     <a:p>
-                      <a:pPr algn="ctr" indent="0" marL="0">
+                      <a:pPr algn="l" indent="0" marL="0">
                         <a:buNone/>
                       </a:pPr>
                       <a:r>
-                        <a:rPr lang="en-US" sz="1000" dirty="0">
+                        <a:rPr lang="en-US" sz="1200" dirty="0">
                           <a:solidFill>
                             <a:srgbClr val="000000"/>
                           </a:solidFill>
@@ -11842,18 +12251,18 @@
                         </a:rPr>
                         <a:t>Risk boundaries</a:t>
                       </a:r>
-                      <a:endParaRPr lang="en-US" sz="1000" dirty="0">
+                      <a:endParaRPr lang="en-US" sz="1200" dirty="0">
                         <a:latin typeface="Arial" charset="0"/>
                         <a:ea typeface="Arial" charset="0"/>
                         <a:cs typeface="Arial" charset="0"/>
                       </a:endParaRPr>
                     </a:p>
                     <a:p>
-                      <a:pPr algn="ctr" indent="0" marL="0">
+                      <a:pPr algn="l" indent="0" marL="0">
                         <a:buNone/>
                       </a:pPr>
                       <a:r>
-                        <a:rPr lang="en-US" sz="1000" dirty="0">
+                        <a:rPr lang="en-US" sz="1200" dirty="0">
                           <a:solidFill>
                             <a:srgbClr val="000000"/>
                           </a:solidFill>
@@ -11863,14 +12272,14 @@
                         </a:rPr>
                         <a:t>Review criteria</a:t>
                       </a:r>
-                      <a:endParaRPr lang="en-US" sz="1000" dirty="0">
+                      <a:endParaRPr lang="en-US" sz="1200" dirty="0">
                         <a:latin typeface="Arial" charset="0"/>
                         <a:ea typeface="Arial" charset="0"/>
                         <a:cs typeface="Arial" charset="0"/>
                       </a:endParaRPr>
                     </a:p>
                   </a:txBody>
-                  <a:tcPr marL="101600" marR="101600" marT="38100" marB="38100" anchor="ctr">
+                  <a:tcPr marL="76200" marR="76200" marT="31750" marB="31750" anchor="ctr">
                     <a:lnL w="6350" cap="flat" cmpd="sng" algn="ctr">
                       <a:solidFill>
                         <a:srgbClr val="C6C9CD"/>
@@ -11919,11 +12328,11 @@
                     </a:bodyPr>
                     <a:lstStyle/>
                     <a:p>
-                      <a:pPr algn="ctr" indent="0" marL="0">
+                      <a:pPr algn="l" indent="0" marL="0">
                         <a:buNone/>
                       </a:pPr>
                       <a:r>
-                        <a:rPr lang="en-US" sz="1000" dirty="0">
+                        <a:rPr lang="en-US" sz="1200" dirty="0">
                           <a:solidFill>
                             <a:srgbClr val="000000"/>
                           </a:solidFill>
@@ -11933,18 +12342,18 @@
                         </a:rPr>
                         <a:t>Test pack</a:t>
                       </a:r>
-                      <a:endParaRPr lang="en-US" sz="1000" dirty="0">
+                      <a:endParaRPr lang="en-US" sz="1200" dirty="0">
                         <a:latin typeface="Arial" charset="0"/>
                         <a:ea typeface="Arial" charset="0"/>
                         <a:cs typeface="Arial" charset="0"/>
                       </a:endParaRPr>
                     </a:p>
                     <a:p>
-                      <a:pPr algn="ctr" indent="0" marL="0">
+                      <a:pPr algn="l" indent="0" marL="0">
                         <a:buNone/>
                       </a:pPr>
                       <a:r>
-                        <a:rPr lang="en-US" sz="1000" dirty="0">
+                        <a:rPr lang="en-US" sz="1200" dirty="0">
                           <a:solidFill>
                             <a:srgbClr val="000000"/>
                           </a:solidFill>
@@ -11954,14 +12363,14 @@
                         </a:rPr>
                         <a:t>Rejection reasons</a:t>
                       </a:r>
-                      <a:endParaRPr lang="en-US" sz="1000" dirty="0">
+                      <a:endParaRPr lang="en-US" sz="1200" dirty="0">
                         <a:latin typeface="Arial" charset="0"/>
                         <a:ea typeface="Arial" charset="0"/>
                         <a:cs typeface="Arial" charset="0"/>
                       </a:endParaRPr>
                     </a:p>
                   </a:txBody>
-                  <a:tcPr marL="101600" marR="101600" marT="38100" marB="38100" anchor="ctr">
+                  <a:tcPr marL="76200" marR="76200" marT="31750" marB="31750" anchor="ctr">
                     <a:lnL w="6350" cap="flat" cmpd="sng" algn="ctr">
                       <a:solidFill>
                         <a:srgbClr val="C6C9CD"/>
@@ -12010,11 +12419,11 @@
                     </a:bodyPr>
                     <a:lstStyle/>
                     <a:p>
-                      <a:pPr algn="ctr" indent="0" marL="0">
+                      <a:pPr algn="l" indent="0" marL="0">
                         <a:buNone/>
                       </a:pPr>
                       <a:r>
-                        <a:rPr lang="en-US" sz="1000" dirty="0">
+                        <a:rPr lang="en-US" sz="1200" dirty="0">
                           <a:solidFill>
                             <a:srgbClr val="000000"/>
                           </a:solidFill>
@@ -12024,18 +12433,18 @@
                         </a:rPr>
                         <a:t>10 reviewed tasks</a:t>
                       </a:r>
-                      <a:endParaRPr lang="en-US" sz="1000" dirty="0">
+                      <a:endParaRPr lang="en-US" sz="1200" dirty="0">
                         <a:latin typeface="Arial" charset="0"/>
                         <a:ea typeface="Arial" charset="0"/>
                         <a:cs typeface="Arial" charset="0"/>
                       </a:endParaRPr>
                     </a:p>
                     <a:p>
-                      <a:pPr algn="ctr" indent="0" marL="0">
+                      <a:pPr algn="l" indent="0" marL="0">
                         <a:buNone/>
                       </a:pPr>
                       <a:r>
-                        <a:rPr lang="en-US" sz="1000" dirty="0">
+                        <a:rPr lang="en-US" sz="1200" dirty="0">
                           <a:solidFill>
                             <a:srgbClr val="000000"/>
                           </a:solidFill>
@@ -12045,14 +12454,14 @@
                         </a:rPr>
                         <a:t>Error triage</a:t>
                       </a:r>
-                      <a:endParaRPr lang="en-US" sz="1000" dirty="0">
+                      <a:endParaRPr lang="en-US" sz="1200" dirty="0">
                         <a:latin typeface="Arial" charset="0"/>
                         <a:ea typeface="Arial" charset="0"/>
                         <a:cs typeface="Arial" charset="0"/>
                       </a:endParaRPr>
                     </a:p>
                   </a:txBody>
-                  <a:tcPr marL="101600" marR="101600" marT="38100" marB="38100" anchor="ctr">
+                  <a:tcPr marL="76200" marR="76200" marT="31750" marB="31750" anchor="ctr">
                     <a:lnL w="6350" cap="flat" cmpd="sng" algn="ctr">
                       <a:solidFill>
                         <a:srgbClr val="C6C9CD"/>
@@ -12101,11 +12510,11 @@
                     </a:bodyPr>
                     <a:lstStyle/>
                     <a:p>
-                      <a:pPr algn="ctr" indent="0" marL="0">
+                      <a:pPr algn="l" indent="0" marL="0">
                         <a:buNone/>
                       </a:pPr>
                       <a:r>
-                        <a:rPr lang="en-US" sz="1000" dirty="0">
+                        <a:rPr lang="en-US" sz="1200" dirty="0">
                           <a:solidFill>
                             <a:srgbClr val="000000"/>
                           </a:solidFill>
@@ -12115,18 +12524,18 @@
                         </a:rPr>
                         <a:t>20 completed tasks</a:t>
                       </a:r>
-                      <a:endParaRPr lang="en-US" sz="1000" dirty="0">
+                      <a:endParaRPr lang="en-US" sz="1200" dirty="0">
                         <a:latin typeface="Arial" charset="0"/>
                         <a:ea typeface="Arial" charset="0"/>
                         <a:cs typeface="Arial" charset="0"/>
                       </a:endParaRPr>
                     </a:p>
                     <a:p>
-                      <a:pPr algn="ctr" indent="0" marL="0">
+                      <a:pPr algn="l" indent="0" marL="0">
                         <a:buNone/>
                       </a:pPr>
                       <a:r>
-                        <a:rPr lang="en-US" sz="1000" dirty="0">
+                        <a:rPr lang="en-US" sz="1200" dirty="0">
                           <a:solidFill>
                             <a:srgbClr val="000000"/>
                           </a:solidFill>
@@ -12136,14 +12545,14 @@
                         </a:rPr>
                         <a:t>Gate evidence</a:t>
                       </a:r>
-                      <a:endParaRPr lang="en-US" sz="1000" dirty="0">
+                      <a:endParaRPr lang="en-US" sz="1200" dirty="0">
                         <a:latin typeface="Arial" charset="0"/>
                         <a:ea typeface="Arial" charset="0"/>
                         <a:cs typeface="Arial" charset="0"/>
                       </a:endParaRPr>
                     </a:p>
                   </a:txBody>
-                  <a:tcPr marL="101600" marR="101600" marT="38100" marB="38100" anchor="ctr">
+                  <a:tcPr marL="76200" marR="76200" marT="31750" marB="31750" anchor="ctr">
                     <a:lnL w="6350" cap="flat" cmpd="sng" algn="ctr">
                       <a:solidFill>
                         <a:srgbClr val="C6C9CD"/>
@@ -12198,7 +12607,7 @@
                         <a:buNone/>
                       </a:pPr>
                       <a:r>
-                        <a:rPr lang="en-US" sz="1000" b="1" dirty="0">
+                        <a:rPr lang="en-US" sz="1200" b="1" dirty="0">
                           <a:solidFill>
                             <a:srgbClr val="000000"/>
                           </a:solidFill>
@@ -12206,20 +12615,14 @@
                           <a:ea typeface="Arial" pitchFamily="34" charset="-122"/>
                           <a:cs typeface="Arial" pitchFamily="34" charset="-120"/>
                         </a:rPr>
-                        <a:t>Adoption &amp; value</a:t>
+                        <a:t>Adoption &amp; value
+</a:t>
                       </a:r>
-                      <a:endParaRPr lang="en-US" sz="1000" dirty="0">
-                        <a:latin typeface="Arial" charset="0"/>
-                        <a:ea typeface="Arial" charset="0"/>
-                        <a:cs typeface="Arial" charset="0"/>
-                      </a:endParaRPr>
-                    </a:p>
-                    <a:p>
                       <a:pPr algn="l" indent="0" marL="0">
                         <a:buNone/>
                       </a:pPr>
                       <a:r>
-                        <a:rPr lang="en-US" sz="1000" b="1" dirty="0">
+                        <a:rPr lang="en-US" sz="1200" dirty="0">
                           <a:solidFill>
                             <a:srgbClr val="000000"/>
                           </a:solidFill>
@@ -12229,14 +12632,14 @@
                         </a:rPr>
                         <a:t>Practice lead</a:t>
                       </a:r>
-                      <a:endParaRPr lang="en-US" sz="1000" dirty="0">
+                      <a:endParaRPr lang="en-US" sz="1200" dirty="0">
                         <a:latin typeface="Arial" charset="0"/>
                         <a:ea typeface="Arial" charset="0"/>
                         <a:cs typeface="Arial" charset="0"/>
                       </a:endParaRPr>
                     </a:p>
                   </a:txBody>
-                  <a:tcPr marL="101600" marR="101600" marT="38100" marB="38100" anchor="ctr">
+                  <a:tcPr marL="76200" marR="76200" marT="31750" marB="31750" anchor="ctr">
                     <a:lnL w="6350" cap="flat" cmpd="sng" algn="ctr">
                       <a:solidFill>
                         <a:srgbClr val="C6C9CD"/>
@@ -12285,11 +12688,11 @@
                     </a:bodyPr>
                     <a:lstStyle/>
                     <a:p>
-                      <a:pPr algn="ctr" indent="0" marL="0">
+                      <a:pPr algn="l" indent="0" marL="0">
                         <a:buNone/>
                       </a:pPr>
                       <a:r>
-                        <a:rPr lang="en-US" sz="1000" dirty="0">
+                        <a:rPr lang="en-US" sz="1200" dirty="0">
                           <a:solidFill>
                             <a:srgbClr val="000000"/>
                           </a:solidFill>
@@ -12299,18 +12702,18 @@
                         </a:rPr>
                         <a:t>Sponsor &amp; users</a:t>
                       </a:r>
-                      <a:endParaRPr lang="en-US" sz="1000" dirty="0">
+                      <a:endParaRPr lang="en-US" sz="1200" dirty="0">
                         <a:latin typeface="Arial" charset="0"/>
                         <a:ea typeface="Arial" charset="0"/>
                         <a:cs typeface="Arial" charset="0"/>
                       </a:endParaRPr>
                     </a:p>
                     <a:p>
-                      <a:pPr algn="ctr" indent="0" marL="0">
+                      <a:pPr algn="l" indent="0" marL="0">
                         <a:buNone/>
                       </a:pPr>
                       <a:r>
-                        <a:rPr lang="en-US" sz="1000" dirty="0">
+                        <a:rPr lang="en-US" sz="1200" dirty="0">
                           <a:solidFill>
                             <a:srgbClr val="000000"/>
                           </a:solidFill>
@@ -12320,14 +12723,14 @@
                         </a:rPr>
                         <a:t>Agree tracking</a:t>
                       </a:r>
-                      <a:endParaRPr lang="en-US" sz="1000" dirty="0">
+                      <a:endParaRPr lang="en-US" sz="1200" dirty="0">
                         <a:latin typeface="Arial" charset="0"/>
                         <a:ea typeface="Arial" charset="0"/>
                         <a:cs typeface="Arial" charset="0"/>
                       </a:endParaRPr>
                     </a:p>
                   </a:txBody>
-                  <a:tcPr marL="101600" marR="101600" marT="38100" marB="38100" anchor="ctr">
+                  <a:tcPr marL="76200" marR="76200" marT="31750" marB="31750" anchor="ctr">
                     <a:lnL w="6350" cap="flat" cmpd="sng" algn="ctr">
                       <a:solidFill>
                         <a:srgbClr val="C6C9CD"/>
@@ -12376,11 +12779,11 @@
                     </a:bodyPr>
                     <a:lstStyle/>
                     <a:p>
-                      <a:pPr algn="ctr" indent="0" marL="0">
+                      <a:pPr algn="l" indent="0" marL="0">
                         <a:buNone/>
                       </a:pPr>
                       <a:r>
-                        <a:rPr lang="en-US" sz="1000" dirty="0">
+                        <a:rPr lang="en-US" sz="1200" dirty="0">
                           <a:solidFill>
                             <a:srgbClr val="000000"/>
                           </a:solidFill>
@@ -12390,18 +12793,18 @@
                         </a:rPr>
                         <a:t>Training &amp; support</a:t>
                       </a:r>
-                      <a:endParaRPr lang="en-US" sz="1000" dirty="0">
+                      <a:endParaRPr lang="en-US" sz="1200" dirty="0">
                         <a:latin typeface="Arial" charset="0"/>
                         <a:ea typeface="Arial" charset="0"/>
                         <a:cs typeface="Arial" charset="0"/>
                       </a:endParaRPr>
                     </a:p>
                     <a:p>
-                      <a:pPr algn="ctr" indent="0" marL="0">
+                      <a:pPr algn="l" indent="0" marL="0">
                         <a:buNone/>
                       </a:pPr>
                       <a:r>
-                        <a:rPr lang="en-US" sz="1000" dirty="0">
+                        <a:rPr lang="en-US" sz="1200" dirty="0">
                           <a:solidFill>
                             <a:srgbClr val="000000"/>
                           </a:solidFill>
@@ -12411,14 +12814,14 @@
                         </a:rPr>
                         <a:t>Measurement plan</a:t>
                       </a:r>
-                      <a:endParaRPr lang="en-US" sz="1000" dirty="0">
+                      <a:endParaRPr lang="en-US" sz="1200" dirty="0">
                         <a:latin typeface="Arial" charset="0"/>
                         <a:ea typeface="Arial" charset="0"/>
                         <a:cs typeface="Arial" charset="0"/>
                       </a:endParaRPr>
                     </a:p>
                   </a:txBody>
-                  <a:tcPr marL="101600" marR="101600" marT="38100" marB="38100" anchor="ctr">
+                  <a:tcPr marL="76200" marR="76200" marT="31750" marB="31750" anchor="ctr">
                     <a:lnL w="6350" cap="flat" cmpd="sng" algn="ctr">
                       <a:solidFill>
                         <a:srgbClr val="C6C9CD"/>
@@ -12467,11 +12870,11 @@
                     </a:bodyPr>
                     <a:lstStyle/>
                     <a:p>
-                      <a:pPr algn="ctr" indent="0" marL="0">
+                      <a:pPr algn="l" indent="0" marL="0">
                         <a:buNone/>
                       </a:pPr>
                       <a:r>
-                        <a:rPr lang="en-US" sz="1000" dirty="0">
+                        <a:rPr lang="en-US" sz="1200" dirty="0">
                           <a:solidFill>
                             <a:srgbClr val="000000"/>
                           </a:solidFill>
@@ -12481,18 +12884,18 @@
                         </a:rPr>
                         <a:t>Weekly usage</a:t>
                       </a:r>
-                      <a:endParaRPr lang="en-US" sz="1000" dirty="0">
+                      <a:endParaRPr lang="en-US" sz="1200" dirty="0">
                         <a:latin typeface="Arial" charset="0"/>
                         <a:ea typeface="Arial" charset="0"/>
                         <a:cs typeface="Arial" charset="0"/>
                       </a:endParaRPr>
                     </a:p>
                     <a:p>
-                      <a:pPr algn="ctr" indent="0" marL="0">
+                      <a:pPr algn="l" indent="0" marL="0">
                         <a:buNone/>
                       </a:pPr>
                       <a:r>
-                        <a:rPr lang="en-US" sz="1000" dirty="0">
+                        <a:rPr lang="en-US" sz="1200" dirty="0">
                           <a:solidFill>
                             <a:srgbClr val="000000"/>
                           </a:solidFill>
@@ -12502,14 +12905,14 @@
                         </a:rPr>
                         <a:t>Feedback sessions</a:t>
                       </a:r>
-                      <a:endParaRPr lang="en-US" sz="1000" dirty="0">
+                      <a:endParaRPr lang="en-US" sz="1200" dirty="0">
                         <a:latin typeface="Arial" charset="0"/>
                         <a:ea typeface="Arial" charset="0"/>
                         <a:cs typeface="Arial" charset="0"/>
                       </a:endParaRPr>
                     </a:p>
                   </a:txBody>
-                  <a:tcPr marL="101600" marR="101600" marT="38100" marB="38100" anchor="ctr">
+                  <a:tcPr marL="76200" marR="76200" marT="31750" marB="31750" anchor="ctr">
                     <a:lnL w="6350" cap="flat" cmpd="sng" algn="ctr">
                       <a:solidFill>
                         <a:srgbClr val="C6C9CD"/>
@@ -12558,11 +12961,11 @@
                     </a:bodyPr>
                     <a:lstStyle/>
                     <a:p>
-                      <a:pPr algn="ctr" indent="0" marL="0">
+                      <a:pPr algn="l" indent="0" marL="0">
                         <a:buNone/>
                       </a:pPr>
                       <a:r>
-                        <a:rPr lang="en-US" sz="1000" dirty="0">
+                        <a:rPr lang="en-US" sz="1200" dirty="0">
                           <a:solidFill>
                             <a:srgbClr val="000000"/>
                           </a:solidFill>
@@ -12572,18 +12975,18 @@
                         </a:rPr>
                         <a:t>Benefit case</a:t>
                       </a:r>
-                      <a:endParaRPr lang="en-US" sz="1000" dirty="0">
+                      <a:endParaRPr lang="en-US" sz="1200" dirty="0">
                         <a:latin typeface="Arial" charset="0"/>
                         <a:ea typeface="Arial" charset="0"/>
                         <a:cs typeface="Arial" charset="0"/>
                       </a:endParaRPr>
                     </a:p>
                     <a:p>
-                      <a:pPr algn="ctr" indent="0" marL="0">
+                      <a:pPr algn="l" indent="0" marL="0">
                         <a:buNone/>
                       </a:pPr>
                       <a:r>
-                        <a:rPr lang="en-US" sz="1000" dirty="0">
+                        <a:rPr lang="en-US" sz="1200" dirty="0">
                           <a:solidFill>
                             <a:srgbClr val="000000"/>
                           </a:solidFill>
@@ -12593,14 +12996,14 @@
                         </a:rPr>
                         <a:t>Scale recommendation</a:t>
                       </a:r>
-                      <a:endParaRPr lang="en-US" sz="1000" dirty="0">
+                      <a:endParaRPr lang="en-US" sz="1200" dirty="0">
                         <a:latin typeface="Arial" charset="0"/>
                         <a:ea typeface="Arial" charset="0"/>
                         <a:cs typeface="Arial" charset="0"/>
                       </a:endParaRPr>
                     </a:p>
                   </a:txBody>
-                  <a:tcPr marL="101600" marR="101600" marT="38100" marB="38100" anchor="ctr">
+                  <a:tcPr marL="76200" marR="76200" marT="31750" marB="31750" anchor="ctr">
                     <a:lnL w="6350" cap="flat" cmpd="sng" algn="ctr">
                       <a:solidFill>
                         <a:srgbClr val="C6C9CD"/>
@@ -12846,7 +13249,7 @@
               <a:defRPr spc="0"/>
             </a:pPr>
             <a:r>
-              <a:rPr lang="en-US" sz="1250" b="1" dirty="0" spc="0">
+              <a:rPr lang="en-US" sz="1400" b="1" dirty="0" spc="0">
                 <a:solidFill>
                   <a:srgbClr val="000000"/>
                 </a:solidFill>
@@ -12856,7 +13259,7 @@
               </a:rPr>
               <a:t>EVIDENCE GATES</a:t>
             </a:r>
-            <a:endParaRPr lang="en-US" sz="1250" dirty="0" spc="0"/>
+            <a:endParaRPr lang="en-US" sz="1400" dirty="0" spc="0"/>
           </a:p>
         </p:txBody>
       </p:sp>
@@ -12891,7 +13294,7 @@
               <a:defRPr spc="0"/>
             </a:pPr>
             <a:r>
-              <a:rPr lang="en-US" sz="1150" b="1" dirty="0" spc="0">
+              <a:rPr lang="en-US" sz="1300" b="1" dirty="0" spc="0">
                 <a:solidFill>
                   <a:srgbClr val="FD5108"/>
                 </a:solidFill>
@@ -12901,7 +13304,7 @@
               </a:rPr>
               <a:t>G1 · Week 2</a:t>
             </a:r>
-            <a:endParaRPr lang="en-US" sz="1150" dirty="0" spc="0"/>
+            <a:endParaRPr lang="en-US" sz="1300" dirty="0" spc="0"/>
           </a:p>
         </p:txBody>
       </p:sp>
@@ -12913,8 +13316,8 @@
         </p:nvSpPr>
         <p:spPr>
           <a:xfrm>
-            <a:off x="444500" y="5251450"/>
-            <a:ext cx="1905000" cy="222250"/>
+            <a:off x="412750" y="5251450"/>
+            <a:ext cx="1968500" cy="342900"/>
           </a:xfrm>
           <a:prstGeom prst="rect">
             <a:avLst/>
@@ -12936,7 +13339,7 @@
               <a:defRPr spc="0"/>
             </a:pPr>
             <a:r>
-              <a:rPr lang="en-US" sz="950" dirty="0" spc="0">
+              <a:rPr lang="en-US" sz="1150" dirty="0" spc="0">
                 <a:solidFill>
                   <a:srgbClr val="000000"/>
                 </a:solidFill>
@@ -12946,7 +13349,7 @@
               </a:rPr>
               <a:t>Corpus + access signed</a:t>
             </a:r>
-            <a:endParaRPr lang="en-US" sz="950" dirty="0" spc="0"/>
+            <a:endParaRPr lang="en-US" sz="1150" dirty="0" spc="0"/>
           </a:p>
         </p:txBody>
       </p:sp>
@@ -12981,7 +13384,7 @@
               <a:defRPr spc="0"/>
             </a:pPr>
             <a:r>
-              <a:rPr lang="en-US" sz="1150" b="1" dirty="0" spc="0">
+              <a:rPr lang="en-US" sz="1300" b="1" dirty="0" spc="0">
                 <a:solidFill>
                   <a:srgbClr val="FD5108"/>
                 </a:solidFill>
@@ -12991,7 +13394,7 @@
               </a:rPr>
               <a:t>G2 · Week 4</a:t>
             </a:r>
-            <a:endParaRPr lang="en-US" sz="1150" dirty="0" spc="0"/>
+            <a:endParaRPr lang="en-US" sz="1300" dirty="0" spc="0"/>
           </a:p>
         </p:txBody>
       </p:sp>
@@ -13003,8 +13406,8 @@
         </p:nvSpPr>
         <p:spPr>
           <a:xfrm>
-            <a:off x="2413000" y="5251450"/>
-            <a:ext cx="1905000" cy="222250"/>
+            <a:off x="2381250" y="5251450"/>
+            <a:ext cx="1968500" cy="342900"/>
           </a:xfrm>
           <a:prstGeom prst="rect">
             <a:avLst/>
@@ -13026,7 +13429,7 @@
               <a:defRPr spc="0"/>
             </a:pPr>
             <a:r>
-              <a:rPr lang="en-US" sz="950" dirty="0" spc="0">
+              <a:rPr lang="en-US" sz="1150" dirty="0" spc="0">
                 <a:solidFill>
                   <a:srgbClr val="000000"/>
                 </a:solidFill>
@@ -13036,7 +13439,7 @@
               </a:rPr>
               <a:t>Test pack approved</a:t>
             </a:r>
-            <a:endParaRPr lang="en-US" sz="950" dirty="0" spc="0"/>
+            <a:endParaRPr lang="en-US" sz="1150" dirty="0" spc="0"/>
           </a:p>
         </p:txBody>
       </p:sp>
@@ -13071,7 +13474,7 @@
               <a:defRPr spc="0"/>
             </a:pPr>
             <a:r>
-              <a:rPr lang="en-US" sz="1150" b="1" dirty="0" spc="0">
+              <a:rPr lang="en-US" sz="1300" b="1" dirty="0" spc="0">
                 <a:solidFill>
                   <a:srgbClr val="FD5108"/>
                 </a:solidFill>
@@ -13081,7 +13484,7 @@
               </a:rPr>
               <a:t>G3 · Week 8</a:t>
             </a:r>
-            <a:endParaRPr lang="en-US" sz="1150" dirty="0" spc="0"/>
+            <a:endParaRPr lang="en-US" sz="1300" dirty="0" spc="0"/>
           </a:p>
         </p:txBody>
       </p:sp>
@@ -13093,8 +13496,8 @@
         </p:nvSpPr>
         <p:spPr>
           <a:xfrm>
-            <a:off x="4381500" y="5251450"/>
-            <a:ext cx="1905000" cy="222250"/>
+            <a:off x="4349750" y="5251450"/>
+            <a:ext cx="1968500" cy="342900"/>
           </a:xfrm>
           <a:prstGeom prst="rect">
             <a:avLst/>
@@ -13116,7 +13519,7 @@
               <a:defRPr spc="0"/>
             </a:pPr>
             <a:r>
-              <a:rPr lang="en-US" sz="950" dirty="0" spc="0">
+              <a:rPr lang="en-US" sz="1150" dirty="0" spc="0">
                 <a:solidFill>
                   <a:srgbClr val="000000"/>
                 </a:solidFill>
@@ -13126,7 +13529,7 @@
               </a:rPr>
               <a:t>10 tasks reviewed</a:t>
             </a:r>
-            <a:endParaRPr lang="en-US" sz="950" dirty="0" spc="0"/>
+            <a:endParaRPr lang="en-US" sz="1150" dirty="0" spc="0"/>
           </a:p>
         </p:txBody>
       </p:sp>
@@ -13161,7 +13564,7 @@
               <a:defRPr spc="0"/>
             </a:pPr>
             <a:r>
-              <a:rPr lang="en-US" sz="1150" b="1" dirty="0" spc="0">
+              <a:rPr lang="en-US" sz="1300" b="1" dirty="0" spc="0">
                 <a:solidFill>
                   <a:srgbClr val="FD5108"/>
                 </a:solidFill>
@@ -13171,7 +13574,7 @@
               </a:rPr>
               <a:t>G4 · Week 12</a:t>
             </a:r>
-            <a:endParaRPr lang="en-US" sz="1150" dirty="0" spc="0"/>
+            <a:endParaRPr lang="en-US" sz="1300" dirty="0" spc="0"/>
           </a:p>
         </p:txBody>
       </p:sp>
@@ -13183,8 +13586,8 @@
         </p:nvSpPr>
         <p:spPr>
           <a:xfrm>
-            <a:off x="6350000" y="5251450"/>
-            <a:ext cx="1905000" cy="222250"/>
+            <a:off x="6318250" y="5251450"/>
+            <a:ext cx="1968500" cy="342900"/>
           </a:xfrm>
           <a:prstGeom prst="rect">
             <a:avLst/>
@@ -13206,7 +13609,7 @@
               <a:defRPr spc="0"/>
             </a:pPr>
             <a:r>
-              <a:rPr lang="en-US" sz="950" dirty="0" spc="0">
+              <a:rPr lang="en-US" sz="1150" dirty="0" spc="0">
                 <a:solidFill>
                   <a:srgbClr val="000000"/>
                 </a:solidFill>
@@ -13214,9 +13617,30 @@
                 <a:ea typeface="Arial" pitchFamily="34" charset="-122"/>
                 <a:cs typeface="Arial" pitchFamily="34" charset="-120"/>
               </a:rPr>
-              <a:t>Practice lead + CFO decide</a:t>
+              <a:t>Practice lead + CFO</a:t>
             </a:r>
-            <a:endParaRPr lang="en-US" sz="950" dirty="0" spc="0"/>
+            <a:endParaRPr lang="en-US" sz="1150" dirty="0" spc="0"/>
+          </a:p>
+          <a:p>
+            <a:pPr algn="ctr" indent="0" marL="0">
+              <a:lnSpc>
+                <a:spcPct val="100000"/>
+              </a:lnSpc>
+              <a:buNone/>
+              <a:defRPr spc="0"/>
+            </a:pPr>
+            <a:r>
+              <a:rPr lang="en-US" sz="1150" dirty="0" spc="0">
+                <a:solidFill>
+                  <a:srgbClr val="000000"/>
+                </a:solidFill>
+                <a:latin typeface="Arial" pitchFamily="34" charset="0"/>
+                <a:ea typeface="Arial" pitchFamily="34" charset="-122"/>
+                <a:cs typeface="Arial" pitchFamily="34" charset="-120"/>
+              </a:rPr>
+              <a:t>decide</a:t>
+            </a:r>
+            <a:endParaRPr lang="en-US" sz="1150" dirty="0" spc="0"/>
           </a:p>
         </p:txBody>
       </p:sp>
@@ -13251,7 +13675,7 @@
               <a:defRPr spc="0"/>
             </a:pPr>
             <a:r>
-              <a:rPr lang="en-US" sz="1250" b="1" dirty="0" spc="0">
+              <a:rPr lang="en-US" sz="1400" b="1" dirty="0" spc="0">
                 <a:solidFill>
                   <a:srgbClr val="000000"/>
                 </a:solidFill>
@@ -13261,7 +13685,7 @@
               </a:rPr>
               <a:t>DEPENDENCIES</a:t>
             </a:r>
-            <a:endParaRPr lang="en-US" sz="1250" dirty="0" spc="0"/>
+            <a:endParaRPr lang="en-US" sz="1400" dirty="0" spc="0"/>
           </a:p>
         </p:txBody>
       </p:sp>
@@ -13296,7 +13720,7 @@
               <a:defRPr spc="0"/>
             </a:pPr>
             <a:r>
-              <a:rPr lang="en-US" sz="1000" dirty="0" spc="0">
+              <a:rPr lang="en-US" sz="1150" dirty="0" spc="0">
                 <a:solidFill>
                   <a:srgbClr val="000000"/>
                 </a:solidFill>
@@ -13306,7 +13730,7 @@
               </a:rPr>
               <a:t>Permissions before retrieval tests</a:t>
             </a:r>
-            <a:endParaRPr lang="en-US" sz="1000" dirty="0" spc="0"/>
+            <a:endParaRPr lang="en-US" sz="1150" dirty="0" spc="0"/>
           </a:p>
         </p:txBody>
       </p:sp>
@@ -13341,7 +13765,7 @@
               <a:defRPr spc="0"/>
             </a:pPr>
             <a:r>
-              <a:rPr lang="en-US" sz="1000" dirty="0" spc="0">
+              <a:rPr lang="en-US" sz="1150" dirty="0" spc="0">
                 <a:solidFill>
                   <a:srgbClr val="000000"/>
                 </a:solidFill>
@@ -13351,7 +13775,7 @@
               </a:rPr>
               <a:t>Approved test pack before pilot</a:t>
             </a:r>
-            <a:endParaRPr lang="en-US" sz="1000" dirty="0" spc="0"/>
+            <a:endParaRPr lang="en-US" sz="1150" dirty="0" spc="0"/>
           </a:p>
         </p:txBody>
       </p:sp>
@@ -13386,7 +13810,7 @@
               <a:defRPr spc="0"/>
             </a:pPr>
             <a:r>
-              <a:rPr lang="en-US" sz="1000" dirty="0" spc="0">
+              <a:rPr lang="en-US" sz="1150" dirty="0" spc="0">
                 <a:solidFill>
                   <a:srgbClr val="000000"/>
                 </a:solidFill>
@@ -13396,7 +13820,7 @@
               </a:rPr>
               <a:t>Quality evidence before benefit case</a:t>
             </a:r>
-            <a:endParaRPr lang="en-US" sz="1000" dirty="0" spc="0"/>
+            <a:endParaRPr lang="en-US" sz="1150" dirty="0" spc="0"/>
           </a:p>
         </p:txBody>
       </p:sp>
@@ -13946,7 +14370,7 @@
                         <a:buNone/>
                       </a:pPr>
                       <a:r>
-                        <a:rPr lang="en-US" sz="1100" b="1" dirty="0">
+                        <a:rPr lang="en-US" sz="1200" b="1" dirty="0">
                           <a:solidFill>
                             <a:srgbClr val="FFFFFF"/>
                           </a:solidFill>
@@ -13956,14 +14380,14 @@
                         </a:rPr>
                         <a:t>Cost item</a:t>
                       </a:r>
-                      <a:endParaRPr lang="en-US" sz="1100" dirty="0">
+                      <a:endParaRPr lang="en-US" sz="1200" dirty="0">
                         <a:latin typeface="Arial" charset="0"/>
                         <a:ea typeface="Arial" charset="0"/>
                         <a:cs typeface="Arial" charset="0"/>
                       </a:endParaRPr>
                     </a:p>
                   </a:txBody>
-                  <a:tcPr marL="101600" marR="101600" marT="38100" marB="38100" anchor="ctr">
+                  <a:tcPr marL="76200" marR="76200" marT="31750" marB="31750" anchor="ctr">
                     <a:lnL w="6350" cap="flat" cmpd="sng" algn="ctr">
                       <a:solidFill>
                         <a:srgbClr val="C6C9CD"/>
@@ -14012,11 +14436,11 @@
                     </a:bodyPr>
                     <a:lstStyle/>
                     <a:p>
-                      <a:pPr algn="ctr" indent="0" marL="0">
+                      <a:pPr algn="l" indent="0" marL="0">
                         <a:buNone/>
                       </a:pPr>
                       <a:r>
-                        <a:rPr lang="en-US" sz="1100" b="1" dirty="0">
+                        <a:rPr lang="en-US" sz="1200" b="1" dirty="0">
                           <a:solidFill>
                             <a:srgbClr val="FFFFFF"/>
                           </a:solidFill>
@@ -14026,14 +14450,14 @@
                         </a:rPr>
                         <a:t>Amount</a:t>
                       </a:r>
-                      <a:endParaRPr lang="en-US" sz="1100" dirty="0">
+                      <a:endParaRPr lang="en-US" sz="1200" dirty="0">
                         <a:latin typeface="Arial" charset="0"/>
                         <a:ea typeface="Arial" charset="0"/>
                         <a:cs typeface="Arial" charset="0"/>
                       </a:endParaRPr>
                     </a:p>
                   </a:txBody>
-                  <a:tcPr marL="101600" marR="101600" marT="38100" marB="38100" anchor="ctr">
+                  <a:tcPr marL="76200" marR="76200" marT="31750" marB="31750" anchor="ctr">
                     <a:lnL w="6350" cap="flat" cmpd="sng" algn="ctr">
                       <a:solidFill>
                         <a:srgbClr val="C6C9CD"/>
@@ -14088,7 +14512,7 @@
                         <a:buNone/>
                       </a:pPr>
                       <a:r>
-                        <a:rPr lang="en-US" sz="1100" b="1" dirty="0">
+                        <a:rPr lang="en-US" sz="1200" dirty="0">
                           <a:solidFill>
                             <a:srgbClr val="000000"/>
                           </a:solidFill>
@@ -14098,14 +14522,14 @@
                         </a:rPr>
                         <a:t>Implementation</a:t>
                       </a:r>
-                      <a:endParaRPr lang="en-US" sz="1100" dirty="0">
+                      <a:endParaRPr lang="en-US" sz="1200" dirty="0">
                         <a:latin typeface="Arial" charset="0"/>
                         <a:ea typeface="Arial" charset="0"/>
                         <a:cs typeface="Arial" charset="0"/>
                       </a:endParaRPr>
                     </a:p>
                   </a:txBody>
-                  <a:tcPr marL="101600" marR="101600" marT="38100" marB="38100" anchor="ctr">
+                  <a:tcPr marL="76200" marR="76200" marT="31750" marB="31750" anchor="ctr">
                     <a:lnL w="6350" cap="flat" cmpd="sng" algn="ctr">
                       <a:solidFill>
                         <a:srgbClr val="C6C9CD"/>
@@ -14154,11 +14578,11 @@
                     </a:bodyPr>
                     <a:lstStyle/>
                     <a:p>
-                      <a:pPr algn="ctr" indent="0" marL="0">
+                      <a:pPr algn="l" indent="0" marL="0">
                         <a:buNone/>
                       </a:pPr>
                       <a:r>
-                        <a:rPr lang="en-US" sz="1100" dirty="0">
+                        <a:rPr lang="en-US" sz="1200" dirty="0">
                           <a:solidFill>
                             <a:srgbClr val="000000"/>
                           </a:solidFill>
@@ -14168,14 +14592,14 @@
                         </a:rPr>
                         <a:t>$85k</a:t>
                       </a:r>
-                      <a:endParaRPr lang="en-US" sz="1100" dirty="0">
+                      <a:endParaRPr lang="en-US" sz="1200" dirty="0">
                         <a:latin typeface="Arial" charset="0"/>
                         <a:ea typeface="Arial" charset="0"/>
                         <a:cs typeface="Arial" charset="0"/>
                       </a:endParaRPr>
                     </a:p>
                   </a:txBody>
-                  <a:tcPr marL="101600" marR="101600" marT="38100" marB="38100" anchor="ctr">
+                  <a:tcPr marL="76200" marR="76200" marT="31750" marB="31750" anchor="ctr">
                     <a:lnL w="6350" cap="flat" cmpd="sng" algn="ctr">
                       <a:solidFill>
                         <a:srgbClr val="C6C9CD"/>
@@ -14230,7 +14654,7 @@
                         <a:buNone/>
                       </a:pPr>
                       <a:r>
-                        <a:rPr lang="en-US" sz="1100" b="1" dirty="0">
+                        <a:rPr lang="en-US" sz="1200" dirty="0">
                           <a:solidFill>
                             <a:srgbClr val="000000"/>
                           </a:solidFill>
@@ -14240,14 +14664,14 @@
                         </a:rPr>
                         <a:t>Pilot included</a:t>
                       </a:r>
-                      <a:endParaRPr lang="en-US" sz="1100" dirty="0">
+                      <a:endParaRPr lang="en-US" sz="1200" dirty="0">
                         <a:latin typeface="Arial" charset="0"/>
                         <a:ea typeface="Arial" charset="0"/>
                         <a:cs typeface="Arial" charset="0"/>
                       </a:endParaRPr>
                     </a:p>
                   </a:txBody>
-                  <a:tcPr marL="101600" marR="101600" marT="38100" marB="38100" anchor="ctr">
+                  <a:tcPr marL="76200" marR="76200" marT="31750" marB="31750" anchor="ctr">
                     <a:lnL w="6350" cap="flat" cmpd="sng" algn="ctr">
                       <a:solidFill>
                         <a:srgbClr val="C6C9CD"/>
@@ -14296,11 +14720,11 @@
                     </a:bodyPr>
                     <a:lstStyle/>
                     <a:p>
-                      <a:pPr algn="ctr" indent="0" marL="0">
+                      <a:pPr algn="l" indent="0" marL="0">
                         <a:buNone/>
                       </a:pPr>
                       <a:r>
-                        <a:rPr lang="en-US" sz="1100" dirty="0">
+                        <a:rPr lang="en-US" sz="1200" dirty="0">
                           <a:solidFill>
                             <a:srgbClr val="000000"/>
                           </a:solidFill>
@@ -14310,14 +14734,14 @@
                         </a:rPr>
                         <a:t>$25k</a:t>
                       </a:r>
-                      <a:endParaRPr lang="en-US" sz="1100" dirty="0">
+                      <a:endParaRPr lang="en-US" sz="1200" dirty="0">
                         <a:latin typeface="Arial" charset="0"/>
                         <a:ea typeface="Arial" charset="0"/>
                         <a:cs typeface="Arial" charset="0"/>
                       </a:endParaRPr>
                     </a:p>
                   </a:txBody>
-                  <a:tcPr marL="101600" marR="101600" marT="38100" marB="38100" anchor="ctr">
+                  <a:tcPr marL="76200" marR="76200" marT="31750" marB="31750" anchor="ctr">
                     <a:lnL w="6350" cap="flat" cmpd="sng" algn="ctr">
                       <a:solidFill>
                         <a:srgbClr val="C6C9CD"/>
@@ -14372,7 +14796,7 @@
                         <a:buNone/>
                       </a:pPr>
                       <a:r>
-                        <a:rPr lang="en-US" sz="1100" b="1" dirty="0">
+                        <a:rPr lang="en-US" sz="1200" dirty="0">
                           <a:solidFill>
                             <a:srgbClr val="000000"/>
                           </a:solidFill>
@@ -14382,14 +14806,14 @@
                         </a:rPr>
                         <a:t>Annual operations</a:t>
                       </a:r>
-                      <a:endParaRPr lang="en-US" sz="1100" dirty="0">
+                      <a:endParaRPr lang="en-US" sz="1200" dirty="0">
                         <a:latin typeface="Arial" charset="0"/>
                         <a:ea typeface="Arial" charset="0"/>
                         <a:cs typeface="Arial" charset="0"/>
                       </a:endParaRPr>
                     </a:p>
                   </a:txBody>
-                  <a:tcPr marL="101600" marR="101600" marT="38100" marB="38100" anchor="ctr">
+                  <a:tcPr marL="76200" marR="76200" marT="31750" marB="31750" anchor="ctr">
                     <a:lnL w="6350" cap="flat" cmpd="sng" algn="ctr">
                       <a:solidFill>
                         <a:srgbClr val="C6C9CD"/>
@@ -14438,11 +14862,11 @@
                     </a:bodyPr>
                     <a:lstStyle/>
                     <a:p>
-                      <a:pPr algn="ctr" indent="0" marL="0">
+                      <a:pPr algn="l" indent="0" marL="0">
                         <a:buNone/>
                       </a:pPr>
                       <a:r>
-                        <a:rPr lang="en-US" sz="1100" dirty="0">
+                        <a:rPr lang="en-US" sz="1200" dirty="0">
                           <a:solidFill>
                             <a:srgbClr val="000000"/>
                           </a:solidFill>
@@ -14452,14 +14876,14 @@
                         </a:rPr>
                         <a:t>$30k</a:t>
                       </a:r>
-                      <a:endParaRPr lang="en-US" sz="1100" dirty="0">
+                      <a:endParaRPr lang="en-US" sz="1200" dirty="0">
                         <a:latin typeface="Arial" charset="0"/>
                         <a:ea typeface="Arial" charset="0"/>
                         <a:cs typeface="Arial" charset="0"/>
                       </a:endParaRPr>
                     </a:p>
                   </a:txBody>
-                  <a:tcPr marL="101600" marR="101600" marT="38100" marB="38100" anchor="ctr">
+                  <a:tcPr marL="76200" marR="76200" marT="31750" marB="31750" anchor="ctr">
                     <a:lnL w="6350" cap="flat" cmpd="sng" algn="ctr">
                       <a:solidFill>
                         <a:srgbClr val="C6C9CD"/>
@@ -14514,7 +14938,7 @@
                         <a:buNone/>
                       </a:pPr>
                       <a:r>
-                        <a:rPr lang="en-US" sz="1100" b="1" dirty="0">
+                        <a:rPr lang="en-US" sz="1200" b="1" dirty="0">
                           <a:solidFill>
                             <a:srgbClr val="000000"/>
                           </a:solidFill>
@@ -14524,14 +14948,14 @@
                         </a:rPr>
                         <a:t>First-year total</a:t>
                       </a:r>
-                      <a:endParaRPr lang="en-US" sz="1100" dirty="0">
+                      <a:endParaRPr lang="en-US" sz="1200" dirty="0">
                         <a:latin typeface="Arial" charset="0"/>
                         <a:ea typeface="Arial" charset="0"/>
                         <a:cs typeface="Arial" charset="0"/>
                       </a:endParaRPr>
                     </a:p>
                   </a:txBody>
-                  <a:tcPr marL="101600" marR="101600" marT="38100" marB="38100" anchor="ctr">
+                  <a:tcPr marL="76200" marR="76200" marT="31750" marB="31750" anchor="ctr">
                     <a:lnL w="6350" cap="flat" cmpd="sng" algn="ctr">
                       <a:solidFill>
                         <a:srgbClr val="C6C9CD"/>
@@ -14580,11 +15004,11 @@
                     </a:bodyPr>
                     <a:lstStyle/>
                     <a:p>
-                      <a:pPr algn="ctr" indent="0" marL="0">
+                      <a:pPr algn="l" indent="0" marL="0">
                         <a:buNone/>
                       </a:pPr>
                       <a:r>
-                        <a:rPr lang="en-US" sz="1100" dirty="0">
+                        <a:rPr lang="en-US" sz="1200" b="1" dirty="0">
                           <a:solidFill>
                             <a:srgbClr val="000000"/>
                           </a:solidFill>
@@ -14594,14 +15018,14 @@
                         </a:rPr>
                         <a:t>$115k</a:t>
                       </a:r>
-                      <a:endParaRPr lang="en-US" sz="1100" dirty="0">
+                      <a:endParaRPr lang="en-US" sz="1200" dirty="0">
                         <a:latin typeface="Arial" charset="0"/>
                         <a:ea typeface="Arial" charset="0"/>
                         <a:cs typeface="Arial" charset="0"/>
                       </a:endParaRPr>
                     </a:p>
                   </a:txBody>
-                  <a:tcPr marL="101600" marR="101600" marT="38100" marB="38100" anchor="ctr">
+                  <a:tcPr marL="76200" marR="76200" marT="31750" marB="31750" anchor="ctr">
                     <a:lnL w="6350" cap="flat" cmpd="sng" algn="ctr">
                       <a:solidFill>
                         <a:srgbClr val="C6C9CD"/>
@@ -14671,13 +15095,13 @@
             <a:tbl>
               <a:tblPr/>
               <a:tblGrid>
-                <a:gridCol w="730250"/>
-                <a:gridCol w="666750"/>
-                <a:gridCol w="603250"/>
+                <a:gridCol w="787400"/>
+                <a:gridCol w="711200"/>
+                <a:gridCol w="622300"/>
+                <a:gridCol w="584200"/>
                 <a:gridCol w="666750"/>
                 <a:gridCol w="685800"/>
-                <a:gridCol w="711200"/>
-                <a:gridCol w="622300"/>
+                <a:gridCol w="628650"/>
               </a:tblGrid>
               <a:tr h="558800">
                 <a:tc>
@@ -14691,7 +15115,7 @@
                         <a:buNone/>
                       </a:pPr>
                       <a:r>
-                        <a:rPr lang="en-US" sz="900" b="1" dirty="0">
+                        <a:rPr lang="en-US" sz="1000" b="1" dirty="0">
                           <a:solidFill>
                             <a:srgbClr val="FFFFFF"/>
                           </a:solidFill>
@@ -14701,14 +15125,14 @@
                         </a:rPr>
                         <a:t>Scenario</a:t>
                       </a:r>
-                      <a:endParaRPr lang="en-US" sz="900" dirty="0">
+                      <a:endParaRPr lang="en-US" sz="1000" dirty="0">
                         <a:latin typeface="Arial" charset="0"/>
                         <a:ea typeface="Arial" charset="0"/>
                         <a:cs typeface="Arial" charset="0"/>
                       </a:endParaRPr>
                     </a:p>
                   </a:txBody>
-                  <a:tcPr marL="101600" marR="101600" marT="38100" marB="38100" anchor="ctr">
+                  <a:tcPr marL="44450" marR="44450" marT="31750" marB="31750" anchor="ctr">
                     <a:lnL w="6350" cap="flat" cmpd="sng" algn="ctr">
                       <a:solidFill>
                         <a:srgbClr val="C6C9CD"/>
@@ -14761,7 +15185,7 @@
                         <a:buNone/>
                       </a:pPr>
                       <a:r>
-                        <a:rPr lang="en-US" sz="900" b="1" dirty="0">
+                        <a:rPr lang="en-US" sz="1000" b="1" dirty="0">
                           <a:solidFill>
                             <a:srgbClr val="FFFFFF"/>
                           </a:solidFill>
@@ -14771,14 +15195,14 @@
                         </a:rPr>
                         <a:t>Adoption</a:t>
                       </a:r>
-                      <a:endParaRPr lang="en-US" sz="900" dirty="0">
+                      <a:endParaRPr lang="en-US" sz="1000" dirty="0">
                         <a:latin typeface="Arial" charset="0"/>
                         <a:ea typeface="Arial" charset="0"/>
                         <a:cs typeface="Arial" charset="0"/>
                       </a:endParaRPr>
                     </a:p>
                   </a:txBody>
-                  <a:tcPr marL="101600" marR="101600" marT="38100" marB="38100" anchor="ctr">
+                  <a:tcPr marL="44450" marR="44450" marT="31750" marB="31750" anchor="ctr">
                     <a:lnL w="6350" cap="flat" cmpd="sng" algn="ctr">
                       <a:solidFill>
                         <a:srgbClr val="C6C9CD"/>
@@ -14831,7 +15255,7 @@
                         <a:buNone/>
                       </a:pPr>
                       <a:r>
-                        <a:rPr lang="en-US" sz="900" b="1" dirty="0">
+                        <a:rPr lang="en-US" sz="1000" b="1" dirty="0">
                           <a:solidFill>
                             <a:srgbClr val="FFFFFF"/>
                           </a:solidFill>
@@ -14839,16 +15263,37 @@
                           <a:ea typeface="Arial" pitchFamily="34" charset="-122"/>
                           <a:cs typeface="Arial" pitchFamily="34" charset="-120"/>
                         </a:rPr>
-                        <a:t>Time saved</a:t>
+                        <a:t>Time</a:t>
                       </a:r>
-                      <a:endParaRPr lang="en-US" sz="900" dirty="0">
+                      <a:endParaRPr lang="en-US" sz="1000" dirty="0">
+                        <a:latin typeface="Arial" charset="0"/>
+                        <a:ea typeface="Arial" charset="0"/>
+                        <a:cs typeface="Arial" charset="0"/>
+                      </a:endParaRPr>
+                    </a:p>
+                    <a:p>
+                      <a:pPr algn="ctr" indent="0" marL="0">
+                        <a:buNone/>
+                      </a:pPr>
+                      <a:r>
+                        <a:rPr lang="en-US" sz="1000" b="1" dirty="0">
+                          <a:solidFill>
+                            <a:srgbClr val="FFFFFF"/>
+                          </a:solidFill>
+                          <a:latin typeface="Arial" pitchFamily="34" charset="0"/>
+                          <a:ea typeface="Arial" pitchFamily="34" charset="-122"/>
+                          <a:cs typeface="Arial" pitchFamily="34" charset="-120"/>
+                        </a:rPr>
+                        <a:t>saved</a:t>
+                      </a:r>
+                      <a:endParaRPr lang="en-US" sz="1000" dirty="0">
                         <a:latin typeface="Arial" charset="0"/>
                         <a:ea typeface="Arial" charset="0"/>
                         <a:cs typeface="Arial" charset="0"/>
                       </a:endParaRPr>
                     </a:p>
                   </a:txBody>
-                  <a:tcPr marL="101600" marR="101600" marT="38100" marB="38100" anchor="ctr">
+                  <a:tcPr marL="44450" marR="44450" marT="31750" marB="31750" anchor="ctr">
                     <a:lnL w="6350" cap="flat" cmpd="sng" algn="ctr">
                       <a:solidFill>
                         <a:srgbClr val="C6C9CD"/>
@@ -14901,7 +15346,7 @@
                         <a:buNone/>
                       </a:pPr>
                       <a:r>
-                        <a:rPr lang="en-US" sz="900" b="1" dirty="0">
+                        <a:rPr lang="en-US" sz="1000" b="1" dirty="0">
                           <a:solidFill>
                             <a:srgbClr val="FFFFFF"/>
                           </a:solidFill>
@@ -14911,14 +15356,14 @@
                         </a:rPr>
                         <a:t>Annual h</a:t>
                       </a:r>
-                      <a:endParaRPr lang="en-US" sz="900" dirty="0">
+                      <a:endParaRPr lang="en-US" sz="1000" dirty="0">
                         <a:latin typeface="Arial" charset="0"/>
                         <a:ea typeface="Arial" charset="0"/>
                         <a:cs typeface="Arial" charset="0"/>
                       </a:endParaRPr>
                     </a:p>
                   </a:txBody>
-                  <a:tcPr marL="101600" marR="101600" marT="38100" marB="38100" anchor="ctr">
+                  <a:tcPr marL="44450" marR="44450" marT="31750" marB="31750" anchor="ctr">
                     <a:lnL w="6350" cap="flat" cmpd="sng" algn="ctr">
                       <a:solidFill>
                         <a:srgbClr val="C6C9CD"/>
@@ -14971,7 +15416,7 @@
                         <a:buNone/>
                       </a:pPr>
                       <a:r>
-                        <a:rPr lang="en-US" sz="900" b="1" dirty="0">
+                        <a:rPr lang="en-US" sz="1000" b="1" dirty="0">
                           <a:solidFill>
                             <a:srgbClr val="FFFFFF"/>
                           </a:solidFill>
@@ -14979,16 +15424,37 @@
                           <a:ea typeface="Arial" pitchFamily="34" charset="-122"/>
                           <a:cs typeface="Arial" pitchFamily="34" charset="-120"/>
                         </a:rPr>
-                        <a:t>Annual capacity</a:t>
+                        <a:t>Annual</a:t>
                       </a:r>
-                      <a:endParaRPr lang="en-US" sz="900" dirty="0">
+                      <a:endParaRPr lang="en-US" sz="1000" dirty="0">
+                        <a:latin typeface="Arial" charset="0"/>
+                        <a:ea typeface="Arial" charset="0"/>
+                        <a:cs typeface="Arial" charset="0"/>
+                      </a:endParaRPr>
+                    </a:p>
+                    <a:p>
+                      <a:pPr algn="ctr" indent="0" marL="0">
+                        <a:buNone/>
+                      </a:pPr>
+                      <a:r>
+                        <a:rPr lang="en-US" sz="1000" b="1" dirty="0">
+                          <a:solidFill>
+                            <a:srgbClr val="FFFFFF"/>
+                          </a:solidFill>
+                          <a:latin typeface="Arial" pitchFamily="34" charset="0"/>
+                          <a:ea typeface="Arial" pitchFamily="34" charset="-122"/>
+                          <a:cs typeface="Arial" pitchFamily="34" charset="-120"/>
+                        </a:rPr>
+                        <a:t>capacity</a:t>
+                      </a:r>
+                      <a:endParaRPr lang="en-US" sz="1000" dirty="0">
                         <a:latin typeface="Arial" charset="0"/>
                         <a:ea typeface="Arial" charset="0"/>
                         <a:cs typeface="Arial" charset="0"/>
                       </a:endParaRPr>
                     </a:p>
                   </a:txBody>
-                  <a:tcPr marL="101600" marR="101600" marT="38100" marB="38100" anchor="ctr">
+                  <a:tcPr marL="44450" marR="44450" marT="31750" marB="31750" anchor="ctr">
                     <a:lnL w="6350" cap="flat" cmpd="sng" algn="ctr">
                       <a:solidFill>
                         <a:srgbClr val="C6C9CD"/>
@@ -15041,7 +15507,7 @@
                         <a:buNone/>
                       </a:pPr>
                       <a:r>
-                        <a:rPr lang="en-US" sz="900" b="1" dirty="0">
+                        <a:rPr lang="en-US" sz="1000" b="1" dirty="0">
                           <a:solidFill>
                             <a:srgbClr val="FFFFFF"/>
                           </a:solidFill>
@@ -15049,16 +15515,37 @@
                           <a:ea typeface="Arial" pitchFamily="34" charset="-122"/>
                           <a:cs typeface="Arial" pitchFamily="34" charset="-120"/>
                         </a:rPr>
-                        <a:t>First-year value</a:t>
+                        <a:t>First-year</a:t>
                       </a:r>
-                      <a:endParaRPr lang="en-US" sz="900" dirty="0">
+                      <a:endParaRPr lang="en-US" sz="1000" dirty="0">
+                        <a:latin typeface="Arial" charset="0"/>
+                        <a:ea typeface="Arial" charset="0"/>
+                        <a:cs typeface="Arial" charset="0"/>
+                      </a:endParaRPr>
+                    </a:p>
+                    <a:p>
+                      <a:pPr algn="ctr" indent="0" marL="0">
+                        <a:buNone/>
+                      </a:pPr>
+                      <a:r>
+                        <a:rPr lang="en-US" sz="1000" b="1" dirty="0">
+                          <a:solidFill>
+                            <a:srgbClr val="FFFFFF"/>
+                          </a:solidFill>
+                          <a:latin typeface="Arial" pitchFamily="34" charset="0"/>
+                          <a:ea typeface="Arial" pitchFamily="34" charset="-122"/>
+                          <a:cs typeface="Arial" pitchFamily="34" charset="-120"/>
+                        </a:rPr>
+                        <a:t>value</a:t>
+                      </a:r>
+                      <a:endParaRPr lang="en-US" sz="1000" dirty="0">
                         <a:latin typeface="Arial" charset="0"/>
                         <a:ea typeface="Arial" charset="0"/>
                         <a:cs typeface="Arial" charset="0"/>
                       </a:endParaRPr>
                     </a:p>
                   </a:txBody>
-                  <a:tcPr marL="101600" marR="101600" marT="38100" marB="38100" anchor="ctr">
+                  <a:tcPr marL="44450" marR="44450" marT="31750" marB="31750" anchor="ctr">
                     <a:lnL w="6350" cap="flat" cmpd="sng" algn="ctr">
                       <a:solidFill>
                         <a:srgbClr val="C6C9CD"/>
@@ -15111,7 +15598,7 @@
                         <a:buNone/>
                       </a:pPr>
                       <a:r>
-                        <a:rPr lang="en-US" sz="900" b="1" dirty="0">
+                        <a:rPr lang="en-US" sz="1000" b="1" dirty="0">
                           <a:solidFill>
                             <a:srgbClr val="FFFFFF"/>
                           </a:solidFill>
@@ -15119,16 +15606,37 @@
                           <a:ea typeface="Arial" pitchFamily="34" charset="-122"/>
                           <a:cs typeface="Arial" pitchFamily="34" charset="-120"/>
                         </a:rPr>
-                        <a:t>Net vs $115k</a:t>
+                        <a:t>Net vs</a:t>
                       </a:r>
-                      <a:endParaRPr lang="en-US" sz="900" dirty="0">
+                      <a:endParaRPr lang="en-US" sz="1000" dirty="0">
+                        <a:latin typeface="Arial" charset="0"/>
+                        <a:ea typeface="Arial" charset="0"/>
+                        <a:cs typeface="Arial" charset="0"/>
+                      </a:endParaRPr>
+                    </a:p>
+                    <a:p>
+                      <a:pPr algn="ctr" indent="0" marL="0">
+                        <a:buNone/>
+                      </a:pPr>
+                      <a:r>
+                        <a:rPr lang="en-US" sz="1000" b="1" dirty="0">
+                          <a:solidFill>
+                            <a:srgbClr val="FFFFFF"/>
+                          </a:solidFill>
+                          <a:latin typeface="Arial" pitchFamily="34" charset="0"/>
+                          <a:ea typeface="Arial" pitchFamily="34" charset="-122"/>
+                          <a:cs typeface="Arial" pitchFamily="34" charset="-120"/>
+                        </a:rPr>
+                        <a:t>$115k</a:t>
+                      </a:r>
+                      <a:endParaRPr lang="en-US" sz="1000" dirty="0">
                         <a:latin typeface="Arial" charset="0"/>
                         <a:ea typeface="Arial" charset="0"/>
                         <a:cs typeface="Arial" charset="0"/>
                       </a:endParaRPr>
                     </a:p>
                   </a:txBody>
-                  <a:tcPr marL="101600" marR="101600" marT="38100" marB="38100" anchor="ctr">
+                  <a:tcPr marL="44450" marR="44450" marT="31750" marB="31750" anchor="ctr">
                     <a:lnL w="6350" cap="flat" cmpd="sng" algn="ctr">
                       <a:solidFill>
                         <a:srgbClr val="C6C9CD"/>
@@ -15183,7 +15691,7 @@
                         <a:buNone/>
                       </a:pPr>
                       <a:r>
-                        <a:rPr lang="en-US" sz="900" b="1" dirty="0">
+                        <a:rPr lang="en-US" sz="1000" b="1" dirty="0">
                           <a:solidFill>
                             <a:srgbClr val="000000"/>
                           </a:solidFill>
@@ -15193,14 +15701,14 @@
                         </a:rPr>
                         <a:t>Downside</a:t>
                       </a:r>
-                      <a:endParaRPr lang="en-US" sz="900" dirty="0">
+                      <a:endParaRPr lang="en-US" sz="1000" dirty="0">
                         <a:latin typeface="Arial" charset="0"/>
                         <a:ea typeface="Arial" charset="0"/>
                         <a:cs typeface="Arial" charset="0"/>
                       </a:endParaRPr>
                     </a:p>
                   </a:txBody>
-                  <a:tcPr marL="101600" marR="101600" marT="38100" marB="38100" anchor="ctr">
+                  <a:tcPr marL="44450" marR="44450" marT="31750" marB="31750" anchor="ctr">
                     <a:lnL w="6350" cap="flat" cmpd="sng" algn="ctr">
                       <a:solidFill>
                         <a:srgbClr val="C6C9CD"/>
@@ -15253,7 +15761,7 @@
                         <a:buNone/>
                       </a:pPr>
                       <a:r>
-                        <a:rPr lang="en-US" sz="900" dirty="0">
+                        <a:rPr lang="en-US" sz="1000" dirty="0">
                           <a:solidFill>
                             <a:srgbClr val="000000"/>
                           </a:solidFill>
@@ -15263,14 +15771,14 @@
                         </a:rPr>
                         <a:t>40%</a:t>
                       </a:r>
-                      <a:endParaRPr lang="en-US" sz="900" dirty="0">
+                      <a:endParaRPr lang="en-US" sz="1000" dirty="0">
                         <a:latin typeface="Arial" charset="0"/>
                         <a:ea typeface="Arial" charset="0"/>
                         <a:cs typeface="Arial" charset="0"/>
                       </a:endParaRPr>
                     </a:p>
                   </a:txBody>
-                  <a:tcPr marL="101600" marR="101600" marT="38100" marB="38100" anchor="ctr">
+                  <a:tcPr marL="44450" marR="44450" marT="31750" marB="31750" anchor="ctr">
                     <a:lnL w="6350" cap="flat" cmpd="sng" algn="ctr">
                       <a:solidFill>
                         <a:srgbClr val="C6C9CD"/>
@@ -15323,7 +15831,7 @@
                         <a:buNone/>
                       </a:pPr>
                       <a:r>
-                        <a:rPr lang="en-US" sz="900" dirty="0">
+                        <a:rPr lang="en-US" sz="1000" dirty="0">
                           <a:solidFill>
                             <a:srgbClr val="000000"/>
                           </a:solidFill>
@@ -15333,14 +15841,14 @@
                         </a:rPr>
                         <a:t>20%</a:t>
                       </a:r>
-                      <a:endParaRPr lang="en-US" sz="900" dirty="0">
+                      <a:endParaRPr lang="en-US" sz="1000" dirty="0">
                         <a:latin typeface="Arial" charset="0"/>
                         <a:ea typeface="Arial" charset="0"/>
                         <a:cs typeface="Arial" charset="0"/>
                       </a:endParaRPr>
                     </a:p>
                   </a:txBody>
-                  <a:tcPr marL="101600" marR="101600" marT="38100" marB="38100" anchor="ctr">
+                  <a:tcPr marL="44450" marR="44450" marT="31750" marB="31750" anchor="ctr">
                     <a:lnL w="6350" cap="flat" cmpd="sng" algn="ctr">
                       <a:solidFill>
                         <a:srgbClr val="C6C9CD"/>
@@ -15393,7 +15901,7 @@
                         <a:buNone/>
                       </a:pPr>
                       <a:r>
-                        <a:rPr lang="en-US" sz="900" dirty="0">
+                        <a:rPr lang="en-US" sz="1000" dirty="0">
                           <a:solidFill>
                             <a:srgbClr val="000000"/>
                           </a:solidFill>
@@ -15403,14 +15911,14 @@
                         </a:rPr>
                         <a:t>864</a:t>
                       </a:r>
-                      <a:endParaRPr lang="en-US" sz="900" dirty="0">
+                      <a:endParaRPr lang="en-US" sz="1000" dirty="0">
                         <a:latin typeface="Arial" charset="0"/>
                         <a:ea typeface="Arial" charset="0"/>
                         <a:cs typeface="Arial" charset="0"/>
                       </a:endParaRPr>
                     </a:p>
                   </a:txBody>
-                  <a:tcPr marL="101600" marR="101600" marT="38100" marB="38100" anchor="ctr">
+                  <a:tcPr marL="44450" marR="44450" marT="31750" marB="31750" anchor="ctr">
                     <a:lnL w="6350" cap="flat" cmpd="sng" algn="ctr">
                       <a:solidFill>
                         <a:srgbClr val="C6C9CD"/>
@@ -15463,7 +15971,7 @@
                         <a:buNone/>
                       </a:pPr>
                       <a:r>
-                        <a:rPr lang="en-US" sz="900" dirty="0">
+                        <a:rPr lang="en-US" sz="1000" dirty="0">
                           <a:solidFill>
                             <a:srgbClr val="000000"/>
                           </a:solidFill>
@@ -15473,14 +15981,14 @@
                         </a:rPr>
                         <a:t>$108k</a:t>
                       </a:r>
-                      <a:endParaRPr lang="en-US" sz="900" dirty="0">
+                      <a:endParaRPr lang="en-US" sz="1000" dirty="0">
                         <a:latin typeface="Arial" charset="0"/>
                         <a:ea typeface="Arial" charset="0"/>
                         <a:cs typeface="Arial" charset="0"/>
                       </a:endParaRPr>
                     </a:p>
                   </a:txBody>
-                  <a:tcPr marL="101600" marR="101600" marT="38100" marB="38100" anchor="ctr">
+                  <a:tcPr marL="44450" marR="44450" marT="31750" marB="31750" anchor="ctr">
                     <a:lnL w="6350" cap="flat" cmpd="sng" algn="ctr">
                       <a:solidFill>
                         <a:srgbClr val="C6C9CD"/>
@@ -15533,7 +16041,7 @@
                         <a:buNone/>
                       </a:pPr>
                       <a:r>
-                        <a:rPr lang="en-US" sz="900" dirty="0">
+                        <a:rPr lang="en-US" sz="1000" dirty="0">
                           <a:solidFill>
                             <a:srgbClr val="000000"/>
                           </a:solidFill>
@@ -15543,14 +16051,14 @@
                         </a:rPr>
                         <a:t>$54k</a:t>
                       </a:r>
-                      <a:endParaRPr lang="en-US" sz="900" dirty="0">
+                      <a:endParaRPr lang="en-US" sz="1000" dirty="0">
                         <a:latin typeface="Arial" charset="0"/>
                         <a:ea typeface="Arial" charset="0"/>
                         <a:cs typeface="Arial" charset="0"/>
                       </a:endParaRPr>
                     </a:p>
                   </a:txBody>
-                  <a:tcPr marL="101600" marR="101600" marT="38100" marB="38100" anchor="ctr">
+                  <a:tcPr marL="44450" marR="44450" marT="31750" marB="31750" anchor="ctr">
                     <a:lnL w="6350" cap="flat" cmpd="sng" algn="ctr">
                       <a:solidFill>
                         <a:srgbClr val="C6C9CD"/>
@@ -15603,7 +16111,7 @@
                         <a:buNone/>
                       </a:pPr>
                       <a:r>
-                        <a:rPr lang="en-US" sz="900" b="1" dirty="0">
+                        <a:rPr lang="en-US" sz="1000" b="1" dirty="0">
                           <a:solidFill>
                             <a:srgbClr val="FD5108"/>
                           </a:solidFill>
@@ -15613,14 +16121,14 @@
                         </a:rPr>
                         <a:t>−$61k</a:t>
                       </a:r>
-                      <a:endParaRPr lang="en-US" sz="900" dirty="0">
+                      <a:endParaRPr lang="en-US" sz="1000" dirty="0">
                         <a:latin typeface="Arial" charset="0"/>
                         <a:ea typeface="Arial" charset="0"/>
                         <a:cs typeface="Arial" charset="0"/>
                       </a:endParaRPr>
                     </a:p>
                   </a:txBody>
-                  <a:tcPr marL="101600" marR="101600" marT="38100" marB="38100" anchor="ctr">
+                  <a:tcPr marL="44450" marR="44450" marT="31750" marB="31750" anchor="ctr">
                     <a:lnL w="6350" cap="flat" cmpd="sng" algn="ctr">
                       <a:solidFill>
                         <a:srgbClr val="C6C9CD"/>
@@ -15675,7 +16183,7 @@
                         <a:buNone/>
                       </a:pPr>
                       <a:r>
-                        <a:rPr lang="en-US" sz="900" b="1" dirty="0">
+                        <a:rPr lang="en-US" sz="1000" b="1" dirty="0">
                           <a:solidFill>
                             <a:srgbClr val="000000"/>
                           </a:solidFill>
@@ -15685,14 +16193,14 @@
                         </a:rPr>
                         <a:t>Base</a:t>
                       </a:r>
-                      <a:endParaRPr lang="en-US" sz="900" dirty="0">
+                      <a:endParaRPr lang="en-US" sz="1000" dirty="0">
                         <a:latin typeface="Arial" charset="0"/>
                         <a:ea typeface="Arial" charset="0"/>
                         <a:cs typeface="Arial" charset="0"/>
                       </a:endParaRPr>
                     </a:p>
                   </a:txBody>
-                  <a:tcPr marL="101600" marR="101600" marT="38100" marB="38100" anchor="ctr">
+                  <a:tcPr marL="44450" marR="44450" marT="31750" marB="31750" anchor="ctr">
                     <a:lnL w="6350" cap="flat" cmpd="sng" algn="ctr">
                       <a:solidFill>
                         <a:srgbClr val="C6C9CD"/>
@@ -15745,7 +16253,7 @@
                         <a:buNone/>
                       </a:pPr>
                       <a:r>
-                        <a:rPr lang="en-US" sz="900" dirty="0">
+                        <a:rPr lang="en-US" sz="1000" dirty="0">
                           <a:solidFill>
                             <a:srgbClr val="000000"/>
                           </a:solidFill>
@@ -15755,14 +16263,14 @@
                         </a:rPr>
                         <a:t>60%</a:t>
                       </a:r>
-                      <a:endParaRPr lang="en-US" sz="900" dirty="0">
+                      <a:endParaRPr lang="en-US" sz="1000" dirty="0">
                         <a:latin typeface="Arial" charset="0"/>
                         <a:ea typeface="Arial" charset="0"/>
                         <a:cs typeface="Arial" charset="0"/>
                       </a:endParaRPr>
                     </a:p>
                   </a:txBody>
-                  <a:tcPr marL="101600" marR="101600" marT="38100" marB="38100" anchor="ctr">
+                  <a:tcPr marL="44450" marR="44450" marT="31750" marB="31750" anchor="ctr">
                     <a:lnL w="6350" cap="flat" cmpd="sng" algn="ctr">
                       <a:solidFill>
                         <a:srgbClr val="C6C9CD"/>
@@ -15815,7 +16323,7 @@
                         <a:buNone/>
                       </a:pPr>
                       <a:r>
-                        <a:rPr lang="en-US" sz="900" dirty="0">
+                        <a:rPr lang="en-US" sz="1000" dirty="0">
                           <a:solidFill>
                             <a:srgbClr val="000000"/>
                           </a:solidFill>
@@ -15825,14 +16333,14 @@
                         </a:rPr>
                         <a:t>30%</a:t>
                       </a:r>
-                      <a:endParaRPr lang="en-US" sz="900" dirty="0">
+                      <a:endParaRPr lang="en-US" sz="1000" dirty="0">
                         <a:latin typeface="Arial" charset="0"/>
                         <a:ea typeface="Arial" charset="0"/>
                         <a:cs typeface="Arial" charset="0"/>
                       </a:endParaRPr>
                     </a:p>
                   </a:txBody>
-                  <a:tcPr marL="101600" marR="101600" marT="38100" marB="38100" anchor="ctr">
+                  <a:tcPr marL="44450" marR="44450" marT="31750" marB="31750" anchor="ctr">
                     <a:lnL w="6350" cap="flat" cmpd="sng" algn="ctr">
                       <a:solidFill>
                         <a:srgbClr val="C6C9CD"/>
@@ -15885,7 +16393,7 @@
                         <a:buNone/>
                       </a:pPr>
                       <a:r>
-                        <a:rPr lang="en-US" sz="900" dirty="0">
+                        <a:rPr lang="en-US" sz="1000" dirty="0">
                           <a:solidFill>
                             <a:srgbClr val="000000"/>
                           </a:solidFill>
@@ -15895,14 +16403,14 @@
                         </a:rPr>
                         <a:t>1,944</a:t>
                       </a:r>
-                      <a:endParaRPr lang="en-US" sz="900" dirty="0">
+                      <a:endParaRPr lang="en-US" sz="1000" dirty="0">
                         <a:latin typeface="Arial" charset="0"/>
                         <a:ea typeface="Arial" charset="0"/>
                         <a:cs typeface="Arial" charset="0"/>
                       </a:endParaRPr>
                     </a:p>
                   </a:txBody>
-                  <a:tcPr marL="101600" marR="101600" marT="38100" marB="38100" anchor="ctr">
+                  <a:tcPr marL="44450" marR="44450" marT="31750" marB="31750" anchor="ctr">
                     <a:lnL w="6350" cap="flat" cmpd="sng" algn="ctr">
                       <a:solidFill>
                         <a:srgbClr val="C6C9CD"/>
@@ -15955,7 +16463,7 @@
                         <a:buNone/>
                       </a:pPr>
                       <a:r>
-                        <a:rPr lang="en-US" sz="900" dirty="0">
+                        <a:rPr lang="en-US" sz="1000" dirty="0">
                           <a:solidFill>
                             <a:srgbClr val="000000"/>
                           </a:solidFill>
@@ -15965,14 +16473,14 @@
                         </a:rPr>
                         <a:t>$243k</a:t>
                       </a:r>
-                      <a:endParaRPr lang="en-US" sz="900" dirty="0">
+                      <a:endParaRPr lang="en-US" sz="1000" dirty="0">
                         <a:latin typeface="Arial" charset="0"/>
                         <a:ea typeface="Arial" charset="0"/>
                         <a:cs typeface="Arial" charset="0"/>
                       </a:endParaRPr>
                     </a:p>
                   </a:txBody>
-                  <a:tcPr marL="101600" marR="101600" marT="38100" marB="38100" anchor="ctr">
+                  <a:tcPr marL="44450" marR="44450" marT="31750" marB="31750" anchor="ctr">
                     <a:lnL w="6350" cap="flat" cmpd="sng" algn="ctr">
                       <a:solidFill>
                         <a:srgbClr val="C6C9CD"/>
@@ -16025,7 +16533,7 @@
                         <a:buNone/>
                       </a:pPr>
                       <a:r>
-                        <a:rPr lang="en-US" sz="900" dirty="0">
+                        <a:rPr lang="en-US" sz="1000" dirty="0">
                           <a:solidFill>
                             <a:srgbClr val="000000"/>
                           </a:solidFill>
@@ -16035,14 +16543,14 @@
                         </a:rPr>
                         <a:t>$121.5k</a:t>
                       </a:r>
-                      <a:endParaRPr lang="en-US" sz="900" dirty="0">
+                      <a:endParaRPr lang="en-US" sz="1000" dirty="0">
                         <a:latin typeface="Arial" charset="0"/>
                         <a:ea typeface="Arial" charset="0"/>
                         <a:cs typeface="Arial" charset="0"/>
                       </a:endParaRPr>
                     </a:p>
                   </a:txBody>
-                  <a:tcPr marL="101600" marR="101600" marT="38100" marB="38100" anchor="ctr">
+                  <a:tcPr marL="44450" marR="44450" marT="31750" marB="31750" anchor="ctr">
                     <a:lnL w="6350" cap="flat" cmpd="sng" algn="ctr">
                       <a:solidFill>
                         <a:srgbClr val="C6C9CD"/>
@@ -16095,7 +16603,7 @@
                         <a:buNone/>
                       </a:pPr>
                       <a:r>
-                        <a:rPr lang="en-US" sz="900" b="1" dirty="0">
+                        <a:rPr lang="en-US" sz="1000" b="1" dirty="0">
                           <a:solidFill>
                             <a:srgbClr val="FD5108"/>
                           </a:solidFill>
@@ -16105,14 +16613,14 @@
                         </a:rPr>
                         <a:t>+$6.5k</a:t>
                       </a:r>
-                      <a:endParaRPr lang="en-US" sz="900" dirty="0">
+                      <a:endParaRPr lang="en-US" sz="1000" dirty="0">
                         <a:latin typeface="Arial" charset="0"/>
                         <a:ea typeface="Arial" charset="0"/>
                         <a:cs typeface="Arial" charset="0"/>
                       </a:endParaRPr>
                     </a:p>
                   </a:txBody>
-                  <a:tcPr marL="101600" marR="101600" marT="38100" marB="38100" anchor="ctr">
+                  <a:tcPr marL="44450" marR="44450" marT="31750" marB="31750" anchor="ctr">
                     <a:lnL w="6350" cap="flat" cmpd="sng" algn="ctr">
                       <a:solidFill>
                         <a:srgbClr val="C6C9CD"/>
@@ -16167,7 +16675,7 @@
                         <a:buNone/>
                       </a:pPr>
                       <a:r>
-                        <a:rPr lang="en-US" sz="900" b="1" dirty="0">
+                        <a:rPr lang="en-US" sz="1000" b="1" dirty="0">
                           <a:solidFill>
                             <a:srgbClr val="000000"/>
                           </a:solidFill>
@@ -16177,14 +16685,14 @@
                         </a:rPr>
                         <a:t>Upside</a:t>
                       </a:r>
-                      <a:endParaRPr lang="en-US" sz="900" dirty="0">
+                      <a:endParaRPr lang="en-US" sz="1000" dirty="0">
                         <a:latin typeface="Arial" charset="0"/>
                         <a:ea typeface="Arial" charset="0"/>
                         <a:cs typeface="Arial" charset="0"/>
                       </a:endParaRPr>
                     </a:p>
                   </a:txBody>
-                  <a:tcPr marL="101600" marR="101600" marT="38100" marB="38100" anchor="ctr">
+                  <a:tcPr marL="44450" marR="44450" marT="31750" marB="31750" anchor="ctr">
                     <a:lnL w="6350" cap="flat" cmpd="sng" algn="ctr">
                       <a:solidFill>
                         <a:srgbClr val="C6C9CD"/>
@@ -16237,7 +16745,7 @@
                         <a:buNone/>
                       </a:pPr>
                       <a:r>
-                        <a:rPr lang="en-US" sz="900" dirty="0">
+                        <a:rPr lang="en-US" sz="1000" dirty="0">
                           <a:solidFill>
                             <a:srgbClr val="000000"/>
                           </a:solidFill>
@@ -16247,14 +16755,14 @@
                         </a:rPr>
                         <a:t>75%</a:t>
                       </a:r>
-                      <a:endParaRPr lang="en-US" sz="900" dirty="0">
+                      <a:endParaRPr lang="en-US" sz="1000" dirty="0">
                         <a:latin typeface="Arial" charset="0"/>
                         <a:ea typeface="Arial" charset="0"/>
                         <a:cs typeface="Arial" charset="0"/>
                       </a:endParaRPr>
                     </a:p>
                   </a:txBody>
-                  <a:tcPr marL="101600" marR="101600" marT="38100" marB="38100" anchor="ctr">
+                  <a:tcPr marL="44450" marR="44450" marT="31750" marB="31750" anchor="ctr">
                     <a:lnL w="6350" cap="flat" cmpd="sng" algn="ctr">
                       <a:solidFill>
                         <a:srgbClr val="C6C9CD"/>
@@ -16307,7 +16815,7 @@
                         <a:buNone/>
                       </a:pPr>
                       <a:r>
-                        <a:rPr lang="en-US" sz="900" dirty="0">
+                        <a:rPr lang="en-US" sz="1000" dirty="0">
                           <a:solidFill>
                             <a:srgbClr val="000000"/>
                           </a:solidFill>
@@ -16317,14 +16825,14 @@
                         </a:rPr>
                         <a:t>40%</a:t>
                       </a:r>
-                      <a:endParaRPr lang="en-US" sz="900" dirty="0">
+                      <a:endParaRPr lang="en-US" sz="1000" dirty="0">
                         <a:latin typeface="Arial" charset="0"/>
                         <a:ea typeface="Arial" charset="0"/>
                         <a:cs typeface="Arial" charset="0"/>
                       </a:endParaRPr>
                     </a:p>
                   </a:txBody>
-                  <a:tcPr marL="101600" marR="101600" marT="38100" marB="38100" anchor="ctr">
+                  <a:tcPr marL="44450" marR="44450" marT="31750" marB="31750" anchor="ctr">
                     <a:lnL w="6350" cap="flat" cmpd="sng" algn="ctr">
                       <a:solidFill>
                         <a:srgbClr val="C6C9CD"/>
@@ -16377,7 +16885,7 @@
                         <a:buNone/>
                       </a:pPr>
                       <a:r>
-                        <a:rPr lang="en-US" sz="900" dirty="0">
+                        <a:rPr lang="en-US" sz="1000" dirty="0">
                           <a:solidFill>
                             <a:srgbClr val="000000"/>
                           </a:solidFill>
@@ -16387,14 +16895,14 @@
                         </a:rPr>
                         <a:t>3,240</a:t>
                       </a:r>
-                      <a:endParaRPr lang="en-US" sz="900" dirty="0">
+                      <a:endParaRPr lang="en-US" sz="1000" dirty="0">
                         <a:latin typeface="Arial" charset="0"/>
                         <a:ea typeface="Arial" charset="0"/>
                         <a:cs typeface="Arial" charset="0"/>
                       </a:endParaRPr>
                     </a:p>
                   </a:txBody>
-                  <a:tcPr marL="101600" marR="101600" marT="38100" marB="38100" anchor="ctr">
+                  <a:tcPr marL="44450" marR="44450" marT="31750" marB="31750" anchor="ctr">
                     <a:lnL w="6350" cap="flat" cmpd="sng" algn="ctr">
                       <a:solidFill>
                         <a:srgbClr val="C6C9CD"/>
@@ -16447,7 +16955,7 @@
                         <a:buNone/>
                       </a:pPr>
                       <a:r>
-                        <a:rPr lang="en-US" sz="900" dirty="0">
+                        <a:rPr lang="en-US" sz="1000" dirty="0">
                           <a:solidFill>
                             <a:srgbClr val="000000"/>
                           </a:solidFill>
@@ -16457,14 +16965,14 @@
                         </a:rPr>
                         <a:t>$405k</a:t>
                       </a:r>
-                      <a:endParaRPr lang="en-US" sz="900" dirty="0">
+                      <a:endParaRPr lang="en-US" sz="1000" dirty="0">
                         <a:latin typeface="Arial" charset="0"/>
                         <a:ea typeface="Arial" charset="0"/>
                         <a:cs typeface="Arial" charset="0"/>
                       </a:endParaRPr>
                     </a:p>
                   </a:txBody>
-                  <a:tcPr marL="101600" marR="101600" marT="38100" marB="38100" anchor="ctr">
+                  <a:tcPr marL="44450" marR="44450" marT="31750" marB="31750" anchor="ctr">
                     <a:lnL w="6350" cap="flat" cmpd="sng" algn="ctr">
                       <a:solidFill>
                         <a:srgbClr val="C6C9CD"/>
@@ -16517,7 +17025,7 @@
                         <a:buNone/>
                       </a:pPr>
                       <a:r>
-                        <a:rPr lang="en-US" sz="900" dirty="0">
+                        <a:rPr lang="en-US" sz="1000" dirty="0">
                           <a:solidFill>
                             <a:srgbClr val="000000"/>
                           </a:solidFill>
@@ -16527,14 +17035,14 @@
                         </a:rPr>
                         <a:t>$202.5k</a:t>
                       </a:r>
-                      <a:endParaRPr lang="en-US" sz="900" dirty="0">
+                      <a:endParaRPr lang="en-US" sz="1000" dirty="0">
                         <a:latin typeface="Arial" charset="0"/>
                         <a:ea typeface="Arial" charset="0"/>
                         <a:cs typeface="Arial" charset="0"/>
                       </a:endParaRPr>
                     </a:p>
                   </a:txBody>
-                  <a:tcPr marL="101600" marR="101600" marT="38100" marB="38100" anchor="ctr">
+                  <a:tcPr marL="44450" marR="44450" marT="31750" marB="31750" anchor="ctr">
                     <a:lnL w="6350" cap="flat" cmpd="sng" algn="ctr">
                       <a:solidFill>
                         <a:srgbClr val="C6C9CD"/>
@@ -16587,7 +17095,7 @@
                         <a:buNone/>
                       </a:pPr>
                       <a:r>
-                        <a:rPr lang="en-US" sz="900" b="1" dirty="0">
+                        <a:rPr lang="en-US" sz="1000" b="1" dirty="0">
                           <a:solidFill>
                             <a:srgbClr val="FD5108"/>
                           </a:solidFill>
@@ -16597,14 +17105,14 @@
                         </a:rPr>
                         <a:t>+$87.5k</a:t>
                       </a:r>
-                      <a:endParaRPr lang="en-US" sz="900" dirty="0">
+                      <a:endParaRPr lang="en-US" sz="1000" dirty="0">
                         <a:latin typeface="Arial" charset="0"/>
                         <a:ea typeface="Arial" charset="0"/>
                         <a:cs typeface="Arial" charset="0"/>
                       </a:endParaRPr>
                     </a:p>
                   </a:txBody>
-                  <a:tcPr marL="101600" marR="101600" marT="38100" marB="38100" anchor="ctr">
+                  <a:tcPr marL="44450" marR="44450" marT="31750" marB="31750" anchor="ctr">
                     <a:lnL w="6350" cap="flat" cmpd="sng" algn="ctr">
                       <a:solidFill>
                         <a:srgbClr val="C6C9CD"/>
@@ -16772,7 +17280,7 @@
               <a:defRPr spc="0"/>
             </a:pPr>
             <a:r>
-              <a:rPr lang="en-US" sz="1350" b="1" dirty="0" spc="0">
+              <a:rPr lang="en-US" sz="1400" b="1" dirty="0" spc="0">
                 <a:solidFill>
                   <a:srgbClr val="000000"/>
                 </a:solidFill>
@@ -16782,7 +17290,7 @@
               </a:rPr>
               <a:t>BASE-CASE CAPACITY MODEL</a:t>
             </a:r>
-            <a:endParaRPr lang="en-US" sz="1350" dirty="0" spc="0"/>
+            <a:endParaRPr lang="en-US" sz="1400" dirty="0" spc="0"/>
           </a:p>
         </p:txBody>
       </p:sp>
@@ -16854,52 +17362,7 @@
       </p:sp>
       <p:sp>
         <p:nvSpPr>
-          <p:cNvPr id="16" name="capacity-labels"/>
-          <p:cNvSpPr txBox="1"/>
-          <p:nvPr/>
-        </p:nvSpPr>
-        <p:spPr>
-          <a:xfrm>
-            <a:off x="412750" y="2781300"/>
-            <a:ext cx="3175000" cy="285750"/>
-          </a:xfrm>
-          <a:prstGeom prst="rect">
-            <a:avLst/>
-          </a:prstGeom>
-          <a:noFill/>
-          <a:ln/>
-        </p:spPr>
-        <p:txBody>
-          <a:bodyPr wrap="square" lIns="12700" tIns="12700" rIns="12700" bIns="12700" rtlCol="0" anchor="t">
-            <a:noAutofit/>
-          </a:bodyPr>
-          <a:lstStyle/>
-          <a:p>
-            <a:pPr algn="ctr" indent="0" marL="0">
-              <a:lnSpc>
-                <a:spcPct val="100000"/>
-              </a:lnSpc>
-              <a:buNone/>
-              <a:defRPr spc="0"/>
-            </a:pPr>
-            <a:r>
-              <a:rPr lang="en-US" sz="950" dirty="0" spc="0">
-                <a:solidFill>
-                  <a:srgbClr val="000000"/>
-                </a:solidFill>
-                <a:latin typeface="Arial" pitchFamily="34" charset="0"/>
-                <a:ea typeface="Arial" pitchFamily="34" charset="-122"/>
-                <a:cs typeface="Arial" pitchFamily="34" charset="-120"/>
-              </a:rPr>
-              <a:t>Engagements Research time Adoption Time saved</a:t>
-            </a:r>
-            <a:endParaRPr lang="en-US" sz="950" dirty="0" spc="0"/>
-          </a:p>
-        </p:txBody>
-      </p:sp>
-      <p:sp>
-        <p:nvSpPr>
-          <p:cNvPr id="17" name="capacity-value"/>
+          <p:cNvPr id="16" name="capacity-value"/>
           <p:cNvSpPr txBox="1"/>
           <p:nvPr/>
         </p:nvSpPr>
@@ -16928,7 +17391,7 @@
               <a:defRPr spc="0"/>
             </a:pPr>
             <a:r>
-              <a:rPr lang="en-US" sz="1350" dirty="0" spc="0">
+              <a:rPr lang="en-US" sz="1400" dirty="0" spc="0">
                 <a:solidFill>
                   <a:srgbClr val="000000"/>
                 </a:solidFill>
@@ -16938,13 +17401,13 @@
               </a:rPr>
               <a:t>1,944 h × $125/h =</a:t>
             </a:r>
-            <a:endParaRPr lang="en-US" sz="1350" dirty="0" spc="0"/>
+            <a:endParaRPr lang="en-US" sz="1400" dirty="0" spc="0"/>
           </a:p>
         </p:txBody>
       </p:sp>
       <p:sp>
         <p:nvSpPr>
-          <p:cNvPr id="18" name="capacity-value-number"/>
+          <p:cNvPr id="17" name="capacity-value-number"/>
           <p:cNvSpPr txBox="1"/>
           <p:nvPr/>
         </p:nvSpPr>
@@ -16973,7 +17436,7 @@
               <a:defRPr spc="0"/>
             </a:pPr>
             <a:r>
-              <a:rPr lang="en-US" sz="2350" b="1" dirty="0" spc="0">
+              <a:rPr lang="en-US" sz="2650" b="1" dirty="0" spc="0">
                 <a:solidFill>
                   <a:srgbClr val="FD5108"/>
                 </a:solidFill>
@@ -16983,13 +17446,13 @@
               </a:rPr>
               <a:t>$243k</a:t>
             </a:r>
-            <a:endParaRPr lang="en-US" sz="2350" dirty="0" spc="0"/>
+            <a:endParaRPr lang="en-US" sz="2650" dirty="0" spc="0"/>
           </a:p>
         </p:txBody>
       </p:sp>
       <p:sp>
         <p:nvSpPr>
-          <p:cNvPr id="19" name="capacity-caption"/>
+          <p:cNvPr id="18" name="capacity-caption"/>
           <p:cNvSpPr txBox="1"/>
           <p:nvPr/>
         </p:nvSpPr>
@@ -16997,6 +17460,96 @@
           <a:xfrm>
             <a:off x="412750" y="3708400"/>
             <a:ext cx="2984500" cy="215900"/>
+          </a:xfrm>
+          <a:prstGeom prst="rect">
+            <a:avLst/>
+          </a:prstGeom>
+          <a:noFill/>
+          <a:ln/>
+        </p:spPr>
+        <p:txBody>
+          <a:bodyPr wrap="square" lIns="12700" tIns="12700" rIns="12700" bIns="12700" rtlCol="0" anchor="t">
+            <a:noAutofit/>
+          </a:bodyPr>
+          <a:lstStyle/>
+          <a:p>
+            <a:pPr algn="l" indent="0" marL="0">
+              <a:lnSpc>
+                <a:spcPct val="100000"/>
+              </a:lnSpc>
+              <a:buNone/>
+              <a:defRPr spc="0"/>
+            </a:pPr>
+            <a:r>
+              <a:rPr lang="en-US" sz="1300" dirty="0" spc="0">
+                <a:solidFill>
+                  <a:srgbClr val="000000"/>
+                </a:solidFill>
+                <a:latin typeface="Arial" pitchFamily="34" charset="0"/>
+                <a:ea typeface="Arial" pitchFamily="34" charset="-122"/>
+                <a:cs typeface="Arial" pitchFamily="34" charset="-120"/>
+              </a:rPr>
+              <a:t>annual capacity equivalent</a:t>
+            </a:r>
+            <a:endParaRPr lang="en-US" sz="1300" dirty="0" spc="0"/>
+          </a:p>
+        </p:txBody>
+      </p:sp>
+      <p:sp>
+        <p:nvSpPr>
+          <p:cNvPr id="19" name="investment-heading"/>
+          <p:cNvSpPr txBox="1"/>
+          <p:nvPr/>
+        </p:nvSpPr>
+        <p:spPr>
+          <a:xfrm>
+            <a:off x="3937000" y="1644650"/>
+            <a:ext cx="3079750" cy="241300"/>
+          </a:xfrm>
+          <a:prstGeom prst="rect">
+            <a:avLst/>
+          </a:prstGeom>
+          <a:noFill/>
+          <a:ln/>
+        </p:spPr>
+        <p:txBody>
+          <a:bodyPr wrap="square" lIns="12700" tIns="12700" rIns="12700" bIns="12700" rtlCol="0" anchor="t">
+            <a:noAutofit/>
+          </a:bodyPr>
+          <a:lstStyle/>
+          <a:p>
+            <a:pPr algn="l" indent="0" marL="0">
+              <a:lnSpc>
+                <a:spcPct val="100000"/>
+              </a:lnSpc>
+              <a:buNone/>
+              <a:defRPr spc="0"/>
+            </a:pPr>
+            <a:r>
+              <a:rPr lang="en-US" sz="1400" b="1" dirty="0" spc="0">
+                <a:solidFill>
+                  <a:srgbClr val="000000"/>
+                </a:solidFill>
+                <a:latin typeface="Arial" pitchFamily="34" charset="0"/>
+                <a:ea typeface="Arial" pitchFamily="34" charset="-122"/>
+                <a:cs typeface="Arial" pitchFamily="34" charset="-120"/>
+              </a:rPr>
+              <a:t>INVESTMENT</a:t>
+            </a:r>
+            <a:endParaRPr lang="en-US" sz="1400" dirty="0" spc="0"/>
+          </a:p>
+        </p:txBody>
+      </p:sp>
+      <p:sp>
+        <p:nvSpPr>
+          <p:cNvPr id="20" name="investment-note"/>
+          <p:cNvSpPr txBox="1"/>
+          <p:nvPr/>
+        </p:nvSpPr>
+        <p:spPr>
+          <a:xfrm>
+            <a:off x="3937000" y="3708400"/>
+            <a:ext cx="3079750" cy="228600"/>
           </a:xfrm>
           <a:prstGeom prst="rect">
             <a:avLst/>
@@ -17026,7 +17579,7 @@
                 <a:ea typeface="Arial" pitchFamily="34" charset="-122"/>
                 <a:cs typeface="Arial" pitchFamily="34" charset="-120"/>
               </a:rPr>
-              <a:t>annual capacity equivalent</a:t>
+              <a:t>Remaining implementation after the pilot $60k.</a:t>
             </a:r>
             <a:endParaRPr lang="en-US" sz="1100" dirty="0" spc="0"/>
           </a:p>
@@ -17034,97 +17587,7 @@
       </p:sp>
       <p:sp>
         <p:nvSpPr>
-          <p:cNvPr id="20" name="investment-heading"/>
-          <p:cNvSpPr txBox="1"/>
-          <p:nvPr/>
-        </p:nvSpPr>
-        <p:spPr>
-          <a:xfrm>
-            <a:off x="3937000" y="1644650"/>
-            <a:ext cx="3079750" cy="241300"/>
-          </a:xfrm>
-          <a:prstGeom prst="rect">
-            <a:avLst/>
-          </a:prstGeom>
-          <a:noFill/>
-          <a:ln/>
-        </p:spPr>
-        <p:txBody>
-          <a:bodyPr wrap="square" lIns="12700" tIns="12700" rIns="12700" bIns="12700" rtlCol="0" anchor="t">
-            <a:noAutofit/>
-          </a:bodyPr>
-          <a:lstStyle/>
-          <a:p>
-            <a:pPr algn="l" indent="0" marL="0">
-              <a:lnSpc>
-                <a:spcPct val="100000"/>
-              </a:lnSpc>
-              <a:buNone/>
-              <a:defRPr spc="0"/>
-            </a:pPr>
-            <a:r>
-              <a:rPr lang="en-US" sz="1350" b="1" dirty="0" spc="0">
-                <a:solidFill>
-                  <a:srgbClr val="000000"/>
-                </a:solidFill>
-                <a:latin typeface="Arial" pitchFamily="34" charset="0"/>
-                <a:ea typeface="Arial" pitchFamily="34" charset="-122"/>
-                <a:cs typeface="Arial" pitchFamily="34" charset="-120"/>
-              </a:rPr>
-              <a:t>INVESTMENT</a:t>
-            </a:r>
-            <a:endParaRPr lang="en-US" sz="1350" dirty="0" spc="0"/>
-          </a:p>
-        </p:txBody>
-      </p:sp>
-      <p:sp>
-        <p:nvSpPr>
-          <p:cNvPr id="21" name="investment-note"/>
-          <p:cNvSpPr txBox="1"/>
-          <p:nvPr/>
-        </p:nvSpPr>
-        <p:spPr>
-          <a:xfrm>
-            <a:off x="3937000" y="3708400"/>
-            <a:ext cx="3079750" cy="228600"/>
-          </a:xfrm>
-          <a:prstGeom prst="rect">
-            <a:avLst/>
-          </a:prstGeom>
-          <a:noFill/>
-          <a:ln/>
-        </p:spPr>
-        <p:txBody>
-          <a:bodyPr wrap="square" lIns="12700" tIns="12700" rIns="12700" bIns="12700" rtlCol="0" anchor="t">
-            <a:noAutofit/>
-          </a:bodyPr>
-          <a:lstStyle/>
-          <a:p>
-            <a:pPr algn="l" indent="0" marL="0">
-              <a:lnSpc>
-                <a:spcPct val="100000"/>
-              </a:lnSpc>
-              <a:buNone/>
-              <a:defRPr spc="0"/>
-            </a:pPr>
-            <a:r>
-              <a:rPr lang="en-US" sz="1050" dirty="0" spc="0">
-                <a:solidFill>
-                  <a:srgbClr val="000000"/>
-                </a:solidFill>
-                <a:latin typeface="Arial" pitchFamily="34" charset="0"/>
-                <a:ea typeface="Arial" pitchFamily="34" charset="-122"/>
-                <a:cs typeface="Arial" pitchFamily="34" charset="-120"/>
-              </a:rPr>
-              <a:t>Remaining implementation after the pilot $60k.</a:t>
-            </a:r>
-            <a:endParaRPr lang="en-US" sz="1050" dirty="0" spc="0"/>
-          </a:p>
-        </p:txBody>
-      </p:sp>
-      <p:sp>
-        <p:nvSpPr>
-          <p:cNvPr id="22" name="sensitivity-heading"/>
+          <p:cNvPr id="21" name="sensitivity-heading"/>
           <p:cNvSpPr txBox="1"/>
           <p:nvPr/>
         </p:nvSpPr>
@@ -17153,7 +17616,7 @@
               <a:defRPr spc="0"/>
             </a:pPr>
             <a:r>
-              <a:rPr lang="en-US" sz="1350" b="1" dirty="0" spc="0">
+              <a:rPr lang="en-US" sz="1400" b="1" dirty="0" spc="0">
                 <a:solidFill>
                   <a:srgbClr val="000000"/>
                 </a:solidFill>
@@ -17163,13 +17626,13 @@
               </a:rPr>
               <a:t>FIRST-YEAR SENSITIVITY · 50% RAMP</a:t>
             </a:r>
-            <a:endParaRPr lang="en-US" sz="1350" dirty="0" spc="0"/>
+            <a:endParaRPr lang="en-US" sz="1400" dirty="0" spc="0"/>
           </a:p>
         </p:txBody>
       </p:sp>
       <p:sp>
         <p:nvSpPr>
-          <p:cNvPr id="23" name="criteria-heading"/>
+          <p:cNvPr id="22" name="criteria-heading"/>
           <p:cNvSpPr txBox="1"/>
           <p:nvPr/>
         </p:nvSpPr>
@@ -17198,7 +17661,7 @@
               <a:defRPr spc="0"/>
             </a:pPr>
             <a:r>
-              <a:rPr lang="en-US" sz="1350" b="1" dirty="0" spc="0">
+              <a:rPr lang="en-US" sz="1400" b="1" dirty="0" spc="0">
                 <a:solidFill>
                   <a:srgbClr val="000000"/>
                 </a:solidFill>
@@ -17208,13 +17671,13 @@
               </a:rPr>
               <a:t>DECISION CRITERIA</a:t>
             </a:r>
-            <a:endParaRPr lang="en-US" sz="1350" dirty="0" spc="0"/>
+            <a:endParaRPr lang="en-US" sz="1400" dirty="0" spc="0"/>
           </a:p>
         </p:txBody>
       </p:sp>
       <p:sp>
         <p:nvSpPr>
-          <p:cNvPr id="24" name="criterion-label-go"/>
+          <p:cNvPr id="23" name="criterion-label-go"/>
           <p:cNvSpPr txBox="1"/>
           <p:nvPr/>
         </p:nvSpPr>
@@ -17243,7 +17706,7 @@
               <a:defRPr spc="0"/>
             </a:pPr>
             <a:r>
-              <a:rPr lang="en-US" sz="1350" b="1" dirty="0" spc="0">
+              <a:rPr lang="en-US" sz="1400" b="1" dirty="0" spc="0">
                 <a:solidFill>
                   <a:srgbClr val="FD5108"/>
                 </a:solidFill>
@@ -17253,13 +17716,13 @@
               </a:rPr>
               <a:t>GO</a:t>
             </a:r>
-            <a:endParaRPr lang="en-US" sz="1350" dirty="0" spc="0"/>
+            <a:endParaRPr lang="en-US" sz="1400" dirty="0" spc="0"/>
           </a:p>
         </p:txBody>
       </p:sp>
       <p:sp>
         <p:nvSpPr>
-          <p:cNvPr id="25" name="criterion-body-go"/>
+          <p:cNvPr id="24" name="criterion-body-go"/>
           <p:cNvSpPr txBox="1"/>
           <p:nvPr/>
         </p:nvSpPr>
@@ -17288,7 +17751,7 @@
               <a:defRPr spc="0"/>
             </a:pPr>
             <a:r>
-              <a:rPr lang="en-US" sz="1100" dirty="0" spc="0">
+              <a:rPr lang="en-US" sz="1200" dirty="0" spc="0">
                 <a:solidFill>
                   <a:srgbClr val="000000"/>
                 </a:solidFill>
@@ -17298,7 +17761,7 @@
               </a:rPr>
               <a:t>All four gates hold.</a:t>
             </a:r>
-            <a:endParaRPr lang="en-US" sz="1100" dirty="0" spc="0"/>
+            <a:endParaRPr lang="en-US" sz="1200" dirty="0" spc="0"/>
           </a:p>
           <a:p>
             <a:pPr algn="l" indent="0" marL="0">
@@ -17309,7 +17772,7 @@
               <a:defRPr spc="0"/>
             </a:pPr>
             <a:r>
-              <a:rPr lang="en-US" sz="1100" dirty="0" spc="0">
+              <a:rPr lang="en-US" sz="1200" dirty="0" spc="0">
                 <a:solidFill>
                   <a:srgbClr val="000000"/>
                 </a:solidFill>
@@ -17319,13 +17782,13 @@
               </a:rPr>
               <a:t>Practice lead owns rollout.</a:t>
             </a:r>
-            <a:endParaRPr lang="en-US" sz="1100" dirty="0" spc="0"/>
+            <a:endParaRPr lang="en-US" sz="1200" dirty="0" spc="0"/>
           </a:p>
         </p:txBody>
       </p:sp>
       <p:sp>
         <p:nvSpPr>
-          <p:cNvPr id="26" name="criterion-label-hold"/>
+          <p:cNvPr id="25" name="criterion-label-hold"/>
           <p:cNvSpPr txBox="1"/>
           <p:nvPr/>
         </p:nvSpPr>
@@ -17354,7 +17817,7 @@
               <a:defRPr spc="0"/>
             </a:pPr>
             <a:r>
-              <a:rPr lang="en-US" sz="1350" b="1" dirty="0" spc="0">
+              <a:rPr lang="en-US" sz="1400" b="1" dirty="0" spc="0">
                 <a:solidFill>
                   <a:srgbClr val="FD5108"/>
                 </a:solidFill>
@@ -17364,13 +17827,13 @@
               </a:rPr>
               <a:t>HOLD</a:t>
             </a:r>
-            <a:endParaRPr lang="en-US" sz="1350" dirty="0" spc="0"/>
+            <a:endParaRPr lang="en-US" sz="1400" dirty="0" spc="0"/>
           </a:p>
         </p:txBody>
       </p:sp>
       <p:sp>
         <p:nvSpPr>
-          <p:cNvPr id="27" name="criterion-body-hold"/>
+          <p:cNvPr id="26" name="criterion-body-hold"/>
           <p:cNvSpPr txBox="1"/>
           <p:nvPr/>
         </p:nvSpPr>
@@ -17399,7 +17862,7 @@
               <a:defRPr spc="0"/>
             </a:pPr>
             <a:r>
-              <a:rPr lang="en-US" sz="1100" dirty="0" spc="0">
+              <a:rPr lang="en-US" sz="1200" dirty="0" spc="0">
                 <a:solidFill>
                   <a:srgbClr val="000000"/>
                 </a:solidFill>
@@ -17409,7 +17872,7 @@
               </a:rPr>
               <a:t>Evidence or usage is weak.</a:t>
             </a:r>
-            <a:endParaRPr lang="en-US" sz="1100" dirty="0" spc="0"/>
+            <a:endParaRPr lang="en-US" sz="1200" dirty="0" spc="0"/>
           </a:p>
           <a:p>
             <a:pPr algn="l" indent="0" marL="0">
@@ -17420,7 +17883,7 @@
               <a:defRPr spc="0"/>
             </a:pPr>
             <a:r>
-              <a:rPr lang="en-US" sz="1100" dirty="0" spc="0">
+              <a:rPr lang="en-US" sz="1200" dirty="0" spc="0">
                 <a:solidFill>
                   <a:srgbClr val="000000"/>
                 </a:solidFill>
@@ -17430,13 +17893,13 @@
               </a:rPr>
               <a:t>Extend within an agreed cap.</a:t>
             </a:r>
-            <a:endParaRPr lang="en-US" sz="1100" dirty="0" spc="0"/>
+            <a:endParaRPr lang="en-US" sz="1200" dirty="0" spc="0"/>
           </a:p>
         </p:txBody>
       </p:sp>
       <p:sp>
         <p:nvSpPr>
-          <p:cNvPr id="28" name="criterion-label-stop"/>
+          <p:cNvPr id="27" name="criterion-label-stop"/>
           <p:cNvSpPr txBox="1"/>
           <p:nvPr/>
         </p:nvSpPr>
@@ -17465,7 +17928,7 @@
               <a:defRPr spc="0"/>
             </a:pPr>
             <a:r>
-              <a:rPr lang="en-US" sz="1350" b="1" dirty="0" spc="0">
+              <a:rPr lang="en-US" sz="1400" b="1" dirty="0" spc="0">
                 <a:solidFill>
                   <a:srgbClr val="FD5108"/>
                 </a:solidFill>
@@ -17475,13 +17938,13 @@
               </a:rPr>
               <a:t>STOP</a:t>
             </a:r>
-            <a:endParaRPr lang="en-US" sz="1350" dirty="0" spc="0"/>
+            <a:endParaRPr lang="en-US" sz="1400" dirty="0" spc="0"/>
           </a:p>
         </p:txBody>
       </p:sp>
       <p:sp>
         <p:nvSpPr>
-          <p:cNvPr id="29" name="criterion-body-stop"/>
+          <p:cNvPr id="28" name="criterion-body-stop"/>
           <p:cNvSpPr txBox="1"/>
           <p:nvPr/>
         </p:nvSpPr>
@@ -17510,7 +17973,7 @@
               <a:defRPr spc="0"/>
             </a:pPr>
             <a:r>
-              <a:rPr lang="en-US" sz="1100" dirty="0" spc="0">
+              <a:rPr lang="en-US" sz="1200" dirty="0" spc="0">
                 <a:solidFill>
                   <a:srgbClr val="000000"/>
                 </a:solidFill>
@@ -17520,7 +17983,7 @@
               </a:rPr>
               <a:t>A critical data control fails.</a:t>
             </a:r>
-            <a:endParaRPr lang="en-US" sz="1100" dirty="0" spc="0"/>
+            <a:endParaRPr lang="en-US" sz="1200" dirty="0" spc="0"/>
           </a:p>
           <a:p>
             <a:pPr algn="l" indent="0" marL="0">
@@ -17531,7 +17994,7 @@
               <a:defRPr spc="0"/>
             </a:pPr>
             <a:r>
-              <a:rPr lang="en-US" sz="1100" dirty="0" spc="0">
+              <a:rPr lang="en-US" sz="1200" dirty="0" spc="0">
                 <a:solidFill>
                   <a:srgbClr val="000000"/>
                 </a:solidFill>
@@ -17541,13 +18004,13 @@
               </a:rPr>
               <a:t>Suspend use and close the issue.</a:t>
             </a:r>
-            <a:endParaRPr lang="en-US" sz="1100" dirty="0" spc="0"/>
+            <a:endParaRPr lang="en-US" sz="1200" dirty="0" spc="0"/>
           </a:p>
         </p:txBody>
       </p:sp>
       <p:sp>
         <p:nvSpPr>
-          <p:cNvPr id="30" name="decision-label"/>
+          <p:cNvPr id="29" name="decision-label"/>
           <p:cNvSpPr txBox="1"/>
           <p:nvPr/>
         </p:nvSpPr>
@@ -17592,7 +18055,7 @@
       </p:sp>
       <p:sp>
         <p:nvSpPr>
-          <p:cNvPr id="31" name="decision-message"/>
+          <p:cNvPr id="30" name="decision-message"/>
           <p:cNvSpPr txBox="1"/>
           <p:nvPr/>
         </p:nvSpPr>
@@ -17635,9 +18098,210 @@
           </a:p>
         </p:txBody>
       </p:sp>
+      <p:sp>
+        <p:nvSpPr>
+          <p:cNvPr id="31" name="factor-engagements"/>
+          <p:cNvSpPr txBox="1"/>
+          <p:nvPr/>
+        </p:nvSpPr>
+        <p:spPr>
+          <a:xfrm>
+            <a:off x="406400" y="2787650"/>
+            <a:ext cx="762000" cy="431800"/>
+          </a:xfrm>
+          <a:prstGeom prst="rect">
+            <a:avLst/>
+          </a:prstGeom>
+          <a:noFill/>
+          <a:ln/>
+        </p:spPr>
+        <p:txBody>
+          <a:bodyPr wrap="square" lIns="12700" tIns="12700" rIns="12700" bIns="12700" rtlCol="0" anchor="t">
+            <a:noAutofit/>
+          </a:bodyPr>
+          <a:lstStyle/>
+          <a:p>
+            <a:pPr algn="ctr" indent="0" marL="0">
+              <a:lnSpc>
+                <a:spcPct val="100000"/>
+              </a:lnSpc>
+              <a:buNone/>
+              <a:defRPr spc="0"/>
+            </a:pPr>
+            <a:r>
+              <a:rPr lang="en-US" sz="900" dirty="0" spc="0">
+                <a:solidFill>
+                  <a:srgbClr val="000000"/>
+                </a:solidFill>
+                <a:latin typeface="Arial" pitchFamily="34" charset="0"/>
+                <a:ea typeface="Arial" pitchFamily="34" charset="-122"/>
+                <a:cs typeface="Arial" pitchFamily="34" charset="-120"/>
+              </a:rPr>
+              <a:t>Engagements</a:t>
+            </a:r>
+            <a:endParaRPr lang="en-US" sz="900" dirty="0" spc="0"/>
+          </a:p>
+        </p:txBody>
+      </p:sp>
+      <p:sp>
+        <p:nvSpPr>
+          <p:cNvPr id="32" name="factor-research"/>
+          <p:cNvSpPr txBox="1"/>
+          <p:nvPr/>
+        </p:nvSpPr>
+        <p:spPr>
+          <a:xfrm>
+            <a:off x="1282700" y="2787650"/>
+            <a:ext cx="723900" cy="431800"/>
+          </a:xfrm>
+          <a:prstGeom prst="rect">
+            <a:avLst/>
+          </a:prstGeom>
+          <a:noFill/>
+          <a:ln/>
+        </p:spPr>
+        <p:txBody>
+          <a:bodyPr wrap="square" lIns="12700" tIns="12700" rIns="12700" bIns="12700" rtlCol="0" anchor="t">
+            <a:noAutofit/>
+          </a:bodyPr>
+          <a:lstStyle/>
+          <a:p>
+            <a:pPr algn="ctr" indent="0" marL="0">
+              <a:lnSpc>
+                <a:spcPct val="100000"/>
+              </a:lnSpc>
+              <a:buNone/>
+              <a:defRPr spc="0"/>
+            </a:pPr>
+            <a:r>
+              <a:rPr lang="en-US" sz="900" dirty="0" spc="0">
+                <a:solidFill>
+                  <a:srgbClr val="000000"/>
+                </a:solidFill>
+                <a:latin typeface="Arial" pitchFamily="34" charset="0"/>
+                <a:ea typeface="Arial" pitchFamily="34" charset="-122"/>
+                <a:cs typeface="Arial" pitchFamily="34" charset="-120"/>
+              </a:rPr>
+              <a:t>Research</a:t>
+            </a:r>
+            <a:endParaRPr lang="en-US" sz="900" dirty="0" spc="0"/>
+          </a:p>
+          <a:p>
+            <a:pPr algn="ctr" indent="0" marL="0">
+              <a:lnSpc>
+                <a:spcPct val="100000"/>
+              </a:lnSpc>
+              <a:buNone/>
+              <a:defRPr spc="0"/>
+            </a:pPr>
+            <a:r>
+              <a:rPr lang="en-US" sz="900" dirty="0" spc="0">
+                <a:solidFill>
+                  <a:srgbClr val="000000"/>
+                </a:solidFill>
+                <a:latin typeface="Arial" pitchFamily="34" charset="0"/>
+                <a:ea typeface="Arial" pitchFamily="34" charset="-122"/>
+                <a:cs typeface="Arial" pitchFamily="34" charset="-120"/>
+              </a:rPr>
+              <a:t>time</a:t>
+            </a:r>
+            <a:endParaRPr lang="en-US" sz="900" dirty="0" spc="0"/>
+          </a:p>
+        </p:txBody>
+      </p:sp>
+      <p:sp>
+        <p:nvSpPr>
+          <p:cNvPr id="33" name="factor-adoption"/>
+          <p:cNvSpPr txBox="1"/>
+          <p:nvPr/>
+        </p:nvSpPr>
+        <p:spPr>
+          <a:xfrm>
+            <a:off x="2139950" y="2787650"/>
+            <a:ext cx="698500" cy="431800"/>
+          </a:xfrm>
+          <a:prstGeom prst="rect">
+            <a:avLst/>
+          </a:prstGeom>
+          <a:noFill/>
+          <a:ln/>
+        </p:spPr>
+        <p:txBody>
+          <a:bodyPr wrap="square" lIns="12700" tIns="12700" rIns="12700" bIns="12700" rtlCol="0" anchor="t">
+            <a:noAutofit/>
+          </a:bodyPr>
+          <a:lstStyle/>
+          <a:p>
+            <a:pPr algn="ctr" indent="0" marL="0">
+              <a:lnSpc>
+                <a:spcPct val="100000"/>
+              </a:lnSpc>
+              <a:buNone/>
+              <a:defRPr spc="0"/>
+            </a:pPr>
+            <a:r>
+              <a:rPr lang="en-US" sz="900" dirty="0" spc="0">
+                <a:solidFill>
+                  <a:srgbClr val="000000"/>
+                </a:solidFill>
+                <a:latin typeface="Arial" pitchFamily="34" charset="0"/>
+                <a:ea typeface="Arial" pitchFamily="34" charset="-122"/>
+                <a:cs typeface="Arial" pitchFamily="34" charset="-120"/>
+              </a:rPr>
+              <a:t>Adoption</a:t>
+            </a:r>
+            <a:endParaRPr lang="en-US" sz="900" dirty="0" spc="0"/>
+          </a:p>
+        </p:txBody>
+      </p:sp>
+      <p:sp>
+        <p:nvSpPr>
+          <p:cNvPr id="34" name="factor-saved"/>
+          <p:cNvSpPr txBox="1"/>
+          <p:nvPr/>
+        </p:nvSpPr>
+        <p:spPr>
+          <a:xfrm>
+            <a:off x="2933700" y="2787650"/>
+            <a:ext cx="730250" cy="431800"/>
+          </a:xfrm>
+          <a:prstGeom prst="rect">
+            <a:avLst/>
+          </a:prstGeom>
+          <a:noFill/>
+          <a:ln/>
+        </p:spPr>
+        <p:txBody>
+          <a:bodyPr wrap="square" lIns="12700" tIns="12700" rIns="12700" bIns="12700" rtlCol="0" anchor="t">
+            <a:noAutofit/>
+          </a:bodyPr>
+          <a:lstStyle/>
+          <a:p>
+            <a:pPr algn="ctr" indent="0" marL="0">
+              <a:lnSpc>
+                <a:spcPct val="100000"/>
+              </a:lnSpc>
+              <a:buNone/>
+              <a:defRPr spc="0"/>
+            </a:pPr>
+            <a:r>
+              <a:rPr lang="en-US" sz="900" dirty="0" spc="0">
+                <a:solidFill>
+                  <a:srgbClr val="000000"/>
+                </a:solidFill>
+                <a:latin typeface="Arial" pitchFamily="34" charset="0"/>
+                <a:ea typeface="Arial" pitchFamily="34" charset="-122"/>
+                <a:cs typeface="Arial" pitchFamily="34" charset="-120"/>
+              </a:rPr>
+              <a:t>Time saved</a:t>
+            </a:r>
+            <a:endParaRPr lang="en-US" sz="900" dirty="0" spc="0"/>
+          </a:p>
+        </p:txBody>
+      </p:sp>
       <p:pic>
         <p:nvPicPr>
-          <p:cNvPr id="32" name="criterion-icon-go" descr="remix-play-circle-line">    </p:cNvPr>
+          <p:cNvPr id="35" name="criterion-icon-go" descr="remix-play-circle-line">    </p:cNvPr>
           <p:cNvPicPr>
             <a:picLocks noChangeAspect="1"/>
           </p:cNvPicPr>
@@ -17657,8 +18321,8 @@
         </p:blipFill>
         <p:spPr>
           <a:xfrm>
-            <a:off x="508000" y="4591050"/>
-            <a:ext cx="546100" cy="546100"/>
+            <a:off x="514350" y="4540250"/>
+            <a:ext cx="749300" cy="749300"/>
           </a:xfrm>
           <a:prstGeom prst="rect">
             <a:avLst/>
@@ -17667,7 +18331,7 @@
       </p:pic>
       <p:pic>
         <p:nvPicPr>
-          <p:cNvPr id="33" name="criterion-icon-hold" descr="remix-pause-circle-line">    </p:cNvPr>
+          <p:cNvPr id="36" name="criterion-icon-hold" descr="remix-pause-circle-line">    </p:cNvPr>
           <p:cNvPicPr>
             <a:picLocks noChangeAspect="1"/>
           </p:cNvPicPr>
@@ -17687,8 +18351,8 @@
         </p:blipFill>
         <p:spPr>
           <a:xfrm>
-            <a:off x="4375150" y="4591050"/>
-            <a:ext cx="546100" cy="546100"/>
+            <a:off x="4381500" y="4540250"/>
+            <a:ext cx="749300" cy="749300"/>
           </a:xfrm>
           <a:prstGeom prst="rect">
             <a:avLst/>
@@ -17697,7 +18361,7 @@
       </p:pic>
       <p:pic>
         <p:nvPicPr>
-          <p:cNvPr id="34" name="criterion-icon-stop" descr="remix-stop-circle-line">    </p:cNvPr>
+          <p:cNvPr id="37" name="criterion-icon-stop" descr="remix-stop-circle-line">    </p:cNvPr>
           <p:cNvPicPr>
             <a:picLocks noChangeAspect="1"/>
           </p:cNvPicPr>
@@ -17717,8 +18381,8 @@
         </p:blipFill>
         <p:spPr>
           <a:xfrm>
-            <a:off x="8242300" y="4591050"/>
-            <a:ext cx="546100" cy="546100"/>
+            <a:off x="8248650" y="4540250"/>
+            <a:ext cx="749300" cy="749300"/>
           </a:xfrm>
           <a:prstGeom prst="rect">
             <a:avLst/>
@@ -17727,7 +18391,7 @@
       </p:pic>
       <p:sp>
         <p:nvSpPr>
-          <p:cNvPr id="35" name="Slide Number Placeholder 0"/>
+          <p:cNvPr id="38" name="Slide Number Placeholder 0"/>
           <p:cNvSpPr>
             <a:spLocks noGrp="1"/>
           </p:cNvSpPr>
